--- a/docs/entrega/SmartWaste_Apresentacao_Atualizada.pptx
+++ b/docs/entrega/SmartWaste_Apresentacao_Atualizada.pptx
@@ -2,22 +2,22 @@
 <file path=ppt/presentation.xml><?xml version="1.0" encoding="utf-8"?>
 <p:presentation xmlns:p="http://schemas.openxmlformats.org/presentationml/2006/main">
   <p:sldMasterIdLst>
-    <p:sldMasterId xmlns:r="http://schemas.openxmlformats.org/officeDocument/2006/relationships" id="2147483648" r:id="R274c04056a1a438c"/>
+    <p:sldMasterId xmlns:r="http://schemas.openxmlformats.org/officeDocument/2006/relationships" id="2147483648" r:id="R4e7613bac0774742"/>
   </p:sldMasterIdLst>
   <p:notesMasterIdLst>
-    <p:notesMasterId xmlns:r="http://schemas.openxmlformats.org/officeDocument/2006/relationships" r:id="R24bf6aa07acf4a69"/>
+    <p:notesMasterId xmlns:r="http://schemas.openxmlformats.org/officeDocument/2006/relationships" r:id="R3b903ae741cf4d85"/>
   </p:notesMasterIdLst>
   <p:sldIdLst>
-    <p:sldId xmlns:r="http://schemas.openxmlformats.org/officeDocument/2006/relationships" id="256" r:id="R5400950d8d3d429a"/>
-    <p:sldId xmlns:r="http://schemas.openxmlformats.org/officeDocument/2006/relationships" id="257" r:id="Re4a628af09d4414c"/>
-    <p:sldId xmlns:r="http://schemas.openxmlformats.org/officeDocument/2006/relationships" id="258" r:id="R47504799dd8b4bf3"/>
-    <p:sldId xmlns:r="http://schemas.openxmlformats.org/officeDocument/2006/relationships" id="259" r:id="Rcdee10ea418d4c1d"/>
-    <p:sldId xmlns:r="http://schemas.openxmlformats.org/officeDocument/2006/relationships" id="260" r:id="Ra5ad5ad5582e459f"/>
-    <p:sldId xmlns:r="http://schemas.openxmlformats.org/officeDocument/2006/relationships" id="261" r:id="R3777a3c71d324160"/>
-    <p:sldId xmlns:r="http://schemas.openxmlformats.org/officeDocument/2006/relationships" id="262" r:id="R23b76e84a1334d84"/>
-    <p:sldId xmlns:r="http://schemas.openxmlformats.org/officeDocument/2006/relationships" id="263" r:id="Rd0f4a25d3a7c4a11"/>
-    <p:sldId xmlns:r="http://schemas.openxmlformats.org/officeDocument/2006/relationships" id="264" r:id="R86c0c9553dfd4440"/>
-    <p:sldId xmlns:r="http://schemas.openxmlformats.org/officeDocument/2006/relationships" id="265" r:id="R9ae6c5980c834252"/>
+    <p:sldId xmlns:r="http://schemas.openxmlformats.org/officeDocument/2006/relationships" id="256" r:id="R9ed199ccc3e44ed3"/>
+    <p:sldId xmlns:r="http://schemas.openxmlformats.org/officeDocument/2006/relationships" id="257" r:id="R4f8f8668bf8f49c9"/>
+    <p:sldId xmlns:r="http://schemas.openxmlformats.org/officeDocument/2006/relationships" id="258" r:id="Rdb262a5c10cf4d9e"/>
+    <p:sldId xmlns:r="http://schemas.openxmlformats.org/officeDocument/2006/relationships" id="259" r:id="R5c232bc27ec24082"/>
+    <p:sldId xmlns:r="http://schemas.openxmlformats.org/officeDocument/2006/relationships" id="260" r:id="Rd24b3b3edc334a31"/>
+    <p:sldId xmlns:r="http://schemas.openxmlformats.org/officeDocument/2006/relationships" id="261" r:id="Rbfcc74926cbc47aa"/>
+    <p:sldId xmlns:r="http://schemas.openxmlformats.org/officeDocument/2006/relationships" id="262" r:id="R4b724a41bace4c3f"/>
+    <p:sldId xmlns:r="http://schemas.openxmlformats.org/officeDocument/2006/relationships" id="263" r:id="R45ff42ea2beb4b96"/>
+    <p:sldId xmlns:r="http://schemas.openxmlformats.org/officeDocument/2006/relationships" id="264" r:id="Rdedd7c9f06ce4172"/>
+    <p:sldId xmlns:r="http://schemas.openxmlformats.org/officeDocument/2006/relationships" id="265" r:id="Rf36906a2fa34458c"/>
   </p:sldIdLst>
   <p:sldSz cx="12192000" cy="6858000"/>
   <p:notesSz cx="6858000" cy="9144000"/>
@@ -591,7 +591,7 @@
           <a:lstStyle xmlns:a="http://schemas.openxmlformats.org/drawingml/2006/main"/>
           <a:p xmlns:a="http://schemas.openxmlformats.org/drawingml/2006/main">
             <a:r>
-              <a:t>Antes, a comunicação acontecia em memória dentro do simulador. Na evolução, programas separados trocam mensagens e a nuvem recebe histórico. A principal razão é permitir que a falha da internet não interrompa a coordenação local.</a:t>
+              <a:t>Explique cada ganho junto da contrapartida, sem apresentar percentuais de economia inventados. Ganhos observados: operação local continuou durante interrupção do enlace e o teste de repetição da API manteve uma linha. Contrapartidas: o histórico remoto atrasa, a fila ocupa disco e há confirmações e reenvios. O consumo adicional não foi quantificado. A falha da internet é diferente da queda da fog. Fonte: evidências locais, integração remota e cloud-smoke.json do pacote distribuído.</a:t>
             </a:r>
           </a:p>
         </p:txBody>
@@ -801,7 +801,7 @@
           <a:lstStyle xmlns:a="http://schemas.openxmlformats.org/drawingml/2006/main"/>
           <a:p xmlns:a="http://schemas.openxmlformats.org/drawingml/2006/main">
             <a:r>
-              <a:t>Gráfico de teste local: eixo horizontal mostra instantes amostrados em segundos, e o vertical conta eventos pendentes. Quando a nuvem está desligada, as leituras aguardam na fila em disco. Reconectar libera novos envios. SQLite é o banco local que mantém essa fila. A queda da internet é diferente da queda da fog: encerrar a fog interrompe novas decisões. Fonte: docs/evidence-local/timeline.csv do pacote da atividade.</a:t>
+              <a:t>A perda do enlace com a internet impede novos envios à nuvem. Os processos locais continuam se computador, broker e rede local permanecerem disponíveis. A edge mede e executa comandos. A fog continua decidindo e grava as leituras no SQLite, um banco no disco. O histórico remoto fica atrasado. Quando o enlace volta, a fog envia grupos de leituras, a nuvem confirma IDs e a fila pode diminuir. Novas leituras continuam chegando, então reconectar não significa zerar a fila imediatamente. Um lote em andamento antes de desconectar ainda pode concluir. O gráfico é de um teste local com envio à nuvem interrompido pelo controle, não um benchmark de internet pública. As categorias mostram instantes amostrados. Fonte: docs/evidence-local/timeline.csv. Disco cheio, falha da fog ou do computador são outras condições, sem garantia geral de ausência de perdas.</a:t>
             </a:r>
           </a:p>
         </p:txBody>
@@ -941,7 +941,7 @@
           <a:lstStyle xmlns:a="http://schemas.openxmlformats.org/drawingml/2006/main"/>
           <a:p xmlns:a="http://schemas.openxmlformats.org/drawingml/2006/main">
             <a:r>
-              <a:t>A nuvem usa Supabase Free em São Paulo. HTTPS é a conexão protegida de envio. Postgres é o banco que guarda as leituras. Free custa zero dentro das cotas. Em 19/10/2026 a página oficial indicava 500 MB de banco, 5 GB de saída e pausa por inatividade. Fonte: https://supabase.com/pricing. O painel continua local. A configuração privada permanece fora do GitHub.</a:t>
+              <a:t>Fonte: docs/evidence-remote/result.json e timeline.csv do pacote da evolução. São contadores reais da execução com dados sintéticos. No ponto recuperado, a fog havia recebido 160 eventos, a nuvem confirmado 128 e a fila ainda tinha 32. 160 = 128 + 32 nesse instante. O aumento das confirmações evidencia recuperação enquanto novas leituras eram produzidas. As 32 leituras pendentes não representam perda comprovada. Não apresentar 80% como eficácia geral ou taxa de recuperação universal: é apenas a proporção desse instante. O envio por HTTPS e o armazenamento Postgres funcionam no Supabase Free em São Paulo. Free significa gratuito dentro das cotas, não ilimitado. A região não comprova ganho de latência.</a:t>
             </a:r>
           </a:p>
         </p:txBody>
@@ -3524,12 +3524,12 @@
   </p:cSld>
   <p:clrMap bg1="lt1" tx1="dk1" bg2="lt2" tx2="dk2" accent1="accent1" accent2="accent2" accent3="accent3" accent4="accent4" accent5="accent5" accent6="accent6" hlink="hlink" folHlink="folHlink"/>
   <p:sldLayoutIdLst>
-    <p:sldLayoutId xmlns:r="http://schemas.openxmlformats.org/officeDocument/2006/relationships" id="2147483649" r:id="Rd9a7c9d821c347f7"/>
-    <p:sldLayoutId xmlns:r="http://schemas.openxmlformats.org/officeDocument/2006/relationships" id="2147483650" r:id="R77a9ae3962f248a3"/>
-    <p:sldLayoutId xmlns:r="http://schemas.openxmlformats.org/officeDocument/2006/relationships" id="2147483651" r:id="Rb592a3145c7b4445"/>
-    <p:sldLayoutId xmlns:r="http://schemas.openxmlformats.org/officeDocument/2006/relationships" id="2147483652" r:id="R4cfdefe324a0404b"/>
-    <p:sldLayoutId xmlns:r="http://schemas.openxmlformats.org/officeDocument/2006/relationships" id="2147483653" r:id="Re378aea786634c19"/>
-    <p:sldLayoutId xmlns:r="http://schemas.openxmlformats.org/officeDocument/2006/relationships" id="2147483654" r:id="Rec434be9c8f24dcb"/>
+    <p:sldLayoutId xmlns:r="http://schemas.openxmlformats.org/officeDocument/2006/relationships" id="2147483649" r:id="Rd0a2ac7017d947b3"/>
+    <p:sldLayoutId xmlns:r="http://schemas.openxmlformats.org/officeDocument/2006/relationships" id="2147483650" r:id="Rc4f0a972de204bc5"/>
+    <p:sldLayoutId xmlns:r="http://schemas.openxmlformats.org/officeDocument/2006/relationships" id="2147483651" r:id="Rf10ba99bb9be42f5"/>
+    <p:sldLayoutId xmlns:r="http://schemas.openxmlformats.org/officeDocument/2006/relationships" id="2147483652" r:id="R3dfacf31f7d044e3"/>
+    <p:sldLayoutId xmlns:r="http://schemas.openxmlformats.org/officeDocument/2006/relationships" id="2147483653" r:id="Re5aff8c08b474fd8"/>
+    <p:sldLayoutId xmlns:r="http://schemas.openxmlformats.org/officeDocument/2006/relationships" id="2147483654" r:id="Rb757501436874fc4"/>
   </p:sldLayoutIdLst>
   <p:txStyles>
     <p:titleStyle>
@@ -4468,6 +4468,200 @@
 </c:chartSpace>
 </file>
 
+<file path=ppt/slides/charts/chart3.xml><?xml version="1.0" encoding="utf-8"?>
+<c:chartSpace xmlns:c="http://schemas.openxmlformats.org/drawingml/2006/chart" xmlns:r="http://schemas.openxmlformats.org/officeDocument/2006/relationships">
+  <c:lang val="en-US"/>
+  <c:chart>
+    <c:plotArea>
+      <c:barChart>
+        <c:barDir val="col"/>
+        <c:varyColors val="0"/>
+        <c:ser>
+          <c:idx val="0"/>
+          <c:order val="0"/>
+          <c:tx>
+            <c:v>Leituras</c:v>
+          </c:tx>
+          <c:spPr>
+            <a:solidFill xmlns:a="http://schemas.openxmlformats.org/drawingml/2006/main">
+              <a:srgbClr val="167655"/>
+            </a:solidFill>
+          </c:spPr>
+          <c:invertIfNegative val="0"/>
+          <c:dPt>
+            <c:idx val="2"/>
+            <c:invertIfNegative val="0"/>
+            <c:spPr>
+              <a:solidFill xmlns:a="http://schemas.openxmlformats.org/drawingml/2006/main">
+                <a:srgbClr val="D9AD5B"/>
+              </a:solidFill>
+            </c:spPr>
+          </c:dPt>
+          <c:cat>
+            <c:strRef>
+              <c:f>'Chart Data'!$A$2:$A$4</c:f>
+              <c:strCache>
+                <c:ptCount val="3"/>
+                <c:pt idx="0">
+                  <c:v>Recebidos na fog</c:v>
+                </c:pt>
+                <c:pt idx="1">
+                  <c:v>Confirmados na nuvem</c:v>
+                </c:pt>
+                <c:pt idx="2">
+                  <c:v>Pendentes</c:v>
+                </c:pt>
+              </c:strCache>
+            </c:strRef>
+          </c:cat>
+          <c:val>
+            <c:numRef>
+              <c:f>'Chart Data'!$B$2:$B$4</c:f>
+              <c:numCache>
+                <c:formatCode>General</c:formatCode>
+                <c:ptCount val="3"/>
+                <c:pt idx="0">
+                  <c:v>160</c:v>
+                </c:pt>
+                <c:pt idx="1">
+                  <c:v>128</c:v>
+                </c:pt>
+                <c:pt idx="2">
+                  <c:v>32</c:v>
+                </c:pt>
+              </c:numCache>
+            </c:numRef>
+          </c:val>
+        </c:ser>
+        <c:dLbls>
+          <c:txPr>
+            <a:bodyPr xmlns:a="http://schemas.openxmlformats.org/drawingml/2006/main" anchorCtr="1"/>
+            <a:lstStyle xmlns:a="http://schemas.openxmlformats.org/drawingml/2006/main"/>
+            <a:p xmlns:a="http://schemas.openxmlformats.org/drawingml/2006/main">
+              <a:pPr>
+                <a:defRPr>
+                  <a:latin typeface="DejaVu Sans"/>
+                  <a:ea typeface="DejaVu Sans"/>
+                  <a:cs typeface="DejaVu Sans"/>
+                </a:defRPr>
+              </a:pPr>
+            </a:p>
+          </c:txPr>
+          <c:dLblPos val="outEnd"/>
+          <c:showLegendKey val="0"/>
+          <c:showVal val="1"/>
+          <c:showCatName val="0"/>
+          <c:showSerName val="0"/>
+          <c:showPercent val="0"/>
+          <c:showBubbleSize val="0"/>
+          <c:showLeaderLines val="0"/>
+        </c:dLbls>
+        <c:axId val="48650112"/>
+        <c:axId val="48672768"/>
+      </c:barChart>
+      <c:catAx>
+        <c:axId val="48650112"/>
+        <c:scaling>
+          <c:orientation val="minMax"/>
+        </c:scaling>
+        <c:delete val="0"/>
+        <c:axPos val="b"/>
+        <c:numFmt formatCode="General"/>
+        <c:majorTickMark val="none"/>
+        <c:minorTickMark val="none"/>
+        <c:spPr>
+          <a:ln xmlns:a="http://schemas.openxmlformats.org/drawingml/2006/main" w="9525">
+            <a:solidFill>
+              <a:srgbClr val="D4D4D4"/>
+            </a:solidFill>
+            <a:prstDash val="solid"/>
+          </a:ln>
+        </c:spPr>
+        <c:txPr>
+          <a:bodyPr xmlns:a="http://schemas.openxmlformats.org/drawingml/2006/main" anchorCtr="1"/>
+          <a:lstStyle xmlns:a="http://schemas.openxmlformats.org/drawingml/2006/main"/>
+          <a:p xmlns:a="http://schemas.openxmlformats.org/drawingml/2006/main">
+            <a:pPr>
+              <a:defRPr sz="1275">
+                <a:solidFill>
+                  <a:srgbClr val="183B30"/>
+                </a:solidFill>
+                <a:latin typeface="DejaVu Sans"/>
+                <a:ea typeface="DejaVu Sans"/>
+                <a:cs typeface="DejaVu Sans"/>
+              </a:defRPr>
+            </a:pPr>
+          </a:p>
+        </c:txPr>
+        <c:crossAx val="48672768"/>
+      </c:catAx>
+      <c:valAx>
+        <c:axId val="48672768"/>
+        <c:scaling>
+          <c:orientation val="minMax"/>
+          <c:max val="190"/>
+          <c:min val="0"/>
+        </c:scaling>
+        <c:delete val="0"/>
+        <c:axPos val="l"/>
+        <c:majorGridlines>
+          <c:spPr>
+            <a:ln xmlns:a="http://schemas.openxmlformats.org/drawingml/2006/main" w="9525">
+              <a:solidFill>
+                <a:srgbClr val="CFDAD1"/>
+              </a:solidFill>
+            </a:ln>
+          </c:spPr>
+        </c:majorGridlines>
+        <c:numFmt formatCode="General"/>
+        <c:majorTickMark val="none"/>
+        <c:minorTickMark val="none"/>
+        <c:spPr>
+          <a:ln xmlns:a="http://schemas.openxmlformats.org/drawingml/2006/main" w="9525">
+            <a:solidFill>
+              <a:srgbClr val="D4D4D4"/>
+            </a:solidFill>
+            <a:prstDash val="solid"/>
+          </a:ln>
+        </c:spPr>
+        <c:txPr>
+          <a:bodyPr xmlns:a="http://schemas.openxmlformats.org/drawingml/2006/main" anchorCtr="1"/>
+          <a:lstStyle xmlns:a="http://schemas.openxmlformats.org/drawingml/2006/main"/>
+          <a:p xmlns:a="http://schemas.openxmlformats.org/drawingml/2006/main">
+            <a:pPr>
+              <a:defRPr sz="1350">
+                <a:solidFill>
+                  <a:srgbClr val="183B30"/>
+                </a:solidFill>
+                <a:latin typeface="DejaVu Sans"/>
+                <a:ea typeface="DejaVu Sans"/>
+                <a:cs typeface="DejaVu Sans"/>
+              </a:defRPr>
+            </a:pPr>
+          </a:p>
+        </c:txPr>
+        <c:crossAx val="48650112"/>
+        <c:crossBetween val="between"/>
+      </c:valAx>
+      <c:spPr>
+        <a:solidFill xmlns:a="http://schemas.openxmlformats.org/drawingml/2006/main">
+          <a:srgbClr val="F5F5EF"/>
+        </a:solidFill>
+      </c:spPr>
+    </c:plotArea>
+    <c:plotVisOnly val="1"/>
+  </c:chart>
+  <c:spPr>
+    <a:solidFill xmlns:a="http://schemas.openxmlformats.org/drawingml/2006/main">
+      <a:srgbClr val="F5F5EF"/>
+    </a:solidFill>
+  </c:spPr>
+  <c:externalData r:id="rIdChartSnapshot1">
+    <c:autoUpdate val="0"/>
+  </c:externalData>
+</c:chartSpace>
+</file>
+
 <file path=ppt/slides/slide1.xml><?xml version="1.0" encoding="utf-8"?>
 <p:sld xmlns:p="http://schemas.openxmlformats.org/presentationml/2006/main">
   <p:cSld>
@@ -5810,7 +6004,7 @@
             </a:pPr>
             <a:r>
               <a:rPr>
-                <a:hlinkClick xmlns:r="http://schemas.openxmlformats.org/officeDocument/2006/relationships" r:id="Rff17e5946a6a4ea6"/>
+                <a:hlinkClick xmlns:r="http://schemas.openxmlformats.org/officeDocument/2006/relationships" r:id="Rdd8aed1c87154a8f"/>
               </a:rPr>
               <a:t>https://github.com/annygabb/IoT---Coleta</a:t>
             </a:r>
@@ -6830,7 +7024,7 @@
             </a:pPr>
             <a:r>
               <a:rPr>
-                <a:hlinkClick xmlns:r="http://schemas.openxmlformats.org/officeDocument/2006/relationships" r:id="R9ae38e5c1f7742a3"/>
+                <a:hlinkClick xmlns:r="http://schemas.openxmlformats.org/officeDocument/2006/relationships" r:id="Ra69a2bfdb5d34468"/>
               </a:rPr>
               <a:t>https://github.com/annygabb/IoT---Coleta</a:t>
             </a:r>
@@ -7575,7 +7769,7 @@
                 <a:ea typeface="DejaVu Sans"/>
                 <a:cs typeface="DejaVu Sans"/>
               </a:rPr>
-              <a:t>O que mudou</a:t>
+              <a:t>Ganhos e contrapartidas</a:t>
             </a:r>
           </a:p>
         </p:txBody>
@@ -7916,10 +8110,10 @@
       </p:sp>
       <p:sp>
         <p:nvSpPr>
-          <p:cNvPr id="6" name="">
+          <p:cNvPr id="8" name="">
             <a:extLst xmlns:a="http://schemas.openxmlformats.org/drawingml/2006/main">
               <a:ext uri="{FF2B5EF4-FFF2-40B4-BE49-F238E27FC236}">
-                <a16:creationId xmlns:a16="http://schemas.microsoft.com/office/drawing/2014/main" id="{6D7685EA-9AEF-4E2A-8CDF-5B57DCD1DE7B}"/>
+                <a16:creationId xmlns:a16="http://schemas.microsoft.com/office/drawing/2014/main" id="{03C7C315-BD59-46DD-8DE0-5A740568FF31}"/>
               </a:ext>
             </a:extLst>
           </p:cNvPr>
@@ -7930,8 +8124,8 @@
         </p:nvSpPr>
         <p:spPr>
           <a:xfrm xmlns:a="http://schemas.openxmlformats.org/drawingml/2006/main">
-            <a:off x="609600" y="5619750"/>
-            <a:ext cx="10572750" cy="571500"/>
+            <a:off x="609600" y="1952625"/>
+            <a:ext cx="5238750" cy="400050"/>
           </a:xfrm>
           <a:prstGeom xmlns:a="http://schemas.openxmlformats.org/drawingml/2006/main" prst="rect">
             <a:avLst/>
@@ -7939,14 +8133,13 @@
           <a:noFill xmlns:a="http://schemas.openxmlformats.org/drawingml/2006/main"/>
           <a:ln xmlns:a="http://schemas.openxmlformats.org/drawingml/2006/main" w="0">
             <a:noFill/>
-            <a:prstDash val="solid"/>
           </a:ln>
         </p:spPr>
         <p:txBody>
           <a:bodyPr xmlns:a="http://schemas.openxmlformats.org/drawingml/2006/main" lIns="0" tIns="0" rIns="0" bIns="0"/>
           <a:lstStyle xmlns:a="http://schemas.openxmlformats.org/drawingml/2006/main">
             <a:defPPr>
-              <a:defRPr sz="1950" b="1">
+              <a:defRPr sz="1875" b="1">
                 <a:solidFill>
                   <a:srgbClr val="167655"/>
                 </a:solidFill>
@@ -7956,8 +8149,7 @@
               </a:defRPr>
             </a:defPPr>
             <a:lvl1pPr>
-              <a:buNone/>
-              <a:defRPr sz="1950" b="1">
+              <a:defRPr sz="1875" b="1">
                 <a:solidFill>
                   <a:srgbClr val="167655"/>
                 </a:solidFill>
@@ -7967,8 +8159,7 @@
               </a:defRPr>
             </a:lvl1pPr>
             <a:lvl2pPr>
-              <a:buNone/>
-              <a:defRPr sz="1950" b="1">
+              <a:defRPr sz="1875" b="1">
                 <a:solidFill>
                   <a:srgbClr val="167655"/>
                 </a:solidFill>
@@ -7978,8 +8169,7 @@
               </a:defRPr>
             </a:lvl2pPr>
             <a:lvl3pPr>
-              <a:buNone/>
-              <a:defRPr sz="1950" b="1">
+              <a:defRPr sz="1875" b="1">
                 <a:solidFill>
                   <a:srgbClr val="167655"/>
                 </a:solidFill>
@@ -7989,8 +8179,7 @@
               </a:defRPr>
             </a:lvl3pPr>
             <a:lvl4pPr>
-              <a:buNone/>
-              <a:defRPr sz="1950" b="1">
+              <a:defRPr sz="1875" b="1">
                 <a:solidFill>
                   <a:srgbClr val="167655"/>
                 </a:solidFill>
@@ -8000,8 +8189,7 @@
               </a:defRPr>
             </a:lvl4pPr>
             <a:lvl5pPr>
-              <a:buNone/>
-              <a:defRPr sz="1950" b="1">
+              <a:defRPr sz="1875" b="1">
                 <a:solidFill>
                   <a:srgbClr val="167655"/>
                 </a:solidFill>
@@ -8011,8 +8199,7 @@
               </a:defRPr>
             </a:lvl5pPr>
             <a:lvl6pPr>
-              <a:buNone/>
-              <a:defRPr sz="1950" b="1">
+              <a:defRPr sz="1875" b="1">
                 <a:solidFill>
                   <a:srgbClr val="167655"/>
                 </a:solidFill>
@@ -8022,8 +8209,7 @@
               </a:defRPr>
             </a:lvl6pPr>
             <a:lvl7pPr>
-              <a:buNone/>
-              <a:defRPr sz="1950" b="1">
+              <a:defRPr sz="1875" b="1">
                 <a:solidFill>
                   <a:srgbClr val="167655"/>
                 </a:solidFill>
@@ -8033,8 +8219,7 @@
               </a:defRPr>
             </a:lvl7pPr>
             <a:lvl8pPr>
-              <a:buNone/>
-              <a:defRPr sz="1950" b="1">
+              <a:defRPr sz="1875" b="1">
                 <a:solidFill>
                   <a:srgbClr val="167655"/>
                 </a:solidFill>
@@ -8044,8 +8229,7 @@
               </a:defRPr>
             </a:lvl8pPr>
             <a:lvl9pPr>
-              <a:buNone/>
-              <a:defRPr sz="1950" b="1">
+              <a:defRPr sz="1875" b="1">
                 <a:solidFill>
                   <a:srgbClr val="167655"/>
                 </a:solidFill>
@@ -8057,8 +8241,7 @@
           </a:lstStyle>
           <a:p xmlns:a="http://schemas.openxmlformats.org/drawingml/2006/main">
             <a:pPr>
-              <a:buNone/>
-              <a:defRPr sz="1950" b="1">
+              <a:defRPr sz="1875" b="1">
                 <a:solidFill>
                   <a:srgbClr val="167655"/>
                 </a:solidFill>
@@ -8068,7 +8251,7 @@
               </a:defRPr>
             </a:pPr>
             <a:r>
-              <a:rPr sz="1950" b="1">
+              <a:rPr sz="1875" b="1">
                 <a:solidFill>
                   <a:srgbClr val="167655"/>
                 </a:solidFill>
@@ -8076,522 +8259,1571 @@
                 <a:ea typeface="DejaVu Sans"/>
                 <a:cs typeface="DejaVu Sans"/>
               </a:rPr>
-              <a:t>Por quê: a coleta local continua quando a internet falha.</a:t>
+              <a:t>GANHOS OBSERVADOS</a:t>
             </a:r>
           </a:p>
         </p:txBody>
       </p:sp>
-      <p:graphicFrame>
-        <p:nvGraphicFramePr>
-          <p:cNvPr id="8" name="">
+      <p:sp>
+        <p:nvSpPr>
+          <p:cNvPr id="9" name="">
             <a:extLst xmlns:a="http://schemas.openxmlformats.org/drawingml/2006/main">
               <a:ext uri="{FF2B5EF4-FFF2-40B4-BE49-F238E27FC236}">
-                <a16:creationId xmlns:a16="http://schemas.microsoft.com/office/drawing/2014/main" id="{32D5DC12-4C75-41E0-B257-B1173E936F27}"/>
+                <a16:creationId xmlns:a16="http://schemas.microsoft.com/office/drawing/2014/main" id="{72063773-6DC2-4409-BFF7-FD461A83DCA9}"/>
               </a:ext>
             </a:extLst>
           </p:cNvPr>
-          <p:cNvGraphicFramePr/>
+          <p:cNvSpPr>
+            <a:spLocks xmlns:a="http://schemas.openxmlformats.org/drawingml/2006/main" noGrp="1"/>
+          </p:cNvSpPr>
           <p:nvPr/>
-        </p:nvGraphicFramePr>
-        <p:xfrm>
-          <a:off xmlns:a="http://schemas.openxmlformats.org/drawingml/2006/main" x="609600" y="2076450"/>
-          <a:ext xmlns:a="http://schemas.openxmlformats.org/drawingml/2006/main" cx="10972800" cy="3238500"/>
-        </p:xfrm>
-        <a:graphic xmlns:a="http://schemas.openxmlformats.org/drawingml/2006/main">
-          <a:graphicData uri="http://schemas.openxmlformats.org/drawingml/2006/table">
-            <a:tbl>
-              <a:tblPr/>
-              <a:tblGrid>
-                <a:gridCol w="2286000"/>
-                <a:gridCol w="4095750"/>
-                <a:gridCol w="4591050"/>
-              </a:tblGrid>
-              <a:tr h="809625">
-                <a:tc>
-                  <a:txBody>
-                    <a:bodyPr/>
-                    <a:lstStyle/>
-                    <a:p>
-                      <a:r>
-                        <a:rPr sz="2025" b="1">
-                          <a:solidFill>
-                            <a:srgbClr val="FFFFFF"/>
-                          </a:solidFill>
-                          <a:latin typeface="DejaVu Sans"/>
-                          <a:ea typeface="DejaVu Sans"/>
-                          <a:cs typeface="DejaVu Sans"/>
-                        </a:rPr>
-                        <a:t>Ponto</a:t>
-                      </a:r>
-                    </a:p>
-                  </a:txBody>
-                  <a:tcPr marL="91440" marR="91440" marT="45720" marB="45720">
-                    <a:lnL w="9525">
-                      <a:solidFill>
-                        <a:srgbClr val="CFDAD1"/>
-                      </a:solidFill>
-                      <a:prstDash val="solid"/>
-                    </a:lnL>
-                    <a:lnR w="9525">
-                      <a:solidFill>
-                        <a:srgbClr val="CFDAD1"/>
-                      </a:solidFill>
-                      <a:prstDash val="solid"/>
-                    </a:lnR>
-                    <a:lnT w="9525">
-                      <a:solidFill>
-                        <a:srgbClr val="CFDAD1"/>
-                      </a:solidFill>
-                      <a:prstDash val="solid"/>
-                    </a:lnT>
-                    <a:lnB w="9525">
-                      <a:solidFill>
-                        <a:srgbClr val="CFDAD1"/>
-                      </a:solidFill>
-                      <a:prstDash val="solid"/>
-                    </a:lnB>
-                    <a:solidFill>
-                      <a:srgbClr val="167655"/>
-                    </a:solidFill>
-                  </a:tcPr>
-                </a:tc>
-                <a:tc>
-                  <a:txBody>
-                    <a:bodyPr/>
-                    <a:lstStyle/>
-                    <a:p>
-                      <a:r>
-                        <a:rPr sz="2025" b="1">
-                          <a:solidFill>
-                            <a:srgbClr val="FFFFFF"/>
-                          </a:solidFill>
-                          <a:latin typeface="DejaVu Sans"/>
-                          <a:ea typeface="DejaVu Sans"/>
-                          <a:cs typeface="DejaVu Sans"/>
-                        </a:rPr>
-                        <a:t>Antes</a:t>
-                      </a:r>
-                    </a:p>
-                  </a:txBody>
-                  <a:tcPr marL="91440" marR="91440" marT="45720" marB="45720">
-                    <a:lnR w="9525">
-                      <a:solidFill>
-                        <a:srgbClr val="CFDAD1"/>
-                      </a:solidFill>
-                      <a:prstDash val="solid"/>
-                    </a:lnR>
-                    <a:lnT w="9525">
-                      <a:solidFill>
-                        <a:srgbClr val="CFDAD1"/>
-                      </a:solidFill>
-                      <a:prstDash val="solid"/>
-                    </a:lnT>
-                    <a:lnB w="9525">
-                      <a:solidFill>
-                        <a:srgbClr val="CFDAD1"/>
-                      </a:solidFill>
-                      <a:prstDash val="solid"/>
-                    </a:lnB>
-                    <a:solidFill>
-                      <a:srgbClr val="167655"/>
-                    </a:solidFill>
-                  </a:tcPr>
-                </a:tc>
-                <a:tc>
-                  <a:txBody>
-                    <a:bodyPr/>
-                    <a:lstStyle/>
-                    <a:p>
-                      <a:r>
-                        <a:rPr sz="2025" b="1">
-                          <a:solidFill>
-                            <a:srgbClr val="FFFFFF"/>
-                          </a:solidFill>
-                          <a:latin typeface="DejaVu Sans"/>
-                          <a:ea typeface="DejaVu Sans"/>
-                          <a:cs typeface="DejaVu Sans"/>
-                        </a:rPr>
-                        <a:t>Agora</a:t>
-                      </a:r>
-                    </a:p>
-                  </a:txBody>
-                  <a:tcPr marL="91440" marR="91440" marT="45720" marB="45720">
-                    <a:lnR w="9525">
-                      <a:solidFill>
-                        <a:srgbClr val="CFDAD1"/>
-                      </a:solidFill>
-                      <a:prstDash val="solid"/>
-                    </a:lnR>
-                    <a:lnT w="9525">
-                      <a:solidFill>
-                        <a:srgbClr val="CFDAD1"/>
-                      </a:solidFill>
-                      <a:prstDash val="solid"/>
-                    </a:lnT>
-                    <a:lnB w="9525">
-                      <a:solidFill>
-                        <a:srgbClr val="CFDAD1"/>
-                      </a:solidFill>
-                      <a:prstDash val="solid"/>
-                    </a:lnB>
-                    <a:solidFill>
-                      <a:srgbClr val="167655"/>
-                    </a:solidFill>
-                  </a:tcPr>
-                </a:tc>
-              </a:tr>
-              <a:tr h="809625">
-                <a:tc>
-                  <a:txBody>
-                    <a:bodyPr/>
-                    <a:lstStyle/>
-                    <a:p>
-                      <a:r>
-                        <a:rPr sz="2025" b="0">
-                          <a:solidFill>
-                            <a:srgbClr val="183B30"/>
-                          </a:solidFill>
-                          <a:latin typeface="DejaVu Sans"/>
-                          <a:ea typeface="DejaVu Sans"/>
-                          <a:cs typeface="DejaVu Sans"/>
-                        </a:rPr>
-                        <a:t>Comunicação</a:t>
-                      </a:r>
-                    </a:p>
-                  </a:txBody>
-                  <a:tcPr marL="91440" marR="91440" marT="45720" marB="45720">
-                    <a:lnL w="9525">
-                      <a:solidFill>
-                        <a:srgbClr val="CFDAD1"/>
-                      </a:solidFill>
-                      <a:prstDash val="solid"/>
-                    </a:lnL>
-                    <a:lnR w="9525">
-                      <a:solidFill>
-                        <a:srgbClr val="CFDAD1"/>
-                      </a:solidFill>
-                      <a:prstDash val="solid"/>
-                    </a:lnR>
-                    <a:lnB w="9525">
-                      <a:solidFill>
-                        <a:srgbClr val="CFDAD1"/>
-                      </a:solidFill>
-                      <a:prstDash val="solid"/>
-                    </a:lnB>
-                    <a:solidFill>
-                      <a:srgbClr val="FFFFFF"/>
-                    </a:solidFill>
-                  </a:tcPr>
-                </a:tc>
-                <a:tc>
-                  <a:txBody>
-                    <a:bodyPr/>
-                    <a:lstStyle/>
-                    <a:p>
-                      <a:r>
-                        <a:rPr sz="2025" b="0">
-                          <a:solidFill>
-                            <a:srgbClr val="183B30"/>
-                          </a:solidFill>
-                          <a:latin typeface="DejaVu Sans"/>
-                          <a:ea typeface="DejaVu Sans"/>
-                          <a:cs typeface="DejaVu Sans"/>
-                        </a:rPr>
-                        <a:t>Dentro de um programa</a:t>
-                      </a:r>
-                    </a:p>
-                  </a:txBody>
-                  <a:tcPr marL="91440" marR="91440" marT="45720" marB="45720">
-                    <a:lnR w="9525">
-                      <a:solidFill>
-                        <a:srgbClr val="CFDAD1"/>
-                      </a:solidFill>
-                      <a:prstDash val="solid"/>
-                    </a:lnR>
-                    <a:lnB w="9525">
-                      <a:solidFill>
-                        <a:srgbClr val="CFDAD1"/>
-                      </a:solidFill>
-                      <a:prstDash val="solid"/>
-                    </a:lnB>
-                    <a:solidFill>
-                      <a:srgbClr val="FFFFFF"/>
-                    </a:solidFill>
-                  </a:tcPr>
-                </a:tc>
-                <a:tc>
-                  <a:txBody>
-                    <a:bodyPr/>
-                    <a:lstStyle/>
-                    <a:p>
-                      <a:r>
-                        <a:rPr sz="2025" b="0">
-                          <a:solidFill>
-                            <a:srgbClr val="183B30"/>
-                          </a:solidFill>
-                          <a:latin typeface="DejaVu Sans"/>
-                          <a:ea typeface="DejaVu Sans"/>
-                          <a:cs typeface="DejaVu Sans"/>
-                        </a:rPr>
-                        <a:t>Mensagens entre programas</a:t>
-                      </a:r>
-                    </a:p>
-                  </a:txBody>
-                  <a:tcPr marL="91440" marR="91440" marT="45720" marB="45720">
-                    <a:lnR w="9525">
-                      <a:solidFill>
-                        <a:srgbClr val="CFDAD1"/>
-                      </a:solidFill>
-                      <a:prstDash val="solid"/>
-                    </a:lnR>
-                    <a:lnB w="9525">
-                      <a:solidFill>
-                        <a:srgbClr val="CFDAD1"/>
-                      </a:solidFill>
-                      <a:prstDash val="solid"/>
-                    </a:lnB>
-                    <a:solidFill>
-                      <a:srgbClr val="FFFFFF"/>
-                    </a:solidFill>
-                  </a:tcPr>
-                </a:tc>
-              </a:tr>
-              <a:tr h="809625">
-                <a:tc>
-                  <a:txBody>
-                    <a:bodyPr/>
-                    <a:lstStyle/>
-                    <a:p>
-                      <a:r>
-                        <a:rPr sz="2025" b="0">
-                          <a:solidFill>
-                            <a:srgbClr val="183B30"/>
-                          </a:solidFill>
-                          <a:latin typeface="DejaVu Sans"/>
-                          <a:ea typeface="DejaVu Sans"/>
-                          <a:cs typeface="DejaVu Sans"/>
-                        </a:rPr>
-                        <a:t>Decisão</a:t>
-                      </a:r>
-                    </a:p>
-                  </a:txBody>
-                  <a:tcPr marL="91440" marR="91440" marT="45720" marB="45720">
-                    <a:lnL w="9525">
-                      <a:solidFill>
-                        <a:srgbClr val="CFDAD1"/>
-                      </a:solidFill>
-                      <a:prstDash val="solid"/>
-                    </a:lnL>
-                    <a:lnR w="9525">
-                      <a:solidFill>
-                        <a:srgbClr val="CFDAD1"/>
-                      </a:solidFill>
-                      <a:prstDash val="solid"/>
-                    </a:lnR>
-                    <a:lnB w="9525">
-                      <a:solidFill>
-                        <a:srgbClr val="CFDAD1"/>
-                      </a:solidFill>
-                      <a:prstDash val="solid"/>
-                    </a:lnB>
-                    <a:solidFill>
-                      <a:srgbClr val="F5F5EF"/>
-                    </a:solidFill>
-                  </a:tcPr>
-                </a:tc>
-                <a:tc>
-                  <a:txBody>
-                    <a:bodyPr/>
-                    <a:lstStyle/>
-                    <a:p>
-                      <a:r>
-                        <a:rPr sz="2025" b="0">
-                          <a:solidFill>
-                            <a:srgbClr val="183B30"/>
-                          </a:solidFill>
-                          <a:latin typeface="DejaVu Sans"/>
-                          <a:ea typeface="DejaVu Sans"/>
-                          <a:cs typeface="DejaVu Sans"/>
-                        </a:rPr>
-                        <a:t>Junto da simulação</a:t>
-                      </a:r>
-                    </a:p>
-                  </a:txBody>
-                  <a:tcPr marL="91440" marR="91440" marT="45720" marB="45720">
-                    <a:lnR w="9525">
-                      <a:solidFill>
-                        <a:srgbClr val="CFDAD1"/>
-                      </a:solidFill>
-                      <a:prstDash val="solid"/>
-                    </a:lnR>
-                    <a:lnB w="9525">
-                      <a:solidFill>
-                        <a:srgbClr val="CFDAD1"/>
-                      </a:solidFill>
-                      <a:prstDash val="solid"/>
-                    </a:lnB>
-                    <a:solidFill>
-                      <a:srgbClr val="F5F5EF"/>
-                    </a:solidFill>
-                  </a:tcPr>
-                </a:tc>
-                <a:tc>
-                  <a:txBody>
-                    <a:bodyPr/>
-                    <a:lstStyle/>
-                    <a:p>
-                      <a:r>
-                        <a:rPr sz="2025" b="0">
-                          <a:solidFill>
-                            <a:srgbClr val="183B30"/>
-                          </a:solidFill>
-                          <a:latin typeface="DejaVu Sans"/>
-                          <a:ea typeface="DejaVu Sans"/>
-                          <a:cs typeface="DejaVu Sans"/>
-                        </a:rPr>
-                        <a:t>Coordenação local separada</a:t>
-                      </a:r>
-                    </a:p>
-                  </a:txBody>
-                  <a:tcPr marL="91440" marR="91440" marT="45720" marB="45720">
-                    <a:lnR w="9525">
-                      <a:solidFill>
-                        <a:srgbClr val="CFDAD1"/>
-                      </a:solidFill>
-                      <a:prstDash val="solid"/>
-                    </a:lnR>
-                    <a:lnB w="9525">
-                      <a:solidFill>
-                        <a:srgbClr val="CFDAD1"/>
-                      </a:solidFill>
-                      <a:prstDash val="solid"/>
-                    </a:lnB>
-                    <a:solidFill>
-                      <a:srgbClr val="F5F5EF"/>
-                    </a:solidFill>
-                  </a:tcPr>
-                </a:tc>
-              </a:tr>
-              <a:tr h="809625">
-                <a:tc>
-                  <a:txBody>
-                    <a:bodyPr/>
-                    <a:lstStyle/>
-                    <a:p>
-                      <a:r>
-                        <a:rPr sz="2025" b="0">
-                          <a:solidFill>
-                            <a:srgbClr val="183B30"/>
-                          </a:solidFill>
-                          <a:latin typeface="DejaVu Sans"/>
-                          <a:ea typeface="DejaVu Sans"/>
-                          <a:cs typeface="DejaVu Sans"/>
-                        </a:rPr>
-                        <a:t>Histórico</a:t>
-                      </a:r>
-                    </a:p>
-                  </a:txBody>
-                  <a:tcPr marL="91440" marR="91440" marT="45720" marB="45720">
-                    <a:lnL w="9525">
-                      <a:solidFill>
-                        <a:srgbClr val="CFDAD1"/>
-                      </a:solidFill>
-                      <a:prstDash val="solid"/>
-                    </a:lnL>
-                    <a:lnR w="9525">
-                      <a:solidFill>
-                        <a:srgbClr val="CFDAD1"/>
-                      </a:solidFill>
-                      <a:prstDash val="solid"/>
-                    </a:lnR>
-                    <a:lnB w="9525">
-                      <a:solidFill>
-                        <a:srgbClr val="CFDAD1"/>
-                      </a:solidFill>
-                      <a:prstDash val="solid"/>
-                    </a:lnB>
-                    <a:solidFill>
-                      <a:srgbClr val="FFFFFF"/>
-                    </a:solidFill>
-                  </a:tcPr>
-                </a:tc>
-                <a:tc>
-                  <a:txBody>
-                    <a:bodyPr/>
-                    <a:lstStyle/>
-                    <a:p>
-                      <a:r>
-                        <a:rPr sz="2025" b="0">
-                          <a:solidFill>
-                            <a:srgbClr val="183B30"/>
-                          </a:solidFill>
-                          <a:latin typeface="DejaVu Sans"/>
-                          <a:ea typeface="DejaVu Sans"/>
-                          <a:cs typeface="DejaVu Sans"/>
-                        </a:rPr>
-                        <a:t>Sem envio à nuvem</a:t>
-                      </a:r>
-                    </a:p>
-                  </a:txBody>
-                  <a:tcPr marL="91440" marR="91440" marT="45720" marB="45720">
-                    <a:lnR w="9525">
-                      <a:solidFill>
-                        <a:srgbClr val="CFDAD1"/>
-                      </a:solidFill>
-                      <a:prstDash val="solid"/>
-                    </a:lnR>
-                    <a:lnB w="9525">
-                      <a:solidFill>
-                        <a:srgbClr val="CFDAD1"/>
-                      </a:solidFill>
-                      <a:prstDash val="solid"/>
-                    </a:lnB>
-                    <a:solidFill>
-                      <a:srgbClr val="FFFFFF"/>
-                    </a:solidFill>
-                  </a:tcPr>
-                </a:tc>
-                <a:tc>
-                  <a:txBody>
-                    <a:bodyPr/>
-                    <a:lstStyle/>
-                    <a:p>
-                      <a:r>
-                        <a:rPr sz="2025" b="0">
-                          <a:solidFill>
-                            <a:srgbClr val="183B30"/>
-                          </a:solidFill>
-                          <a:latin typeface="DejaVu Sans"/>
-                          <a:ea typeface="DejaVu Sans"/>
-                          <a:cs typeface="DejaVu Sans"/>
-                        </a:rPr>
-                        <a:t>Dados guardados na internet</a:t>
-                      </a:r>
-                    </a:p>
-                  </a:txBody>
-                  <a:tcPr marL="91440" marR="91440" marT="45720" marB="45720">
-                    <a:lnR w="9525">
-                      <a:solidFill>
-                        <a:srgbClr val="CFDAD1"/>
-                      </a:solidFill>
-                      <a:prstDash val="solid"/>
-                    </a:lnR>
-                    <a:lnB w="9525">
-                      <a:solidFill>
-                        <a:srgbClr val="CFDAD1"/>
-                      </a:solidFill>
-                      <a:prstDash val="solid"/>
-                    </a:lnB>
-                    <a:solidFill>
-                      <a:srgbClr val="FFFFFF"/>
-                    </a:solidFill>
-                  </a:tcPr>
-                </a:tc>
-              </a:tr>
-            </a:tbl>
-          </a:graphicData>
-        </a:graphic>
-      </p:graphicFrame>
+        </p:nvSpPr>
+        <p:spPr>
+          <a:xfrm xmlns:a="http://schemas.openxmlformats.org/drawingml/2006/main">
+            <a:off x="6477000" y="1952625"/>
+            <a:ext cx="5143500" cy="400050"/>
+          </a:xfrm>
+          <a:prstGeom xmlns:a="http://schemas.openxmlformats.org/drawingml/2006/main" prst="rect">
+            <a:avLst/>
+          </a:prstGeom>
+          <a:noFill xmlns:a="http://schemas.openxmlformats.org/drawingml/2006/main"/>
+          <a:ln xmlns:a="http://schemas.openxmlformats.org/drawingml/2006/main" w="0">
+            <a:noFill/>
+          </a:ln>
+        </p:spPr>
+        <p:txBody>
+          <a:bodyPr xmlns:a="http://schemas.openxmlformats.org/drawingml/2006/main" lIns="0" tIns="0" rIns="0" bIns="0"/>
+          <a:lstStyle xmlns:a="http://schemas.openxmlformats.org/drawingml/2006/main">
+            <a:defPPr>
+              <a:defRPr sz="1875" b="1">
+                <a:solidFill>
+                  <a:srgbClr val="936017"/>
+                </a:solidFill>
+                <a:latin typeface="DejaVu Sans"/>
+                <a:ea typeface="DejaVu Sans"/>
+                <a:cs typeface="DejaVu Sans"/>
+              </a:defRPr>
+            </a:defPPr>
+            <a:lvl1pPr>
+              <a:defRPr sz="1875" b="1">
+                <a:solidFill>
+                  <a:srgbClr val="936017"/>
+                </a:solidFill>
+                <a:latin typeface="DejaVu Sans"/>
+                <a:ea typeface="DejaVu Sans"/>
+                <a:cs typeface="DejaVu Sans"/>
+              </a:defRPr>
+            </a:lvl1pPr>
+            <a:lvl2pPr>
+              <a:defRPr sz="1875" b="1">
+                <a:solidFill>
+                  <a:srgbClr val="936017"/>
+                </a:solidFill>
+                <a:latin typeface="DejaVu Sans"/>
+                <a:ea typeface="DejaVu Sans"/>
+                <a:cs typeface="DejaVu Sans"/>
+              </a:defRPr>
+            </a:lvl2pPr>
+            <a:lvl3pPr>
+              <a:defRPr sz="1875" b="1">
+                <a:solidFill>
+                  <a:srgbClr val="936017"/>
+                </a:solidFill>
+                <a:latin typeface="DejaVu Sans"/>
+                <a:ea typeface="DejaVu Sans"/>
+                <a:cs typeface="DejaVu Sans"/>
+              </a:defRPr>
+            </a:lvl3pPr>
+            <a:lvl4pPr>
+              <a:defRPr sz="1875" b="1">
+                <a:solidFill>
+                  <a:srgbClr val="936017"/>
+                </a:solidFill>
+                <a:latin typeface="DejaVu Sans"/>
+                <a:ea typeface="DejaVu Sans"/>
+                <a:cs typeface="DejaVu Sans"/>
+              </a:defRPr>
+            </a:lvl4pPr>
+            <a:lvl5pPr>
+              <a:defRPr sz="1875" b="1">
+                <a:solidFill>
+                  <a:srgbClr val="936017"/>
+                </a:solidFill>
+                <a:latin typeface="DejaVu Sans"/>
+                <a:ea typeface="DejaVu Sans"/>
+                <a:cs typeface="DejaVu Sans"/>
+              </a:defRPr>
+            </a:lvl5pPr>
+            <a:lvl6pPr>
+              <a:defRPr sz="1875" b="1">
+                <a:solidFill>
+                  <a:srgbClr val="936017"/>
+                </a:solidFill>
+                <a:latin typeface="DejaVu Sans"/>
+                <a:ea typeface="DejaVu Sans"/>
+                <a:cs typeface="DejaVu Sans"/>
+              </a:defRPr>
+            </a:lvl6pPr>
+            <a:lvl7pPr>
+              <a:defRPr sz="1875" b="1">
+                <a:solidFill>
+                  <a:srgbClr val="936017"/>
+                </a:solidFill>
+                <a:latin typeface="DejaVu Sans"/>
+                <a:ea typeface="DejaVu Sans"/>
+                <a:cs typeface="DejaVu Sans"/>
+              </a:defRPr>
+            </a:lvl7pPr>
+            <a:lvl8pPr>
+              <a:defRPr sz="1875" b="1">
+                <a:solidFill>
+                  <a:srgbClr val="936017"/>
+                </a:solidFill>
+                <a:latin typeface="DejaVu Sans"/>
+                <a:ea typeface="DejaVu Sans"/>
+                <a:cs typeface="DejaVu Sans"/>
+              </a:defRPr>
+            </a:lvl8pPr>
+            <a:lvl9pPr>
+              <a:defRPr sz="1875" b="1">
+                <a:solidFill>
+                  <a:srgbClr val="936017"/>
+                </a:solidFill>
+                <a:latin typeface="DejaVu Sans"/>
+                <a:ea typeface="DejaVu Sans"/>
+                <a:cs typeface="DejaVu Sans"/>
+              </a:defRPr>
+            </a:lvl9pPr>
+          </a:lstStyle>
+          <a:p xmlns:a="http://schemas.openxmlformats.org/drawingml/2006/main">
+            <a:pPr>
+              <a:defRPr sz="1875" b="1">
+                <a:solidFill>
+                  <a:srgbClr val="936017"/>
+                </a:solidFill>
+                <a:latin typeface="DejaVu Sans"/>
+                <a:ea typeface="DejaVu Sans"/>
+                <a:cs typeface="DejaVu Sans"/>
+              </a:defRPr>
+            </a:pPr>
+            <a:r>
+              <a:rPr sz="1875" b="1">
+                <a:solidFill>
+                  <a:srgbClr val="936017"/>
+                </a:solidFill>
+                <a:latin typeface="DejaVu Sans"/>
+                <a:ea typeface="DejaVu Sans"/>
+                <a:cs typeface="DejaVu Sans"/>
+              </a:rPr>
+              <a:t>LIMITES E CUSTOS</a:t>
+            </a:r>
+          </a:p>
+        </p:txBody>
+      </p:sp>
+      <p:sp>
+        <p:nvSpPr>
+          <p:cNvPr id="10" name="">
+            <a:extLst xmlns:a="http://schemas.openxmlformats.org/drawingml/2006/main">
+              <a:ext uri="{FF2B5EF4-FFF2-40B4-BE49-F238E27FC236}">
+                <a16:creationId xmlns:a16="http://schemas.microsoft.com/office/drawing/2014/main" id="{1210F2A1-B749-4AF9-80F5-B73C581DD113}"/>
+              </a:ext>
+            </a:extLst>
+          </p:cNvPr>
+          <p:cNvSpPr>
+            <a:spLocks xmlns:a="http://schemas.openxmlformats.org/drawingml/2006/main" noGrp="1"/>
+          </p:cNvSpPr>
+          <p:nvPr/>
+        </p:nvSpPr>
+        <p:spPr>
+          <a:xfrm xmlns:a="http://schemas.openxmlformats.org/drawingml/2006/main">
+            <a:off x="609600" y="2686050"/>
+            <a:ext cx="5238750" cy="762000"/>
+          </a:xfrm>
+          <a:prstGeom xmlns:a="http://schemas.openxmlformats.org/drawingml/2006/main" prst="rect">
+            <a:avLst/>
+          </a:prstGeom>
+          <a:noFill xmlns:a="http://schemas.openxmlformats.org/drawingml/2006/main"/>
+          <a:ln xmlns:a="http://schemas.openxmlformats.org/drawingml/2006/main" w="0">
+            <a:noFill/>
+          </a:ln>
+        </p:spPr>
+        <p:txBody>
+          <a:bodyPr xmlns:a="http://schemas.openxmlformats.org/drawingml/2006/main" lIns="0" tIns="0" rIns="0" bIns="0"/>
+          <a:lstStyle xmlns:a="http://schemas.openxmlformats.org/drawingml/2006/main">
+            <a:defPPr>
+              <a:defRPr sz="2400" b="1">
+                <a:solidFill>
+                  <a:srgbClr val="167655"/>
+                </a:solidFill>
+                <a:latin typeface="DejaVu Sans"/>
+                <a:ea typeface="DejaVu Sans"/>
+                <a:cs typeface="DejaVu Sans"/>
+              </a:defRPr>
+            </a:defPPr>
+            <a:lvl1pPr>
+              <a:defRPr sz="2400" b="1">
+                <a:solidFill>
+                  <a:srgbClr val="167655"/>
+                </a:solidFill>
+                <a:latin typeface="DejaVu Sans"/>
+                <a:ea typeface="DejaVu Sans"/>
+                <a:cs typeface="DejaVu Sans"/>
+              </a:defRPr>
+            </a:lvl1pPr>
+            <a:lvl2pPr>
+              <a:defRPr sz="2400" b="1">
+                <a:solidFill>
+                  <a:srgbClr val="167655"/>
+                </a:solidFill>
+                <a:latin typeface="DejaVu Sans"/>
+                <a:ea typeface="DejaVu Sans"/>
+                <a:cs typeface="DejaVu Sans"/>
+              </a:defRPr>
+            </a:lvl2pPr>
+            <a:lvl3pPr>
+              <a:defRPr sz="2400" b="1">
+                <a:solidFill>
+                  <a:srgbClr val="167655"/>
+                </a:solidFill>
+                <a:latin typeface="DejaVu Sans"/>
+                <a:ea typeface="DejaVu Sans"/>
+                <a:cs typeface="DejaVu Sans"/>
+              </a:defRPr>
+            </a:lvl3pPr>
+            <a:lvl4pPr>
+              <a:defRPr sz="2400" b="1">
+                <a:solidFill>
+                  <a:srgbClr val="167655"/>
+                </a:solidFill>
+                <a:latin typeface="DejaVu Sans"/>
+                <a:ea typeface="DejaVu Sans"/>
+                <a:cs typeface="DejaVu Sans"/>
+              </a:defRPr>
+            </a:lvl4pPr>
+            <a:lvl5pPr>
+              <a:defRPr sz="2400" b="1">
+                <a:solidFill>
+                  <a:srgbClr val="167655"/>
+                </a:solidFill>
+                <a:latin typeface="DejaVu Sans"/>
+                <a:ea typeface="DejaVu Sans"/>
+                <a:cs typeface="DejaVu Sans"/>
+              </a:defRPr>
+            </a:lvl5pPr>
+            <a:lvl6pPr>
+              <a:defRPr sz="2400" b="1">
+                <a:solidFill>
+                  <a:srgbClr val="167655"/>
+                </a:solidFill>
+                <a:latin typeface="DejaVu Sans"/>
+                <a:ea typeface="DejaVu Sans"/>
+                <a:cs typeface="DejaVu Sans"/>
+              </a:defRPr>
+            </a:lvl6pPr>
+            <a:lvl7pPr>
+              <a:defRPr sz="2400" b="1">
+                <a:solidFill>
+                  <a:srgbClr val="167655"/>
+                </a:solidFill>
+                <a:latin typeface="DejaVu Sans"/>
+                <a:ea typeface="DejaVu Sans"/>
+                <a:cs typeface="DejaVu Sans"/>
+              </a:defRPr>
+            </a:lvl7pPr>
+            <a:lvl8pPr>
+              <a:defRPr sz="2400" b="1">
+                <a:solidFill>
+                  <a:srgbClr val="167655"/>
+                </a:solidFill>
+                <a:latin typeface="DejaVu Sans"/>
+                <a:ea typeface="DejaVu Sans"/>
+                <a:cs typeface="DejaVu Sans"/>
+              </a:defRPr>
+            </a:lvl8pPr>
+            <a:lvl9pPr>
+              <a:defRPr sz="2400" b="1">
+                <a:solidFill>
+                  <a:srgbClr val="167655"/>
+                </a:solidFill>
+                <a:latin typeface="DejaVu Sans"/>
+                <a:ea typeface="DejaVu Sans"/>
+                <a:cs typeface="DejaVu Sans"/>
+              </a:defRPr>
+            </a:lvl9pPr>
+          </a:lstStyle>
+          <a:p xmlns:a="http://schemas.openxmlformats.org/drawingml/2006/main">
+            <a:pPr>
+              <a:defRPr sz="2400" b="1">
+                <a:solidFill>
+                  <a:srgbClr val="167655"/>
+                </a:solidFill>
+                <a:latin typeface="DejaVu Sans"/>
+                <a:ea typeface="DejaVu Sans"/>
+                <a:cs typeface="DejaVu Sans"/>
+              </a:defRPr>
+            </a:pPr>
+            <a:r>
+              <a:rPr sz="2400" b="1">
+                <a:solidFill>
+                  <a:srgbClr val="167655"/>
+                </a:solidFill>
+                <a:latin typeface="DejaVu Sans"/>
+                <a:ea typeface="DejaVu Sans"/>
+                <a:cs typeface="DejaVu Sans"/>
+              </a:rPr>
+              <a:t>Coleta continua sem internet</a:t>
+            </a:r>
+          </a:p>
+        </p:txBody>
+      </p:sp>
+      <p:sp>
+        <p:nvSpPr>
+          <p:cNvPr id="11" name="">
+            <a:extLst xmlns:a="http://schemas.openxmlformats.org/drawingml/2006/main">
+              <a:ext uri="{FF2B5EF4-FFF2-40B4-BE49-F238E27FC236}">
+                <a16:creationId xmlns:a16="http://schemas.microsoft.com/office/drawing/2014/main" id="{FC17EFD8-FE58-4DF7-8733-C2FA12FE37B3}"/>
+              </a:ext>
+            </a:extLst>
+          </p:cNvPr>
+          <p:cNvSpPr>
+            <a:spLocks xmlns:a="http://schemas.openxmlformats.org/drawingml/2006/main" noGrp="1"/>
+          </p:cNvSpPr>
+          <p:nvPr/>
+        </p:nvSpPr>
+        <p:spPr>
+          <a:xfrm xmlns:a="http://schemas.openxmlformats.org/drawingml/2006/main">
+            <a:off x="609600" y="3476625"/>
+            <a:ext cx="5143500" cy="571500"/>
+          </a:xfrm>
+          <a:prstGeom xmlns:a="http://schemas.openxmlformats.org/drawingml/2006/main" prst="rect">
+            <a:avLst/>
+          </a:prstGeom>
+          <a:noFill xmlns:a="http://schemas.openxmlformats.org/drawingml/2006/main"/>
+          <a:ln xmlns:a="http://schemas.openxmlformats.org/drawingml/2006/main" w="0">
+            <a:noFill/>
+          </a:ln>
+        </p:spPr>
+        <p:txBody>
+          <a:bodyPr xmlns:a="http://schemas.openxmlformats.org/drawingml/2006/main" lIns="0" tIns="0" rIns="0" bIns="0"/>
+          <a:lstStyle xmlns:a="http://schemas.openxmlformats.org/drawingml/2006/main">
+            <a:defPPr>
+              <a:defRPr sz="1875" b="0">
+                <a:solidFill>
+                  <a:srgbClr val="183B30"/>
+                </a:solidFill>
+                <a:latin typeface="DejaVu Sans"/>
+                <a:ea typeface="DejaVu Sans"/>
+                <a:cs typeface="DejaVu Sans"/>
+              </a:defRPr>
+            </a:defPPr>
+            <a:lvl1pPr>
+              <a:defRPr sz="1875" b="0">
+                <a:solidFill>
+                  <a:srgbClr val="183B30"/>
+                </a:solidFill>
+                <a:latin typeface="DejaVu Sans"/>
+                <a:ea typeface="DejaVu Sans"/>
+                <a:cs typeface="DejaVu Sans"/>
+              </a:defRPr>
+            </a:lvl1pPr>
+            <a:lvl2pPr>
+              <a:defRPr sz="1875" b="0">
+                <a:solidFill>
+                  <a:srgbClr val="183B30"/>
+                </a:solidFill>
+                <a:latin typeface="DejaVu Sans"/>
+                <a:ea typeface="DejaVu Sans"/>
+                <a:cs typeface="DejaVu Sans"/>
+              </a:defRPr>
+            </a:lvl2pPr>
+            <a:lvl3pPr>
+              <a:defRPr sz="1875" b="0">
+                <a:solidFill>
+                  <a:srgbClr val="183B30"/>
+                </a:solidFill>
+                <a:latin typeface="DejaVu Sans"/>
+                <a:ea typeface="DejaVu Sans"/>
+                <a:cs typeface="DejaVu Sans"/>
+              </a:defRPr>
+            </a:lvl3pPr>
+            <a:lvl4pPr>
+              <a:defRPr sz="1875" b="0">
+                <a:solidFill>
+                  <a:srgbClr val="183B30"/>
+                </a:solidFill>
+                <a:latin typeface="DejaVu Sans"/>
+                <a:ea typeface="DejaVu Sans"/>
+                <a:cs typeface="DejaVu Sans"/>
+              </a:defRPr>
+            </a:lvl4pPr>
+            <a:lvl5pPr>
+              <a:defRPr sz="1875" b="0">
+                <a:solidFill>
+                  <a:srgbClr val="183B30"/>
+                </a:solidFill>
+                <a:latin typeface="DejaVu Sans"/>
+                <a:ea typeface="DejaVu Sans"/>
+                <a:cs typeface="DejaVu Sans"/>
+              </a:defRPr>
+            </a:lvl5pPr>
+            <a:lvl6pPr>
+              <a:defRPr sz="1875" b="0">
+                <a:solidFill>
+                  <a:srgbClr val="183B30"/>
+                </a:solidFill>
+                <a:latin typeface="DejaVu Sans"/>
+                <a:ea typeface="DejaVu Sans"/>
+                <a:cs typeface="DejaVu Sans"/>
+              </a:defRPr>
+            </a:lvl6pPr>
+            <a:lvl7pPr>
+              <a:defRPr sz="1875" b="0">
+                <a:solidFill>
+                  <a:srgbClr val="183B30"/>
+                </a:solidFill>
+                <a:latin typeface="DejaVu Sans"/>
+                <a:ea typeface="DejaVu Sans"/>
+                <a:cs typeface="DejaVu Sans"/>
+              </a:defRPr>
+            </a:lvl7pPr>
+            <a:lvl8pPr>
+              <a:defRPr sz="1875" b="0">
+                <a:solidFill>
+                  <a:srgbClr val="183B30"/>
+                </a:solidFill>
+                <a:latin typeface="DejaVu Sans"/>
+                <a:ea typeface="DejaVu Sans"/>
+                <a:cs typeface="DejaVu Sans"/>
+              </a:defRPr>
+            </a:lvl8pPr>
+            <a:lvl9pPr>
+              <a:defRPr sz="1875" b="0">
+                <a:solidFill>
+                  <a:srgbClr val="183B30"/>
+                </a:solidFill>
+                <a:latin typeface="DejaVu Sans"/>
+                <a:ea typeface="DejaVu Sans"/>
+                <a:cs typeface="DejaVu Sans"/>
+              </a:defRPr>
+            </a:lvl9pPr>
+          </a:lstStyle>
+          <a:p xmlns:a="http://schemas.openxmlformats.org/drawingml/2006/main">
+            <a:pPr>
+              <a:defRPr sz="1875" b="0">
+                <a:solidFill>
+                  <a:srgbClr val="183B30"/>
+                </a:solidFill>
+                <a:latin typeface="DejaVu Sans"/>
+                <a:ea typeface="DejaVu Sans"/>
+                <a:cs typeface="DejaVu Sans"/>
+              </a:defRPr>
+            </a:pPr>
+            <a:r>
+              <a:rPr sz="1875" b="0">
+                <a:solidFill>
+                  <a:srgbClr val="183B30"/>
+                </a:solidFill>
+                <a:latin typeface="DejaVu Sans"/>
+                <a:ea typeface="DejaVu Sans"/>
+                <a:cs typeface="DejaVu Sans"/>
+              </a:rPr>
+              <a:t>A fog coordena a operação local.</a:t>
+            </a:r>
+          </a:p>
+        </p:txBody>
+      </p:sp>
+      <p:sp>
+        <p:nvSpPr>
+          <p:cNvPr id="12" name="">
+            <a:extLst xmlns:a="http://schemas.openxmlformats.org/drawingml/2006/main">
+              <a:ext uri="{FF2B5EF4-FFF2-40B4-BE49-F238E27FC236}">
+                <a16:creationId xmlns:a16="http://schemas.microsoft.com/office/drawing/2014/main" id="{9C0C5F9A-D3CD-4789-BCE3-66A7B1D52902}"/>
+              </a:ext>
+            </a:extLst>
+          </p:cNvPr>
+          <p:cNvSpPr>
+            <a:spLocks xmlns:a="http://schemas.openxmlformats.org/drawingml/2006/main" noGrp="1"/>
+          </p:cNvSpPr>
+          <p:nvPr/>
+        </p:nvSpPr>
+        <p:spPr>
+          <a:xfrm xmlns:a="http://schemas.openxmlformats.org/drawingml/2006/main">
+            <a:off x="6477000" y="2686050"/>
+            <a:ext cx="5143500" cy="762000"/>
+          </a:xfrm>
+          <a:prstGeom xmlns:a="http://schemas.openxmlformats.org/drawingml/2006/main" prst="rect">
+            <a:avLst/>
+          </a:prstGeom>
+          <a:noFill xmlns:a="http://schemas.openxmlformats.org/drawingml/2006/main"/>
+          <a:ln xmlns:a="http://schemas.openxmlformats.org/drawingml/2006/main" w="0">
+            <a:noFill/>
+          </a:ln>
+        </p:spPr>
+        <p:txBody>
+          <a:bodyPr xmlns:a="http://schemas.openxmlformats.org/drawingml/2006/main" lIns="0" tIns="0" rIns="0" bIns="0"/>
+          <a:lstStyle xmlns:a="http://schemas.openxmlformats.org/drawingml/2006/main">
+            <a:defPPr>
+              <a:defRPr sz="2400" b="1">
+                <a:solidFill>
+                  <a:srgbClr val="936017"/>
+                </a:solidFill>
+                <a:latin typeface="DejaVu Sans"/>
+                <a:ea typeface="DejaVu Sans"/>
+                <a:cs typeface="DejaVu Sans"/>
+              </a:defRPr>
+            </a:defPPr>
+            <a:lvl1pPr>
+              <a:defRPr sz="2400" b="1">
+                <a:solidFill>
+                  <a:srgbClr val="936017"/>
+                </a:solidFill>
+                <a:latin typeface="DejaVu Sans"/>
+                <a:ea typeface="DejaVu Sans"/>
+                <a:cs typeface="DejaVu Sans"/>
+              </a:defRPr>
+            </a:lvl1pPr>
+            <a:lvl2pPr>
+              <a:defRPr sz="2400" b="1">
+                <a:solidFill>
+                  <a:srgbClr val="936017"/>
+                </a:solidFill>
+                <a:latin typeface="DejaVu Sans"/>
+                <a:ea typeface="DejaVu Sans"/>
+                <a:cs typeface="DejaVu Sans"/>
+              </a:defRPr>
+            </a:lvl2pPr>
+            <a:lvl3pPr>
+              <a:defRPr sz="2400" b="1">
+                <a:solidFill>
+                  <a:srgbClr val="936017"/>
+                </a:solidFill>
+                <a:latin typeface="DejaVu Sans"/>
+                <a:ea typeface="DejaVu Sans"/>
+                <a:cs typeface="DejaVu Sans"/>
+              </a:defRPr>
+            </a:lvl3pPr>
+            <a:lvl4pPr>
+              <a:defRPr sz="2400" b="1">
+                <a:solidFill>
+                  <a:srgbClr val="936017"/>
+                </a:solidFill>
+                <a:latin typeface="DejaVu Sans"/>
+                <a:ea typeface="DejaVu Sans"/>
+                <a:cs typeface="DejaVu Sans"/>
+              </a:defRPr>
+            </a:lvl4pPr>
+            <a:lvl5pPr>
+              <a:defRPr sz="2400" b="1">
+                <a:solidFill>
+                  <a:srgbClr val="936017"/>
+                </a:solidFill>
+                <a:latin typeface="DejaVu Sans"/>
+                <a:ea typeface="DejaVu Sans"/>
+                <a:cs typeface="DejaVu Sans"/>
+              </a:defRPr>
+            </a:lvl5pPr>
+            <a:lvl6pPr>
+              <a:defRPr sz="2400" b="1">
+                <a:solidFill>
+                  <a:srgbClr val="936017"/>
+                </a:solidFill>
+                <a:latin typeface="DejaVu Sans"/>
+                <a:ea typeface="DejaVu Sans"/>
+                <a:cs typeface="DejaVu Sans"/>
+              </a:defRPr>
+            </a:lvl6pPr>
+            <a:lvl7pPr>
+              <a:defRPr sz="2400" b="1">
+                <a:solidFill>
+                  <a:srgbClr val="936017"/>
+                </a:solidFill>
+                <a:latin typeface="DejaVu Sans"/>
+                <a:ea typeface="DejaVu Sans"/>
+                <a:cs typeface="DejaVu Sans"/>
+              </a:defRPr>
+            </a:lvl7pPr>
+            <a:lvl8pPr>
+              <a:defRPr sz="2400" b="1">
+                <a:solidFill>
+                  <a:srgbClr val="936017"/>
+                </a:solidFill>
+                <a:latin typeface="DejaVu Sans"/>
+                <a:ea typeface="DejaVu Sans"/>
+                <a:cs typeface="DejaVu Sans"/>
+              </a:defRPr>
+            </a:lvl8pPr>
+            <a:lvl9pPr>
+              <a:defRPr sz="2400" b="1">
+                <a:solidFill>
+                  <a:srgbClr val="936017"/>
+                </a:solidFill>
+                <a:latin typeface="DejaVu Sans"/>
+                <a:ea typeface="DejaVu Sans"/>
+                <a:cs typeface="DejaVu Sans"/>
+              </a:defRPr>
+            </a:lvl9pPr>
+          </a:lstStyle>
+          <a:p xmlns:a="http://schemas.openxmlformats.org/drawingml/2006/main">
+            <a:pPr>
+              <a:defRPr sz="2400" b="1">
+                <a:solidFill>
+                  <a:srgbClr val="936017"/>
+                </a:solidFill>
+                <a:latin typeface="DejaVu Sans"/>
+                <a:ea typeface="DejaVu Sans"/>
+                <a:cs typeface="DejaVu Sans"/>
+              </a:defRPr>
+            </a:pPr>
+            <a:r>
+              <a:rPr sz="2400" b="1">
+                <a:solidFill>
+                  <a:srgbClr val="936017"/>
+                </a:solidFill>
+                <a:latin typeface="DejaVu Sans"/>
+                <a:ea typeface="DejaVu Sans"/>
+                <a:cs typeface="DejaVu Sans"/>
+              </a:rPr>
+              <a:t>Histórico remoto chega depois</a:t>
+            </a:r>
+          </a:p>
+        </p:txBody>
+      </p:sp>
+      <p:sp>
+        <p:nvSpPr>
+          <p:cNvPr id="13" name="">
+            <a:extLst xmlns:a="http://schemas.openxmlformats.org/drawingml/2006/main">
+              <a:ext uri="{FF2B5EF4-FFF2-40B4-BE49-F238E27FC236}">
+                <a16:creationId xmlns:a16="http://schemas.microsoft.com/office/drawing/2014/main" id="{D2EF1F5F-1565-4795-9169-A2E89C0FDB04}"/>
+              </a:ext>
+            </a:extLst>
+          </p:cNvPr>
+          <p:cNvSpPr>
+            <a:spLocks xmlns:a="http://schemas.openxmlformats.org/drawingml/2006/main" noGrp="1"/>
+          </p:cNvSpPr>
+          <p:nvPr/>
+        </p:nvSpPr>
+        <p:spPr>
+          <a:xfrm xmlns:a="http://schemas.openxmlformats.org/drawingml/2006/main">
+            <a:off x="6477000" y="3476625"/>
+            <a:ext cx="5143500" cy="571500"/>
+          </a:xfrm>
+          <a:prstGeom xmlns:a="http://schemas.openxmlformats.org/drawingml/2006/main" prst="rect">
+            <a:avLst/>
+          </a:prstGeom>
+          <a:noFill xmlns:a="http://schemas.openxmlformats.org/drawingml/2006/main"/>
+          <a:ln xmlns:a="http://schemas.openxmlformats.org/drawingml/2006/main" w="0">
+            <a:noFill/>
+          </a:ln>
+        </p:spPr>
+        <p:txBody>
+          <a:bodyPr xmlns:a="http://schemas.openxmlformats.org/drawingml/2006/main" lIns="0" tIns="0" rIns="0" bIns="0"/>
+          <a:lstStyle xmlns:a="http://schemas.openxmlformats.org/drawingml/2006/main">
+            <a:defPPr>
+              <a:defRPr sz="1875" b="0">
+                <a:solidFill>
+                  <a:srgbClr val="183B30"/>
+                </a:solidFill>
+                <a:latin typeface="DejaVu Sans"/>
+                <a:ea typeface="DejaVu Sans"/>
+                <a:cs typeface="DejaVu Sans"/>
+              </a:defRPr>
+            </a:defPPr>
+            <a:lvl1pPr>
+              <a:defRPr sz="1875" b="0">
+                <a:solidFill>
+                  <a:srgbClr val="183B30"/>
+                </a:solidFill>
+                <a:latin typeface="DejaVu Sans"/>
+                <a:ea typeface="DejaVu Sans"/>
+                <a:cs typeface="DejaVu Sans"/>
+              </a:defRPr>
+            </a:lvl1pPr>
+            <a:lvl2pPr>
+              <a:defRPr sz="1875" b="0">
+                <a:solidFill>
+                  <a:srgbClr val="183B30"/>
+                </a:solidFill>
+                <a:latin typeface="DejaVu Sans"/>
+                <a:ea typeface="DejaVu Sans"/>
+                <a:cs typeface="DejaVu Sans"/>
+              </a:defRPr>
+            </a:lvl2pPr>
+            <a:lvl3pPr>
+              <a:defRPr sz="1875" b="0">
+                <a:solidFill>
+                  <a:srgbClr val="183B30"/>
+                </a:solidFill>
+                <a:latin typeface="DejaVu Sans"/>
+                <a:ea typeface="DejaVu Sans"/>
+                <a:cs typeface="DejaVu Sans"/>
+              </a:defRPr>
+            </a:lvl3pPr>
+            <a:lvl4pPr>
+              <a:defRPr sz="1875" b="0">
+                <a:solidFill>
+                  <a:srgbClr val="183B30"/>
+                </a:solidFill>
+                <a:latin typeface="DejaVu Sans"/>
+                <a:ea typeface="DejaVu Sans"/>
+                <a:cs typeface="DejaVu Sans"/>
+              </a:defRPr>
+            </a:lvl4pPr>
+            <a:lvl5pPr>
+              <a:defRPr sz="1875" b="0">
+                <a:solidFill>
+                  <a:srgbClr val="183B30"/>
+                </a:solidFill>
+                <a:latin typeface="DejaVu Sans"/>
+                <a:ea typeface="DejaVu Sans"/>
+                <a:cs typeface="DejaVu Sans"/>
+              </a:defRPr>
+            </a:lvl5pPr>
+            <a:lvl6pPr>
+              <a:defRPr sz="1875" b="0">
+                <a:solidFill>
+                  <a:srgbClr val="183B30"/>
+                </a:solidFill>
+                <a:latin typeface="DejaVu Sans"/>
+                <a:ea typeface="DejaVu Sans"/>
+                <a:cs typeface="DejaVu Sans"/>
+              </a:defRPr>
+            </a:lvl6pPr>
+            <a:lvl7pPr>
+              <a:defRPr sz="1875" b="0">
+                <a:solidFill>
+                  <a:srgbClr val="183B30"/>
+                </a:solidFill>
+                <a:latin typeface="DejaVu Sans"/>
+                <a:ea typeface="DejaVu Sans"/>
+                <a:cs typeface="DejaVu Sans"/>
+              </a:defRPr>
+            </a:lvl7pPr>
+            <a:lvl8pPr>
+              <a:defRPr sz="1875" b="0">
+                <a:solidFill>
+                  <a:srgbClr val="183B30"/>
+                </a:solidFill>
+                <a:latin typeface="DejaVu Sans"/>
+                <a:ea typeface="DejaVu Sans"/>
+                <a:cs typeface="DejaVu Sans"/>
+              </a:defRPr>
+            </a:lvl8pPr>
+            <a:lvl9pPr>
+              <a:defRPr sz="1875" b="0">
+                <a:solidFill>
+                  <a:srgbClr val="183B30"/>
+                </a:solidFill>
+                <a:latin typeface="DejaVu Sans"/>
+                <a:ea typeface="DejaVu Sans"/>
+                <a:cs typeface="DejaVu Sans"/>
+              </a:defRPr>
+            </a:lvl9pPr>
+          </a:lstStyle>
+          <a:p xmlns:a="http://schemas.openxmlformats.org/drawingml/2006/main">
+            <a:pPr>
+              <a:defRPr sz="1875" b="0">
+                <a:solidFill>
+                  <a:srgbClr val="183B30"/>
+                </a:solidFill>
+                <a:latin typeface="DejaVu Sans"/>
+                <a:ea typeface="DejaVu Sans"/>
+                <a:cs typeface="DejaVu Sans"/>
+              </a:defRPr>
+            </a:pPr>
+            <a:r>
+              <a:rPr sz="1875" b="0">
+                <a:solidFill>
+                  <a:srgbClr val="183B30"/>
+                </a:solidFill>
+                <a:latin typeface="DejaVu Sans"/>
+                <a:ea typeface="DejaVu Sans"/>
+                <a:cs typeface="DejaVu Sans"/>
+              </a:rPr>
+              <a:t>As leituras esperam na fila em disco.</a:t>
+            </a:r>
+          </a:p>
+        </p:txBody>
+      </p:sp>
+      <p:sp>
+        <p:nvSpPr>
+          <p:cNvPr id="14" name="">
+            <a:extLst xmlns:a="http://schemas.openxmlformats.org/drawingml/2006/main">
+              <a:ext uri="{FF2B5EF4-FFF2-40B4-BE49-F238E27FC236}">
+                <a16:creationId xmlns:a16="http://schemas.microsoft.com/office/drawing/2014/main" id="{82FB2B5F-28F1-4D92-A75D-76104FD182C8}"/>
+              </a:ext>
+            </a:extLst>
+          </p:cNvPr>
+          <p:cNvSpPr>
+            <a:spLocks xmlns:a="http://schemas.openxmlformats.org/drawingml/2006/main" noGrp="1"/>
+          </p:cNvSpPr>
+          <p:nvPr/>
+        </p:nvSpPr>
+        <p:spPr>
+          <a:xfrm xmlns:a="http://schemas.openxmlformats.org/drawingml/2006/main">
+            <a:off x="609600" y="4381500"/>
+            <a:ext cx="5238750" cy="762000"/>
+          </a:xfrm>
+          <a:prstGeom xmlns:a="http://schemas.openxmlformats.org/drawingml/2006/main" prst="rect">
+            <a:avLst/>
+          </a:prstGeom>
+          <a:noFill xmlns:a="http://schemas.openxmlformats.org/drawingml/2006/main"/>
+          <a:ln xmlns:a="http://schemas.openxmlformats.org/drawingml/2006/main" w="0">
+            <a:noFill/>
+          </a:ln>
+        </p:spPr>
+        <p:txBody>
+          <a:bodyPr xmlns:a="http://schemas.openxmlformats.org/drawingml/2006/main" lIns="0" tIns="0" rIns="0" bIns="0"/>
+          <a:lstStyle xmlns:a="http://schemas.openxmlformats.org/drawingml/2006/main">
+            <a:defPPr>
+              <a:defRPr sz="2400" b="1">
+                <a:solidFill>
+                  <a:srgbClr val="167655"/>
+                </a:solidFill>
+                <a:latin typeface="DejaVu Sans"/>
+                <a:ea typeface="DejaVu Sans"/>
+                <a:cs typeface="DejaVu Sans"/>
+              </a:defRPr>
+            </a:defPPr>
+            <a:lvl1pPr>
+              <a:defRPr sz="2400" b="1">
+                <a:solidFill>
+                  <a:srgbClr val="167655"/>
+                </a:solidFill>
+                <a:latin typeface="DejaVu Sans"/>
+                <a:ea typeface="DejaVu Sans"/>
+                <a:cs typeface="DejaVu Sans"/>
+              </a:defRPr>
+            </a:lvl1pPr>
+            <a:lvl2pPr>
+              <a:defRPr sz="2400" b="1">
+                <a:solidFill>
+                  <a:srgbClr val="167655"/>
+                </a:solidFill>
+                <a:latin typeface="DejaVu Sans"/>
+                <a:ea typeface="DejaVu Sans"/>
+                <a:cs typeface="DejaVu Sans"/>
+              </a:defRPr>
+            </a:lvl2pPr>
+            <a:lvl3pPr>
+              <a:defRPr sz="2400" b="1">
+                <a:solidFill>
+                  <a:srgbClr val="167655"/>
+                </a:solidFill>
+                <a:latin typeface="DejaVu Sans"/>
+                <a:ea typeface="DejaVu Sans"/>
+                <a:cs typeface="DejaVu Sans"/>
+              </a:defRPr>
+            </a:lvl3pPr>
+            <a:lvl4pPr>
+              <a:defRPr sz="2400" b="1">
+                <a:solidFill>
+                  <a:srgbClr val="167655"/>
+                </a:solidFill>
+                <a:latin typeface="DejaVu Sans"/>
+                <a:ea typeface="DejaVu Sans"/>
+                <a:cs typeface="DejaVu Sans"/>
+              </a:defRPr>
+            </a:lvl4pPr>
+            <a:lvl5pPr>
+              <a:defRPr sz="2400" b="1">
+                <a:solidFill>
+                  <a:srgbClr val="167655"/>
+                </a:solidFill>
+                <a:latin typeface="DejaVu Sans"/>
+                <a:ea typeface="DejaVu Sans"/>
+                <a:cs typeface="DejaVu Sans"/>
+              </a:defRPr>
+            </a:lvl5pPr>
+            <a:lvl6pPr>
+              <a:defRPr sz="2400" b="1">
+                <a:solidFill>
+                  <a:srgbClr val="167655"/>
+                </a:solidFill>
+                <a:latin typeface="DejaVu Sans"/>
+                <a:ea typeface="DejaVu Sans"/>
+                <a:cs typeface="DejaVu Sans"/>
+              </a:defRPr>
+            </a:lvl6pPr>
+            <a:lvl7pPr>
+              <a:defRPr sz="2400" b="1">
+                <a:solidFill>
+                  <a:srgbClr val="167655"/>
+                </a:solidFill>
+                <a:latin typeface="DejaVu Sans"/>
+                <a:ea typeface="DejaVu Sans"/>
+                <a:cs typeface="DejaVu Sans"/>
+              </a:defRPr>
+            </a:lvl7pPr>
+            <a:lvl8pPr>
+              <a:defRPr sz="2400" b="1">
+                <a:solidFill>
+                  <a:srgbClr val="167655"/>
+                </a:solidFill>
+                <a:latin typeface="DejaVu Sans"/>
+                <a:ea typeface="DejaVu Sans"/>
+                <a:cs typeface="DejaVu Sans"/>
+              </a:defRPr>
+            </a:lvl8pPr>
+            <a:lvl9pPr>
+              <a:defRPr sz="2400" b="1">
+                <a:solidFill>
+                  <a:srgbClr val="167655"/>
+                </a:solidFill>
+                <a:latin typeface="DejaVu Sans"/>
+                <a:ea typeface="DejaVu Sans"/>
+                <a:cs typeface="DejaVu Sans"/>
+              </a:defRPr>
+            </a:lvl9pPr>
+          </a:lstStyle>
+          <a:p xmlns:a="http://schemas.openxmlformats.org/drawingml/2006/main">
+            <a:pPr>
+              <a:defRPr sz="2400" b="1">
+                <a:solidFill>
+                  <a:srgbClr val="167655"/>
+                </a:solidFill>
+                <a:latin typeface="DejaVu Sans"/>
+                <a:ea typeface="DejaVu Sans"/>
+                <a:cs typeface="DejaVu Sans"/>
+              </a:defRPr>
+            </a:pPr>
+            <a:r>
+              <a:rPr sz="2400" b="1">
+                <a:solidFill>
+                  <a:srgbClr val="167655"/>
+                </a:solidFill>
+                <a:latin typeface="DejaVu Sans"/>
+                <a:ea typeface="DejaVu Sans"/>
+                <a:cs typeface="DejaVu Sans"/>
+              </a:rPr>
+              <a:t>Reenvio sem duplicar histórico</a:t>
+            </a:r>
+          </a:p>
+        </p:txBody>
+      </p:sp>
+      <p:sp>
+        <p:nvSpPr>
+          <p:cNvPr id="15" name="">
+            <a:extLst xmlns:a="http://schemas.openxmlformats.org/drawingml/2006/main">
+              <a:ext uri="{FF2B5EF4-FFF2-40B4-BE49-F238E27FC236}">
+                <a16:creationId xmlns:a16="http://schemas.microsoft.com/office/drawing/2014/main" id="{6D141E13-584F-43F9-82B9-B9C885CAC433}"/>
+              </a:ext>
+            </a:extLst>
+          </p:cNvPr>
+          <p:cNvSpPr>
+            <a:spLocks xmlns:a="http://schemas.openxmlformats.org/drawingml/2006/main" noGrp="1"/>
+          </p:cNvSpPr>
+          <p:nvPr/>
+        </p:nvSpPr>
+        <p:spPr>
+          <a:xfrm xmlns:a="http://schemas.openxmlformats.org/drawingml/2006/main">
+            <a:off x="609600" y="5172075"/>
+            <a:ext cx="5143500" cy="571500"/>
+          </a:xfrm>
+          <a:prstGeom xmlns:a="http://schemas.openxmlformats.org/drawingml/2006/main" prst="rect">
+            <a:avLst/>
+          </a:prstGeom>
+          <a:noFill xmlns:a="http://schemas.openxmlformats.org/drawingml/2006/main"/>
+          <a:ln xmlns:a="http://schemas.openxmlformats.org/drawingml/2006/main" w="0">
+            <a:noFill/>
+          </a:ln>
+        </p:spPr>
+        <p:txBody>
+          <a:bodyPr xmlns:a="http://schemas.openxmlformats.org/drawingml/2006/main" lIns="0" tIns="0" rIns="0" bIns="0"/>
+          <a:lstStyle xmlns:a="http://schemas.openxmlformats.org/drawingml/2006/main">
+            <a:defPPr>
+              <a:defRPr sz="1875" b="0">
+                <a:solidFill>
+                  <a:srgbClr val="183B30"/>
+                </a:solidFill>
+                <a:latin typeface="DejaVu Sans"/>
+                <a:ea typeface="DejaVu Sans"/>
+                <a:cs typeface="DejaVu Sans"/>
+              </a:defRPr>
+            </a:defPPr>
+            <a:lvl1pPr>
+              <a:defRPr sz="1875" b="0">
+                <a:solidFill>
+                  <a:srgbClr val="183B30"/>
+                </a:solidFill>
+                <a:latin typeface="DejaVu Sans"/>
+                <a:ea typeface="DejaVu Sans"/>
+                <a:cs typeface="DejaVu Sans"/>
+              </a:defRPr>
+            </a:lvl1pPr>
+            <a:lvl2pPr>
+              <a:defRPr sz="1875" b="0">
+                <a:solidFill>
+                  <a:srgbClr val="183B30"/>
+                </a:solidFill>
+                <a:latin typeface="DejaVu Sans"/>
+                <a:ea typeface="DejaVu Sans"/>
+                <a:cs typeface="DejaVu Sans"/>
+              </a:defRPr>
+            </a:lvl2pPr>
+            <a:lvl3pPr>
+              <a:defRPr sz="1875" b="0">
+                <a:solidFill>
+                  <a:srgbClr val="183B30"/>
+                </a:solidFill>
+                <a:latin typeface="DejaVu Sans"/>
+                <a:ea typeface="DejaVu Sans"/>
+                <a:cs typeface="DejaVu Sans"/>
+              </a:defRPr>
+            </a:lvl3pPr>
+            <a:lvl4pPr>
+              <a:defRPr sz="1875" b="0">
+                <a:solidFill>
+                  <a:srgbClr val="183B30"/>
+                </a:solidFill>
+                <a:latin typeface="DejaVu Sans"/>
+                <a:ea typeface="DejaVu Sans"/>
+                <a:cs typeface="DejaVu Sans"/>
+              </a:defRPr>
+            </a:lvl4pPr>
+            <a:lvl5pPr>
+              <a:defRPr sz="1875" b="0">
+                <a:solidFill>
+                  <a:srgbClr val="183B30"/>
+                </a:solidFill>
+                <a:latin typeface="DejaVu Sans"/>
+                <a:ea typeface="DejaVu Sans"/>
+                <a:cs typeface="DejaVu Sans"/>
+              </a:defRPr>
+            </a:lvl5pPr>
+            <a:lvl6pPr>
+              <a:defRPr sz="1875" b="0">
+                <a:solidFill>
+                  <a:srgbClr val="183B30"/>
+                </a:solidFill>
+                <a:latin typeface="DejaVu Sans"/>
+                <a:ea typeface="DejaVu Sans"/>
+                <a:cs typeface="DejaVu Sans"/>
+              </a:defRPr>
+            </a:lvl6pPr>
+            <a:lvl7pPr>
+              <a:defRPr sz="1875" b="0">
+                <a:solidFill>
+                  <a:srgbClr val="183B30"/>
+                </a:solidFill>
+                <a:latin typeface="DejaVu Sans"/>
+                <a:ea typeface="DejaVu Sans"/>
+                <a:cs typeface="DejaVu Sans"/>
+              </a:defRPr>
+            </a:lvl7pPr>
+            <a:lvl8pPr>
+              <a:defRPr sz="1875" b="0">
+                <a:solidFill>
+                  <a:srgbClr val="183B30"/>
+                </a:solidFill>
+                <a:latin typeface="DejaVu Sans"/>
+                <a:ea typeface="DejaVu Sans"/>
+                <a:cs typeface="DejaVu Sans"/>
+              </a:defRPr>
+            </a:lvl8pPr>
+            <a:lvl9pPr>
+              <a:defRPr sz="1875" b="0">
+                <a:solidFill>
+                  <a:srgbClr val="183B30"/>
+                </a:solidFill>
+                <a:latin typeface="DejaVu Sans"/>
+                <a:ea typeface="DejaVu Sans"/>
+                <a:cs typeface="DejaVu Sans"/>
+              </a:defRPr>
+            </a:lvl9pPr>
+          </a:lstStyle>
+          <a:p xmlns:a="http://schemas.openxmlformats.org/drawingml/2006/main">
+            <a:pPr>
+              <a:defRPr sz="1875" b="0">
+                <a:solidFill>
+                  <a:srgbClr val="183B30"/>
+                </a:solidFill>
+                <a:latin typeface="DejaVu Sans"/>
+                <a:ea typeface="DejaVu Sans"/>
+                <a:cs typeface="DejaVu Sans"/>
+              </a:defRPr>
+            </a:pPr>
+            <a:r>
+              <a:rPr sz="1875" b="0">
+                <a:solidFill>
+                  <a:srgbClr val="183B30"/>
+                </a:solidFill>
+                <a:latin typeface="DejaVu Sans"/>
+                <a:ea typeface="DejaVu Sans"/>
+                <a:cs typeface="DejaVu Sans"/>
+              </a:rPr>
+              <a:t>O mesmo ID identifica a leitura.</a:t>
+            </a:r>
+          </a:p>
+        </p:txBody>
+      </p:sp>
+      <p:sp>
+        <p:nvSpPr>
+          <p:cNvPr id="16" name="">
+            <a:extLst xmlns:a="http://schemas.openxmlformats.org/drawingml/2006/main">
+              <a:ext uri="{FF2B5EF4-FFF2-40B4-BE49-F238E27FC236}">
+                <a16:creationId xmlns:a16="http://schemas.microsoft.com/office/drawing/2014/main" id="{B5E0C3BC-C59C-4406-A1B5-96392D0038F5}"/>
+              </a:ext>
+            </a:extLst>
+          </p:cNvPr>
+          <p:cNvSpPr>
+            <a:spLocks xmlns:a="http://schemas.openxmlformats.org/drawingml/2006/main" noGrp="1"/>
+          </p:cNvSpPr>
+          <p:nvPr/>
+        </p:nvSpPr>
+        <p:spPr>
+          <a:xfrm xmlns:a="http://schemas.openxmlformats.org/drawingml/2006/main">
+            <a:off x="6477000" y="4381500"/>
+            <a:ext cx="5143500" cy="762000"/>
+          </a:xfrm>
+          <a:prstGeom xmlns:a="http://schemas.openxmlformats.org/drawingml/2006/main" prst="rect">
+            <a:avLst/>
+          </a:prstGeom>
+          <a:noFill xmlns:a="http://schemas.openxmlformats.org/drawingml/2006/main"/>
+          <a:ln xmlns:a="http://schemas.openxmlformats.org/drawingml/2006/main" w="0">
+            <a:noFill/>
+          </a:ln>
+        </p:spPr>
+        <p:txBody>
+          <a:bodyPr xmlns:a="http://schemas.openxmlformats.org/drawingml/2006/main" lIns="0" tIns="0" rIns="0" bIns="0"/>
+          <a:lstStyle xmlns:a="http://schemas.openxmlformats.org/drawingml/2006/main">
+            <a:defPPr>
+              <a:defRPr sz="2400" b="1">
+                <a:solidFill>
+                  <a:srgbClr val="936017"/>
+                </a:solidFill>
+                <a:latin typeface="DejaVu Sans"/>
+                <a:ea typeface="DejaVu Sans"/>
+                <a:cs typeface="DejaVu Sans"/>
+              </a:defRPr>
+            </a:defPPr>
+            <a:lvl1pPr>
+              <a:defRPr sz="2400" b="1">
+                <a:solidFill>
+                  <a:srgbClr val="936017"/>
+                </a:solidFill>
+                <a:latin typeface="DejaVu Sans"/>
+                <a:ea typeface="DejaVu Sans"/>
+                <a:cs typeface="DejaVu Sans"/>
+              </a:defRPr>
+            </a:lvl1pPr>
+            <a:lvl2pPr>
+              <a:defRPr sz="2400" b="1">
+                <a:solidFill>
+                  <a:srgbClr val="936017"/>
+                </a:solidFill>
+                <a:latin typeface="DejaVu Sans"/>
+                <a:ea typeface="DejaVu Sans"/>
+                <a:cs typeface="DejaVu Sans"/>
+              </a:defRPr>
+            </a:lvl2pPr>
+            <a:lvl3pPr>
+              <a:defRPr sz="2400" b="1">
+                <a:solidFill>
+                  <a:srgbClr val="936017"/>
+                </a:solidFill>
+                <a:latin typeface="DejaVu Sans"/>
+                <a:ea typeface="DejaVu Sans"/>
+                <a:cs typeface="DejaVu Sans"/>
+              </a:defRPr>
+            </a:lvl3pPr>
+            <a:lvl4pPr>
+              <a:defRPr sz="2400" b="1">
+                <a:solidFill>
+                  <a:srgbClr val="936017"/>
+                </a:solidFill>
+                <a:latin typeface="DejaVu Sans"/>
+                <a:ea typeface="DejaVu Sans"/>
+                <a:cs typeface="DejaVu Sans"/>
+              </a:defRPr>
+            </a:lvl4pPr>
+            <a:lvl5pPr>
+              <a:defRPr sz="2400" b="1">
+                <a:solidFill>
+                  <a:srgbClr val="936017"/>
+                </a:solidFill>
+                <a:latin typeface="DejaVu Sans"/>
+                <a:ea typeface="DejaVu Sans"/>
+                <a:cs typeface="DejaVu Sans"/>
+              </a:defRPr>
+            </a:lvl5pPr>
+            <a:lvl6pPr>
+              <a:defRPr sz="2400" b="1">
+                <a:solidFill>
+                  <a:srgbClr val="936017"/>
+                </a:solidFill>
+                <a:latin typeface="DejaVu Sans"/>
+                <a:ea typeface="DejaVu Sans"/>
+                <a:cs typeface="DejaVu Sans"/>
+              </a:defRPr>
+            </a:lvl6pPr>
+            <a:lvl7pPr>
+              <a:defRPr sz="2400" b="1">
+                <a:solidFill>
+                  <a:srgbClr val="936017"/>
+                </a:solidFill>
+                <a:latin typeface="DejaVu Sans"/>
+                <a:ea typeface="DejaVu Sans"/>
+                <a:cs typeface="DejaVu Sans"/>
+              </a:defRPr>
+            </a:lvl7pPr>
+            <a:lvl8pPr>
+              <a:defRPr sz="2400" b="1">
+                <a:solidFill>
+                  <a:srgbClr val="936017"/>
+                </a:solidFill>
+                <a:latin typeface="DejaVu Sans"/>
+                <a:ea typeface="DejaVu Sans"/>
+                <a:cs typeface="DejaVu Sans"/>
+              </a:defRPr>
+            </a:lvl8pPr>
+            <a:lvl9pPr>
+              <a:defRPr sz="2400" b="1">
+                <a:solidFill>
+                  <a:srgbClr val="936017"/>
+                </a:solidFill>
+                <a:latin typeface="DejaVu Sans"/>
+                <a:ea typeface="DejaVu Sans"/>
+                <a:cs typeface="DejaVu Sans"/>
+              </a:defRPr>
+            </a:lvl9pPr>
+          </a:lstStyle>
+          <a:p xmlns:a="http://schemas.openxmlformats.org/drawingml/2006/main">
+            <a:pPr>
+              <a:defRPr sz="2400" b="1">
+                <a:solidFill>
+                  <a:srgbClr val="936017"/>
+                </a:solidFill>
+                <a:latin typeface="DejaVu Sans"/>
+                <a:ea typeface="DejaVu Sans"/>
+                <a:cs typeface="DejaVu Sans"/>
+              </a:defRPr>
+            </a:pPr>
+            <a:r>
+              <a:rPr sz="2400" b="1">
+                <a:solidFill>
+                  <a:srgbClr val="936017"/>
+                </a:solidFill>
+                <a:latin typeface="DejaVu Sans"/>
+                <a:ea typeface="DejaVu Sans"/>
+                <a:cs typeface="DejaVu Sans"/>
+              </a:rPr>
+              <a:t>Mais armazenamento e mensagens</a:t>
+            </a:r>
+          </a:p>
+        </p:txBody>
+      </p:sp>
+      <p:sp>
+        <p:nvSpPr>
+          <p:cNvPr id="17" name="">
+            <a:extLst xmlns:a="http://schemas.openxmlformats.org/drawingml/2006/main">
+              <a:ext uri="{FF2B5EF4-FFF2-40B4-BE49-F238E27FC236}">
+                <a16:creationId xmlns:a16="http://schemas.microsoft.com/office/drawing/2014/main" id="{AC585C56-0E9E-4A83-A872-C14F6BF7674B}"/>
+              </a:ext>
+            </a:extLst>
+          </p:cNvPr>
+          <p:cNvSpPr>
+            <a:spLocks xmlns:a="http://schemas.openxmlformats.org/drawingml/2006/main" noGrp="1"/>
+          </p:cNvSpPr>
+          <p:nvPr/>
+        </p:nvSpPr>
+        <p:spPr>
+          <a:xfrm xmlns:a="http://schemas.openxmlformats.org/drawingml/2006/main">
+            <a:off x="6477000" y="5172075"/>
+            <a:ext cx="5143500" cy="571500"/>
+          </a:xfrm>
+          <a:prstGeom xmlns:a="http://schemas.openxmlformats.org/drawingml/2006/main" prst="rect">
+            <a:avLst/>
+          </a:prstGeom>
+          <a:noFill xmlns:a="http://schemas.openxmlformats.org/drawingml/2006/main"/>
+          <a:ln xmlns:a="http://schemas.openxmlformats.org/drawingml/2006/main" w="0">
+            <a:noFill/>
+          </a:ln>
+        </p:spPr>
+        <p:txBody>
+          <a:bodyPr xmlns:a="http://schemas.openxmlformats.org/drawingml/2006/main" lIns="0" tIns="0" rIns="0" bIns="0"/>
+          <a:lstStyle xmlns:a="http://schemas.openxmlformats.org/drawingml/2006/main">
+            <a:defPPr>
+              <a:defRPr sz="1875" b="0">
+                <a:solidFill>
+                  <a:srgbClr val="183B30"/>
+                </a:solidFill>
+                <a:latin typeface="DejaVu Sans"/>
+                <a:ea typeface="DejaVu Sans"/>
+                <a:cs typeface="DejaVu Sans"/>
+              </a:defRPr>
+            </a:defPPr>
+            <a:lvl1pPr>
+              <a:defRPr sz="1875" b="0">
+                <a:solidFill>
+                  <a:srgbClr val="183B30"/>
+                </a:solidFill>
+                <a:latin typeface="DejaVu Sans"/>
+                <a:ea typeface="DejaVu Sans"/>
+                <a:cs typeface="DejaVu Sans"/>
+              </a:defRPr>
+            </a:lvl1pPr>
+            <a:lvl2pPr>
+              <a:defRPr sz="1875" b="0">
+                <a:solidFill>
+                  <a:srgbClr val="183B30"/>
+                </a:solidFill>
+                <a:latin typeface="DejaVu Sans"/>
+                <a:ea typeface="DejaVu Sans"/>
+                <a:cs typeface="DejaVu Sans"/>
+              </a:defRPr>
+            </a:lvl2pPr>
+            <a:lvl3pPr>
+              <a:defRPr sz="1875" b="0">
+                <a:solidFill>
+                  <a:srgbClr val="183B30"/>
+                </a:solidFill>
+                <a:latin typeface="DejaVu Sans"/>
+                <a:ea typeface="DejaVu Sans"/>
+                <a:cs typeface="DejaVu Sans"/>
+              </a:defRPr>
+            </a:lvl3pPr>
+            <a:lvl4pPr>
+              <a:defRPr sz="1875" b="0">
+                <a:solidFill>
+                  <a:srgbClr val="183B30"/>
+                </a:solidFill>
+                <a:latin typeface="DejaVu Sans"/>
+                <a:ea typeface="DejaVu Sans"/>
+                <a:cs typeface="DejaVu Sans"/>
+              </a:defRPr>
+            </a:lvl4pPr>
+            <a:lvl5pPr>
+              <a:defRPr sz="1875" b="0">
+                <a:solidFill>
+                  <a:srgbClr val="183B30"/>
+                </a:solidFill>
+                <a:latin typeface="DejaVu Sans"/>
+                <a:ea typeface="DejaVu Sans"/>
+                <a:cs typeface="DejaVu Sans"/>
+              </a:defRPr>
+            </a:lvl5pPr>
+            <a:lvl6pPr>
+              <a:defRPr sz="1875" b="0">
+                <a:solidFill>
+                  <a:srgbClr val="183B30"/>
+                </a:solidFill>
+                <a:latin typeface="DejaVu Sans"/>
+                <a:ea typeface="DejaVu Sans"/>
+                <a:cs typeface="DejaVu Sans"/>
+              </a:defRPr>
+            </a:lvl6pPr>
+            <a:lvl7pPr>
+              <a:defRPr sz="1875" b="0">
+                <a:solidFill>
+                  <a:srgbClr val="183B30"/>
+                </a:solidFill>
+                <a:latin typeface="DejaVu Sans"/>
+                <a:ea typeface="DejaVu Sans"/>
+                <a:cs typeface="DejaVu Sans"/>
+              </a:defRPr>
+            </a:lvl7pPr>
+            <a:lvl8pPr>
+              <a:defRPr sz="1875" b="0">
+                <a:solidFill>
+                  <a:srgbClr val="183B30"/>
+                </a:solidFill>
+                <a:latin typeface="DejaVu Sans"/>
+                <a:ea typeface="DejaVu Sans"/>
+                <a:cs typeface="DejaVu Sans"/>
+              </a:defRPr>
+            </a:lvl8pPr>
+            <a:lvl9pPr>
+              <a:defRPr sz="1875" b="0">
+                <a:solidFill>
+                  <a:srgbClr val="183B30"/>
+                </a:solidFill>
+                <a:latin typeface="DejaVu Sans"/>
+                <a:ea typeface="DejaVu Sans"/>
+                <a:cs typeface="DejaVu Sans"/>
+              </a:defRPr>
+            </a:lvl9pPr>
+          </a:lstStyle>
+          <a:p xmlns:a="http://schemas.openxmlformats.org/drawingml/2006/main">
+            <a:pPr>
+              <a:defRPr sz="1875" b="0">
+                <a:solidFill>
+                  <a:srgbClr val="183B30"/>
+                </a:solidFill>
+                <a:latin typeface="DejaVu Sans"/>
+                <a:ea typeface="DejaVu Sans"/>
+                <a:cs typeface="DejaVu Sans"/>
+              </a:defRPr>
+            </a:pPr>
+            <a:r>
+              <a:rPr sz="1875" b="0">
+                <a:solidFill>
+                  <a:srgbClr val="183B30"/>
+                </a:solidFill>
+                <a:latin typeface="DejaVu Sans"/>
+                <a:ea typeface="DejaVu Sans"/>
+                <a:cs typeface="DejaVu Sans"/>
+              </a:rPr>
+              <a:t>Fila, confirmações e reenvios usam recursos.</a:t>
+            </a:r>
+          </a:p>
+        </p:txBody>
+      </p:sp>
+      <p:sp>
+        <p:nvSpPr>
+          <p:cNvPr id="18" name="">
+            <a:extLst xmlns:a="http://schemas.openxmlformats.org/drawingml/2006/main">
+              <a:ext uri="{FF2B5EF4-FFF2-40B4-BE49-F238E27FC236}">
+                <a16:creationId xmlns:a16="http://schemas.microsoft.com/office/drawing/2014/main" id="{0043983E-AF05-49DA-8B25-9E92343F3B31}"/>
+              </a:ext>
+            </a:extLst>
+          </p:cNvPr>
+          <p:cNvSpPr>
+            <a:spLocks xmlns:a="http://schemas.openxmlformats.org/drawingml/2006/main" noGrp="1"/>
+          </p:cNvSpPr>
+          <p:nvPr/>
+        </p:nvSpPr>
+        <p:spPr>
+          <a:xfrm xmlns:a="http://schemas.openxmlformats.org/drawingml/2006/main">
+            <a:off x="609600" y="5972175"/>
+            <a:ext cx="10953750" cy="361950"/>
+          </a:xfrm>
+          <a:prstGeom xmlns:a="http://schemas.openxmlformats.org/drawingml/2006/main" prst="rect">
+            <a:avLst/>
+          </a:prstGeom>
+          <a:noFill xmlns:a="http://schemas.openxmlformats.org/drawingml/2006/main"/>
+          <a:ln xmlns:a="http://schemas.openxmlformats.org/drawingml/2006/main" w="0">
+            <a:noFill/>
+          </a:ln>
+        </p:spPr>
+        <p:txBody>
+          <a:bodyPr xmlns:a="http://schemas.openxmlformats.org/drawingml/2006/main" lIns="0" tIns="0" rIns="0" bIns="0"/>
+          <a:lstStyle xmlns:a="http://schemas.openxmlformats.org/drawingml/2006/main">
+            <a:defPPr>
+              <a:defRPr sz="1800" b="1">
+                <a:solidFill>
+                  <a:srgbClr val="183B30"/>
+                </a:solidFill>
+                <a:latin typeface="DejaVu Sans"/>
+                <a:ea typeface="DejaVu Sans"/>
+                <a:cs typeface="DejaVu Sans"/>
+              </a:defRPr>
+            </a:defPPr>
+            <a:lvl1pPr>
+              <a:defRPr sz="1800" b="1">
+                <a:solidFill>
+                  <a:srgbClr val="183B30"/>
+                </a:solidFill>
+                <a:latin typeface="DejaVu Sans"/>
+                <a:ea typeface="DejaVu Sans"/>
+                <a:cs typeface="DejaVu Sans"/>
+              </a:defRPr>
+            </a:lvl1pPr>
+            <a:lvl2pPr>
+              <a:defRPr sz="1800" b="1">
+                <a:solidFill>
+                  <a:srgbClr val="183B30"/>
+                </a:solidFill>
+                <a:latin typeface="DejaVu Sans"/>
+                <a:ea typeface="DejaVu Sans"/>
+                <a:cs typeface="DejaVu Sans"/>
+              </a:defRPr>
+            </a:lvl2pPr>
+            <a:lvl3pPr>
+              <a:defRPr sz="1800" b="1">
+                <a:solidFill>
+                  <a:srgbClr val="183B30"/>
+                </a:solidFill>
+                <a:latin typeface="DejaVu Sans"/>
+                <a:ea typeface="DejaVu Sans"/>
+                <a:cs typeface="DejaVu Sans"/>
+              </a:defRPr>
+            </a:lvl3pPr>
+            <a:lvl4pPr>
+              <a:defRPr sz="1800" b="1">
+                <a:solidFill>
+                  <a:srgbClr val="183B30"/>
+                </a:solidFill>
+                <a:latin typeface="DejaVu Sans"/>
+                <a:ea typeface="DejaVu Sans"/>
+                <a:cs typeface="DejaVu Sans"/>
+              </a:defRPr>
+            </a:lvl4pPr>
+            <a:lvl5pPr>
+              <a:defRPr sz="1800" b="1">
+                <a:solidFill>
+                  <a:srgbClr val="183B30"/>
+                </a:solidFill>
+                <a:latin typeface="DejaVu Sans"/>
+                <a:ea typeface="DejaVu Sans"/>
+                <a:cs typeface="DejaVu Sans"/>
+              </a:defRPr>
+            </a:lvl5pPr>
+            <a:lvl6pPr>
+              <a:defRPr sz="1800" b="1">
+                <a:solidFill>
+                  <a:srgbClr val="183B30"/>
+                </a:solidFill>
+                <a:latin typeface="DejaVu Sans"/>
+                <a:ea typeface="DejaVu Sans"/>
+                <a:cs typeface="DejaVu Sans"/>
+              </a:defRPr>
+            </a:lvl6pPr>
+            <a:lvl7pPr>
+              <a:defRPr sz="1800" b="1">
+                <a:solidFill>
+                  <a:srgbClr val="183B30"/>
+                </a:solidFill>
+                <a:latin typeface="DejaVu Sans"/>
+                <a:ea typeface="DejaVu Sans"/>
+                <a:cs typeface="DejaVu Sans"/>
+              </a:defRPr>
+            </a:lvl7pPr>
+            <a:lvl8pPr>
+              <a:defRPr sz="1800" b="1">
+                <a:solidFill>
+                  <a:srgbClr val="183B30"/>
+                </a:solidFill>
+                <a:latin typeface="DejaVu Sans"/>
+                <a:ea typeface="DejaVu Sans"/>
+                <a:cs typeface="DejaVu Sans"/>
+              </a:defRPr>
+            </a:lvl8pPr>
+            <a:lvl9pPr>
+              <a:defRPr sz="1800" b="1">
+                <a:solidFill>
+                  <a:srgbClr val="183B30"/>
+                </a:solidFill>
+                <a:latin typeface="DejaVu Sans"/>
+                <a:ea typeface="DejaVu Sans"/>
+                <a:cs typeface="DejaVu Sans"/>
+              </a:defRPr>
+            </a:lvl9pPr>
+          </a:lstStyle>
+          <a:p xmlns:a="http://schemas.openxmlformats.org/drawingml/2006/main">
+            <a:pPr>
+              <a:defRPr sz="1800" b="1">
+                <a:solidFill>
+                  <a:srgbClr val="183B30"/>
+                </a:solidFill>
+                <a:latin typeface="DejaVu Sans"/>
+                <a:ea typeface="DejaVu Sans"/>
+                <a:cs typeface="DejaVu Sans"/>
+              </a:defRPr>
+            </a:pPr>
+            <a:r>
+              <a:rPr sz="1800" b="1">
+                <a:solidFill>
+                  <a:srgbClr val="183B30"/>
+                </a:solidFill>
+                <a:latin typeface="DejaVu Sans"/>
+                <a:ea typeface="DejaVu Sans"/>
+                <a:cs typeface="DejaVu Sans"/>
+              </a:rPr>
+              <a:t>Se a fog parar, novas decisões também param.</a:t>
+            </a:r>
+          </a:p>
+        </p:txBody>
+      </p:sp>
     </p:spTree>
     <p:extLst>
       <p:ext uri="{BB962C8B-B14F-4D97-AF65-F5344CB8AC3E}">
@@ -8626,7 +9858,7 @@
           <p:cNvPr id="15" name="">
             <a:extLst xmlns:a="http://schemas.openxmlformats.org/drawingml/2006/main">
               <a:ext uri="{FF2B5EF4-FFF2-40B4-BE49-F238E27FC236}">
-                <a16:creationId xmlns:a16="http://schemas.microsoft.com/office/drawing/2014/main" id="{4641AF0B-B206-425C-86B6-957CA7D0F454}"/>
+                <a16:creationId xmlns:a16="http://schemas.microsoft.com/office/drawing/2014/main" id="{BF478D59-4B1E-4FF5-A0F8-6BCC61F48A71}"/>
               </a:ext>
             </a:extLst>
           </p:cNvPr>
@@ -8657,7 +9889,7 @@
           <p:cNvPr id="14" name="">
             <a:extLst xmlns:a="http://schemas.openxmlformats.org/drawingml/2006/main">
               <a:ext uri="{FF2B5EF4-FFF2-40B4-BE49-F238E27FC236}">
-                <a16:creationId xmlns:a16="http://schemas.microsoft.com/office/drawing/2014/main" id="{0419720C-3567-4641-AC2A-509783EADAA0}"/>
+                <a16:creationId xmlns:a16="http://schemas.microsoft.com/office/drawing/2014/main" id="{5302C467-0B88-44D3-A79C-08B9C4666ADD}"/>
               </a:ext>
             </a:extLst>
           </p:cNvPr>
@@ -8688,7 +9920,7 @@
           <p:cNvPr id="13" name="">
             <a:extLst xmlns:a="http://schemas.openxmlformats.org/drawingml/2006/main">
               <a:ext uri="{FF2B5EF4-FFF2-40B4-BE49-F238E27FC236}">
-                <a16:creationId xmlns:a16="http://schemas.microsoft.com/office/drawing/2014/main" id="{10120E0F-09BD-4EF4-8F70-EE7020148A52}"/>
+                <a16:creationId xmlns:a16="http://schemas.microsoft.com/office/drawing/2014/main" id="{60F58FCC-93BD-40FF-8F86-7255720B2610}"/>
               </a:ext>
             </a:extLst>
           </p:cNvPr>
@@ -10987,6 +12219,7 @@
               </a:defRPr>
             </a:defPPr>
             <a:lvl1pPr>
+              <a:buNone/>
               <a:defRPr sz="1650" b="0">
                 <a:solidFill>
                   <a:srgbClr val="183B30"/>
@@ -10997,6 +12230,7 @@
               </a:defRPr>
             </a:lvl1pPr>
             <a:lvl2pPr>
+              <a:buNone/>
               <a:defRPr sz="1650" b="0">
                 <a:solidFill>
                   <a:srgbClr val="183B30"/>
@@ -11007,6 +12241,7 @@
               </a:defRPr>
             </a:lvl2pPr>
             <a:lvl3pPr>
+              <a:buNone/>
               <a:defRPr sz="1650" b="0">
                 <a:solidFill>
                   <a:srgbClr val="183B30"/>
@@ -11017,6 +12252,7 @@
               </a:defRPr>
             </a:lvl3pPr>
             <a:lvl4pPr>
+              <a:buNone/>
               <a:defRPr sz="1650" b="0">
                 <a:solidFill>
                   <a:srgbClr val="183B30"/>
@@ -11027,6 +12263,7 @@
               </a:defRPr>
             </a:lvl4pPr>
             <a:lvl5pPr>
+              <a:buNone/>
               <a:defRPr sz="1650" b="0">
                 <a:solidFill>
                   <a:srgbClr val="183B30"/>
@@ -11037,6 +12274,7 @@
               </a:defRPr>
             </a:lvl5pPr>
             <a:lvl6pPr>
+              <a:buNone/>
               <a:defRPr sz="1650" b="0">
                 <a:solidFill>
                   <a:srgbClr val="183B30"/>
@@ -11047,6 +12285,7 @@
               </a:defRPr>
             </a:lvl6pPr>
             <a:lvl7pPr>
+              <a:buNone/>
               <a:defRPr sz="1650" b="0">
                 <a:solidFill>
                   <a:srgbClr val="183B30"/>
@@ -11057,6 +12296,7 @@
               </a:defRPr>
             </a:lvl7pPr>
             <a:lvl8pPr>
+              <a:buNone/>
               <a:defRPr sz="1650" b="0">
                 <a:solidFill>
                   <a:srgbClr val="183B30"/>
@@ -11067,6 +12307,7 @@
               </a:defRPr>
             </a:lvl8pPr>
             <a:lvl9pPr>
+              <a:buNone/>
               <a:defRPr sz="1650" b="0">
                 <a:solidFill>
                   <a:srgbClr val="183B30"/>
@@ -11079,6 +12320,7 @@
           </a:lstStyle>
           <a:p xmlns:a="http://schemas.openxmlformats.org/drawingml/2006/main">
             <a:pPr>
+              <a:buNone/>
               <a:defRPr sz="1650" b="0">
                 <a:solidFill>
                   <a:srgbClr val="183B30"/>
@@ -13169,7 +14411,7 @@
           <p:cNvPr id="5" name="Chart">
             <a:extLst xmlns:a="http://schemas.openxmlformats.org/drawingml/2006/main">
               <a:ext uri="{FF2B5EF4-FFF2-40B4-BE49-F238E27FC236}">
-                <a16:creationId xmlns:a16="http://schemas.microsoft.com/office/drawing/2014/main" id="{CC50670D-DF93-4A0C-83AA-889C26F8AF7E}"/>
+                <a16:creationId xmlns:a16="http://schemas.microsoft.com/office/drawing/2014/main" id="{14130289-157C-49CC-954B-7C9421E5F7D9}"/>
               </a:ext>
             </a:extLst>
           </p:cNvPr>
@@ -13177,21 +14419,21 @@
           <p:nvPr/>
         </p:nvGraphicFramePr>
         <p:xfrm>
-          <a:off xmlns:a="http://schemas.openxmlformats.org/drawingml/2006/main" x="609600" y="1952625"/>
-          <a:ext xmlns:a="http://schemas.openxmlformats.org/drawingml/2006/main" cx="10668000" cy="3714750"/>
+          <a:off xmlns:a="http://schemas.openxmlformats.org/drawingml/2006/main" x="609600" y="3524250"/>
+          <a:ext xmlns:a="http://schemas.openxmlformats.org/drawingml/2006/main" cx="10972800" cy="2000250"/>
         </p:xfrm>
         <a:graphic xmlns:a="http://schemas.openxmlformats.org/drawingml/2006/main">
           <a:graphicData uri="http://schemas.openxmlformats.org/drawingml/2006/chart">
-            <c:chart xmlns:r="http://schemas.openxmlformats.org/officeDocument/2006/relationships" xmlns:c="http://schemas.openxmlformats.org/drawingml/2006/chart" r:id="Re809b58af1474920"/>
+            <c:chart xmlns:r="http://schemas.openxmlformats.org/officeDocument/2006/relationships" xmlns:c="http://schemas.openxmlformats.org/drawingml/2006/chart" r:id="Rcf001bf761394db1"/>
           </a:graphicData>
         </a:graphic>
       </p:graphicFrame>
       <p:sp>
         <p:nvSpPr>
-          <p:cNvPr id="6" name="">
+          <p:cNvPr id="8" name="">
             <a:extLst xmlns:a="http://schemas.openxmlformats.org/drawingml/2006/main">
               <a:ext uri="{FF2B5EF4-FFF2-40B4-BE49-F238E27FC236}">
-                <a16:creationId xmlns:a16="http://schemas.microsoft.com/office/drawing/2014/main" id="{6E819FF5-FE67-47C3-B43D-4983FA5CDAF2}"/>
+                <a16:creationId xmlns:a16="http://schemas.microsoft.com/office/drawing/2014/main" id="{1EFAEF52-1314-48C7-A555-95152539AEC0}"/>
               </a:ext>
             </a:extLst>
           </p:cNvPr>
@@ -13202,175 +14444,8 @@
         </p:nvSpPr>
         <p:spPr>
           <a:xfrm xmlns:a="http://schemas.openxmlformats.org/drawingml/2006/main">
-            <a:off x="609600" y="5848350"/>
-            <a:ext cx="10858500" cy="457200"/>
-          </a:xfrm>
-          <a:prstGeom xmlns:a="http://schemas.openxmlformats.org/drawingml/2006/main" prst="rect">
-            <a:avLst/>
-          </a:prstGeom>
-          <a:noFill xmlns:a="http://schemas.openxmlformats.org/drawingml/2006/main"/>
-          <a:ln xmlns:a="http://schemas.openxmlformats.org/drawingml/2006/main" w="0">
-            <a:noFill/>
-            <a:prstDash val="solid"/>
-          </a:ln>
-        </p:spPr>
-        <p:txBody>
-          <a:bodyPr xmlns:a="http://schemas.openxmlformats.org/drawingml/2006/main" lIns="0" tIns="0" rIns="0" bIns="0"/>
-          <a:lstStyle xmlns:a="http://schemas.openxmlformats.org/drawingml/2006/main">
-            <a:defPPr>
-              <a:defRPr sz="1875" b="1">
-                <a:solidFill>
-                  <a:srgbClr val="167655"/>
-                </a:solidFill>
-                <a:latin typeface="DejaVu Sans"/>
-                <a:ea typeface="DejaVu Sans"/>
-                <a:cs typeface="DejaVu Sans"/>
-              </a:defRPr>
-            </a:defPPr>
-            <a:lvl1pPr>
-              <a:buNone/>
-              <a:defRPr sz="1875" b="1">
-                <a:solidFill>
-                  <a:srgbClr val="167655"/>
-                </a:solidFill>
-                <a:latin typeface="DejaVu Sans"/>
-                <a:ea typeface="DejaVu Sans"/>
-                <a:cs typeface="DejaVu Sans"/>
-              </a:defRPr>
-            </a:lvl1pPr>
-            <a:lvl2pPr>
-              <a:buNone/>
-              <a:defRPr sz="1875" b="1">
-                <a:solidFill>
-                  <a:srgbClr val="167655"/>
-                </a:solidFill>
-                <a:latin typeface="DejaVu Sans"/>
-                <a:ea typeface="DejaVu Sans"/>
-                <a:cs typeface="DejaVu Sans"/>
-              </a:defRPr>
-            </a:lvl2pPr>
-            <a:lvl3pPr>
-              <a:buNone/>
-              <a:defRPr sz="1875" b="1">
-                <a:solidFill>
-                  <a:srgbClr val="167655"/>
-                </a:solidFill>
-                <a:latin typeface="DejaVu Sans"/>
-                <a:ea typeface="DejaVu Sans"/>
-                <a:cs typeface="DejaVu Sans"/>
-              </a:defRPr>
-            </a:lvl3pPr>
-            <a:lvl4pPr>
-              <a:buNone/>
-              <a:defRPr sz="1875" b="1">
-                <a:solidFill>
-                  <a:srgbClr val="167655"/>
-                </a:solidFill>
-                <a:latin typeface="DejaVu Sans"/>
-                <a:ea typeface="DejaVu Sans"/>
-                <a:cs typeface="DejaVu Sans"/>
-              </a:defRPr>
-            </a:lvl4pPr>
-            <a:lvl5pPr>
-              <a:buNone/>
-              <a:defRPr sz="1875" b="1">
-                <a:solidFill>
-                  <a:srgbClr val="167655"/>
-                </a:solidFill>
-                <a:latin typeface="DejaVu Sans"/>
-                <a:ea typeface="DejaVu Sans"/>
-                <a:cs typeface="DejaVu Sans"/>
-              </a:defRPr>
-            </a:lvl5pPr>
-            <a:lvl6pPr>
-              <a:buNone/>
-              <a:defRPr sz="1875" b="1">
-                <a:solidFill>
-                  <a:srgbClr val="167655"/>
-                </a:solidFill>
-                <a:latin typeface="DejaVu Sans"/>
-                <a:ea typeface="DejaVu Sans"/>
-                <a:cs typeface="DejaVu Sans"/>
-              </a:defRPr>
-            </a:lvl6pPr>
-            <a:lvl7pPr>
-              <a:buNone/>
-              <a:defRPr sz="1875" b="1">
-                <a:solidFill>
-                  <a:srgbClr val="167655"/>
-                </a:solidFill>
-                <a:latin typeface="DejaVu Sans"/>
-                <a:ea typeface="DejaVu Sans"/>
-                <a:cs typeface="DejaVu Sans"/>
-              </a:defRPr>
-            </a:lvl7pPr>
-            <a:lvl8pPr>
-              <a:buNone/>
-              <a:defRPr sz="1875" b="1">
-                <a:solidFill>
-                  <a:srgbClr val="167655"/>
-                </a:solidFill>
-                <a:latin typeface="DejaVu Sans"/>
-                <a:ea typeface="DejaVu Sans"/>
-                <a:cs typeface="DejaVu Sans"/>
-              </a:defRPr>
-            </a:lvl8pPr>
-            <a:lvl9pPr>
-              <a:buNone/>
-              <a:defRPr sz="1875" b="1">
-                <a:solidFill>
-                  <a:srgbClr val="167655"/>
-                </a:solidFill>
-                <a:latin typeface="DejaVu Sans"/>
-                <a:ea typeface="DejaVu Sans"/>
-                <a:cs typeface="DejaVu Sans"/>
-              </a:defRPr>
-            </a:lvl9pPr>
-          </a:lstStyle>
-          <a:p xmlns:a="http://schemas.openxmlformats.org/drawingml/2006/main">
-            <a:pPr>
-              <a:buNone/>
-              <a:defRPr sz="1875" b="1">
-                <a:solidFill>
-                  <a:srgbClr val="167655"/>
-                </a:solidFill>
-                <a:latin typeface="DejaVu Sans"/>
-                <a:ea typeface="DejaVu Sans"/>
-                <a:cs typeface="DejaVu Sans"/>
-              </a:defRPr>
-            </a:pPr>
-            <a:r>
-              <a:rPr sz="1875" b="1">
-                <a:solidFill>
-                  <a:srgbClr val="167655"/>
-                </a:solidFill>
-                <a:latin typeface="DejaVu Sans"/>
-                <a:ea typeface="DejaVu Sans"/>
-                <a:cs typeface="DejaVu Sans"/>
-              </a:rPr>
-              <a:t>Fila = dados aguardando envio. Após reconectar, o envio continua.</a:t>
-            </a:r>
-          </a:p>
-        </p:txBody>
-      </p:sp>
-      <p:sp>
-        <p:nvSpPr>
-          <p:cNvPr id="8" name="">
-            <a:extLst xmlns:a="http://schemas.openxmlformats.org/drawingml/2006/main">
-              <a:ext uri="{FF2B5EF4-FFF2-40B4-BE49-F238E27FC236}">
-                <a16:creationId xmlns:a16="http://schemas.microsoft.com/office/drawing/2014/main" id="{8C4C7C38-F48F-4700-82F6-8664AA662553}"/>
-              </a:ext>
-            </a:extLst>
-          </p:cNvPr>
-          <p:cNvSpPr>
-            <a:spLocks xmlns:a="http://schemas.openxmlformats.org/drawingml/2006/main" noGrp="1"/>
-          </p:cNvSpPr>
-          <p:nvPr/>
-        </p:nvSpPr>
-        <p:spPr>
-          <a:xfrm xmlns:a="http://schemas.openxmlformats.org/drawingml/2006/main">
-            <a:off x="609600" y="1695450"/>
-            <a:ext cx="10477500" cy="285750"/>
+            <a:off x="609600" y="1685925"/>
+            <a:ext cx="10953750" cy="361950"/>
           </a:xfrm>
           <a:prstGeom xmlns:a="http://schemas.openxmlformats.org/drawingml/2006/main" prst="rect">
             <a:avLst/>
@@ -13384,7 +14459,7 @@
           <a:bodyPr xmlns:a="http://schemas.openxmlformats.org/drawingml/2006/main" lIns="0" tIns="0" rIns="0" bIns="0"/>
           <a:lstStyle xmlns:a="http://schemas.openxmlformats.org/drawingml/2006/main">
             <a:defPPr>
-              <a:defRPr sz="1650" b="0">
+              <a:defRPr sz="1725" b="0">
                 <a:solidFill>
                   <a:srgbClr val="183B30"/>
                 </a:solidFill>
@@ -13394,7 +14469,7 @@
               </a:defRPr>
             </a:defPPr>
             <a:lvl1pPr>
-              <a:defRPr sz="1650" b="0">
+              <a:defRPr sz="1725" b="0">
                 <a:solidFill>
                   <a:srgbClr val="183B30"/>
                 </a:solidFill>
@@ -13404,7 +14479,7 @@
               </a:defRPr>
             </a:lvl1pPr>
             <a:lvl2pPr>
-              <a:defRPr sz="1650" b="0">
+              <a:defRPr sz="1725" b="0">
                 <a:solidFill>
                   <a:srgbClr val="183B30"/>
                 </a:solidFill>
@@ -13414,7 +14489,7 @@
               </a:defRPr>
             </a:lvl2pPr>
             <a:lvl3pPr>
-              <a:defRPr sz="1650" b="0">
+              <a:defRPr sz="1725" b="0">
                 <a:solidFill>
                   <a:srgbClr val="183B30"/>
                 </a:solidFill>
@@ -13424,7 +14499,7 @@
               </a:defRPr>
             </a:lvl3pPr>
             <a:lvl4pPr>
-              <a:defRPr sz="1650" b="0">
+              <a:defRPr sz="1725" b="0">
                 <a:solidFill>
                   <a:srgbClr val="183B30"/>
                 </a:solidFill>
@@ -13434,7 +14509,7 @@
               </a:defRPr>
             </a:lvl4pPr>
             <a:lvl5pPr>
-              <a:defRPr sz="1650" b="0">
+              <a:defRPr sz="1725" b="0">
                 <a:solidFill>
                   <a:srgbClr val="183B30"/>
                 </a:solidFill>
@@ -13444,7 +14519,7 @@
               </a:defRPr>
             </a:lvl5pPr>
             <a:lvl6pPr>
-              <a:defRPr sz="1650" b="0">
+              <a:defRPr sz="1725" b="0">
                 <a:solidFill>
                   <a:srgbClr val="183B30"/>
                 </a:solidFill>
@@ -13454,7 +14529,7 @@
               </a:defRPr>
             </a:lvl6pPr>
             <a:lvl7pPr>
-              <a:defRPr sz="1650" b="0">
+              <a:defRPr sz="1725" b="0">
                 <a:solidFill>
                   <a:srgbClr val="183B30"/>
                 </a:solidFill>
@@ -13464,7 +14539,7 @@
               </a:defRPr>
             </a:lvl7pPr>
             <a:lvl8pPr>
-              <a:defRPr sz="1650" b="0">
+              <a:defRPr sz="1725" b="0">
                 <a:solidFill>
                   <a:srgbClr val="183B30"/>
                 </a:solidFill>
@@ -13474,7 +14549,7 @@
               </a:defRPr>
             </a:lvl8pPr>
             <a:lvl9pPr>
-              <a:defRPr sz="1650" b="0">
+              <a:defRPr sz="1725" b="0">
                 <a:solidFill>
                   <a:srgbClr val="183B30"/>
                 </a:solidFill>
@@ -13486,7 +14561,7 @@
           </a:lstStyle>
           <a:p xmlns:a="http://schemas.openxmlformats.org/drawingml/2006/main">
             <a:pPr>
-              <a:defRPr sz="1650" b="0">
+              <a:defRPr sz="1725" b="0">
                 <a:solidFill>
                   <a:srgbClr val="183B30"/>
                 </a:solidFill>
@@ -13496,7 +14571,7 @@
               </a:defRPr>
             </a:pPr>
             <a:r>
-              <a:rPr sz="1650" b="0">
+              <a:rPr sz="1725" b="0">
                 <a:solidFill>
                   <a:srgbClr val="183B30"/>
                 </a:solidFill>
@@ -13504,7 +14579,7 @@
                 <a:ea typeface="DejaVu Sans"/>
                 <a:cs typeface="DejaVu Sans"/>
               </a:rPr>
-              <a:t>Eventos pendentes (quantidade)</a:t>
+              <a:t>Condição: computador, broker e rede local continuam funcionando.</a:t>
             </a:r>
           </a:p>
         </p:txBody>
@@ -13514,7 +14589,7 @@
           <p:cNvPr id="9" name="">
             <a:extLst xmlns:a="http://schemas.openxmlformats.org/drawingml/2006/main">
               <a:ext uri="{FF2B5EF4-FFF2-40B4-BE49-F238E27FC236}">
-                <a16:creationId xmlns:a16="http://schemas.microsoft.com/office/drawing/2014/main" id="{0D48C40E-FD23-42B5-9F93-736DED9CAFBF}"/>
+                <a16:creationId xmlns:a16="http://schemas.microsoft.com/office/drawing/2014/main" id="{E71D200A-5803-47E5-A289-35334DCEF09C}"/>
               </a:ext>
             </a:extLst>
           </p:cNvPr>
@@ -13525,8 +14600,8 @@
         </p:nvSpPr>
         <p:spPr>
           <a:xfrm xmlns:a="http://schemas.openxmlformats.org/drawingml/2006/main">
-            <a:off x="9048750" y="5553075"/>
-            <a:ext cx="2571750" cy="266700"/>
+            <a:off x="609600" y="2209800"/>
+            <a:ext cx="3333750" cy="400050"/>
           </a:xfrm>
           <a:prstGeom xmlns:a="http://schemas.openxmlformats.org/drawingml/2006/main" prst="rect">
             <a:avLst/>
@@ -13540,9 +14615,9 @@
           <a:bodyPr xmlns:a="http://schemas.openxmlformats.org/drawingml/2006/main" lIns="0" tIns="0" rIns="0" bIns="0"/>
           <a:lstStyle xmlns:a="http://schemas.openxmlformats.org/drawingml/2006/main">
             <a:defPPr>
-              <a:defRPr sz="1350" b="0">
-                <a:solidFill>
-                  <a:srgbClr val="183B30"/>
+              <a:defRPr sz="2100" b="1">
+                <a:solidFill>
+                  <a:srgbClr val="167655"/>
                 </a:solidFill>
                 <a:latin typeface="DejaVu Sans"/>
                 <a:ea typeface="DejaVu Sans"/>
@@ -13550,9 +14625,9 @@
               </a:defRPr>
             </a:defPPr>
             <a:lvl1pPr>
-              <a:defRPr sz="1350" b="0">
-                <a:solidFill>
-                  <a:srgbClr val="183B30"/>
+              <a:defRPr sz="2100" b="1">
+                <a:solidFill>
+                  <a:srgbClr val="167655"/>
                 </a:solidFill>
                 <a:latin typeface="DejaVu Sans"/>
                 <a:ea typeface="DejaVu Sans"/>
@@ -13560,9 +14635,9 @@
               </a:defRPr>
             </a:lvl1pPr>
             <a:lvl2pPr>
-              <a:defRPr sz="1350" b="0">
-                <a:solidFill>
-                  <a:srgbClr val="183B30"/>
+              <a:defRPr sz="2100" b="1">
+                <a:solidFill>
+                  <a:srgbClr val="167655"/>
                 </a:solidFill>
                 <a:latin typeface="DejaVu Sans"/>
                 <a:ea typeface="DejaVu Sans"/>
@@ -13570,9 +14645,9 @@
               </a:defRPr>
             </a:lvl2pPr>
             <a:lvl3pPr>
-              <a:defRPr sz="1350" b="0">
-                <a:solidFill>
-                  <a:srgbClr val="183B30"/>
+              <a:defRPr sz="2100" b="1">
+                <a:solidFill>
+                  <a:srgbClr val="167655"/>
                 </a:solidFill>
                 <a:latin typeface="DejaVu Sans"/>
                 <a:ea typeface="DejaVu Sans"/>
@@ -13580,9 +14655,9 @@
               </a:defRPr>
             </a:lvl3pPr>
             <a:lvl4pPr>
-              <a:defRPr sz="1350" b="0">
-                <a:solidFill>
-                  <a:srgbClr val="183B30"/>
+              <a:defRPr sz="2100" b="1">
+                <a:solidFill>
+                  <a:srgbClr val="167655"/>
                 </a:solidFill>
                 <a:latin typeface="DejaVu Sans"/>
                 <a:ea typeface="DejaVu Sans"/>
@@ -13590,9 +14665,9 @@
               </a:defRPr>
             </a:lvl4pPr>
             <a:lvl5pPr>
-              <a:defRPr sz="1350" b="0">
-                <a:solidFill>
-                  <a:srgbClr val="183B30"/>
+              <a:defRPr sz="2100" b="1">
+                <a:solidFill>
+                  <a:srgbClr val="167655"/>
                 </a:solidFill>
                 <a:latin typeface="DejaVu Sans"/>
                 <a:ea typeface="DejaVu Sans"/>
@@ -13600,9 +14675,9 @@
               </a:defRPr>
             </a:lvl5pPr>
             <a:lvl6pPr>
-              <a:defRPr sz="1350" b="0">
-                <a:solidFill>
-                  <a:srgbClr val="183B30"/>
+              <a:defRPr sz="2100" b="1">
+                <a:solidFill>
+                  <a:srgbClr val="167655"/>
                 </a:solidFill>
                 <a:latin typeface="DejaVu Sans"/>
                 <a:ea typeface="DejaVu Sans"/>
@@ -13610,9 +14685,9 @@
               </a:defRPr>
             </a:lvl6pPr>
             <a:lvl7pPr>
-              <a:defRPr sz="1350" b="0">
-                <a:solidFill>
-                  <a:srgbClr val="183B30"/>
+              <a:defRPr sz="2100" b="1">
+                <a:solidFill>
+                  <a:srgbClr val="167655"/>
                 </a:solidFill>
                 <a:latin typeface="DejaVu Sans"/>
                 <a:ea typeface="DejaVu Sans"/>
@@ -13620,9 +14695,9 @@
               </a:defRPr>
             </a:lvl7pPr>
             <a:lvl8pPr>
-              <a:defRPr sz="1350" b="0">
-                <a:solidFill>
-                  <a:srgbClr val="183B30"/>
+              <a:defRPr sz="2100" b="1">
+                <a:solidFill>
+                  <a:srgbClr val="167655"/>
                 </a:solidFill>
                 <a:latin typeface="DejaVu Sans"/>
                 <a:ea typeface="DejaVu Sans"/>
@@ -13630,9 +14705,9 @@
               </a:defRPr>
             </a:lvl8pPr>
             <a:lvl9pPr>
-              <a:defRPr sz="1350" b="0">
-                <a:solidFill>
-                  <a:srgbClr val="183B30"/>
+              <a:defRPr sz="2100" b="1">
+                <a:solidFill>
+                  <a:srgbClr val="167655"/>
                 </a:solidFill>
                 <a:latin typeface="DejaVu Sans"/>
                 <a:ea typeface="DejaVu Sans"/>
@@ -13642,9 +14717,9 @@
           </a:lstStyle>
           <a:p xmlns:a="http://schemas.openxmlformats.org/drawingml/2006/main">
             <a:pPr>
-              <a:defRPr sz="1350" b="0">
-                <a:solidFill>
-                  <a:srgbClr val="183B30"/>
+              <a:defRPr sz="2100" b="1">
+                <a:solidFill>
+                  <a:srgbClr val="167655"/>
                 </a:solidFill>
                 <a:latin typeface="DejaVu Sans"/>
                 <a:ea typeface="DejaVu Sans"/>
@@ -13652,15 +14727,1199 @@
               </a:defRPr>
             </a:pPr>
             <a:r>
-              <a:rPr sz="1350" b="0">
-                <a:solidFill>
-                  <a:srgbClr val="183B30"/>
+              <a:rPr sz="2100" b="1">
+                <a:solidFill>
+                  <a:srgbClr val="167655"/>
                 </a:solidFill>
                 <a:latin typeface="DejaVu Sans"/>
                 <a:ea typeface="DejaVu Sans"/>
                 <a:cs typeface="DejaVu Sans"/>
               </a:rPr>
-              <a:t>s = segundos reais</a:t>
+              <a:t>1. Sem internet</a:t>
+            </a:r>
+          </a:p>
+        </p:txBody>
+      </p:sp>
+      <p:sp>
+        <p:nvSpPr>
+          <p:cNvPr id="10" name="">
+            <a:extLst xmlns:a="http://schemas.openxmlformats.org/drawingml/2006/main">
+              <a:ext uri="{FF2B5EF4-FFF2-40B4-BE49-F238E27FC236}">
+                <a16:creationId xmlns:a16="http://schemas.microsoft.com/office/drawing/2014/main" id="{84D3E3C2-0019-447E-8C7B-61E97830FB9C}"/>
+              </a:ext>
+            </a:extLst>
+          </p:cNvPr>
+          <p:cNvSpPr>
+            <a:spLocks xmlns:a="http://schemas.openxmlformats.org/drawingml/2006/main" noGrp="1"/>
+          </p:cNvSpPr>
+          <p:nvPr/>
+        </p:nvSpPr>
+        <p:spPr>
+          <a:xfrm xmlns:a="http://schemas.openxmlformats.org/drawingml/2006/main">
+            <a:off x="609600" y="2686050"/>
+            <a:ext cx="3333750" cy="704850"/>
+          </a:xfrm>
+          <a:prstGeom xmlns:a="http://schemas.openxmlformats.org/drawingml/2006/main" prst="rect">
+            <a:avLst/>
+          </a:prstGeom>
+          <a:noFill xmlns:a="http://schemas.openxmlformats.org/drawingml/2006/main"/>
+          <a:ln xmlns:a="http://schemas.openxmlformats.org/drawingml/2006/main" w="0">
+            <a:noFill/>
+          </a:ln>
+        </p:spPr>
+        <p:txBody>
+          <a:bodyPr xmlns:a="http://schemas.openxmlformats.org/drawingml/2006/main" lIns="0" tIns="0" rIns="0" bIns="0"/>
+          <a:lstStyle xmlns:a="http://schemas.openxmlformats.org/drawingml/2006/main">
+            <a:defPPr>
+              <a:defRPr sz="1725" b="0">
+                <a:solidFill>
+                  <a:srgbClr val="183B30"/>
+                </a:solidFill>
+                <a:latin typeface="DejaVu Sans"/>
+                <a:ea typeface="DejaVu Sans"/>
+                <a:cs typeface="DejaVu Sans"/>
+              </a:defRPr>
+            </a:defPPr>
+            <a:lvl1pPr>
+              <a:defRPr sz="1725" b="0">
+                <a:solidFill>
+                  <a:srgbClr val="183B30"/>
+                </a:solidFill>
+                <a:latin typeface="DejaVu Sans"/>
+                <a:ea typeface="DejaVu Sans"/>
+                <a:cs typeface="DejaVu Sans"/>
+              </a:defRPr>
+            </a:lvl1pPr>
+            <a:lvl2pPr>
+              <a:defRPr sz="1725" b="0">
+                <a:solidFill>
+                  <a:srgbClr val="183B30"/>
+                </a:solidFill>
+                <a:latin typeface="DejaVu Sans"/>
+                <a:ea typeface="DejaVu Sans"/>
+                <a:cs typeface="DejaVu Sans"/>
+              </a:defRPr>
+            </a:lvl2pPr>
+            <a:lvl3pPr>
+              <a:defRPr sz="1725" b="0">
+                <a:solidFill>
+                  <a:srgbClr val="183B30"/>
+                </a:solidFill>
+                <a:latin typeface="DejaVu Sans"/>
+                <a:ea typeface="DejaVu Sans"/>
+                <a:cs typeface="DejaVu Sans"/>
+              </a:defRPr>
+            </a:lvl3pPr>
+            <a:lvl4pPr>
+              <a:defRPr sz="1725" b="0">
+                <a:solidFill>
+                  <a:srgbClr val="183B30"/>
+                </a:solidFill>
+                <a:latin typeface="DejaVu Sans"/>
+                <a:ea typeface="DejaVu Sans"/>
+                <a:cs typeface="DejaVu Sans"/>
+              </a:defRPr>
+            </a:lvl4pPr>
+            <a:lvl5pPr>
+              <a:defRPr sz="1725" b="0">
+                <a:solidFill>
+                  <a:srgbClr val="183B30"/>
+                </a:solidFill>
+                <a:latin typeface="DejaVu Sans"/>
+                <a:ea typeface="DejaVu Sans"/>
+                <a:cs typeface="DejaVu Sans"/>
+              </a:defRPr>
+            </a:lvl5pPr>
+            <a:lvl6pPr>
+              <a:defRPr sz="1725" b="0">
+                <a:solidFill>
+                  <a:srgbClr val="183B30"/>
+                </a:solidFill>
+                <a:latin typeface="DejaVu Sans"/>
+                <a:ea typeface="DejaVu Sans"/>
+                <a:cs typeface="DejaVu Sans"/>
+              </a:defRPr>
+            </a:lvl6pPr>
+            <a:lvl7pPr>
+              <a:defRPr sz="1725" b="0">
+                <a:solidFill>
+                  <a:srgbClr val="183B30"/>
+                </a:solidFill>
+                <a:latin typeface="DejaVu Sans"/>
+                <a:ea typeface="DejaVu Sans"/>
+                <a:cs typeface="DejaVu Sans"/>
+              </a:defRPr>
+            </a:lvl7pPr>
+            <a:lvl8pPr>
+              <a:defRPr sz="1725" b="0">
+                <a:solidFill>
+                  <a:srgbClr val="183B30"/>
+                </a:solidFill>
+                <a:latin typeface="DejaVu Sans"/>
+                <a:ea typeface="DejaVu Sans"/>
+                <a:cs typeface="DejaVu Sans"/>
+              </a:defRPr>
+            </a:lvl8pPr>
+            <a:lvl9pPr>
+              <a:defRPr sz="1725" b="0">
+                <a:solidFill>
+                  <a:srgbClr val="183B30"/>
+                </a:solidFill>
+                <a:latin typeface="DejaVu Sans"/>
+                <a:ea typeface="DejaVu Sans"/>
+                <a:cs typeface="DejaVu Sans"/>
+              </a:defRPr>
+            </a:lvl9pPr>
+          </a:lstStyle>
+          <a:p xmlns:a="http://schemas.openxmlformats.org/drawingml/2006/main">
+            <a:pPr>
+              <a:defRPr sz="1725" b="0">
+                <a:solidFill>
+                  <a:srgbClr val="183B30"/>
+                </a:solidFill>
+                <a:latin typeface="DejaVu Sans"/>
+                <a:ea typeface="DejaVu Sans"/>
+                <a:cs typeface="DejaVu Sans"/>
+              </a:defRPr>
+            </a:pPr>
+            <a:r>
+              <a:rPr sz="1725" b="0">
+                <a:solidFill>
+                  <a:srgbClr val="183B30"/>
+                </a:solidFill>
+                <a:latin typeface="DejaVu Sans"/>
+                <a:ea typeface="DejaVu Sans"/>
+                <a:cs typeface="DejaVu Sans"/>
+              </a:rPr>
+              <a:t>Edge mede e executa.</a:t>
+            </a:r>
+          </a:p>
+          <a:p xmlns:a="http://schemas.openxmlformats.org/drawingml/2006/main">
+            <a:pPr>
+              <a:defRPr sz="1725" b="0">
+                <a:solidFill>
+                  <a:srgbClr val="183B30"/>
+                </a:solidFill>
+                <a:latin typeface="DejaVu Sans"/>
+                <a:ea typeface="DejaVu Sans"/>
+                <a:cs typeface="DejaVu Sans"/>
+              </a:defRPr>
+            </a:pPr>
+            <a:r>
+              <a:rPr sz="1725" b="0">
+                <a:solidFill>
+                  <a:srgbClr val="183B30"/>
+                </a:solidFill>
+                <a:latin typeface="DejaVu Sans"/>
+                <a:ea typeface="DejaVu Sans"/>
+                <a:cs typeface="DejaVu Sans"/>
+              </a:rPr>
+              <a:t>Fog decide e guarda a fila.</a:t>
+            </a:r>
+          </a:p>
+        </p:txBody>
+      </p:sp>
+      <p:sp>
+        <p:nvSpPr>
+          <p:cNvPr id="11" name="">
+            <a:extLst xmlns:a="http://schemas.openxmlformats.org/drawingml/2006/main">
+              <a:ext uri="{FF2B5EF4-FFF2-40B4-BE49-F238E27FC236}">
+                <a16:creationId xmlns:a16="http://schemas.microsoft.com/office/drawing/2014/main" id="{8194124C-F615-4D49-8B20-02D4E09594F4}"/>
+              </a:ext>
+            </a:extLst>
+          </p:cNvPr>
+          <p:cNvSpPr>
+            <a:spLocks xmlns:a="http://schemas.openxmlformats.org/drawingml/2006/main" noGrp="1"/>
+          </p:cNvSpPr>
+          <p:nvPr/>
+        </p:nvSpPr>
+        <p:spPr>
+          <a:xfrm xmlns:a="http://schemas.openxmlformats.org/drawingml/2006/main">
+            <a:off x="4381500" y="2209800"/>
+            <a:ext cx="3333750" cy="400050"/>
+          </a:xfrm>
+          <a:prstGeom xmlns:a="http://schemas.openxmlformats.org/drawingml/2006/main" prst="rect">
+            <a:avLst/>
+          </a:prstGeom>
+          <a:noFill xmlns:a="http://schemas.openxmlformats.org/drawingml/2006/main"/>
+          <a:ln xmlns:a="http://schemas.openxmlformats.org/drawingml/2006/main" w="0">
+            <a:noFill/>
+          </a:ln>
+        </p:spPr>
+        <p:txBody>
+          <a:bodyPr xmlns:a="http://schemas.openxmlformats.org/drawingml/2006/main" lIns="0" tIns="0" rIns="0" bIns="0"/>
+          <a:lstStyle xmlns:a="http://schemas.openxmlformats.org/drawingml/2006/main">
+            <a:defPPr>
+              <a:defRPr sz="2100" b="1">
+                <a:solidFill>
+                  <a:srgbClr val="167655"/>
+                </a:solidFill>
+                <a:latin typeface="DejaVu Sans"/>
+                <a:ea typeface="DejaVu Sans"/>
+                <a:cs typeface="DejaVu Sans"/>
+              </a:defRPr>
+            </a:defPPr>
+            <a:lvl1pPr>
+              <a:defRPr sz="2100" b="1">
+                <a:solidFill>
+                  <a:srgbClr val="167655"/>
+                </a:solidFill>
+                <a:latin typeface="DejaVu Sans"/>
+                <a:ea typeface="DejaVu Sans"/>
+                <a:cs typeface="DejaVu Sans"/>
+              </a:defRPr>
+            </a:lvl1pPr>
+            <a:lvl2pPr>
+              <a:defRPr sz="2100" b="1">
+                <a:solidFill>
+                  <a:srgbClr val="167655"/>
+                </a:solidFill>
+                <a:latin typeface="DejaVu Sans"/>
+                <a:ea typeface="DejaVu Sans"/>
+                <a:cs typeface="DejaVu Sans"/>
+              </a:defRPr>
+            </a:lvl2pPr>
+            <a:lvl3pPr>
+              <a:defRPr sz="2100" b="1">
+                <a:solidFill>
+                  <a:srgbClr val="167655"/>
+                </a:solidFill>
+                <a:latin typeface="DejaVu Sans"/>
+                <a:ea typeface="DejaVu Sans"/>
+                <a:cs typeface="DejaVu Sans"/>
+              </a:defRPr>
+            </a:lvl3pPr>
+            <a:lvl4pPr>
+              <a:defRPr sz="2100" b="1">
+                <a:solidFill>
+                  <a:srgbClr val="167655"/>
+                </a:solidFill>
+                <a:latin typeface="DejaVu Sans"/>
+                <a:ea typeface="DejaVu Sans"/>
+                <a:cs typeface="DejaVu Sans"/>
+              </a:defRPr>
+            </a:lvl4pPr>
+            <a:lvl5pPr>
+              <a:defRPr sz="2100" b="1">
+                <a:solidFill>
+                  <a:srgbClr val="167655"/>
+                </a:solidFill>
+                <a:latin typeface="DejaVu Sans"/>
+                <a:ea typeface="DejaVu Sans"/>
+                <a:cs typeface="DejaVu Sans"/>
+              </a:defRPr>
+            </a:lvl5pPr>
+            <a:lvl6pPr>
+              <a:defRPr sz="2100" b="1">
+                <a:solidFill>
+                  <a:srgbClr val="167655"/>
+                </a:solidFill>
+                <a:latin typeface="DejaVu Sans"/>
+                <a:ea typeface="DejaVu Sans"/>
+                <a:cs typeface="DejaVu Sans"/>
+              </a:defRPr>
+            </a:lvl6pPr>
+            <a:lvl7pPr>
+              <a:defRPr sz="2100" b="1">
+                <a:solidFill>
+                  <a:srgbClr val="167655"/>
+                </a:solidFill>
+                <a:latin typeface="DejaVu Sans"/>
+                <a:ea typeface="DejaVu Sans"/>
+                <a:cs typeface="DejaVu Sans"/>
+              </a:defRPr>
+            </a:lvl7pPr>
+            <a:lvl8pPr>
+              <a:defRPr sz="2100" b="1">
+                <a:solidFill>
+                  <a:srgbClr val="167655"/>
+                </a:solidFill>
+                <a:latin typeface="DejaVu Sans"/>
+                <a:ea typeface="DejaVu Sans"/>
+                <a:cs typeface="DejaVu Sans"/>
+              </a:defRPr>
+            </a:lvl8pPr>
+            <a:lvl9pPr>
+              <a:defRPr sz="2100" b="1">
+                <a:solidFill>
+                  <a:srgbClr val="167655"/>
+                </a:solidFill>
+                <a:latin typeface="DejaVu Sans"/>
+                <a:ea typeface="DejaVu Sans"/>
+                <a:cs typeface="DejaVu Sans"/>
+              </a:defRPr>
+            </a:lvl9pPr>
+          </a:lstStyle>
+          <a:p xmlns:a="http://schemas.openxmlformats.org/drawingml/2006/main">
+            <a:pPr>
+              <a:defRPr sz="2100" b="1">
+                <a:solidFill>
+                  <a:srgbClr val="167655"/>
+                </a:solidFill>
+                <a:latin typeface="DejaVu Sans"/>
+                <a:ea typeface="DejaVu Sans"/>
+                <a:cs typeface="DejaVu Sans"/>
+              </a:defRPr>
+            </a:pPr>
+            <a:r>
+              <a:rPr sz="2100" b="1">
+                <a:solidFill>
+                  <a:srgbClr val="167655"/>
+                </a:solidFill>
+                <a:latin typeface="DejaVu Sans"/>
+                <a:ea typeface="DejaVu Sans"/>
+                <a:cs typeface="DejaVu Sans"/>
+              </a:rPr>
+              <a:t>2. Enquanto espera</a:t>
+            </a:r>
+          </a:p>
+        </p:txBody>
+      </p:sp>
+      <p:sp>
+        <p:nvSpPr>
+          <p:cNvPr id="12" name="">
+            <a:extLst xmlns:a="http://schemas.openxmlformats.org/drawingml/2006/main">
+              <a:ext uri="{FF2B5EF4-FFF2-40B4-BE49-F238E27FC236}">
+                <a16:creationId xmlns:a16="http://schemas.microsoft.com/office/drawing/2014/main" id="{BFA6A2DD-488F-45CF-A050-1E918A6A2A5D}"/>
+              </a:ext>
+            </a:extLst>
+          </p:cNvPr>
+          <p:cNvSpPr>
+            <a:spLocks xmlns:a="http://schemas.openxmlformats.org/drawingml/2006/main" noGrp="1"/>
+          </p:cNvSpPr>
+          <p:nvPr/>
+        </p:nvSpPr>
+        <p:spPr>
+          <a:xfrm xmlns:a="http://schemas.openxmlformats.org/drawingml/2006/main">
+            <a:off x="4381500" y="2686050"/>
+            <a:ext cx="3333750" cy="704850"/>
+          </a:xfrm>
+          <a:prstGeom xmlns:a="http://schemas.openxmlformats.org/drawingml/2006/main" prst="rect">
+            <a:avLst/>
+          </a:prstGeom>
+          <a:noFill xmlns:a="http://schemas.openxmlformats.org/drawingml/2006/main"/>
+          <a:ln xmlns:a="http://schemas.openxmlformats.org/drawingml/2006/main" w="0">
+            <a:noFill/>
+          </a:ln>
+        </p:spPr>
+        <p:txBody>
+          <a:bodyPr xmlns:a="http://schemas.openxmlformats.org/drawingml/2006/main" lIns="0" tIns="0" rIns="0" bIns="0"/>
+          <a:lstStyle xmlns:a="http://schemas.openxmlformats.org/drawingml/2006/main">
+            <a:defPPr>
+              <a:defRPr sz="1725" b="0">
+                <a:solidFill>
+                  <a:srgbClr val="183B30"/>
+                </a:solidFill>
+                <a:latin typeface="DejaVu Sans"/>
+                <a:ea typeface="DejaVu Sans"/>
+                <a:cs typeface="DejaVu Sans"/>
+              </a:defRPr>
+            </a:defPPr>
+            <a:lvl1pPr>
+              <a:defRPr sz="1725" b="0">
+                <a:solidFill>
+                  <a:srgbClr val="183B30"/>
+                </a:solidFill>
+                <a:latin typeface="DejaVu Sans"/>
+                <a:ea typeface="DejaVu Sans"/>
+                <a:cs typeface="DejaVu Sans"/>
+              </a:defRPr>
+            </a:lvl1pPr>
+            <a:lvl2pPr>
+              <a:defRPr sz="1725" b="0">
+                <a:solidFill>
+                  <a:srgbClr val="183B30"/>
+                </a:solidFill>
+                <a:latin typeface="DejaVu Sans"/>
+                <a:ea typeface="DejaVu Sans"/>
+                <a:cs typeface="DejaVu Sans"/>
+              </a:defRPr>
+            </a:lvl2pPr>
+            <a:lvl3pPr>
+              <a:defRPr sz="1725" b="0">
+                <a:solidFill>
+                  <a:srgbClr val="183B30"/>
+                </a:solidFill>
+                <a:latin typeface="DejaVu Sans"/>
+                <a:ea typeface="DejaVu Sans"/>
+                <a:cs typeface="DejaVu Sans"/>
+              </a:defRPr>
+            </a:lvl3pPr>
+            <a:lvl4pPr>
+              <a:defRPr sz="1725" b="0">
+                <a:solidFill>
+                  <a:srgbClr val="183B30"/>
+                </a:solidFill>
+                <a:latin typeface="DejaVu Sans"/>
+                <a:ea typeface="DejaVu Sans"/>
+                <a:cs typeface="DejaVu Sans"/>
+              </a:defRPr>
+            </a:lvl4pPr>
+            <a:lvl5pPr>
+              <a:defRPr sz="1725" b="0">
+                <a:solidFill>
+                  <a:srgbClr val="183B30"/>
+                </a:solidFill>
+                <a:latin typeface="DejaVu Sans"/>
+                <a:ea typeface="DejaVu Sans"/>
+                <a:cs typeface="DejaVu Sans"/>
+              </a:defRPr>
+            </a:lvl5pPr>
+            <a:lvl6pPr>
+              <a:defRPr sz="1725" b="0">
+                <a:solidFill>
+                  <a:srgbClr val="183B30"/>
+                </a:solidFill>
+                <a:latin typeface="DejaVu Sans"/>
+                <a:ea typeface="DejaVu Sans"/>
+                <a:cs typeface="DejaVu Sans"/>
+              </a:defRPr>
+            </a:lvl6pPr>
+            <a:lvl7pPr>
+              <a:defRPr sz="1725" b="0">
+                <a:solidFill>
+                  <a:srgbClr val="183B30"/>
+                </a:solidFill>
+                <a:latin typeface="DejaVu Sans"/>
+                <a:ea typeface="DejaVu Sans"/>
+                <a:cs typeface="DejaVu Sans"/>
+              </a:defRPr>
+            </a:lvl7pPr>
+            <a:lvl8pPr>
+              <a:defRPr sz="1725" b="0">
+                <a:solidFill>
+                  <a:srgbClr val="183B30"/>
+                </a:solidFill>
+                <a:latin typeface="DejaVu Sans"/>
+                <a:ea typeface="DejaVu Sans"/>
+                <a:cs typeface="DejaVu Sans"/>
+              </a:defRPr>
+            </a:lvl8pPr>
+            <a:lvl9pPr>
+              <a:defRPr sz="1725" b="0">
+                <a:solidFill>
+                  <a:srgbClr val="183B30"/>
+                </a:solidFill>
+                <a:latin typeface="DejaVu Sans"/>
+                <a:ea typeface="DejaVu Sans"/>
+                <a:cs typeface="DejaVu Sans"/>
+              </a:defRPr>
+            </a:lvl9pPr>
+          </a:lstStyle>
+          <a:p xmlns:a="http://schemas.openxmlformats.org/drawingml/2006/main">
+            <a:pPr>
+              <a:defRPr sz="1725" b="0">
+                <a:solidFill>
+                  <a:srgbClr val="183B30"/>
+                </a:solidFill>
+                <a:latin typeface="DejaVu Sans"/>
+                <a:ea typeface="DejaVu Sans"/>
+                <a:cs typeface="DejaVu Sans"/>
+              </a:defRPr>
+            </a:pPr>
+            <a:r>
+              <a:rPr sz="1725" b="0">
+                <a:solidFill>
+                  <a:srgbClr val="183B30"/>
+                </a:solidFill>
+                <a:latin typeface="DejaVu Sans"/>
+                <a:ea typeface="DejaVu Sans"/>
+                <a:cs typeface="DejaVu Sans"/>
+              </a:rPr>
+              <a:t>MQTT local continua.</a:t>
+            </a:r>
+          </a:p>
+          <a:p xmlns:a="http://schemas.openxmlformats.org/drawingml/2006/main">
+            <a:pPr>
+              <a:defRPr sz="1725" b="0">
+                <a:solidFill>
+                  <a:srgbClr val="183B30"/>
+                </a:solidFill>
+                <a:latin typeface="DejaVu Sans"/>
+                <a:ea typeface="DejaVu Sans"/>
+                <a:cs typeface="DejaVu Sans"/>
+              </a:defRPr>
+            </a:pPr>
+            <a:r>
+              <a:rPr sz="1725" b="0">
+                <a:solidFill>
+                  <a:srgbClr val="183B30"/>
+                </a:solidFill>
+                <a:latin typeface="DejaVu Sans"/>
+                <a:ea typeface="DejaVu Sans"/>
+                <a:cs typeface="DejaVu Sans"/>
+              </a:rPr>
+              <a:t>Nuvem fica desatualizada.</a:t>
+            </a:r>
+          </a:p>
+        </p:txBody>
+      </p:sp>
+      <p:sp>
+        <p:nvSpPr>
+          <p:cNvPr id="13" name="">
+            <a:extLst xmlns:a="http://schemas.openxmlformats.org/drawingml/2006/main">
+              <a:ext uri="{FF2B5EF4-FFF2-40B4-BE49-F238E27FC236}">
+                <a16:creationId xmlns:a16="http://schemas.microsoft.com/office/drawing/2014/main" id="{549297C8-D3B7-45D3-AD3E-5471E92AEF09}"/>
+              </a:ext>
+            </a:extLst>
+          </p:cNvPr>
+          <p:cNvSpPr>
+            <a:spLocks xmlns:a="http://schemas.openxmlformats.org/drawingml/2006/main" noGrp="1"/>
+          </p:cNvSpPr>
+          <p:nvPr/>
+        </p:nvSpPr>
+        <p:spPr>
+          <a:xfrm xmlns:a="http://schemas.openxmlformats.org/drawingml/2006/main">
+            <a:off x="8153400" y="2209800"/>
+            <a:ext cx="3333750" cy="400050"/>
+          </a:xfrm>
+          <a:prstGeom xmlns:a="http://schemas.openxmlformats.org/drawingml/2006/main" prst="rect">
+            <a:avLst/>
+          </a:prstGeom>
+          <a:noFill xmlns:a="http://schemas.openxmlformats.org/drawingml/2006/main"/>
+          <a:ln xmlns:a="http://schemas.openxmlformats.org/drawingml/2006/main" w="0">
+            <a:noFill/>
+          </a:ln>
+        </p:spPr>
+        <p:txBody>
+          <a:bodyPr xmlns:a="http://schemas.openxmlformats.org/drawingml/2006/main" lIns="0" tIns="0" rIns="0" bIns="0"/>
+          <a:lstStyle xmlns:a="http://schemas.openxmlformats.org/drawingml/2006/main">
+            <a:defPPr>
+              <a:defRPr sz="2100" b="1">
+                <a:solidFill>
+                  <a:srgbClr val="167655"/>
+                </a:solidFill>
+                <a:latin typeface="DejaVu Sans"/>
+                <a:ea typeface="DejaVu Sans"/>
+                <a:cs typeface="DejaVu Sans"/>
+              </a:defRPr>
+            </a:defPPr>
+            <a:lvl1pPr>
+              <a:defRPr sz="2100" b="1">
+                <a:solidFill>
+                  <a:srgbClr val="167655"/>
+                </a:solidFill>
+                <a:latin typeface="DejaVu Sans"/>
+                <a:ea typeface="DejaVu Sans"/>
+                <a:cs typeface="DejaVu Sans"/>
+              </a:defRPr>
+            </a:lvl1pPr>
+            <a:lvl2pPr>
+              <a:defRPr sz="2100" b="1">
+                <a:solidFill>
+                  <a:srgbClr val="167655"/>
+                </a:solidFill>
+                <a:latin typeface="DejaVu Sans"/>
+                <a:ea typeface="DejaVu Sans"/>
+                <a:cs typeface="DejaVu Sans"/>
+              </a:defRPr>
+            </a:lvl2pPr>
+            <a:lvl3pPr>
+              <a:defRPr sz="2100" b="1">
+                <a:solidFill>
+                  <a:srgbClr val="167655"/>
+                </a:solidFill>
+                <a:latin typeface="DejaVu Sans"/>
+                <a:ea typeface="DejaVu Sans"/>
+                <a:cs typeface="DejaVu Sans"/>
+              </a:defRPr>
+            </a:lvl3pPr>
+            <a:lvl4pPr>
+              <a:defRPr sz="2100" b="1">
+                <a:solidFill>
+                  <a:srgbClr val="167655"/>
+                </a:solidFill>
+                <a:latin typeface="DejaVu Sans"/>
+                <a:ea typeface="DejaVu Sans"/>
+                <a:cs typeface="DejaVu Sans"/>
+              </a:defRPr>
+            </a:lvl4pPr>
+            <a:lvl5pPr>
+              <a:defRPr sz="2100" b="1">
+                <a:solidFill>
+                  <a:srgbClr val="167655"/>
+                </a:solidFill>
+                <a:latin typeface="DejaVu Sans"/>
+                <a:ea typeface="DejaVu Sans"/>
+                <a:cs typeface="DejaVu Sans"/>
+              </a:defRPr>
+            </a:lvl5pPr>
+            <a:lvl6pPr>
+              <a:defRPr sz="2100" b="1">
+                <a:solidFill>
+                  <a:srgbClr val="167655"/>
+                </a:solidFill>
+                <a:latin typeface="DejaVu Sans"/>
+                <a:ea typeface="DejaVu Sans"/>
+                <a:cs typeface="DejaVu Sans"/>
+              </a:defRPr>
+            </a:lvl6pPr>
+            <a:lvl7pPr>
+              <a:defRPr sz="2100" b="1">
+                <a:solidFill>
+                  <a:srgbClr val="167655"/>
+                </a:solidFill>
+                <a:latin typeface="DejaVu Sans"/>
+                <a:ea typeface="DejaVu Sans"/>
+                <a:cs typeface="DejaVu Sans"/>
+              </a:defRPr>
+            </a:lvl7pPr>
+            <a:lvl8pPr>
+              <a:defRPr sz="2100" b="1">
+                <a:solidFill>
+                  <a:srgbClr val="167655"/>
+                </a:solidFill>
+                <a:latin typeface="DejaVu Sans"/>
+                <a:ea typeface="DejaVu Sans"/>
+                <a:cs typeface="DejaVu Sans"/>
+              </a:defRPr>
+            </a:lvl8pPr>
+            <a:lvl9pPr>
+              <a:defRPr sz="2100" b="1">
+                <a:solidFill>
+                  <a:srgbClr val="167655"/>
+                </a:solidFill>
+                <a:latin typeface="DejaVu Sans"/>
+                <a:ea typeface="DejaVu Sans"/>
+                <a:cs typeface="DejaVu Sans"/>
+              </a:defRPr>
+            </a:lvl9pPr>
+          </a:lstStyle>
+          <a:p xmlns:a="http://schemas.openxmlformats.org/drawingml/2006/main">
+            <a:pPr>
+              <a:defRPr sz="2100" b="1">
+                <a:solidFill>
+                  <a:srgbClr val="167655"/>
+                </a:solidFill>
+                <a:latin typeface="DejaVu Sans"/>
+                <a:ea typeface="DejaVu Sans"/>
+                <a:cs typeface="DejaVu Sans"/>
+              </a:defRPr>
+            </a:pPr>
+            <a:r>
+              <a:rPr sz="2100" b="1">
+                <a:solidFill>
+                  <a:srgbClr val="167655"/>
+                </a:solidFill>
+                <a:latin typeface="DejaVu Sans"/>
+                <a:ea typeface="DejaVu Sans"/>
+                <a:cs typeface="DejaVu Sans"/>
+              </a:rPr>
+              <a:t>3. Após reconectar</a:t>
+            </a:r>
+          </a:p>
+        </p:txBody>
+      </p:sp>
+      <p:sp>
+        <p:nvSpPr>
+          <p:cNvPr id="14" name="">
+            <a:extLst xmlns:a="http://schemas.openxmlformats.org/drawingml/2006/main">
+              <a:ext uri="{FF2B5EF4-FFF2-40B4-BE49-F238E27FC236}">
+                <a16:creationId xmlns:a16="http://schemas.microsoft.com/office/drawing/2014/main" id="{684FDB9A-3552-48AE-B6A7-B1C5CA528A0F}"/>
+              </a:ext>
+            </a:extLst>
+          </p:cNvPr>
+          <p:cNvSpPr>
+            <a:spLocks xmlns:a="http://schemas.openxmlformats.org/drawingml/2006/main" noGrp="1"/>
+          </p:cNvSpPr>
+          <p:nvPr/>
+        </p:nvSpPr>
+        <p:spPr>
+          <a:xfrm xmlns:a="http://schemas.openxmlformats.org/drawingml/2006/main">
+            <a:off x="8153400" y="2686050"/>
+            <a:ext cx="3333750" cy="704850"/>
+          </a:xfrm>
+          <a:prstGeom xmlns:a="http://schemas.openxmlformats.org/drawingml/2006/main" prst="rect">
+            <a:avLst/>
+          </a:prstGeom>
+          <a:noFill xmlns:a="http://schemas.openxmlformats.org/drawingml/2006/main"/>
+          <a:ln xmlns:a="http://schemas.openxmlformats.org/drawingml/2006/main" w="0">
+            <a:noFill/>
+          </a:ln>
+        </p:spPr>
+        <p:txBody>
+          <a:bodyPr xmlns:a="http://schemas.openxmlformats.org/drawingml/2006/main" lIns="0" tIns="0" rIns="0" bIns="0"/>
+          <a:lstStyle xmlns:a="http://schemas.openxmlformats.org/drawingml/2006/main">
+            <a:defPPr>
+              <a:defRPr sz="1725" b="0">
+                <a:solidFill>
+                  <a:srgbClr val="183B30"/>
+                </a:solidFill>
+                <a:latin typeface="DejaVu Sans"/>
+                <a:ea typeface="DejaVu Sans"/>
+                <a:cs typeface="DejaVu Sans"/>
+              </a:defRPr>
+            </a:defPPr>
+            <a:lvl1pPr>
+              <a:defRPr sz="1725" b="0">
+                <a:solidFill>
+                  <a:srgbClr val="183B30"/>
+                </a:solidFill>
+                <a:latin typeface="DejaVu Sans"/>
+                <a:ea typeface="DejaVu Sans"/>
+                <a:cs typeface="DejaVu Sans"/>
+              </a:defRPr>
+            </a:lvl1pPr>
+            <a:lvl2pPr>
+              <a:defRPr sz="1725" b="0">
+                <a:solidFill>
+                  <a:srgbClr val="183B30"/>
+                </a:solidFill>
+                <a:latin typeface="DejaVu Sans"/>
+                <a:ea typeface="DejaVu Sans"/>
+                <a:cs typeface="DejaVu Sans"/>
+              </a:defRPr>
+            </a:lvl2pPr>
+            <a:lvl3pPr>
+              <a:defRPr sz="1725" b="0">
+                <a:solidFill>
+                  <a:srgbClr val="183B30"/>
+                </a:solidFill>
+                <a:latin typeface="DejaVu Sans"/>
+                <a:ea typeface="DejaVu Sans"/>
+                <a:cs typeface="DejaVu Sans"/>
+              </a:defRPr>
+            </a:lvl3pPr>
+            <a:lvl4pPr>
+              <a:defRPr sz="1725" b="0">
+                <a:solidFill>
+                  <a:srgbClr val="183B30"/>
+                </a:solidFill>
+                <a:latin typeface="DejaVu Sans"/>
+                <a:ea typeface="DejaVu Sans"/>
+                <a:cs typeface="DejaVu Sans"/>
+              </a:defRPr>
+            </a:lvl4pPr>
+            <a:lvl5pPr>
+              <a:defRPr sz="1725" b="0">
+                <a:solidFill>
+                  <a:srgbClr val="183B30"/>
+                </a:solidFill>
+                <a:latin typeface="DejaVu Sans"/>
+                <a:ea typeface="DejaVu Sans"/>
+                <a:cs typeface="DejaVu Sans"/>
+              </a:defRPr>
+            </a:lvl5pPr>
+            <a:lvl6pPr>
+              <a:defRPr sz="1725" b="0">
+                <a:solidFill>
+                  <a:srgbClr val="183B30"/>
+                </a:solidFill>
+                <a:latin typeface="DejaVu Sans"/>
+                <a:ea typeface="DejaVu Sans"/>
+                <a:cs typeface="DejaVu Sans"/>
+              </a:defRPr>
+            </a:lvl6pPr>
+            <a:lvl7pPr>
+              <a:defRPr sz="1725" b="0">
+                <a:solidFill>
+                  <a:srgbClr val="183B30"/>
+                </a:solidFill>
+                <a:latin typeface="DejaVu Sans"/>
+                <a:ea typeface="DejaVu Sans"/>
+                <a:cs typeface="DejaVu Sans"/>
+              </a:defRPr>
+            </a:lvl7pPr>
+            <a:lvl8pPr>
+              <a:defRPr sz="1725" b="0">
+                <a:solidFill>
+                  <a:srgbClr val="183B30"/>
+                </a:solidFill>
+                <a:latin typeface="DejaVu Sans"/>
+                <a:ea typeface="DejaVu Sans"/>
+                <a:cs typeface="DejaVu Sans"/>
+              </a:defRPr>
+            </a:lvl8pPr>
+            <a:lvl9pPr>
+              <a:defRPr sz="1725" b="0">
+                <a:solidFill>
+                  <a:srgbClr val="183B30"/>
+                </a:solidFill>
+                <a:latin typeface="DejaVu Sans"/>
+                <a:ea typeface="DejaVu Sans"/>
+                <a:cs typeface="DejaVu Sans"/>
+              </a:defRPr>
+            </a:lvl9pPr>
+          </a:lstStyle>
+          <a:p xmlns:a="http://schemas.openxmlformats.org/drawingml/2006/main">
+            <a:pPr>
+              <a:defRPr sz="1725" b="0">
+                <a:solidFill>
+                  <a:srgbClr val="183B30"/>
+                </a:solidFill>
+                <a:latin typeface="DejaVu Sans"/>
+                <a:ea typeface="DejaVu Sans"/>
+                <a:cs typeface="DejaVu Sans"/>
+              </a:defRPr>
+            </a:pPr>
+            <a:r>
+              <a:rPr sz="1725" b="0">
+                <a:solidFill>
+                  <a:srgbClr val="183B30"/>
+                </a:solidFill>
+                <a:latin typeface="DejaVu Sans"/>
+                <a:ea typeface="DejaVu Sans"/>
+                <a:cs typeface="DejaVu Sans"/>
+              </a:rPr>
+              <a:t>Fog reenvia em lotes.</a:t>
+            </a:r>
+          </a:p>
+          <a:p xmlns:a="http://schemas.openxmlformats.org/drawingml/2006/main">
+            <a:pPr>
+              <a:defRPr sz="1725" b="0">
+                <a:solidFill>
+                  <a:srgbClr val="183B30"/>
+                </a:solidFill>
+                <a:latin typeface="DejaVu Sans"/>
+                <a:ea typeface="DejaVu Sans"/>
+                <a:cs typeface="DejaVu Sans"/>
+              </a:defRPr>
+            </a:pPr>
+            <a:r>
+              <a:rPr sz="1725" b="0">
+                <a:solidFill>
+                  <a:srgbClr val="183B30"/>
+                </a:solidFill>
+                <a:latin typeface="DejaVu Sans"/>
+                <a:ea typeface="DejaVu Sans"/>
+                <a:cs typeface="DejaVu Sans"/>
+              </a:rPr>
+              <a:t>Nuvem confirma os IDs.</a:t>
+            </a:r>
+          </a:p>
+        </p:txBody>
+      </p:sp>
+      <p:sp>
+        <p:nvSpPr>
+          <p:cNvPr id="15" name="">
+            <a:extLst xmlns:a="http://schemas.openxmlformats.org/drawingml/2006/main">
+              <a:ext uri="{FF2B5EF4-FFF2-40B4-BE49-F238E27FC236}">
+                <a16:creationId xmlns:a16="http://schemas.microsoft.com/office/drawing/2014/main" id="{8F4F4EE7-CEEE-4842-A665-F3F99DD005BE}"/>
+              </a:ext>
+            </a:extLst>
+          </p:cNvPr>
+          <p:cNvSpPr>
+            <a:spLocks xmlns:a="http://schemas.openxmlformats.org/drawingml/2006/main" noGrp="1"/>
+          </p:cNvSpPr>
+          <p:nvPr/>
+        </p:nvSpPr>
+        <p:spPr>
+          <a:xfrm xmlns:a="http://schemas.openxmlformats.org/drawingml/2006/main">
+            <a:off x="609600" y="5591175"/>
+            <a:ext cx="10953750" cy="285750"/>
+          </a:xfrm>
+          <a:prstGeom xmlns:a="http://schemas.openxmlformats.org/drawingml/2006/main" prst="rect">
+            <a:avLst/>
+          </a:prstGeom>
+          <a:noFill xmlns:a="http://schemas.openxmlformats.org/drawingml/2006/main"/>
+          <a:ln xmlns:a="http://schemas.openxmlformats.org/drawingml/2006/main" w="0">
+            <a:noFill/>
+          </a:ln>
+        </p:spPr>
+        <p:txBody>
+          <a:bodyPr xmlns:a="http://schemas.openxmlformats.org/drawingml/2006/main" lIns="0" tIns="0" rIns="0" bIns="0"/>
+          <a:lstStyle xmlns:a="http://schemas.openxmlformats.org/drawingml/2006/main">
+            <a:defPPr>
+              <a:defRPr sz="1425" b="0">
+                <a:solidFill>
+                  <a:srgbClr val="5F736B"/>
+                </a:solidFill>
+                <a:latin typeface="DejaVu Sans"/>
+                <a:ea typeface="DejaVu Sans"/>
+                <a:cs typeface="DejaVu Sans"/>
+              </a:defRPr>
+            </a:defPPr>
+            <a:lvl1pPr>
+              <a:defRPr sz="1425" b="0">
+                <a:solidFill>
+                  <a:srgbClr val="5F736B"/>
+                </a:solidFill>
+                <a:latin typeface="DejaVu Sans"/>
+                <a:ea typeface="DejaVu Sans"/>
+                <a:cs typeface="DejaVu Sans"/>
+              </a:defRPr>
+            </a:lvl1pPr>
+            <a:lvl2pPr>
+              <a:defRPr sz="1425" b="0">
+                <a:solidFill>
+                  <a:srgbClr val="5F736B"/>
+                </a:solidFill>
+                <a:latin typeface="DejaVu Sans"/>
+                <a:ea typeface="DejaVu Sans"/>
+                <a:cs typeface="DejaVu Sans"/>
+              </a:defRPr>
+            </a:lvl2pPr>
+            <a:lvl3pPr>
+              <a:defRPr sz="1425" b="0">
+                <a:solidFill>
+                  <a:srgbClr val="5F736B"/>
+                </a:solidFill>
+                <a:latin typeface="DejaVu Sans"/>
+                <a:ea typeface="DejaVu Sans"/>
+                <a:cs typeface="DejaVu Sans"/>
+              </a:defRPr>
+            </a:lvl3pPr>
+            <a:lvl4pPr>
+              <a:defRPr sz="1425" b="0">
+                <a:solidFill>
+                  <a:srgbClr val="5F736B"/>
+                </a:solidFill>
+                <a:latin typeface="DejaVu Sans"/>
+                <a:ea typeface="DejaVu Sans"/>
+                <a:cs typeface="DejaVu Sans"/>
+              </a:defRPr>
+            </a:lvl4pPr>
+            <a:lvl5pPr>
+              <a:defRPr sz="1425" b="0">
+                <a:solidFill>
+                  <a:srgbClr val="5F736B"/>
+                </a:solidFill>
+                <a:latin typeface="DejaVu Sans"/>
+                <a:ea typeface="DejaVu Sans"/>
+                <a:cs typeface="DejaVu Sans"/>
+              </a:defRPr>
+            </a:lvl5pPr>
+            <a:lvl6pPr>
+              <a:defRPr sz="1425" b="0">
+                <a:solidFill>
+                  <a:srgbClr val="5F736B"/>
+                </a:solidFill>
+                <a:latin typeface="DejaVu Sans"/>
+                <a:ea typeface="DejaVu Sans"/>
+                <a:cs typeface="DejaVu Sans"/>
+              </a:defRPr>
+            </a:lvl6pPr>
+            <a:lvl7pPr>
+              <a:defRPr sz="1425" b="0">
+                <a:solidFill>
+                  <a:srgbClr val="5F736B"/>
+                </a:solidFill>
+                <a:latin typeface="DejaVu Sans"/>
+                <a:ea typeface="DejaVu Sans"/>
+                <a:cs typeface="DejaVu Sans"/>
+              </a:defRPr>
+            </a:lvl7pPr>
+            <a:lvl8pPr>
+              <a:defRPr sz="1425" b="0">
+                <a:solidFill>
+                  <a:srgbClr val="5F736B"/>
+                </a:solidFill>
+                <a:latin typeface="DejaVu Sans"/>
+                <a:ea typeface="DejaVu Sans"/>
+                <a:cs typeface="DejaVu Sans"/>
+              </a:defRPr>
+            </a:lvl8pPr>
+            <a:lvl9pPr>
+              <a:defRPr sz="1425" b="0">
+                <a:solidFill>
+                  <a:srgbClr val="5F736B"/>
+                </a:solidFill>
+                <a:latin typeface="DejaVu Sans"/>
+                <a:ea typeface="DejaVu Sans"/>
+                <a:cs typeface="DejaVu Sans"/>
+              </a:defRPr>
+            </a:lvl9pPr>
+          </a:lstStyle>
+          <a:p xmlns:a="http://schemas.openxmlformats.org/drawingml/2006/main">
+            <a:pPr>
+              <a:defRPr sz="1425" b="0">
+                <a:solidFill>
+                  <a:srgbClr val="5F736B"/>
+                </a:solidFill>
+                <a:latin typeface="DejaVu Sans"/>
+                <a:ea typeface="DejaVu Sans"/>
+                <a:cs typeface="DejaVu Sans"/>
+              </a:defRPr>
+            </a:pPr>
+            <a:r>
+              <a:rPr sz="1425" b="0">
+                <a:solidFill>
+                  <a:srgbClr val="5F736B"/>
+                </a:solidFill>
+                <a:latin typeface="DejaVu Sans"/>
+                <a:ea typeface="DejaVu Sans"/>
+                <a:cs typeface="DejaVu Sans"/>
+              </a:rPr>
+              <a:t>Teste local: quantidade de leituras pendentes. s = segundos reais.</a:t>
+            </a:r>
+          </a:p>
+        </p:txBody>
+      </p:sp>
+      <p:sp>
+        <p:nvSpPr>
+          <p:cNvPr id="16" name="">
+            <a:extLst xmlns:a="http://schemas.openxmlformats.org/drawingml/2006/main">
+              <a:ext uri="{FF2B5EF4-FFF2-40B4-BE49-F238E27FC236}">
+                <a16:creationId xmlns:a16="http://schemas.microsoft.com/office/drawing/2014/main" id="{32A8BD26-49E4-434B-A072-ADCB2F9EA0EE}"/>
+              </a:ext>
+            </a:extLst>
+          </p:cNvPr>
+          <p:cNvSpPr>
+            <a:spLocks xmlns:a="http://schemas.openxmlformats.org/drawingml/2006/main" noGrp="1"/>
+          </p:cNvSpPr>
+          <p:nvPr/>
+        </p:nvSpPr>
+        <p:spPr>
+          <a:xfrm xmlns:a="http://schemas.openxmlformats.org/drawingml/2006/main">
+            <a:off x="609600" y="5905500"/>
+            <a:ext cx="10953750" cy="523875"/>
+          </a:xfrm>
+          <a:prstGeom xmlns:a="http://schemas.openxmlformats.org/drawingml/2006/main" prst="rect">
+            <a:avLst/>
+          </a:prstGeom>
+          <a:noFill xmlns:a="http://schemas.openxmlformats.org/drawingml/2006/main"/>
+          <a:ln xmlns:a="http://schemas.openxmlformats.org/drawingml/2006/main" w="0">
+            <a:noFill/>
+          </a:ln>
+        </p:spPr>
+        <p:txBody>
+          <a:bodyPr xmlns:a="http://schemas.openxmlformats.org/drawingml/2006/main" lIns="0" tIns="0" rIns="0" bIns="0"/>
+          <a:lstStyle xmlns:a="http://schemas.openxmlformats.org/drawingml/2006/main">
+            <a:defPPr>
+              <a:defRPr sz="1725" b="1">
+                <a:solidFill>
+                  <a:srgbClr val="183B30"/>
+                </a:solidFill>
+                <a:latin typeface="DejaVu Sans"/>
+                <a:ea typeface="DejaVu Sans"/>
+                <a:cs typeface="DejaVu Sans"/>
+              </a:defRPr>
+            </a:defPPr>
+            <a:lvl1pPr>
+              <a:defRPr sz="1725" b="1">
+                <a:solidFill>
+                  <a:srgbClr val="183B30"/>
+                </a:solidFill>
+                <a:latin typeface="DejaVu Sans"/>
+                <a:ea typeface="DejaVu Sans"/>
+                <a:cs typeface="DejaVu Sans"/>
+              </a:defRPr>
+            </a:lvl1pPr>
+            <a:lvl2pPr>
+              <a:defRPr sz="1725" b="1">
+                <a:solidFill>
+                  <a:srgbClr val="183B30"/>
+                </a:solidFill>
+                <a:latin typeface="DejaVu Sans"/>
+                <a:ea typeface="DejaVu Sans"/>
+                <a:cs typeface="DejaVu Sans"/>
+              </a:defRPr>
+            </a:lvl2pPr>
+            <a:lvl3pPr>
+              <a:defRPr sz="1725" b="1">
+                <a:solidFill>
+                  <a:srgbClr val="183B30"/>
+                </a:solidFill>
+                <a:latin typeface="DejaVu Sans"/>
+                <a:ea typeface="DejaVu Sans"/>
+                <a:cs typeface="DejaVu Sans"/>
+              </a:defRPr>
+            </a:lvl3pPr>
+            <a:lvl4pPr>
+              <a:defRPr sz="1725" b="1">
+                <a:solidFill>
+                  <a:srgbClr val="183B30"/>
+                </a:solidFill>
+                <a:latin typeface="DejaVu Sans"/>
+                <a:ea typeface="DejaVu Sans"/>
+                <a:cs typeface="DejaVu Sans"/>
+              </a:defRPr>
+            </a:lvl4pPr>
+            <a:lvl5pPr>
+              <a:defRPr sz="1725" b="1">
+                <a:solidFill>
+                  <a:srgbClr val="183B30"/>
+                </a:solidFill>
+                <a:latin typeface="DejaVu Sans"/>
+                <a:ea typeface="DejaVu Sans"/>
+                <a:cs typeface="DejaVu Sans"/>
+              </a:defRPr>
+            </a:lvl5pPr>
+            <a:lvl6pPr>
+              <a:defRPr sz="1725" b="1">
+                <a:solidFill>
+                  <a:srgbClr val="183B30"/>
+                </a:solidFill>
+                <a:latin typeface="DejaVu Sans"/>
+                <a:ea typeface="DejaVu Sans"/>
+                <a:cs typeface="DejaVu Sans"/>
+              </a:defRPr>
+            </a:lvl6pPr>
+            <a:lvl7pPr>
+              <a:defRPr sz="1725" b="1">
+                <a:solidFill>
+                  <a:srgbClr val="183B30"/>
+                </a:solidFill>
+                <a:latin typeface="DejaVu Sans"/>
+                <a:ea typeface="DejaVu Sans"/>
+                <a:cs typeface="DejaVu Sans"/>
+              </a:defRPr>
+            </a:lvl7pPr>
+            <a:lvl8pPr>
+              <a:defRPr sz="1725" b="1">
+                <a:solidFill>
+                  <a:srgbClr val="183B30"/>
+                </a:solidFill>
+                <a:latin typeface="DejaVu Sans"/>
+                <a:ea typeface="DejaVu Sans"/>
+                <a:cs typeface="DejaVu Sans"/>
+              </a:defRPr>
+            </a:lvl8pPr>
+            <a:lvl9pPr>
+              <a:defRPr sz="1725" b="1">
+                <a:solidFill>
+                  <a:srgbClr val="183B30"/>
+                </a:solidFill>
+                <a:latin typeface="DejaVu Sans"/>
+                <a:ea typeface="DejaVu Sans"/>
+                <a:cs typeface="DejaVu Sans"/>
+              </a:defRPr>
+            </a:lvl9pPr>
+          </a:lstStyle>
+          <a:p xmlns:a="http://schemas.openxmlformats.org/drawingml/2006/main">
+            <a:pPr>
+              <a:defRPr sz="1725" b="1">
+                <a:solidFill>
+                  <a:srgbClr val="183B30"/>
+                </a:solidFill>
+                <a:latin typeface="DejaVu Sans"/>
+                <a:ea typeface="DejaVu Sans"/>
+                <a:cs typeface="DejaVu Sans"/>
+              </a:defRPr>
+            </a:pPr>
+            <a:r>
+              <a:rPr sz="1725" b="1">
+                <a:solidFill>
+                  <a:srgbClr val="183B30"/>
+                </a:solidFill>
+                <a:latin typeface="DejaVu Sans"/>
+                <a:ea typeface="DejaVu Sans"/>
+                <a:cs typeface="DejaVu Sans"/>
+              </a:rPr>
+              <a:t>Fila = leituras aguardando envio. Lote = grupo de leituras enviado junto.</a:t>
+            </a:r>
+          </a:p>
+          <a:p xmlns:a="http://schemas.openxmlformats.org/drawingml/2006/main">
+            <a:pPr>
+              <a:defRPr sz="1725" b="1">
+                <a:solidFill>
+                  <a:srgbClr val="183B30"/>
+                </a:solidFill>
+                <a:latin typeface="DejaVu Sans"/>
+                <a:ea typeface="DejaVu Sans"/>
+                <a:cs typeface="DejaVu Sans"/>
+              </a:defRPr>
+            </a:pPr>
+            <a:r>
+              <a:rPr sz="1725" b="1">
+                <a:solidFill>
+                  <a:srgbClr val="183B30"/>
+                </a:solidFill>
+                <a:latin typeface="DejaVu Sans"/>
+                <a:ea typeface="DejaVu Sans"/>
+                <a:cs typeface="DejaVu Sans"/>
+              </a:rPr>
+              <a:t>Atraso no histórico remoto não comprova perda de dados.</a:t>
             </a:r>
           </a:p>
         </p:txBody>
@@ -14367,7 +16626,7 @@
           <p:cNvPr id="5" name="Chart">
             <a:extLst xmlns:a="http://schemas.openxmlformats.org/drawingml/2006/main">
               <a:ext uri="{FF2B5EF4-FFF2-40B4-BE49-F238E27FC236}">
-                <a16:creationId xmlns:a16="http://schemas.microsoft.com/office/drawing/2014/main" id="{6FEFCA01-DFEE-41AA-9D12-66A6FE505C24}"/>
+                <a16:creationId xmlns:a16="http://schemas.microsoft.com/office/drawing/2014/main" id="{3923F7FF-8472-4B08-B931-5A694521DD5B}"/>
               </a:ext>
             </a:extLst>
           </p:cNvPr>
@@ -14380,7 +16639,7 @@
         </p:xfrm>
         <a:graphic xmlns:a="http://schemas.openxmlformats.org/drawingml/2006/main">
           <a:graphicData uri="http://schemas.openxmlformats.org/drawingml/2006/chart">
-            <c:chart xmlns:r="http://schemas.openxmlformats.org/officeDocument/2006/relationships" xmlns:c="http://schemas.openxmlformats.org/drawingml/2006/chart" r:id="R396e9cc7b4f94870"/>
+            <c:chart xmlns:r="http://schemas.openxmlformats.org/officeDocument/2006/relationships" xmlns:c="http://schemas.openxmlformats.org/drawingml/2006/chart" r:id="Rab29a5adf6cf49bd"/>
           </a:graphicData>
         </a:graphic>
       </p:graphicFrame>
@@ -14933,7 +17192,7 @@
                 <a:ea typeface="DejaVu Sans"/>
                 <a:cs typeface="DejaVu Sans"/>
               </a:rPr>
-              <a:t>Histórico na nuvem</a:t>
+              <a:t>Recuperação: ganho e atraso observado</a:t>
             </a:r>
           </a:p>
         </p:txBody>
@@ -15274,10 +17533,10 @@
       </p:sp>
       <p:sp>
         <p:nvSpPr>
-          <p:cNvPr id="5" name="">
+          <p:cNvPr id="9" name="">
             <a:extLst xmlns:a="http://schemas.openxmlformats.org/drawingml/2006/main">
               <a:ext uri="{FF2B5EF4-FFF2-40B4-BE49-F238E27FC236}">
-                <a16:creationId xmlns:a16="http://schemas.microsoft.com/office/drawing/2014/main" id="{E1B46CC1-048A-4DB9-AFDC-67C315C09568}"/>
+                <a16:creationId xmlns:a16="http://schemas.microsoft.com/office/drawing/2014/main" id="{CD5045AD-BDF2-41DC-9E6E-4ADF2104938B}"/>
               </a:ext>
             </a:extLst>
           </p:cNvPr>
@@ -15288,8 +17547,8 @@
         </p:nvSpPr>
         <p:spPr>
           <a:xfrm xmlns:a="http://schemas.openxmlformats.org/drawingml/2006/main">
-            <a:off x="609600" y="2190750"/>
-            <a:ext cx="10382250" cy="952500"/>
+            <a:off x="609600" y="1695450"/>
+            <a:ext cx="10953750" cy="381000"/>
           </a:xfrm>
           <a:prstGeom xmlns:a="http://schemas.openxmlformats.org/drawingml/2006/main" prst="rect">
             <a:avLst/>
@@ -15297,16 +17556,15 @@
           <a:noFill xmlns:a="http://schemas.openxmlformats.org/drawingml/2006/main"/>
           <a:ln xmlns:a="http://schemas.openxmlformats.org/drawingml/2006/main" w="0">
             <a:noFill/>
-            <a:prstDash val="solid"/>
           </a:ln>
         </p:spPr>
         <p:txBody>
           <a:bodyPr xmlns:a="http://schemas.openxmlformats.org/drawingml/2006/main" lIns="0" tIns="0" rIns="0" bIns="0"/>
           <a:lstStyle xmlns:a="http://schemas.openxmlformats.org/drawingml/2006/main">
             <a:defPPr>
-              <a:defRPr sz="2475" b="1">
-                <a:solidFill>
-                  <a:srgbClr val="167655"/>
+              <a:defRPr sz="1800" b="0">
+                <a:solidFill>
+                  <a:srgbClr val="183B30"/>
                 </a:solidFill>
                 <a:latin typeface="DejaVu Sans"/>
                 <a:ea typeface="DejaVu Sans"/>
@@ -15314,10 +17572,9 @@
               </a:defRPr>
             </a:defPPr>
             <a:lvl1pPr>
-              <a:buNone/>
-              <a:defRPr sz="2475" b="1">
-                <a:solidFill>
-                  <a:srgbClr val="167655"/>
+              <a:defRPr sz="1800" b="0">
+                <a:solidFill>
+                  <a:srgbClr val="183B30"/>
                 </a:solidFill>
                 <a:latin typeface="DejaVu Sans"/>
                 <a:ea typeface="DejaVu Sans"/>
@@ -15325,10 +17582,9 @@
               </a:defRPr>
             </a:lvl1pPr>
             <a:lvl2pPr>
-              <a:buNone/>
-              <a:defRPr sz="2475" b="1">
-                <a:solidFill>
-                  <a:srgbClr val="167655"/>
+              <a:defRPr sz="1800" b="0">
+                <a:solidFill>
+                  <a:srgbClr val="183B30"/>
                 </a:solidFill>
                 <a:latin typeface="DejaVu Sans"/>
                 <a:ea typeface="DejaVu Sans"/>
@@ -15336,10 +17592,9 @@
               </a:defRPr>
             </a:lvl2pPr>
             <a:lvl3pPr>
-              <a:buNone/>
-              <a:defRPr sz="2475" b="1">
-                <a:solidFill>
-                  <a:srgbClr val="167655"/>
+              <a:defRPr sz="1800" b="0">
+                <a:solidFill>
+                  <a:srgbClr val="183B30"/>
                 </a:solidFill>
                 <a:latin typeface="DejaVu Sans"/>
                 <a:ea typeface="DejaVu Sans"/>
@@ -15347,10 +17602,9 @@
               </a:defRPr>
             </a:lvl3pPr>
             <a:lvl4pPr>
-              <a:buNone/>
-              <a:defRPr sz="2475" b="1">
-                <a:solidFill>
-                  <a:srgbClr val="167655"/>
+              <a:defRPr sz="1800" b="0">
+                <a:solidFill>
+                  <a:srgbClr val="183B30"/>
                 </a:solidFill>
                 <a:latin typeface="DejaVu Sans"/>
                 <a:ea typeface="DejaVu Sans"/>
@@ -15358,10 +17612,9 @@
               </a:defRPr>
             </a:lvl4pPr>
             <a:lvl5pPr>
-              <a:buNone/>
-              <a:defRPr sz="2475" b="1">
-                <a:solidFill>
-                  <a:srgbClr val="167655"/>
+              <a:defRPr sz="1800" b="0">
+                <a:solidFill>
+                  <a:srgbClr val="183B30"/>
                 </a:solidFill>
                 <a:latin typeface="DejaVu Sans"/>
                 <a:ea typeface="DejaVu Sans"/>
@@ -15369,10 +17622,9 @@
               </a:defRPr>
             </a:lvl5pPr>
             <a:lvl6pPr>
-              <a:buNone/>
-              <a:defRPr sz="2475" b="1">
-                <a:solidFill>
-                  <a:srgbClr val="167655"/>
+              <a:defRPr sz="1800" b="0">
+                <a:solidFill>
+                  <a:srgbClr val="183B30"/>
                 </a:solidFill>
                 <a:latin typeface="DejaVu Sans"/>
                 <a:ea typeface="DejaVu Sans"/>
@@ -15380,10 +17632,9 @@
               </a:defRPr>
             </a:lvl6pPr>
             <a:lvl7pPr>
-              <a:buNone/>
-              <a:defRPr sz="2475" b="1">
-                <a:solidFill>
-                  <a:srgbClr val="167655"/>
+              <a:defRPr sz="1800" b="0">
+                <a:solidFill>
+                  <a:srgbClr val="183B30"/>
                 </a:solidFill>
                 <a:latin typeface="DejaVu Sans"/>
                 <a:ea typeface="DejaVu Sans"/>
@@ -15391,10 +17642,9 @@
               </a:defRPr>
             </a:lvl7pPr>
             <a:lvl8pPr>
-              <a:buNone/>
-              <a:defRPr sz="2475" b="1">
-                <a:solidFill>
-                  <a:srgbClr val="167655"/>
+              <a:defRPr sz="1800" b="0">
+                <a:solidFill>
+                  <a:srgbClr val="183B30"/>
                 </a:solidFill>
                 <a:latin typeface="DejaVu Sans"/>
                 <a:ea typeface="DejaVu Sans"/>
@@ -15402,10 +17652,9 @@
               </a:defRPr>
             </a:lvl8pPr>
             <a:lvl9pPr>
-              <a:buNone/>
-              <a:defRPr sz="2475" b="1">
-                <a:solidFill>
-                  <a:srgbClr val="167655"/>
+              <a:defRPr sz="1800" b="0">
+                <a:solidFill>
+                  <a:srgbClr val="183B30"/>
                 </a:solidFill>
                 <a:latin typeface="DejaVu Sans"/>
                 <a:ea typeface="DejaVu Sans"/>
@@ -15415,10 +17664,9 @@
           </a:lstStyle>
           <a:p xmlns:a="http://schemas.openxmlformats.org/drawingml/2006/main">
             <a:pPr>
-              <a:buNone/>
-              <a:defRPr sz="2475" b="1">
-                <a:solidFill>
-                  <a:srgbClr val="167655"/>
+              <a:defRPr sz="1800" b="0">
+                <a:solidFill>
+                  <a:srgbClr val="183B30"/>
                 </a:solidFill>
                 <a:latin typeface="DejaVu Sans"/>
                 <a:ea typeface="DejaVu Sans"/>
@@ -15426,25 +17674,47 @@
               </a:defRPr>
             </a:pPr>
             <a:r>
-              <a:rPr sz="2475" b="1">
-                <a:solidFill>
-                  <a:srgbClr val="167655"/>
+              <a:rPr sz="1800" b="0">
+                <a:solidFill>
+                  <a:srgbClr val="183B30"/>
                 </a:solidFill>
                 <a:latin typeface="DejaVu Sans"/>
                 <a:ea typeface="DejaVu Sans"/>
                 <a:cs typeface="DejaVu Sans"/>
               </a:rPr>
-              <a:t>Supabase = serviço que guarda os dados na internet.</a:t>
+              <a:t>Teste remoto com Supabase: ponto observado após reconectar</a:t>
             </a:r>
           </a:p>
         </p:txBody>
       </p:sp>
+      <p:graphicFrame>
+        <p:nvGraphicFramePr>
+          <p:cNvPr id="10" name="Chart">
+            <a:extLst xmlns:a="http://schemas.openxmlformats.org/drawingml/2006/main">
+              <a:ext uri="{FF2B5EF4-FFF2-40B4-BE49-F238E27FC236}">
+                <a16:creationId xmlns:a16="http://schemas.microsoft.com/office/drawing/2014/main" id="{1BDFEFD2-BD8F-4D05-A54B-B446C6DD2ED7}"/>
+              </a:ext>
+            </a:extLst>
+          </p:cNvPr>
+          <p:cNvGraphicFramePr/>
+          <p:nvPr/>
+        </p:nvGraphicFramePr>
+        <p:xfrm>
+          <a:off xmlns:a="http://schemas.openxmlformats.org/drawingml/2006/main" x="609600" y="2266950"/>
+          <a:ext xmlns:a="http://schemas.openxmlformats.org/drawingml/2006/main" cx="6858000" cy="2952750"/>
+        </p:xfrm>
+        <a:graphic xmlns:a="http://schemas.openxmlformats.org/drawingml/2006/main">
+          <a:graphicData uri="http://schemas.openxmlformats.org/drawingml/2006/chart">
+            <c:chart xmlns:r="http://schemas.openxmlformats.org/officeDocument/2006/relationships" xmlns:c="http://schemas.openxmlformats.org/drawingml/2006/chart" r:id="Re7baa6cc1ee34dab"/>
+          </a:graphicData>
+        </a:graphic>
+      </p:graphicFrame>
       <p:sp>
         <p:nvSpPr>
-          <p:cNvPr id="6" name="">
+          <p:cNvPr id="11" name="">
             <a:extLst xmlns:a="http://schemas.openxmlformats.org/drawingml/2006/main">
               <a:ext uri="{FF2B5EF4-FFF2-40B4-BE49-F238E27FC236}">
-                <a16:creationId xmlns:a16="http://schemas.microsoft.com/office/drawing/2014/main" id="{CF519A31-D713-4F2D-AF56-0B597A1760EB}"/>
+                <a16:creationId xmlns:a16="http://schemas.microsoft.com/office/drawing/2014/main" id="{BDB4E5E5-4EFD-46F7-A5A9-3DE3EA937D71}"/>
               </a:ext>
             </a:extLst>
           </p:cNvPr>
@@ -15455,8 +17725,8 @@
         </p:nvSpPr>
         <p:spPr>
           <a:xfrm xmlns:a="http://schemas.openxmlformats.org/drawingml/2006/main">
-            <a:off x="609600" y="3286125"/>
-            <a:ext cx="10477500" cy="1905000"/>
+            <a:off x="8096250" y="2409825"/>
+            <a:ext cx="3333750" cy="342900"/>
           </a:xfrm>
           <a:prstGeom xmlns:a="http://schemas.openxmlformats.org/drawingml/2006/main" prst="rect">
             <a:avLst/>
@@ -15464,7 +17734,162 @@
           <a:noFill xmlns:a="http://schemas.openxmlformats.org/drawingml/2006/main"/>
           <a:ln xmlns:a="http://schemas.openxmlformats.org/drawingml/2006/main" w="0">
             <a:noFill/>
-            <a:prstDash val="solid"/>
+          </a:ln>
+        </p:spPr>
+        <p:txBody>
+          <a:bodyPr xmlns:a="http://schemas.openxmlformats.org/drawingml/2006/main" lIns="0" tIns="0" rIns="0" bIns="0"/>
+          <a:lstStyle xmlns:a="http://schemas.openxmlformats.org/drawingml/2006/main">
+            <a:defPPr>
+              <a:defRPr sz="1800" b="1">
+                <a:solidFill>
+                  <a:srgbClr val="167655"/>
+                </a:solidFill>
+                <a:latin typeface="DejaVu Sans"/>
+                <a:ea typeface="DejaVu Sans"/>
+                <a:cs typeface="DejaVu Sans"/>
+              </a:defRPr>
+            </a:defPPr>
+            <a:lvl1pPr>
+              <a:defRPr sz="1800" b="1">
+                <a:solidFill>
+                  <a:srgbClr val="167655"/>
+                </a:solidFill>
+                <a:latin typeface="DejaVu Sans"/>
+                <a:ea typeface="DejaVu Sans"/>
+                <a:cs typeface="DejaVu Sans"/>
+              </a:defRPr>
+            </a:lvl1pPr>
+            <a:lvl2pPr>
+              <a:defRPr sz="1800" b="1">
+                <a:solidFill>
+                  <a:srgbClr val="167655"/>
+                </a:solidFill>
+                <a:latin typeface="DejaVu Sans"/>
+                <a:ea typeface="DejaVu Sans"/>
+                <a:cs typeface="DejaVu Sans"/>
+              </a:defRPr>
+            </a:lvl2pPr>
+            <a:lvl3pPr>
+              <a:defRPr sz="1800" b="1">
+                <a:solidFill>
+                  <a:srgbClr val="167655"/>
+                </a:solidFill>
+                <a:latin typeface="DejaVu Sans"/>
+                <a:ea typeface="DejaVu Sans"/>
+                <a:cs typeface="DejaVu Sans"/>
+              </a:defRPr>
+            </a:lvl3pPr>
+            <a:lvl4pPr>
+              <a:defRPr sz="1800" b="1">
+                <a:solidFill>
+                  <a:srgbClr val="167655"/>
+                </a:solidFill>
+                <a:latin typeface="DejaVu Sans"/>
+                <a:ea typeface="DejaVu Sans"/>
+                <a:cs typeface="DejaVu Sans"/>
+              </a:defRPr>
+            </a:lvl4pPr>
+            <a:lvl5pPr>
+              <a:defRPr sz="1800" b="1">
+                <a:solidFill>
+                  <a:srgbClr val="167655"/>
+                </a:solidFill>
+                <a:latin typeface="DejaVu Sans"/>
+                <a:ea typeface="DejaVu Sans"/>
+                <a:cs typeface="DejaVu Sans"/>
+              </a:defRPr>
+            </a:lvl5pPr>
+            <a:lvl6pPr>
+              <a:defRPr sz="1800" b="1">
+                <a:solidFill>
+                  <a:srgbClr val="167655"/>
+                </a:solidFill>
+                <a:latin typeface="DejaVu Sans"/>
+                <a:ea typeface="DejaVu Sans"/>
+                <a:cs typeface="DejaVu Sans"/>
+              </a:defRPr>
+            </a:lvl6pPr>
+            <a:lvl7pPr>
+              <a:defRPr sz="1800" b="1">
+                <a:solidFill>
+                  <a:srgbClr val="167655"/>
+                </a:solidFill>
+                <a:latin typeface="DejaVu Sans"/>
+                <a:ea typeface="DejaVu Sans"/>
+                <a:cs typeface="DejaVu Sans"/>
+              </a:defRPr>
+            </a:lvl7pPr>
+            <a:lvl8pPr>
+              <a:defRPr sz="1800" b="1">
+                <a:solidFill>
+                  <a:srgbClr val="167655"/>
+                </a:solidFill>
+                <a:latin typeface="DejaVu Sans"/>
+                <a:ea typeface="DejaVu Sans"/>
+                <a:cs typeface="DejaVu Sans"/>
+              </a:defRPr>
+            </a:lvl8pPr>
+            <a:lvl9pPr>
+              <a:defRPr sz="1800" b="1">
+                <a:solidFill>
+                  <a:srgbClr val="167655"/>
+                </a:solidFill>
+                <a:latin typeface="DejaVu Sans"/>
+                <a:ea typeface="DejaVu Sans"/>
+                <a:cs typeface="DejaVu Sans"/>
+              </a:defRPr>
+            </a:lvl9pPr>
+          </a:lstStyle>
+          <a:p xmlns:a="http://schemas.openxmlformats.org/drawingml/2006/main">
+            <a:pPr>
+              <a:defRPr sz="1800" b="1">
+                <a:solidFill>
+                  <a:srgbClr val="167655"/>
+                </a:solidFill>
+                <a:latin typeface="DejaVu Sans"/>
+                <a:ea typeface="DejaVu Sans"/>
+                <a:cs typeface="DejaVu Sans"/>
+              </a:defRPr>
+            </a:pPr>
+            <a:r>
+              <a:rPr sz="1800" b="1">
+                <a:solidFill>
+                  <a:srgbClr val="167655"/>
+                </a:solidFill>
+                <a:latin typeface="DejaVu Sans"/>
+                <a:ea typeface="DejaVu Sans"/>
+                <a:cs typeface="DejaVu Sans"/>
+              </a:rPr>
+              <a:t>GANHO</a:t>
+            </a:r>
+          </a:p>
+        </p:txBody>
+      </p:sp>
+      <p:sp>
+        <p:nvSpPr>
+          <p:cNvPr id="12" name="">
+            <a:extLst xmlns:a="http://schemas.openxmlformats.org/drawingml/2006/main">
+              <a:ext uri="{FF2B5EF4-FFF2-40B4-BE49-F238E27FC236}">
+                <a16:creationId xmlns:a16="http://schemas.microsoft.com/office/drawing/2014/main" id="{E065C797-5557-495A-9964-9DF6DEC69477}"/>
+              </a:ext>
+            </a:extLst>
+          </p:cNvPr>
+          <p:cNvSpPr>
+            <a:spLocks xmlns:a="http://schemas.openxmlformats.org/drawingml/2006/main" noGrp="1"/>
+          </p:cNvSpPr>
+          <p:nvPr/>
+        </p:nvSpPr>
+        <p:spPr>
+          <a:xfrm xmlns:a="http://schemas.openxmlformats.org/drawingml/2006/main">
+            <a:off x="8096250" y="2867025"/>
+            <a:ext cx="3333750" cy="742950"/>
+          </a:xfrm>
+          <a:prstGeom xmlns:a="http://schemas.openxmlformats.org/drawingml/2006/main" prst="rect">
+            <a:avLst/>
+          </a:prstGeom>
+          <a:noFill xmlns:a="http://schemas.openxmlformats.org/drawingml/2006/main"/>
+          <a:ln xmlns:a="http://schemas.openxmlformats.org/drawingml/2006/main" w="0">
+            <a:noFill/>
           </a:ln>
         </p:spPr>
         <p:txBody>
@@ -15481,7 +17906,6 @@
               </a:defRPr>
             </a:defPPr>
             <a:lvl1pPr>
-              <a:buNone/>
               <a:defRPr sz="2100" b="0">
                 <a:solidFill>
                   <a:srgbClr val="183B30"/>
@@ -15492,7 +17916,6 @@
               </a:defRPr>
             </a:lvl1pPr>
             <a:lvl2pPr>
-              <a:buNone/>
               <a:defRPr sz="2100" b="0">
                 <a:solidFill>
                   <a:srgbClr val="183B30"/>
@@ -15503,7 +17926,6 @@
               </a:defRPr>
             </a:lvl2pPr>
             <a:lvl3pPr>
-              <a:buNone/>
               <a:defRPr sz="2100" b="0">
                 <a:solidFill>
                   <a:srgbClr val="183B30"/>
@@ -15514,7 +17936,6 @@
               </a:defRPr>
             </a:lvl3pPr>
             <a:lvl4pPr>
-              <a:buNone/>
               <a:defRPr sz="2100" b="0">
                 <a:solidFill>
                   <a:srgbClr val="183B30"/>
@@ -15525,7 +17946,6 @@
               </a:defRPr>
             </a:lvl4pPr>
             <a:lvl5pPr>
-              <a:buNone/>
               <a:defRPr sz="2100" b="0">
                 <a:solidFill>
                   <a:srgbClr val="183B30"/>
@@ -15536,7 +17956,6 @@
               </a:defRPr>
             </a:lvl5pPr>
             <a:lvl6pPr>
-              <a:buNone/>
               <a:defRPr sz="2100" b="0">
                 <a:solidFill>
                   <a:srgbClr val="183B30"/>
@@ -15547,7 +17966,6 @@
               </a:defRPr>
             </a:lvl6pPr>
             <a:lvl7pPr>
-              <a:buNone/>
               <a:defRPr sz="2100" b="0">
                 <a:solidFill>
                   <a:srgbClr val="183B30"/>
@@ -15558,7 +17976,6 @@
               </a:defRPr>
             </a:lvl7pPr>
             <a:lvl8pPr>
-              <a:buNone/>
               <a:defRPr sz="2100" b="0">
                 <a:solidFill>
                   <a:srgbClr val="183B30"/>
@@ -15569,7 +17986,6 @@
               </a:defRPr>
             </a:lvl8pPr>
             <a:lvl9pPr>
-              <a:buNone/>
               <a:defRPr sz="2100" b="0">
                 <a:solidFill>
                   <a:srgbClr val="183B30"/>
@@ -15582,7 +17998,6 @@
           </a:lstStyle>
           <a:p xmlns:a="http://schemas.openxmlformats.org/drawingml/2006/main">
             <a:pPr>
-              <a:buNone/>
               <a:defRPr sz="2100" b="0">
                 <a:solidFill>
                   <a:srgbClr val="183B30"/>
@@ -15601,12 +18016,11 @@
                 <a:ea typeface="DejaVu Sans"/>
                 <a:cs typeface="DejaVu Sans"/>
               </a:rPr>
-              <a:t>HTTPS = conexão protegida para enviar os dados.</a:t>
+              <a:t>128 leituras já tinham</a:t>
             </a:r>
           </a:p>
           <a:p xmlns:a="http://schemas.openxmlformats.org/drawingml/2006/main">
             <a:pPr>
-              <a:buNone/>
               <a:defRPr sz="2100" b="0">
                 <a:solidFill>
                   <a:srgbClr val="183B30"/>
@@ -15625,41 +18039,352 @@
                 <a:ea typeface="DejaVu Sans"/>
                 <a:cs typeface="DejaVu Sans"/>
               </a:rPr>
-              <a:t>Postgres = banco de dados que guarda as leituras.</a:t>
-            </a:r>
-          </a:p>
-          <a:p xmlns:a="http://schemas.openxmlformats.org/drawingml/2006/main">
-            <a:pPr>
-              <a:buNone/>
-              <a:defRPr sz="2100" b="0">
-                <a:solidFill>
-                  <a:srgbClr val="183B30"/>
-                </a:solidFill>
-                <a:latin typeface="DejaVu Sans"/>
-                <a:ea typeface="DejaVu Sans"/>
-                <a:cs typeface="DejaVu Sans"/>
-              </a:defRPr>
-            </a:pPr>
-            <a:r>
-              <a:rPr sz="2100" b="0">
-                <a:solidFill>
-                  <a:srgbClr val="183B30"/>
-                </a:solidFill>
-                <a:latin typeface="DejaVu Sans"/>
-                <a:ea typeface="DejaVu Sans"/>
-                <a:cs typeface="DejaVu Sans"/>
-              </a:rPr>
-              <a:t>O projeto usa o plano Free em São Paulo.</a:t>
+              <a:t>confirmação da nuvem.</a:t>
             </a:r>
           </a:p>
         </p:txBody>
       </p:sp>
       <p:sp>
         <p:nvSpPr>
-          <p:cNvPr id="7" name="">
+          <p:cNvPr id="13" name="">
             <a:extLst xmlns:a="http://schemas.openxmlformats.org/drawingml/2006/main">
               <a:ext uri="{FF2B5EF4-FFF2-40B4-BE49-F238E27FC236}">
-                <a16:creationId xmlns:a16="http://schemas.microsoft.com/office/drawing/2014/main" id="{D1FD044C-7E5C-40BD-8B26-611B35DCBA2D}"/>
+                <a16:creationId xmlns:a16="http://schemas.microsoft.com/office/drawing/2014/main" id="{C68A6AA1-1D81-46A2-9B3A-84C14A6E94B9}"/>
+              </a:ext>
+            </a:extLst>
+          </p:cNvPr>
+          <p:cNvSpPr>
+            <a:spLocks xmlns:a="http://schemas.openxmlformats.org/drawingml/2006/main" noGrp="1"/>
+          </p:cNvSpPr>
+          <p:nvPr/>
+        </p:nvSpPr>
+        <p:spPr>
+          <a:xfrm xmlns:a="http://schemas.openxmlformats.org/drawingml/2006/main">
+            <a:off x="8096250" y="3981450"/>
+            <a:ext cx="3333750" cy="342900"/>
+          </a:xfrm>
+          <a:prstGeom xmlns:a="http://schemas.openxmlformats.org/drawingml/2006/main" prst="rect">
+            <a:avLst/>
+          </a:prstGeom>
+          <a:noFill xmlns:a="http://schemas.openxmlformats.org/drawingml/2006/main"/>
+          <a:ln xmlns:a="http://schemas.openxmlformats.org/drawingml/2006/main" w="0">
+            <a:noFill/>
+          </a:ln>
+        </p:spPr>
+        <p:txBody>
+          <a:bodyPr xmlns:a="http://schemas.openxmlformats.org/drawingml/2006/main" lIns="0" tIns="0" rIns="0" bIns="0"/>
+          <a:lstStyle xmlns:a="http://schemas.openxmlformats.org/drawingml/2006/main">
+            <a:defPPr>
+              <a:defRPr sz="1800" b="1">
+                <a:solidFill>
+                  <a:srgbClr val="936017"/>
+                </a:solidFill>
+                <a:latin typeface="DejaVu Sans"/>
+                <a:ea typeface="DejaVu Sans"/>
+                <a:cs typeface="DejaVu Sans"/>
+              </a:defRPr>
+            </a:defPPr>
+            <a:lvl1pPr>
+              <a:defRPr sz="1800" b="1">
+                <a:solidFill>
+                  <a:srgbClr val="936017"/>
+                </a:solidFill>
+                <a:latin typeface="DejaVu Sans"/>
+                <a:ea typeface="DejaVu Sans"/>
+                <a:cs typeface="DejaVu Sans"/>
+              </a:defRPr>
+            </a:lvl1pPr>
+            <a:lvl2pPr>
+              <a:defRPr sz="1800" b="1">
+                <a:solidFill>
+                  <a:srgbClr val="936017"/>
+                </a:solidFill>
+                <a:latin typeface="DejaVu Sans"/>
+                <a:ea typeface="DejaVu Sans"/>
+                <a:cs typeface="DejaVu Sans"/>
+              </a:defRPr>
+            </a:lvl2pPr>
+            <a:lvl3pPr>
+              <a:defRPr sz="1800" b="1">
+                <a:solidFill>
+                  <a:srgbClr val="936017"/>
+                </a:solidFill>
+                <a:latin typeface="DejaVu Sans"/>
+                <a:ea typeface="DejaVu Sans"/>
+                <a:cs typeface="DejaVu Sans"/>
+              </a:defRPr>
+            </a:lvl3pPr>
+            <a:lvl4pPr>
+              <a:defRPr sz="1800" b="1">
+                <a:solidFill>
+                  <a:srgbClr val="936017"/>
+                </a:solidFill>
+                <a:latin typeface="DejaVu Sans"/>
+                <a:ea typeface="DejaVu Sans"/>
+                <a:cs typeface="DejaVu Sans"/>
+              </a:defRPr>
+            </a:lvl4pPr>
+            <a:lvl5pPr>
+              <a:defRPr sz="1800" b="1">
+                <a:solidFill>
+                  <a:srgbClr val="936017"/>
+                </a:solidFill>
+                <a:latin typeface="DejaVu Sans"/>
+                <a:ea typeface="DejaVu Sans"/>
+                <a:cs typeface="DejaVu Sans"/>
+              </a:defRPr>
+            </a:lvl5pPr>
+            <a:lvl6pPr>
+              <a:defRPr sz="1800" b="1">
+                <a:solidFill>
+                  <a:srgbClr val="936017"/>
+                </a:solidFill>
+                <a:latin typeface="DejaVu Sans"/>
+                <a:ea typeface="DejaVu Sans"/>
+                <a:cs typeface="DejaVu Sans"/>
+              </a:defRPr>
+            </a:lvl6pPr>
+            <a:lvl7pPr>
+              <a:defRPr sz="1800" b="1">
+                <a:solidFill>
+                  <a:srgbClr val="936017"/>
+                </a:solidFill>
+                <a:latin typeface="DejaVu Sans"/>
+                <a:ea typeface="DejaVu Sans"/>
+                <a:cs typeface="DejaVu Sans"/>
+              </a:defRPr>
+            </a:lvl7pPr>
+            <a:lvl8pPr>
+              <a:defRPr sz="1800" b="1">
+                <a:solidFill>
+                  <a:srgbClr val="936017"/>
+                </a:solidFill>
+                <a:latin typeface="DejaVu Sans"/>
+                <a:ea typeface="DejaVu Sans"/>
+                <a:cs typeface="DejaVu Sans"/>
+              </a:defRPr>
+            </a:lvl8pPr>
+            <a:lvl9pPr>
+              <a:defRPr sz="1800" b="1">
+                <a:solidFill>
+                  <a:srgbClr val="936017"/>
+                </a:solidFill>
+                <a:latin typeface="DejaVu Sans"/>
+                <a:ea typeface="DejaVu Sans"/>
+                <a:cs typeface="DejaVu Sans"/>
+              </a:defRPr>
+            </a:lvl9pPr>
+          </a:lstStyle>
+          <a:p xmlns:a="http://schemas.openxmlformats.org/drawingml/2006/main">
+            <a:pPr>
+              <a:defRPr sz="1800" b="1">
+                <a:solidFill>
+                  <a:srgbClr val="936017"/>
+                </a:solidFill>
+                <a:latin typeface="DejaVu Sans"/>
+                <a:ea typeface="DejaVu Sans"/>
+                <a:cs typeface="DejaVu Sans"/>
+              </a:defRPr>
+            </a:pPr>
+            <a:r>
+              <a:rPr sz="1800" b="1">
+                <a:solidFill>
+                  <a:srgbClr val="936017"/>
+                </a:solidFill>
+                <a:latin typeface="DejaVu Sans"/>
+                <a:ea typeface="DejaVu Sans"/>
+                <a:cs typeface="DejaVu Sans"/>
+              </a:rPr>
+              <a:t>ATRASO</a:t>
+            </a:r>
+          </a:p>
+        </p:txBody>
+      </p:sp>
+      <p:sp>
+        <p:nvSpPr>
+          <p:cNvPr id="14" name="">
+            <a:extLst xmlns:a="http://schemas.openxmlformats.org/drawingml/2006/main">
+              <a:ext uri="{FF2B5EF4-FFF2-40B4-BE49-F238E27FC236}">
+                <a16:creationId xmlns:a16="http://schemas.microsoft.com/office/drawing/2014/main" id="{3E9CCA8E-06B7-4F55-9D08-2123D89F6BAB}"/>
+              </a:ext>
+            </a:extLst>
+          </p:cNvPr>
+          <p:cNvSpPr>
+            <a:spLocks xmlns:a="http://schemas.openxmlformats.org/drawingml/2006/main" noGrp="1"/>
+          </p:cNvSpPr>
+          <p:nvPr/>
+        </p:nvSpPr>
+        <p:spPr>
+          <a:xfrm xmlns:a="http://schemas.openxmlformats.org/drawingml/2006/main">
+            <a:off x="8096250" y="4438650"/>
+            <a:ext cx="3333750" cy="952500"/>
+          </a:xfrm>
+          <a:prstGeom xmlns:a="http://schemas.openxmlformats.org/drawingml/2006/main" prst="rect">
+            <a:avLst/>
+          </a:prstGeom>
+          <a:noFill xmlns:a="http://schemas.openxmlformats.org/drawingml/2006/main"/>
+          <a:ln xmlns:a="http://schemas.openxmlformats.org/drawingml/2006/main" w="0">
+            <a:noFill/>
+          </a:ln>
+        </p:spPr>
+        <p:txBody>
+          <a:bodyPr xmlns:a="http://schemas.openxmlformats.org/drawingml/2006/main" lIns="0" tIns="0" rIns="0" bIns="0"/>
+          <a:lstStyle xmlns:a="http://schemas.openxmlformats.org/drawingml/2006/main">
+            <a:defPPr>
+              <a:defRPr sz="1875" b="0">
+                <a:solidFill>
+                  <a:srgbClr val="183B30"/>
+                </a:solidFill>
+                <a:latin typeface="DejaVu Sans"/>
+                <a:ea typeface="DejaVu Sans"/>
+                <a:cs typeface="DejaVu Sans"/>
+              </a:defRPr>
+            </a:defPPr>
+            <a:lvl1pPr>
+              <a:defRPr sz="1875" b="0">
+                <a:solidFill>
+                  <a:srgbClr val="183B30"/>
+                </a:solidFill>
+                <a:latin typeface="DejaVu Sans"/>
+                <a:ea typeface="DejaVu Sans"/>
+                <a:cs typeface="DejaVu Sans"/>
+              </a:defRPr>
+            </a:lvl1pPr>
+            <a:lvl2pPr>
+              <a:defRPr sz="1875" b="0">
+                <a:solidFill>
+                  <a:srgbClr val="183B30"/>
+                </a:solidFill>
+                <a:latin typeface="DejaVu Sans"/>
+                <a:ea typeface="DejaVu Sans"/>
+                <a:cs typeface="DejaVu Sans"/>
+              </a:defRPr>
+            </a:lvl2pPr>
+            <a:lvl3pPr>
+              <a:defRPr sz="1875" b="0">
+                <a:solidFill>
+                  <a:srgbClr val="183B30"/>
+                </a:solidFill>
+                <a:latin typeface="DejaVu Sans"/>
+                <a:ea typeface="DejaVu Sans"/>
+                <a:cs typeface="DejaVu Sans"/>
+              </a:defRPr>
+            </a:lvl3pPr>
+            <a:lvl4pPr>
+              <a:defRPr sz="1875" b="0">
+                <a:solidFill>
+                  <a:srgbClr val="183B30"/>
+                </a:solidFill>
+                <a:latin typeface="DejaVu Sans"/>
+                <a:ea typeface="DejaVu Sans"/>
+                <a:cs typeface="DejaVu Sans"/>
+              </a:defRPr>
+            </a:lvl4pPr>
+            <a:lvl5pPr>
+              <a:defRPr sz="1875" b="0">
+                <a:solidFill>
+                  <a:srgbClr val="183B30"/>
+                </a:solidFill>
+                <a:latin typeface="DejaVu Sans"/>
+                <a:ea typeface="DejaVu Sans"/>
+                <a:cs typeface="DejaVu Sans"/>
+              </a:defRPr>
+            </a:lvl5pPr>
+            <a:lvl6pPr>
+              <a:defRPr sz="1875" b="0">
+                <a:solidFill>
+                  <a:srgbClr val="183B30"/>
+                </a:solidFill>
+                <a:latin typeface="DejaVu Sans"/>
+                <a:ea typeface="DejaVu Sans"/>
+                <a:cs typeface="DejaVu Sans"/>
+              </a:defRPr>
+            </a:lvl6pPr>
+            <a:lvl7pPr>
+              <a:defRPr sz="1875" b="0">
+                <a:solidFill>
+                  <a:srgbClr val="183B30"/>
+                </a:solidFill>
+                <a:latin typeface="DejaVu Sans"/>
+                <a:ea typeface="DejaVu Sans"/>
+                <a:cs typeface="DejaVu Sans"/>
+              </a:defRPr>
+            </a:lvl7pPr>
+            <a:lvl8pPr>
+              <a:defRPr sz="1875" b="0">
+                <a:solidFill>
+                  <a:srgbClr val="183B30"/>
+                </a:solidFill>
+                <a:latin typeface="DejaVu Sans"/>
+                <a:ea typeface="DejaVu Sans"/>
+                <a:cs typeface="DejaVu Sans"/>
+              </a:defRPr>
+            </a:lvl8pPr>
+            <a:lvl9pPr>
+              <a:defRPr sz="1875" b="0">
+                <a:solidFill>
+                  <a:srgbClr val="183B30"/>
+                </a:solidFill>
+                <a:latin typeface="DejaVu Sans"/>
+                <a:ea typeface="DejaVu Sans"/>
+                <a:cs typeface="DejaVu Sans"/>
+              </a:defRPr>
+            </a:lvl9pPr>
+          </a:lstStyle>
+          <a:p xmlns:a="http://schemas.openxmlformats.org/drawingml/2006/main">
+            <a:pPr>
+              <a:defRPr sz="1875" b="0">
+                <a:solidFill>
+                  <a:srgbClr val="183B30"/>
+                </a:solidFill>
+                <a:latin typeface="DejaVu Sans"/>
+                <a:ea typeface="DejaVu Sans"/>
+                <a:cs typeface="DejaVu Sans"/>
+              </a:defRPr>
+            </a:pPr>
+            <a:r>
+              <a:rPr sz="1875" b="0">
+                <a:solidFill>
+                  <a:srgbClr val="183B30"/>
+                </a:solidFill>
+                <a:latin typeface="DejaVu Sans"/>
+                <a:ea typeface="DejaVu Sans"/>
+                <a:cs typeface="DejaVu Sans"/>
+              </a:rPr>
+              <a:t>32 ainda aguardavam envio.</a:t>
+            </a:r>
+          </a:p>
+          <a:p xmlns:a="http://schemas.openxmlformats.org/drawingml/2006/main">
+            <a:pPr>
+              <a:defRPr sz="1875" b="0">
+                <a:solidFill>
+                  <a:srgbClr val="183B30"/>
+                </a:solidFill>
+                <a:latin typeface="DejaVu Sans"/>
+                <a:ea typeface="DejaVu Sans"/>
+                <a:cs typeface="DejaVu Sans"/>
+              </a:defRPr>
+            </a:pPr>
+            <a:r>
+              <a:rPr sz="1875" b="0">
+                <a:solidFill>
+                  <a:srgbClr val="183B30"/>
+                </a:solidFill>
+                <a:latin typeface="DejaVu Sans"/>
+                <a:ea typeface="DejaVu Sans"/>
+                <a:cs typeface="DejaVu Sans"/>
+              </a:rPr>
+              <a:t>Pendente não significa perdido.</a:t>
+            </a:r>
+          </a:p>
+        </p:txBody>
+      </p:sp>
+      <p:sp>
+        <p:nvSpPr>
+          <p:cNvPr id="15" name="">
+            <a:extLst xmlns:a="http://schemas.openxmlformats.org/drawingml/2006/main">
+              <a:ext uri="{FF2B5EF4-FFF2-40B4-BE49-F238E27FC236}">
+                <a16:creationId xmlns:a16="http://schemas.microsoft.com/office/drawing/2014/main" id="{57E7616E-37ED-4257-B276-45A694CC2927}"/>
               </a:ext>
             </a:extLst>
           </p:cNvPr>
@@ -15671,7 +18396,7 @@
         <p:spPr>
           <a:xfrm xmlns:a="http://schemas.openxmlformats.org/drawingml/2006/main">
             <a:off x="609600" y="5619750"/>
-            <a:ext cx="10858500" cy="476250"/>
+            <a:ext cx="10953750" cy="590550"/>
           </a:xfrm>
           <a:prstGeom xmlns:a="http://schemas.openxmlformats.org/drawingml/2006/main" prst="rect">
             <a:avLst/>
@@ -15679,16 +18404,15 @@
           <a:noFill xmlns:a="http://schemas.openxmlformats.org/drawingml/2006/main"/>
           <a:ln xmlns:a="http://schemas.openxmlformats.org/drawingml/2006/main" w="0">
             <a:noFill/>
-            <a:prstDash val="solid"/>
           </a:ln>
         </p:spPr>
         <p:txBody>
           <a:bodyPr xmlns:a="http://schemas.openxmlformats.org/drawingml/2006/main" lIns="0" tIns="0" rIns="0" bIns="0"/>
           <a:lstStyle xmlns:a="http://schemas.openxmlformats.org/drawingml/2006/main">
             <a:defPPr>
-              <a:defRPr sz="1950" b="1">
-                <a:solidFill>
-                  <a:srgbClr val="167655"/>
+              <a:defRPr sz="1725" b="0">
+                <a:solidFill>
+                  <a:srgbClr val="183B30"/>
                 </a:solidFill>
                 <a:latin typeface="DejaVu Sans"/>
                 <a:ea typeface="DejaVu Sans"/>
@@ -15696,10 +18420,9 @@
               </a:defRPr>
             </a:defPPr>
             <a:lvl1pPr>
-              <a:buNone/>
-              <a:defRPr sz="1950" b="1">
-                <a:solidFill>
-                  <a:srgbClr val="167655"/>
+              <a:defRPr sz="1725" b="0">
+                <a:solidFill>
+                  <a:srgbClr val="183B30"/>
                 </a:solidFill>
                 <a:latin typeface="DejaVu Sans"/>
                 <a:ea typeface="DejaVu Sans"/>
@@ -15707,10 +18430,9 @@
               </a:defRPr>
             </a:lvl1pPr>
             <a:lvl2pPr>
-              <a:buNone/>
-              <a:defRPr sz="1950" b="1">
-                <a:solidFill>
-                  <a:srgbClr val="167655"/>
+              <a:defRPr sz="1725" b="0">
+                <a:solidFill>
+                  <a:srgbClr val="183B30"/>
                 </a:solidFill>
                 <a:latin typeface="DejaVu Sans"/>
                 <a:ea typeface="DejaVu Sans"/>
@@ -15718,10 +18440,9 @@
               </a:defRPr>
             </a:lvl2pPr>
             <a:lvl3pPr>
-              <a:buNone/>
-              <a:defRPr sz="1950" b="1">
-                <a:solidFill>
-                  <a:srgbClr val="167655"/>
+              <a:defRPr sz="1725" b="0">
+                <a:solidFill>
+                  <a:srgbClr val="183B30"/>
                 </a:solidFill>
                 <a:latin typeface="DejaVu Sans"/>
                 <a:ea typeface="DejaVu Sans"/>
@@ -15729,10 +18450,9 @@
               </a:defRPr>
             </a:lvl3pPr>
             <a:lvl4pPr>
-              <a:buNone/>
-              <a:defRPr sz="1950" b="1">
-                <a:solidFill>
-                  <a:srgbClr val="167655"/>
+              <a:defRPr sz="1725" b="0">
+                <a:solidFill>
+                  <a:srgbClr val="183B30"/>
                 </a:solidFill>
                 <a:latin typeface="DejaVu Sans"/>
                 <a:ea typeface="DejaVu Sans"/>
@@ -15740,10 +18460,9 @@
               </a:defRPr>
             </a:lvl4pPr>
             <a:lvl5pPr>
-              <a:buNone/>
-              <a:defRPr sz="1950" b="1">
-                <a:solidFill>
-                  <a:srgbClr val="167655"/>
+              <a:defRPr sz="1725" b="0">
+                <a:solidFill>
+                  <a:srgbClr val="183B30"/>
                 </a:solidFill>
                 <a:latin typeface="DejaVu Sans"/>
                 <a:ea typeface="DejaVu Sans"/>
@@ -15751,10 +18470,9 @@
               </a:defRPr>
             </a:lvl5pPr>
             <a:lvl6pPr>
-              <a:buNone/>
-              <a:defRPr sz="1950" b="1">
-                <a:solidFill>
-                  <a:srgbClr val="167655"/>
+              <a:defRPr sz="1725" b="0">
+                <a:solidFill>
+                  <a:srgbClr val="183B30"/>
                 </a:solidFill>
                 <a:latin typeface="DejaVu Sans"/>
                 <a:ea typeface="DejaVu Sans"/>
@@ -15762,10 +18480,9 @@
               </a:defRPr>
             </a:lvl6pPr>
             <a:lvl7pPr>
-              <a:buNone/>
-              <a:defRPr sz="1950" b="1">
-                <a:solidFill>
-                  <a:srgbClr val="167655"/>
+              <a:defRPr sz="1725" b="0">
+                <a:solidFill>
+                  <a:srgbClr val="183B30"/>
                 </a:solidFill>
                 <a:latin typeface="DejaVu Sans"/>
                 <a:ea typeface="DejaVu Sans"/>
@@ -15773,10 +18490,9 @@
               </a:defRPr>
             </a:lvl7pPr>
             <a:lvl8pPr>
-              <a:buNone/>
-              <a:defRPr sz="1950" b="1">
-                <a:solidFill>
-                  <a:srgbClr val="167655"/>
+              <a:defRPr sz="1725" b="0">
+                <a:solidFill>
+                  <a:srgbClr val="183B30"/>
                 </a:solidFill>
                 <a:latin typeface="DejaVu Sans"/>
                 <a:ea typeface="DejaVu Sans"/>
@@ -15784,10 +18500,9 @@
               </a:defRPr>
             </a:lvl8pPr>
             <a:lvl9pPr>
-              <a:buNone/>
-              <a:defRPr sz="1950" b="1">
-                <a:solidFill>
-                  <a:srgbClr val="167655"/>
+              <a:defRPr sz="1725" b="0">
+                <a:solidFill>
+                  <a:srgbClr val="183B30"/>
                 </a:solidFill>
                 <a:latin typeface="DejaVu Sans"/>
                 <a:ea typeface="DejaVu Sans"/>
@@ -15797,10 +18512,9 @@
           </a:lstStyle>
           <a:p xmlns:a="http://schemas.openxmlformats.org/drawingml/2006/main">
             <a:pPr>
-              <a:buNone/>
-              <a:defRPr sz="1950" b="1">
-                <a:solidFill>
-                  <a:srgbClr val="167655"/>
+              <a:defRPr sz="1725" b="0">
+                <a:solidFill>
+                  <a:srgbClr val="183B30"/>
                 </a:solidFill>
                 <a:latin typeface="DejaVu Sans"/>
                 <a:ea typeface="DejaVu Sans"/>
@@ -15808,15 +18522,38 @@
               </a:defRPr>
             </a:pPr>
             <a:r>
-              <a:rPr sz="1950" b="1">
-                <a:solidFill>
-                  <a:srgbClr val="167655"/>
+              <a:rPr sz="1725" b="0">
+                <a:solidFill>
+                  <a:srgbClr val="183B30"/>
                 </a:solidFill>
                 <a:latin typeface="DejaVu Sans"/>
                 <a:ea typeface="DejaVu Sans"/>
                 <a:cs typeface="DejaVu Sans"/>
               </a:rPr>
-              <a:t>Free = gratuito dentro das cotas do serviço.</a:t>
+              <a:t>Supabase = serviço na internet. Postgres = banco de dados.</a:t>
+            </a:r>
+          </a:p>
+          <a:p xmlns:a="http://schemas.openxmlformats.org/drawingml/2006/main">
+            <a:pPr>
+              <a:defRPr sz="1725" b="0">
+                <a:solidFill>
+                  <a:srgbClr val="183B30"/>
+                </a:solidFill>
+                <a:latin typeface="DejaVu Sans"/>
+                <a:ea typeface="DejaVu Sans"/>
+                <a:cs typeface="DejaVu Sans"/>
+              </a:defRPr>
+            </a:pPr>
+            <a:r>
+              <a:rPr sz="1725" b="0">
+                <a:solidFill>
+                  <a:srgbClr val="183B30"/>
+                </a:solidFill>
+                <a:latin typeface="DejaVu Sans"/>
+                <a:ea typeface="DejaVu Sans"/>
+                <a:cs typeface="DejaVu Sans"/>
+              </a:rPr>
+              <a:t>HTTPS = conexão protegida. Hospedagem: São Paulo, plano Free.</a:t>
             </a:r>
           </a:p>
         </p:txBody>
@@ -16685,7 +19422,7 @@
           <p:cNvPr id="8" name="">
             <a:extLst xmlns:a="http://schemas.openxmlformats.org/drawingml/2006/main">
               <a:ext uri="{FF2B5EF4-FFF2-40B4-BE49-F238E27FC236}">
-                <a16:creationId xmlns:a16="http://schemas.microsoft.com/office/drawing/2014/main" id="{9F0125E3-BFD3-44E8-AFCC-4BB84309229B}"/>
+                <a16:creationId xmlns:a16="http://schemas.microsoft.com/office/drawing/2014/main" id="{AC5DF4DC-EFEE-4E68-A013-FDC033F6D878}"/>
               </a:ext>
             </a:extLst>
           </p:cNvPr>
@@ -17904,7 +20641,7 @@
           <p:cNvPr id="8" name="">
             <a:extLst xmlns:a="http://schemas.openxmlformats.org/drawingml/2006/main">
               <a:ext uri="{FF2B5EF4-FFF2-40B4-BE49-F238E27FC236}">
-                <a16:creationId xmlns:a16="http://schemas.microsoft.com/office/drawing/2014/main" id="{C862D2FB-0F66-465C-A52D-C24E71DB91C7}"/>
+                <a16:creationId xmlns:a16="http://schemas.microsoft.com/office/drawing/2014/main" id="{ECE29B23-8DF3-4B23-9AEF-48F89C6C62F9}"/>
               </a:ext>
             </a:extLst>
           </p:cNvPr>

--- a/docs/entrega/SmartWaste_Apresentacao_Atualizada.pptx
+++ b/docs/entrega/SmartWaste_Apresentacao_Atualizada.pptx
@@ -2,22 +2,26 @@
 <file path=ppt/presentation.xml><?xml version="1.0" encoding="utf-8"?>
 <p:presentation xmlns:p="http://schemas.openxmlformats.org/presentationml/2006/main">
   <p:sldMasterIdLst>
-    <p:sldMasterId xmlns:r="http://schemas.openxmlformats.org/officeDocument/2006/relationships" id="2147483648" r:id="R4e7613bac0774742"/>
+    <p:sldMasterId xmlns:r="http://schemas.openxmlformats.org/officeDocument/2006/relationships" id="2147483648" r:id="R3bd44bd75ecc4750"/>
   </p:sldMasterIdLst>
   <p:notesMasterIdLst>
-    <p:notesMasterId xmlns:r="http://schemas.openxmlformats.org/officeDocument/2006/relationships" r:id="R3b903ae741cf4d85"/>
+    <p:notesMasterId xmlns:r="http://schemas.openxmlformats.org/officeDocument/2006/relationships" r:id="R2dbfcf0e01a04f4b"/>
   </p:notesMasterIdLst>
   <p:sldIdLst>
-    <p:sldId xmlns:r="http://schemas.openxmlformats.org/officeDocument/2006/relationships" id="256" r:id="R9ed199ccc3e44ed3"/>
-    <p:sldId xmlns:r="http://schemas.openxmlformats.org/officeDocument/2006/relationships" id="257" r:id="R4f8f8668bf8f49c9"/>
-    <p:sldId xmlns:r="http://schemas.openxmlformats.org/officeDocument/2006/relationships" id="258" r:id="Rdb262a5c10cf4d9e"/>
-    <p:sldId xmlns:r="http://schemas.openxmlformats.org/officeDocument/2006/relationships" id="259" r:id="R5c232bc27ec24082"/>
-    <p:sldId xmlns:r="http://schemas.openxmlformats.org/officeDocument/2006/relationships" id="260" r:id="Rd24b3b3edc334a31"/>
-    <p:sldId xmlns:r="http://schemas.openxmlformats.org/officeDocument/2006/relationships" id="261" r:id="Rbfcc74926cbc47aa"/>
-    <p:sldId xmlns:r="http://schemas.openxmlformats.org/officeDocument/2006/relationships" id="262" r:id="R4b724a41bace4c3f"/>
-    <p:sldId xmlns:r="http://schemas.openxmlformats.org/officeDocument/2006/relationships" id="263" r:id="R45ff42ea2beb4b96"/>
-    <p:sldId xmlns:r="http://schemas.openxmlformats.org/officeDocument/2006/relationships" id="264" r:id="Rdedd7c9f06ce4172"/>
-    <p:sldId xmlns:r="http://schemas.openxmlformats.org/officeDocument/2006/relationships" id="265" r:id="Rf36906a2fa34458c"/>
+    <p:sldId xmlns:r="http://schemas.openxmlformats.org/officeDocument/2006/relationships" id="256" r:id="R4a026f245e1c4c98"/>
+    <p:sldId xmlns:r="http://schemas.openxmlformats.org/officeDocument/2006/relationships" id="257" r:id="Rde49b4ed3f044ce7"/>
+    <p:sldId xmlns:r="http://schemas.openxmlformats.org/officeDocument/2006/relationships" id="258" r:id="R1d8edd7c69684bd7"/>
+    <p:sldId xmlns:r="http://schemas.openxmlformats.org/officeDocument/2006/relationships" id="259" r:id="Rc18231eaa87342f9"/>
+    <p:sldId xmlns:r="http://schemas.openxmlformats.org/officeDocument/2006/relationships" id="260" r:id="Ra929f6c7e25a41a2"/>
+    <p:sldId xmlns:r="http://schemas.openxmlformats.org/officeDocument/2006/relationships" id="261" r:id="R552ba897d29242c4"/>
+    <p:sldId xmlns:r="http://schemas.openxmlformats.org/officeDocument/2006/relationships" id="262" r:id="Ra0d1267665b441f9"/>
+    <p:sldId xmlns:r="http://schemas.openxmlformats.org/officeDocument/2006/relationships" id="263" r:id="R321155b100804eee"/>
+    <p:sldId xmlns:r="http://schemas.openxmlformats.org/officeDocument/2006/relationships" id="264" r:id="Re02697bce1d149eb"/>
+    <p:sldId xmlns:r="http://schemas.openxmlformats.org/officeDocument/2006/relationships" id="266" r:id="R911e934970524c7c"/>
+    <p:sldId xmlns:r="http://schemas.openxmlformats.org/officeDocument/2006/relationships" id="267" r:id="R6a032e918c684cf2"/>
+    <p:sldId xmlns:r="http://schemas.openxmlformats.org/officeDocument/2006/relationships" id="268" r:id="R32b55fb0ee9a4e09"/>
+    <p:sldId xmlns:r="http://schemas.openxmlformats.org/officeDocument/2006/relationships" id="269" r:id="R7cec8ed2ab12459d"/>
+    <p:sldId xmlns:r="http://schemas.openxmlformats.org/officeDocument/2006/relationships" id="265" r:id="Raaf6bada3a0248c1"/>
   </p:sldIdLst>
   <p:sldSz cx="12192000" cy="6858000"/>
   <p:notesSz cx="6858000" cy="9144000"/>
@@ -451,7 +455,7 @@
           <a:lstStyle xmlns:a="http://schemas.openxmlformats.org/drawingml/2006/main"/>
           <a:p xmlns:a="http://schemas.openxmlformats.org/drawingml/2006/main">
             <a:r>
-              <a:t>Apresente o SmartWaste DF em 20 segundos. O grupo é Anny, Arthur e Eduardo. Sensores e caminhões são virtuais, mas a troca MQTT e a hospedagem do histórico são reais. O link abre o repositório público.</a:t>
+              <a:t>Apresente o SmartWaste DF em 20 segundos. O grupo é Anny, Arthur, Eduardo e Jéssica. Sensores e caminhões são virtuais, mas a troca MQTT e a hospedagem do histórico são reais. O link abre o repositório público.</a:t>
             </a:r>
           </a:p>
         </p:txBody>
@@ -521,7 +525,287 @@
           <a:lstStyle xmlns:a="http://schemas.openxmlformats.org/drawingml/2006/main"/>
           <a:p xmlns:a="http://schemas.openxmlformats.org/drawingml/2006/main">
             <a:r>
-              <a:t>O GitHub contém a versão original e a documentação pública da evolução. A versão distribuída testada está no pacote da atividade. A apresentação não expõe credenciais. Se houver tempo, desconectar a nuvem, observar a fila, reconectar e exportar o PDF.</a:t>
+              <a:t>O repositório público passa a conter o código distribuído sem o JSON privado. A entrega de 20/10 passou em 60 testes Python e 28 JavaScript. O ensaio integrou MQTT real, dois eventos rurais, nuvem emulada e clientes Python, Node e Java. A função Supabase com o endpoint canônico e o SQL adicional estão preparados no GitHub, mas não foram implantados nesta etapa. O fluxo das lixeiras continua compatível com a função já publicada. Não há teste real de 72 horas nem comprovação de SLA ou economia em campo. Grupo: Anny, Arthur, Eduardo e Jéssica.</a:t>
+            </a:r>
+          </a:p>
+        </p:txBody>
+      </p:sp>
+      <p:sp>
+        <p:nvSpPr>
+          <p:cNvPr id="4" name="Slide Number Placeholder 3"/>
+          <p:cNvSpPr>
+            <a:spLocks xmlns:a="http://schemas.openxmlformats.org/drawingml/2006/main" noGrp="1"/>
+          </p:cNvSpPr>
+          <p:nvPr>
+            <p:ph type="sldNum" idx="5"/>
+          </p:nvPr>
+        </p:nvSpPr>
+        <p:spPr/>
+        <p:txBody>
+          <a:bodyPr xmlns:a="http://schemas.openxmlformats.org/drawingml/2006/main"/>
+          <a:lstStyle xmlns:a="http://schemas.openxmlformats.org/drawingml/2006/main"/>
+          <a:p xmlns:a="http://schemas.openxmlformats.org/drawingml/2006/main"/>
+        </p:txBody>
+      </p:sp>
+    </p:spTree>
+  </p:cSld>
+  <p:clrMapOvr>
+    <a:masterClrMapping xmlns:a="http://schemas.openxmlformats.org/drawingml/2006/main"/>
+  </p:clrMapOvr>
+</p:notes>
+</file>
+
+<file path=ppt/notesSlides/notesSlide11.xml><?xml version="1.0" encoding="utf-8"?>
+<p:notes xmlns:p="http://schemas.openxmlformats.org/presentationml/2006/main">
+  <p:cSld>
+    <p:spTree>
+      <p:nvGrpSpPr>
+        <p:cNvPr id="1" name=""/>
+        <p:cNvGrpSpPr/>
+        <p:nvPr/>
+      </p:nvGrpSpPr>
+      <p:grpSpPr>
+        <a:xfrm xmlns:a="http://schemas.openxmlformats.org/drawingml/2006/main"/>
+      </p:grpSpPr>
+      <p:sp>
+        <p:nvSpPr>
+          <p:cNvPr id="2" name="Slide Image Placeholder 1"/>
+          <p:cNvSpPr>
+            <a:spLocks xmlns:a="http://schemas.openxmlformats.org/drawingml/2006/main" noGrp="1"/>
+          </p:cNvSpPr>
+          <p:nvPr>
+            <p:ph type="sldImg" idx="0"/>
+          </p:nvPr>
+        </p:nvSpPr>
+        <p:spPr/>
+      </p:sp>
+      <p:sp>
+        <p:nvSpPr>
+          <p:cNvPr id="3" name="Notes Placeholder 2"/>
+          <p:cNvSpPr>
+            <a:spLocks xmlns:a="http://schemas.openxmlformats.org/drawingml/2006/main" noGrp="1"/>
+          </p:cNvSpPr>
+          <p:nvPr>
+            <p:ph type="body" idx="1"/>
+          </p:nvPr>
+        </p:nvSpPr>
+        <p:spPr/>
+        <p:txBody>
+          <a:bodyPr xmlns:a="http://schemas.openxmlformats.org/drawingml/2006/main"/>
+          <a:lstStyle xmlns:a="http://schemas.openxmlformats.org/drawingml/2006/main"/>
+          <a:p xmlns:a="http://schemas.openxmlformats.org/drawingml/2006/main">
+            <a:r>
+              <a:t>Formato canônico significa um contrato comum. Um sensor de lixeira e um sensor de solo publicam quem mediu, quando mediu e quais grandezas mediu. Timestamp é data e hora com fuso. UTC é a referência de horário usada no contrato. UUID é um identificador único. No adaptador do SmartWaste, ele é determinístico a partir do event_id existente e se mantém no reenvio. O formato antigo e a física do simulador permanecem. Fonte: apps/distributed/platform_contract.py, contracts/telemetry-1.0.schema.json e testes/distributed/test_platform.py da entrega de 20/10/2026.</a:t>
+            </a:r>
+          </a:p>
+        </p:txBody>
+      </p:sp>
+      <p:sp>
+        <p:nvSpPr>
+          <p:cNvPr id="4" name="Slide Number Placeholder 3"/>
+          <p:cNvSpPr>
+            <a:spLocks xmlns:a="http://schemas.openxmlformats.org/drawingml/2006/main" noGrp="1"/>
+          </p:cNvSpPr>
+          <p:nvPr>
+            <p:ph type="sldNum" idx="5"/>
+          </p:nvPr>
+        </p:nvSpPr>
+        <p:spPr/>
+        <p:txBody>
+          <a:bodyPr xmlns:a="http://schemas.openxmlformats.org/drawingml/2006/main"/>
+          <a:lstStyle xmlns:a="http://schemas.openxmlformats.org/drawingml/2006/main"/>
+          <a:p xmlns:a="http://schemas.openxmlformats.org/drawingml/2006/main"/>
+        </p:txBody>
+      </p:sp>
+    </p:spTree>
+  </p:cSld>
+  <p:clrMapOvr>
+    <a:masterClrMapping xmlns:a="http://schemas.openxmlformats.org/drawingml/2006/main"/>
+  </p:clrMapOvr>
+</p:notes>
+</file>
+
+<file path=ppt/notesSlides/notesSlide12.xml><?xml version="1.0" encoding="utf-8"?>
+<p:notes xmlns:p="http://schemas.openxmlformats.org/presentationml/2006/main">
+  <p:cSld>
+    <p:spTree>
+      <p:nvGrpSpPr>
+        <p:cNvPr id="1" name=""/>
+        <p:cNvGrpSpPr/>
+        <p:nvPr/>
+      </p:nvGrpSpPr>
+      <p:grpSpPr>
+        <a:xfrm xmlns:a="http://schemas.openxmlformats.org/drawingml/2006/main"/>
+      </p:grpSpPr>
+      <p:sp>
+        <p:nvSpPr>
+          <p:cNvPr id="2" name="Slide Image Placeholder 1"/>
+          <p:cNvSpPr>
+            <a:spLocks xmlns:a="http://schemas.openxmlformats.org/drawingml/2006/main" noGrp="1"/>
+          </p:cNvSpPr>
+          <p:nvPr>
+            <p:ph type="sldImg" idx="0"/>
+          </p:nvPr>
+        </p:nvSpPr>
+        <p:spPr/>
+      </p:sp>
+      <p:sp>
+        <p:nvSpPr>
+          <p:cNvPr id="3" name="Notes Placeholder 2"/>
+          <p:cNvSpPr>
+            <a:spLocks xmlns:a="http://schemas.openxmlformats.org/drawingml/2006/main" noGrp="1"/>
+          </p:cNvSpPr>
+          <p:nvPr>
+            <p:ph type="body" idx="1"/>
+          </p:nvPr>
+        </p:nvSpPr>
+        <p:spPr/>
+        <p:txBody>
+          <a:bodyPr xmlns:a="http://schemas.openxmlformats.org/drawingml/2006/main"/>
+          <a:lstStyle xmlns:a="http://schemas.openxmlformats.org/drawingml/2006/main"/>
+          <a:p xmlns:a="http://schemas.openxmlformats.org/drawingml/2006/main">
+            <a:r>
+              <a:t>O catálogo é persistente e gerenciado pela API local. Primeiro cadastramos domínio e perfil, depois local e dispositivo. Perfil define quais grandezas e unidades são aceitas. Uma medida fora da faixa pode ser conservada como suspeita; erro de estrutura ou unidade incompatível vai para quarentena. O teste criou um sensor de solo por cadastro, sem mudar código. Não há tela nova de cadastro nem irrigação automática. Fonte: apps/distributed/catalog.py, catalog-default.json, platform_api.py e ensaio integrado local de 20/10/2026.</a:t>
+            </a:r>
+          </a:p>
+        </p:txBody>
+      </p:sp>
+      <p:sp>
+        <p:nvSpPr>
+          <p:cNvPr id="4" name="Slide Number Placeholder 3"/>
+          <p:cNvSpPr>
+            <a:spLocks xmlns:a="http://schemas.openxmlformats.org/drawingml/2006/main" noGrp="1"/>
+          </p:cNvSpPr>
+          <p:nvPr>
+            <p:ph type="sldNum" idx="5"/>
+          </p:nvPr>
+        </p:nvSpPr>
+        <p:spPr/>
+        <p:txBody>
+          <a:bodyPr xmlns:a="http://schemas.openxmlformats.org/drawingml/2006/main"/>
+          <a:lstStyle xmlns:a="http://schemas.openxmlformats.org/drawingml/2006/main"/>
+          <a:p xmlns:a="http://schemas.openxmlformats.org/drawingml/2006/main"/>
+        </p:txBody>
+      </p:sp>
+    </p:spTree>
+  </p:cSld>
+  <p:clrMapOvr>
+    <a:masterClrMapping xmlns:a="http://schemas.openxmlformats.org/drawingml/2006/main"/>
+  </p:clrMapOvr>
+</p:notes>
+</file>
+
+<file path=ppt/notesSlides/notesSlide13.xml><?xml version="1.0" encoding="utf-8"?>
+<p:notes xmlns:p="http://schemas.openxmlformats.org/presentationml/2006/main">
+  <p:cSld>
+    <p:spTree>
+      <p:nvGrpSpPr>
+        <p:cNvPr id="1" name=""/>
+        <p:cNvGrpSpPr/>
+        <p:nvPr/>
+      </p:nvGrpSpPr>
+      <p:grpSpPr>
+        <a:xfrm xmlns:a="http://schemas.openxmlformats.org/drawingml/2006/main"/>
+      </p:grpSpPr>
+      <p:sp>
+        <p:nvSpPr>
+          <p:cNvPr id="2" name="Slide Image Placeholder 1"/>
+          <p:cNvSpPr>
+            <a:spLocks xmlns:a="http://schemas.openxmlformats.org/drawingml/2006/main" noGrp="1"/>
+          </p:cNvSpPr>
+          <p:nvPr>
+            <p:ph type="sldImg" idx="0"/>
+          </p:nvPr>
+        </p:nvSpPr>
+        <p:spPr/>
+      </p:sp>
+      <p:sp>
+        <p:nvSpPr>
+          <p:cNvPr id="3" name="Notes Placeholder 2"/>
+          <p:cNvSpPr>
+            <a:spLocks xmlns:a="http://schemas.openxmlformats.org/drawingml/2006/main" noGrp="1"/>
+          </p:cNvSpPr>
+          <p:nvPr>
+            <p:ph type="body" idx="1"/>
+          </p:nvPr>
+        </p:nvSpPr>
+        <p:spPr/>
+        <p:txBody>
+          <a:bodyPr xmlns:a="http://schemas.openxmlformats.org/drawingml/2006/main"/>
+          <a:lstStyle xmlns:a="http://schemas.openxmlformats.org/drawingml/2006/main"/>
+          <a:p xmlns:a="http://schemas.openxmlformats.org/drawingml/2006/main">
+            <a:r>
+              <a:t>O teste test_batch_5000_keeps_4997 envia cinco mil mensagens. Três usam uma versão de contrato inválida. A ingestão aceita 4.997 e registra três recusas com índice e motivo. A barra das três é pequena porque o eixo usa a mesma escala. A quarentena conserva o erro e não equivale a uma confirmação da nuvem. O resultado é desse teste local e não uma taxa universal de confiabilidade. A fila de transporte usa lotes limitados por bytes e quantidade para evitar erro 413. Fonte: tests/distributed/test_platform.py e docs/evidence-platform/python.txt.</a:t>
+            </a:r>
+          </a:p>
+        </p:txBody>
+      </p:sp>
+      <p:sp>
+        <p:nvSpPr>
+          <p:cNvPr id="4" name="Slide Number Placeholder 3"/>
+          <p:cNvSpPr>
+            <a:spLocks xmlns:a="http://schemas.openxmlformats.org/drawingml/2006/main" noGrp="1"/>
+          </p:cNvSpPr>
+          <p:nvPr>
+            <p:ph type="sldNum" idx="5"/>
+          </p:nvPr>
+        </p:nvSpPr>
+        <p:spPr/>
+        <p:txBody>
+          <a:bodyPr xmlns:a="http://schemas.openxmlformats.org/drawingml/2006/main"/>
+          <a:lstStyle xmlns:a="http://schemas.openxmlformats.org/drawingml/2006/main"/>
+          <a:p xmlns:a="http://schemas.openxmlformats.org/drawingml/2006/main"/>
+        </p:txBody>
+      </p:sp>
+    </p:spTree>
+  </p:cSld>
+  <p:clrMapOvr>
+    <a:masterClrMapping xmlns:a="http://schemas.openxmlformats.org/drawingml/2006/main"/>
+  </p:clrMapOvr>
+</p:notes>
+</file>
+
+<file path=ppt/notesSlides/notesSlide14.xml><?xml version="1.0" encoding="utf-8"?>
+<p:notes xmlns:p="http://schemas.openxmlformats.org/presentationml/2006/main">
+  <p:cSld>
+    <p:spTree>
+      <p:nvGrpSpPr>
+        <p:cNvPr id="1" name=""/>
+        <p:cNvGrpSpPr/>
+        <p:nvPr/>
+      </p:nvGrpSpPr>
+      <p:grpSpPr>
+        <a:xfrm xmlns:a="http://schemas.openxmlformats.org/drawingml/2006/main"/>
+      </p:grpSpPr>
+      <p:sp>
+        <p:nvSpPr>
+          <p:cNvPr id="2" name="Slide Image Placeholder 1"/>
+          <p:cNvSpPr>
+            <a:spLocks xmlns:a="http://schemas.openxmlformats.org/drawingml/2006/main" noGrp="1"/>
+          </p:cNvSpPr>
+          <p:nvPr>
+            <p:ph type="sldImg" idx="0"/>
+          </p:nvPr>
+        </p:nvSpPr>
+        <p:spPr/>
+      </p:sp>
+      <p:sp>
+        <p:nvSpPr>
+          <p:cNvPr id="3" name="Notes Placeholder 2"/>
+          <p:cNvSpPr>
+            <a:spLocks xmlns:a="http://schemas.openxmlformats.org/drawingml/2006/main" noGrp="1"/>
+          </p:cNvSpPr>
+          <p:nvPr>
+            <p:ph type="body" idx="1"/>
+          </p:nvPr>
+        </p:nvSpPr>
+        <p:spPr/>
+        <p:txBody>
+          <a:bodyPr xmlns:a="http://schemas.openxmlformats.org/drawingml/2006/main"/>
+          <a:lstStyle xmlns:a="http://schemas.openxmlformats.org/drawingml/2006/main"/>
+          <a:p xmlns:a="http://schemas.openxmlformats.org/drawingml/2006/main">
+            <a:r>
+              <a:t>Este quadro é um exemplo didático, não uma captura de dispositivo real. A consulta ordena pelo horário da medição e permite filtrar período, dispositivo, área e grandeza. O estado mais novo não depende da ordem de chegada. Há uma diferença adicional no simulador: o relógio virtual pode reiniciar. Por isso, o histórico adaptado usa simulated_at, enquanto o último estado das lixeiras usa a observação real emitted_at. O captured_at do snapshot protege o painel entre boots diferentes. Sensores canônicos nativos usam seu timestamp para determinar a última medição. Fonte: ingestion.py, core.py e testes de atraso e reinício.</a:t>
             </a:r>
           </a:p>
         </p:txBody>
@@ -3524,12 +3808,12 @@
   </p:cSld>
   <p:clrMap bg1="lt1" tx1="dk1" bg2="lt2" tx2="dk2" accent1="accent1" accent2="accent2" accent3="accent3" accent4="accent4" accent5="accent5" accent6="accent6" hlink="hlink" folHlink="folHlink"/>
   <p:sldLayoutIdLst>
-    <p:sldLayoutId xmlns:r="http://schemas.openxmlformats.org/officeDocument/2006/relationships" id="2147483649" r:id="Rd0a2ac7017d947b3"/>
-    <p:sldLayoutId xmlns:r="http://schemas.openxmlformats.org/officeDocument/2006/relationships" id="2147483650" r:id="Rc4f0a972de204bc5"/>
-    <p:sldLayoutId xmlns:r="http://schemas.openxmlformats.org/officeDocument/2006/relationships" id="2147483651" r:id="Rf10ba99bb9be42f5"/>
-    <p:sldLayoutId xmlns:r="http://schemas.openxmlformats.org/officeDocument/2006/relationships" id="2147483652" r:id="R3dfacf31f7d044e3"/>
-    <p:sldLayoutId xmlns:r="http://schemas.openxmlformats.org/officeDocument/2006/relationships" id="2147483653" r:id="Re5aff8c08b474fd8"/>
-    <p:sldLayoutId xmlns:r="http://schemas.openxmlformats.org/officeDocument/2006/relationships" id="2147483654" r:id="Rb757501436874fc4"/>
+    <p:sldLayoutId xmlns:r="http://schemas.openxmlformats.org/officeDocument/2006/relationships" id="2147483649" r:id="Rc9512a286f22412e"/>
+    <p:sldLayoutId xmlns:r="http://schemas.openxmlformats.org/officeDocument/2006/relationships" id="2147483650" r:id="R75dcf65d6bef4641"/>
+    <p:sldLayoutId xmlns:r="http://schemas.openxmlformats.org/officeDocument/2006/relationships" id="2147483651" r:id="R4bfdae1fd4784804"/>
+    <p:sldLayoutId xmlns:r="http://schemas.openxmlformats.org/officeDocument/2006/relationships" id="2147483652" r:id="Rb8f009557d514634"/>
+    <p:sldLayoutId xmlns:r="http://schemas.openxmlformats.org/officeDocument/2006/relationships" id="2147483653" r:id="R2a3653591c7a4b25"/>
+    <p:sldLayoutId xmlns:r="http://schemas.openxmlformats.org/officeDocument/2006/relationships" id="2147483654" r:id="Rfa935f247021448a"/>
   </p:sldLayoutIdLst>
   <p:txStyles>
     <p:titleStyle>
@@ -4662,6 +4946,194 @@
 </c:chartSpace>
 </file>
 
+<file path=ppt/slides/charts/chart4.xml><?xml version="1.0" encoding="utf-8"?>
+<c:chartSpace xmlns:c="http://schemas.openxmlformats.org/drawingml/2006/chart" xmlns:r="http://schemas.openxmlformats.org/officeDocument/2006/relationships">
+  <c:lang val="en-US"/>
+  <c:chart>
+    <c:plotArea>
+      <c:barChart>
+        <c:barDir val="col"/>
+        <c:varyColors val="0"/>
+        <c:ser>
+          <c:idx val="0"/>
+          <c:order val="0"/>
+          <c:tx>
+            <c:v>Mensagens</c:v>
+          </c:tx>
+          <c:spPr>
+            <a:solidFill xmlns:a="http://schemas.openxmlformats.org/drawingml/2006/main">
+              <a:srgbClr val="167655"/>
+            </a:solidFill>
+          </c:spPr>
+          <c:invertIfNegative val="0"/>
+          <c:dPt>
+            <c:idx val="1"/>
+            <c:invertIfNegative val="0"/>
+            <c:spPr>
+              <a:solidFill xmlns:a="http://schemas.openxmlformats.org/drawingml/2006/main">
+                <a:srgbClr val="D9AD5B"/>
+              </a:solidFill>
+            </c:spPr>
+          </c:dPt>
+          <c:cat>
+            <c:strRef>
+              <c:f>'Chart Data'!$A$2:$A$3</c:f>
+              <c:strCache>
+                <c:ptCount val="2"/>
+                <c:pt idx="0">
+                  <c:v>Aceitas</c:v>
+                </c:pt>
+                <c:pt idx="1">
+                  <c:v>Isoladas</c:v>
+                </c:pt>
+              </c:strCache>
+            </c:strRef>
+          </c:cat>
+          <c:val>
+            <c:numRef>
+              <c:f>'Chart Data'!$B$2:$B$3</c:f>
+              <c:numCache>
+                <c:formatCode>General</c:formatCode>
+                <c:ptCount val="2"/>
+                <c:pt idx="0">
+                  <c:v>4997</c:v>
+                </c:pt>
+                <c:pt idx="1">
+                  <c:v>3</c:v>
+                </c:pt>
+              </c:numCache>
+            </c:numRef>
+          </c:val>
+        </c:ser>
+        <c:dLbls>
+          <c:txPr>
+            <a:bodyPr xmlns:a="http://schemas.openxmlformats.org/drawingml/2006/main" anchorCtr="1"/>
+            <a:lstStyle xmlns:a="http://schemas.openxmlformats.org/drawingml/2006/main"/>
+            <a:p xmlns:a="http://schemas.openxmlformats.org/drawingml/2006/main">
+              <a:pPr>
+                <a:defRPr>
+                  <a:latin typeface="DejaVu Sans"/>
+                  <a:ea typeface="DejaVu Sans"/>
+                  <a:cs typeface="DejaVu Sans"/>
+                </a:defRPr>
+              </a:pPr>
+            </a:p>
+          </c:txPr>
+          <c:dLblPos val="outEnd"/>
+          <c:showLegendKey val="0"/>
+          <c:showVal val="1"/>
+          <c:showCatName val="0"/>
+          <c:showSerName val="0"/>
+          <c:showPercent val="0"/>
+          <c:showBubbleSize val="0"/>
+          <c:showLeaderLines val="0"/>
+        </c:dLbls>
+        <c:axId val="48650112"/>
+        <c:axId val="48672768"/>
+      </c:barChart>
+      <c:catAx>
+        <c:axId val="48650112"/>
+        <c:scaling>
+          <c:orientation val="minMax"/>
+        </c:scaling>
+        <c:delete val="0"/>
+        <c:axPos val="b"/>
+        <c:numFmt formatCode="General"/>
+        <c:majorTickMark val="none"/>
+        <c:minorTickMark val="none"/>
+        <c:spPr>
+          <a:ln xmlns:a="http://schemas.openxmlformats.org/drawingml/2006/main" w="9525">
+            <a:solidFill>
+              <a:srgbClr val="D4D4D4"/>
+            </a:solidFill>
+            <a:prstDash val="solid"/>
+          </a:ln>
+        </c:spPr>
+        <c:txPr>
+          <a:bodyPr xmlns:a="http://schemas.openxmlformats.org/drawingml/2006/main" anchorCtr="1"/>
+          <a:lstStyle xmlns:a="http://schemas.openxmlformats.org/drawingml/2006/main"/>
+          <a:p xmlns:a="http://schemas.openxmlformats.org/drawingml/2006/main">
+            <a:pPr>
+              <a:defRPr sz="1650">
+                <a:solidFill>
+                  <a:srgbClr val="183B30"/>
+                </a:solidFill>
+                <a:latin typeface="DejaVu Sans"/>
+                <a:ea typeface="DejaVu Sans"/>
+                <a:cs typeface="DejaVu Sans"/>
+              </a:defRPr>
+            </a:pPr>
+          </a:p>
+        </c:txPr>
+        <c:crossAx val="48672768"/>
+      </c:catAx>
+      <c:valAx>
+        <c:axId val="48672768"/>
+        <c:scaling>
+          <c:orientation val="minMax"/>
+          <c:max val="5500"/>
+          <c:min val="0"/>
+        </c:scaling>
+        <c:delete val="0"/>
+        <c:axPos val="l"/>
+        <c:majorGridlines>
+          <c:spPr>
+            <a:ln xmlns:a="http://schemas.openxmlformats.org/drawingml/2006/main" w="9525">
+              <a:solidFill>
+                <a:srgbClr val="CFDAD1"/>
+              </a:solidFill>
+            </a:ln>
+          </c:spPr>
+        </c:majorGridlines>
+        <c:numFmt formatCode="General"/>
+        <c:majorTickMark val="none"/>
+        <c:minorTickMark val="none"/>
+        <c:spPr>
+          <a:ln xmlns:a="http://schemas.openxmlformats.org/drawingml/2006/main" w="9525">
+            <a:solidFill>
+              <a:srgbClr val="D4D4D4"/>
+            </a:solidFill>
+            <a:prstDash val="solid"/>
+          </a:ln>
+        </c:spPr>
+        <c:txPr>
+          <a:bodyPr xmlns:a="http://schemas.openxmlformats.org/drawingml/2006/main" anchorCtr="1"/>
+          <a:lstStyle xmlns:a="http://schemas.openxmlformats.org/drawingml/2006/main"/>
+          <a:p xmlns:a="http://schemas.openxmlformats.org/drawingml/2006/main">
+            <a:pPr>
+              <a:defRPr sz="1350">
+                <a:solidFill>
+                  <a:srgbClr val="183B30"/>
+                </a:solidFill>
+                <a:latin typeface="DejaVu Sans"/>
+                <a:ea typeface="DejaVu Sans"/>
+                <a:cs typeface="DejaVu Sans"/>
+              </a:defRPr>
+            </a:pPr>
+          </a:p>
+        </c:txPr>
+        <c:crossAx val="48650112"/>
+        <c:crossBetween val="between"/>
+      </c:valAx>
+      <c:spPr>
+        <a:solidFill xmlns:a="http://schemas.openxmlformats.org/drawingml/2006/main">
+          <a:srgbClr val="F5F5EF"/>
+        </a:solidFill>
+      </c:spPr>
+    </c:plotArea>
+    <c:plotVisOnly val="1"/>
+  </c:chart>
+  <c:spPr>
+    <a:solidFill xmlns:a="http://schemas.openxmlformats.org/drawingml/2006/main">
+      <a:srgbClr val="F5F5EF"/>
+    </a:solidFill>
+  </c:spPr>
+  <c:externalData r:id="rIdChartSnapshot1">
+    <c:autoUpdate val="0"/>
+  </c:externalData>
+</c:chartSpace>
+</file>
+
 <file path=ppt/slides/slide1.xml><?xml version="1.0" encoding="utf-8"?>
 <p:sld xmlns:p="http://schemas.openxmlformats.org/presentationml/2006/main">
   <p:cSld>
@@ -5177,7 +5649,7 @@
                 <a:ea typeface="DejaVu Sans"/>
                 <a:cs typeface="DejaVu Sans"/>
               </a:rPr>
-              <a:t>Anny, Arthur e Eduardo</a:t>
+              <a:t>Anny, Arthur, Eduardo e Jéssica</a:t>
             </a:r>
           </a:p>
         </p:txBody>
@@ -5678,7 +6150,7 @@
                 <a:ea typeface="DejaVu Sans"/>
                 <a:cs typeface="DejaVu Sans"/>
               </a:rPr>
-              <a:t>Sensores medem. O sistema decide. A nuvem guarda.</a:t>
+              <a:t>Coleta local e integração de novos sensores</a:t>
             </a:r>
           </a:p>
         </p:txBody>
@@ -5845,7 +6317,7 @@
                 <a:ea typeface="DejaVu Sans"/>
                 <a:cs typeface="DejaVu Sans"/>
               </a:rPr>
-              <a:t>Engenharia de Software - Anny - Arthur - Eduardo</a:t>
+              <a:t>Engenharia de Software - Anny - Arthur - Eduardo - Jéssica</a:t>
             </a:r>
           </a:p>
         </p:txBody>
@@ -6533,7 +7005,7 @@
                 <a:ea typeface="DejaVu Sans"/>
                 <a:cs typeface="DejaVu Sans"/>
               </a:rPr>
-              <a:t>Anny, Arthur e Eduardo</a:t>
+              <a:t>Anny, Arthur, Eduardo e Jéssica</a:t>
             </a:r>
           </a:p>
         </p:txBody>
@@ -6699,7 +7171,7 @@
                 <a:ea typeface="DejaVu Sans"/>
                 <a:cs typeface="DejaVu Sans"/>
               </a:rPr>
-              <a:t>10</a:t>
+              <a:t>14</a:t>
             </a:r>
           </a:p>
         </p:txBody>
@@ -6865,7 +7337,7 @@
                 <a:ea typeface="DejaVu Sans"/>
                 <a:cs typeface="DejaVu Sans"/>
               </a:rPr>
-              <a:t>Anny, Arthur e Eduardo</a:t>
+              <a:t>Anny, Arthur, Eduardo e Jéssica</a:t>
             </a:r>
           </a:p>
         </p:txBody>
@@ -7024,7 +7496,7 @@
             </a:pPr>
             <a:r>
               <a:rPr>
-                <a:hlinkClick xmlns:r="http://schemas.openxmlformats.org/officeDocument/2006/relationships" r:id="Ra69a2bfdb5d34468"/>
+                <a:hlinkClick xmlns:r="http://schemas.openxmlformats.org/officeDocument/2006/relationships" r:id="Rb024f856ac454544"/>
               </a:rPr>
               <a:t>https://github.com/annygabb/IoT---Coleta</a:t>
             </a:r>
@@ -7216,7 +7688,7 @@
                 <a:ea typeface="DejaVu Sans"/>
                 <a:cs typeface="DejaVu Sans"/>
               </a:rPr>
-              <a:t>Comunicação MQTT real e histórico no Supabase.</a:t>
+              <a:t>60 testes Python e 28 JavaScript aprovados.</a:t>
             </a:r>
           </a:p>
           <a:p xmlns:a="http://schemas.openxmlformats.org/drawingml/2006/main">
@@ -7240,7 +7712,7 @@
                 <a:ea typeface="DejaVu Sans"/>
                 <a:cs typeface="DejaVu Sans"/>
               </a:rPr>
-              <a:t>Relatório com as mudanças e os resultados dos testes.</a:t>
+              <a:t>Novos sensores testados com MQTT e nuvem local.</a:t>
             </a:r>
           </a:p>
         </p:txBody>
@@ -7262,7 +7734,7 @@
         <p:spPr>
           <a:xfrm xmlns:a="http://schemas.openxmlformats.org/drawingml/2006/main">
             <a:off x="609600" y="5715000"/>
-            <a:ext cx="10858500" cy="476250"/>
+            <a:ext cx="10858500" cy="552450"/>
           </a:xfrm>
           <a:prstGeom xmlns:a="http://schemas.openxmlformats.org/drawingml/2006/main" prst="rect">
             <a:avLst/>
@@ -7406,7 +7878,164 @@
                 <a:ea typeface="DejaVu Sans"/>
                 <a:cs typeface="DejaVu Sans"/>
               </a:rPr>
-              <a:t>GitHub: código original e documentação. Versão distribuída: pacote da atividade.</a:t>
+              <a:t>GitHub: código distribuído e documentação pública atualizados.</a:t>
+            </a:r>
+          </a:p>
+        </p:txBody>
+      </p:sp>
+      <p:sp>
+        <p:nvSpPr>
+          <p:cNvPr id="10" name="">
+            <a:extLst xmlns:a="http://schemas.openxmlformats.org/drawingml/2006/main">
+              <a:ext uri="{FF2B5EF4-FFF2-40B4-BE49-F238E27FC236}">
+                <a16:creationId xmlns:a16="http://schemas.microsoft.com/office/drawing/2014/main" id="{940E5400-04D8-4517-9129-D6840FB49669}"/>
+              </a:ext>
+            </a:extLst>
+          </p:cNvPr>
+          <p:cNvSpPr>
+            <a:spLocks xmlns:a="http://schemas.openxmlformats.org/drawingml/2006/main" noGrp="1"/>
+          </p:cNvSpPr>
+          <p:nvPr/>
+        </p:nvSpPr>
+        <p:spPr>
+          <a:xfrm xmlns:a="http://schemas.openxmlformats.org/drawingml/2006/main">
+            <a:off x="609600" y="4857750"/>
+            <a:ext cx="10953750" cy="428625"/>
+          </a:xfrm>
+          <a:prstGeom xmlns:a="http://schemas.openxmlformats.org/drawingml/2006/main" prst="rect">
+            <a:avLst/>
+          </a:prstGeom>
+          <a:noFill xmlns:a="http://schemas.openxmlformats.org/drawingml/2006/main"/>
+          <a:ln xmlns:a="http://schemas.openxmlformats.org/drawingml/2006/main" w="0">
+            <a:noFill/>
+            <a:prstDash val="solid"/>
+          </a:ln>
+        </p:spPr>
+        <p:txBody>
+          <a:bodyPr xmlns:a="http://schemas.openxmlformats.org/drawingml/2006/main" lIns="0" tIns="0" rIns="0" bIns="0"/>
+          <a:lstStyle xmlns:a="http://schemas.openxmlformats.org/drawingml/2006/main">
+            <a:defPPr>
+              <a:defRPr sz="1950" b="1">
+                <a:solidFill>
+                  <a:srgbClr val="936017"/>
+                </a:solidFill>
+                <a:latin typeface="DejaVu Sans"/>
+                <a:ea typeface="DejaVu Sans"/>
+                <a:cs typeface="DejaVu Sans"/>
+              </a:defRPr>
+            </a:defPPr>
+            <a:lvl1pPr>
+              <a:defRPr sz="1950" b="1">
+                <a:solidFill>
+                  <a:srgbClr val="936017"/>
+                </a:solidFill>
+                <a:latin typeface="DejaVu Sans"/>
+                <a:ea typeface="DejaVu Sans"/>
+                <a:cs typeface="DejaVu Sans"/>
+              </a:defRPr>
+            </a:lvl1pPr>
+            <a:lvl2pPr>
+              <a:defRPr sz="1950" b="1">
+                <a:solidFill>
+                  <a:srgbClr val="936017"/>
+                </a:solidFill>
+                <a:latin typeface="DejaVu Sans"/>
+                <a:ea typeface="DejaVu Sans"/>
+                <a:cs typeface="DejaVu Sans"/>
+              </a:defRPr>
+            </a:lvl2pPr>
+            <a:lvl3pPr>
+              <a:defRPr sz="1950" b="1">
+                <a:solidFill>
+                  <a:srgbClr val="936017"/>
+                </a:solidFill>
+                <a:latin typeface="DejaVu Sans"/>
+                <a:ea typeface="DejaVu Sans"/>
+                <a:cs typeface="DejaVu Sans"/>
+              </a:defRPr>
+            </a:lvl3pPr>
+            <a:lvl4pPr>
+              <a:defRPr sz="1950" b="1">
+                <a:solidFill>
+                  <a:srgbClr val="936017"/>
+                </a:solidFill>
+                <a:latin typeface="DejaVu Sans"/>
+                <a:ea typeface="DejaVu Sans"/>
+                <a:cs typeface="DejaVu Sans"/>
+              </a:defRPr>
+            </a:lvl4pPr>
+            <a:lvl5pPr>
+              <a:defRPr sz="1950" b="1">
+                <a:solidFill>
+                  <a:srgbClr val="936017"/>
+                </a:solidFill>
+                <a:latin typeface="DejaVu Sans"/>
+                <a:ea typeface="DejaVu Sans"/>
+                <a:cs typeface="DejaVu Sans"/>
+              </a:defRPr>
+            </a:lvl5pPr>
+            <a:lvl6pPr>
+              <a:defRPr sz="1950" b="1">
+                <a:solidFill>
+                  <a:srgbClr val="936017"/>
+                </a:solidFill>
+                <a:latin typeface="DejaVu Sans"/>
+                <a:ea typeface="DejaVu Sans"/>
+                <a:cs typeface="DejaVu Sans"/>
+              </a:defRPr>
+            </a:lvl6pPr>
+            <a:lvl7pPr>
+              <a:defRPr sz="1950" b="1">
+                <a:solidFill>
+                  <a:srgbClr val="936017"/>
+                </a:solidFill>
+                <a:latin typeface="DejaVu Sans"/>
+                <a:ea typeface="DejaVu Sans"/>
+                <a:cs typeface="DejaVu Sans"/>
+              </a:defRPr>
+            </a:lvl7pPr>
+            <a:lvl8pPr>
+              <a:defRPr sz="1950" b="1">
+                <a:solidFill>
+                  <a:srgbClr val="936017"/>
+                </a:solidFill>
+                <a:latin typeface="DejaVu Sans"/>
+                <a:ea typeface="DejaVu Sans"/>
+                <a:cs typeface="DejaVu Sans"/>
+              </a:defRPr>
+            </a:lvl8pPr>
+            <a:lvl9pPr>
+              <a:defRPr sz="1950" b="1">
+                <a:solidFill>
+                  <a:srgbClr val="936017"/>
+                </a:solidFill>
+                <a:latin typeface="DejaVu Sans"/>
+                <a:ea typeface="DejaVu Sans"/>
+                <a:cs typeface="DejaVu Sans"/>
+              </a:defRPr>
+            </a:lvl9pPr>
+          </a:lstStyle>
+          <a:p xmlns:a="http://schemas.openxmlformats.org/drawingml/2006/main">
+            <a:pPr>
+              <a:defRPr sz="1950" b="1">
+                <a:solidFill>
+                  <a:srgbClr val="936017"/>
+                </a:solidFill>
+                <a:latin typeface="DejaVu Sans"/>
+                <a:ea typeface="DejaVu Sans"/>
+                <a:cs typeface="DejaVu Sans"/>
+              </a:defRPr>
+            </a:pPr>
+            <a:r>
+              <a:rPr sz="1950" b="1">
+                <a:solidFill>
+                  <a:srgbClr val="936017"/>
+                </a:solidFill>
+                <a:latin typeface="DejaVu Sans"/>
+                <a:ea typeface="DejaVu Sans"/>
+                <a:cs typeface="DejaVu Sans"/>
+              </a:rPr>
+              <a:t>Supabase: novos sensores aguardam atualização na nuvem.</a:t>
             </a:r>
           </a:p>
         </p:txBody>
@@ -7415,6 +8044,6503 @@
     <p:extLst>
       <p:ext uri="{BB962C8B-B14F-4D97-AF65-F5344CB8AC3E}">
         <p14:creationId xmlns:p14="http://schemas.microsoft.com/office/powerpoint/2010/main" val="1619836494"/>
+      </p:ext>
+    </p:extLst>
+  </p:cSld>
+</p:sld>
+</file>
+
+<file path=ppt/slides/slide11.xml><?xml version="1.0" encoding="utf-8"?>
+<p:sld xmlns:p="http://schemas.openxmlformats.org/presentationml/2006/main">
+  <p:cSld>
+    <p:bg>
+      <p:bgPr>
+        <a:solidFill xmlns:a="http://schemas.openxmlformats.org/drawingml/2006/main">
+          <a:srgbClr val="F5F5EF"/>
+        </a:solidFill>
+      </p:bgPr>
+    </p:bg>
+    <p:spTree>
+      <p:nvGrpSpPr>
+        <p:cNvPr id="1" name=""/>
+        <p:cNvGrpSpPr/>
+        <p:nvPr/>
+      </p:nvGrpSpPr>
+      <p:grpSpPr>
+        <a:xfrm xmlns:a="http://schemas.openxmlformats.org/drawingml/2006/main"/>
+      </p:grpSpPr>
+      <p:sp>
+        <p:nvSpPr>
+          <p:cNvPr id="8" name="">
+            <a:extLst xmlns:a="http://schemas.openxmlformats.org/drawingml/2006/main">
+              <a:ext uri="{FF2B5EF4-FFF2-40B4-BE49-F238E27FC236}">
+                <a16:creationId xmlns:a16="http://schemas.microsoft.com/office/drawing/2014/main" id="{C312AB3C-D7F7-4BC2-A034-5AADF60CDB45}"/>
+              </a:ext>
+            </a:extLst>
+          </p:cNvPr>
+          <p:cNvSpPr>
+            <a:spLocks xmlns:a="http://schemas.openxmlformats.org/drawingml/2006/main" noGrp="1"/>
+          </p:cNvSpPr>
+          <p:nvPr/>
+        </p:nvSpPr>
+        <p:spPr>
+          <a:xfrm xmlns:a="http://schemas.openxmlformats.org/drawingml/2006/main">
+            <a:off x="609600" y="276225"/>
+            <a:ext cx="10477500" cy="266700"/>
+          </a:xfrm>
+          <a:prstGeom xmlns:a="http://schemas.openxmlformats.org/drawingml/2006/main" prst="rect">
+            <a:avLst/>
+          </a:prstGeom>
+          <a:noFill xmlns:a="http://schemas.openxmlformats.org/drawingml/2006/main"/>
+          <a:ln xmlns:a="http://schemas.openxmlformats.org/drawingml/2006/main" w="0">
+            <a:noFill/>
+            <a:prstDash val="solid"/>
+          </a:ln>
+        </p:spPr>
+        <p:txBody>
+          <a:bodyPr xmlns:a="http://schemas.openxmlformats.org/drawingml/2006/main" lIns="0" tIns="0" rIns="0" bIns="0"/>
+          <a:lstStyle xmlns:a="http://schemas.openxmlformats.org/drawingml/2006/main">
+            <a:defPPr>
+              <a:defRPr sz="1200" b="1">
+                <a:solidFill>
+                  <a:srgbClr val="167655"/>
+                </a:solidFill>
+                <a:latin typeface="DejaVu Sans"/>
+                <a:ea typeface="DejaVu Sans"/>
+                <a:cs typeface="DejaVu Sans"/>
+              </a:defRPr>
+            </a:defPPr>
+            <a:lvl1pPr>
+              <a:defRPr sz="1200" b="1">
+                <a:solidFill>
+                  <a:srgbClr val="167655"/>
+                </a:solidFill>
+                <a:latin typeface="DejaVu Sans"/>
+                <a:ea typeface="DejaVu Sans"/>
+                <a:cs typeface="DejaVu Sans"/>
+              </a:defRPr>
+            </a:lvl1pPr>
+            <a:lvl2pPr>
+              <a:defRPr sz="1200" b="1">
+                <a:solidFill>
+                  <a:srgbClr val="167655"/>
+                </a:solidFill>
+                <a:latin typeface="DejaVu Sans"/>
+                <a:ea typeface="DejaVu Sans"/>
+                <a:cs typeface="DejaVu Sans"/>
+              </a:defRPr>
+            </a:lvl2pPr>
+            <a:lvl3pPr>
+              <a:defRPr sz="1200" b="1">
+                <a:solidFill>
+                  <a:srgbClr val="167655"/>
+                </a:solidFill>
+                <a:latin typeface="DejaVu Sans"/>
+                <a:ea typeface="DejaVu Sans"/>
+                <a:cs typeface="DejaVu Sans"/>
+              </a:defRPr>
+            </a:lvl3pPr>
+            <a:lvl4pPr>
+              <a:defRPr sz="1200" b="1">
+                <a:solidFill>
+                  <a:srgbClr val="167655"/>
+                </a:solidFill>
+                <a:latin typeface="DejaVu Sans"/>
+                <a:ea typeface="DejaVu Sans"/>
+                <a:cs typeface="DejaVu Sans"/>
+              </a:defRPr>
+            </a:lvl4pPr>
+            <a:lvl5pPr>
+              <a:defRPr sz="1200" b="1">
+                <a:solidFill>
+                  <a:srgbClr val="167655"/>
+                </a:solidFill>
+                <a:latin typeface="DejaVu Sans"/>
+                <a:ea typeface="DejaVu Sans"/>
+                <a:cs typeface="DejaVu Sans"/>
+              </a:defRPr>
+            </a:lvl5pPr>
+            <a:lvl6pPr>
+              <a:defRPr sz="1200" b="1">
+                <a:solidFill>
+                  <a:srgbClr val="167655"/>
+                </a:solidFill>
+                <a:latin typeface="DejaVu Sans"/>
+                <a:ea typeface="DejaVu Sans"/>
+                <a:cs typeface="DejaVu Sans"/>
+              </a:defRPr>
+            </a:lvl6pPr>
+            <a:lvl7pPr>
+              <a:defRPr sz="1200" b="1">
+                <a:solidFill>
+                  <a:srgbClr val="167655"/>
+                </a:solidFill>
+                <a:latin typeface="DejaVu Sans"/>
+                <a:ea typeface="DejaVu Sans"/>
+                <a:cs typeface="DejaVu Sans"/>
+              </a:defRPr>
+            </a:lvl7pPr>
+            <a:lvl8pPr>
+              <a:defRPr sz="1200" b="1">
+                <a:solidFill>
+                  <a:srgbClr val="167655"/>
+                </a:solidFill>
+                <a:latin typeface="DejaVu Sans"/>
+                <a:ea typeface="DejaVu Sans"/>
+                <a:cs typeface="DejaVu Sans"/>
+              </a:defRPr>
+            </a:lvl8pPr>
+            <a:lvl9pPr>
+              <a:defRPr sz="1200" b="1">
+                <a:solidFill>
+                  <a:srgbClr val="167655"/>
+                </a:solidFill>
+                <a:latin typeface="DejaVu Sans"/>
+                <a:ea typeface="DejaVu Sans"/>
+                <a:cs typeface="DejaVu Sans"/>
+              </a:defRPr>
+            </a:lvl9pPr>
+          </a:lstStyle>
+          <a:p xmlns:a="http://schemas.openxmlformats.org/drawingml/2006/main">
+            <a:pPr>
+              <a:defRPr sz="1200" b="1">
+                <a:solidFill>
+                  <a:srgbClr val="167655"/>
+                </a:solidFill>
+                <a:latin typeface="DejaVu Sans"/>
+                <a:ea typeface="DejaVu Sans"/>
+                <a:cs typeface="DejaVu Sans"/>
+              </a:defRPr>
+            </a:pPr>
+            <a:r>
+              <a:rPr sz="1200" b="1">
+                <a:solidFill>
+                  <a:srgbClr val="167655"/>
+                </a:solidFill>
+                <a:latin typeface="DejaVu Sans"/>
+                <a:ea typeface="DejaVu Sans"/>
+                <a:cs typeface="DejaVu Sans"/>
+              </a:rPr>
+              <a:t>SMARTWASTE DF  /  ENGENHARIA DE SOFTWARE</a:t>
+            </a:r>
+          </a:p>
+        </p:txBody>
+      </p:sp>
+      <p:sp>
+        <p:nvSpPr>
+          <p:cNvPr id="2" name="">
+            <a:extLst xmlns:a="http://schemas.openxmlformats.org/drawingml/2006/main">
+              <a:ext uri="{FF2B5EF4-FFF2-40B4-BE49-F238E27FC236}">
+                <a16:creationId xmlns:a16="http://schemas.microsoft.com/office/drawing/2014/main" id="{21A099F9-C85B-44A9-AF70-99CEFEFD5695}"/>
+              </a:ext>
+            </a:extLst>
+          </p:cNvPr>
+          <p:cNvSpPr>
+            <a:spLocks xmlns:a="http://schemas.openxmlformats.org/drawingml/2006/main" noGrp="1"/>
+          </p:cNvSpPr>
+          <p:nvPr/>
+        </p:nvSpPr>
+        <p:spPr>
+          <a:xfrm xmlns:a="http://schemas.openxmlformats.org/drawingml/2006/main">
+            <a:off x="609600" y="781050"/>
+            <a:ext cx="10972800" cy="762000"/>
+          </a:xfrm>
+          <a:prstGeom xmlns:a="http://schemas.openxmlformats.org/drawingml/2006/main" prst="rect">
+            <a:avLst/>
+          </a:prstGeom>
+          <a:noFill xmlns:a="http://schemas.openxmlformats.org/drawingml/2006/main"/>
+          <a:ln xmlns:a="http://schemas.openxmlformats.org/drawingml/2006/main" w="0">
+            <a:noFill/>
+            <a:prstDash val="solid"/>
+          </a:ln>
+        </p:spPr>
+        <p:txBody>
+          <a:bodyPr xmlns:a="http://schemas.openxmlformats.org/drawingml/2006/main" lIns="0" tIns="0" rIns="0" bIns="0"/>
+          <a:lstStyle xmlns:a="http://schemas.openxmlformats.org/drawingml/2006/main">
+            <a:defPPr>
+              <a:defRPr sz="3300" b="1">
+                <a:solidFill>
+                  <a:srgbClr val="183B30"/>
+                </a:solidFill>
+                <a:latin typeface="DejaVu Sans"/>
+                <a:ea typeface="DejaVu Sans"/>
+                <a:cs typeface="DejaVu Sans"/>
+              </a:defRPr>
+            </a:defPPr>
+            <a:lvl1pPr>
+              <a:defRPr sz="3300" b="1">
+                <a:solidFill>
+                  <a:srgbClr val="183B30"/>
+                </a:solidFill>
+                <a:latin typeface="DejaVu Sans"/>
+                <a:ea typeface="DejaVu Sans"/>
+                <a:cs typeface="DejaVu Sans"/>
+              </a:defRPr>
+            </a:lvl1pPr>
+            <a:lvl2pPr>
+              <a:defRPr sz="3300" b="1">
+                <a:solidFill>
+                  <a:srgbClr val="183B30"/>
+                </a:solidFill>
+                <a:latin typeface="DejaVu Sans"/>
+                <a:ea typeface="DejaVu Sans"/>
+                <a:cs typeface="DejaVu Sans"/>
+              </a:defRPr>
+            </a:lvl2pPr>
+            <a:lvl3pPr>
+              <a:defRPr sz="3300" b="1">
+                <a:solidFill>
+                  <a:srgbClr val="183B30"/>
+                </a:solidFill>
+                <a:latin typeface="DejaVu Sans"/>
+                <a:ea typeface="DejaVu Sans"/>
+                <a:cs typeface="DejaVu Sans"/>
+              </a:defRPr>
+            </a:lvl3pPr>
+            <a:lvl4pPr>
+              <a:defRPr sz="3300" b="1">
+                <a:solidFill>
+                  <a:srgbClr val="183B30"/>
+                </a:solidFill>
+                <a:latin typeface="DejaVu Sans"/>
+                <a:ea typeface="DejaVu Sans"/>
+                <a:cs typeface="DejaVu Sans"/>
+              </a:defRPr>
+            </a:lvl4pPr>
+            <a:lvl5pPr>
+              <a:defRPr sz="3300" b="1">
+                <a:solidFill>
+                  <a:srgbClr val="183B30"/>
+                </a:solidFill>
+                <a:latin typeface="DejaVu Sans"/>
+                <a:ea typeface="DejaVu Sans"/>
+                <a:cs typeface="DejaVu Sans"/>
+              </a:defRPr>
+            </a:lvl5pPr>
+            <a:lvl6pPr>
+              <a:defRPr sz="3300" b="1">
+                <a:solidFill>
+                  <a:srgbClr val="183B30"/>
+                </a:solidFill>
+                <a:latin typeface="DejaVu Sans"/>
+                <a:ea typeface="DejaVu Sans"/>
+                <a:cs typeface="DejaVu Sans"/>
+              </a:defRPr>
+            </a:lvl6pPr>
+            <a:lvl7pPr>
+              <a:defRPr sz="3300" b="1">
+                <a:solidFill>
+                  <a:srgbClr val="183B30"/>
+                </a:solidFill>
+                <a:latin typeface="DejaVu Sans"/>
+                <a:ea typeface="DejaVu Sans"/>
+                <a:cs typeface="DejaVu Sans"/>
+              </a:defRPr>
+            </a:lvl7pPr>
+            <a:lvl8pPr>
+              <a:defRPr sz="3300" b="1">
+                <a:solidFill>
+                  <a:srgbClr val="183B30"/>
+                </a:solidFill>
+                <a:latin typeface="DejaVu Sans"/>
+                <a:ea typeface="DejaVu Sans"/>
+                <a:cs typeface="DejaVu Sans"/>
+              </a:defRPr>
+            </a:lvl8pPr>
+            <a:lvl9pPr>
+              <a:defRPr sz="3300" b="1">
+                <a:solidFill>
+                  <a:srgbClr val="183B30"/>
+                </a:solidFill>
+                <a:latin typeface="DejaVu Sans"/>
+                <a:ea typeface="DejaVu Sans"/>
+                <a:cs typeface="DejaVu Sans"/>
+              </a:defRPr>
+            </a:lvl9pPr>
+          </a:lstStyle>
+          <a:p xmlns:a="http://schemas.openxmlformats.org/drawingml/2006/main">
+            <a:pPr>
+              <a:defRPr sz="3300" b="1">
+                <a:solidFill>
+                  <a:srgbClr val="183B30"/>
+                </a:solidFill>
+                <a:latin typeface="DejaVu Sans"/>
+                <a:ea typeface="DejaVu Sans"/>
+                <a:cs typeface="DejaVu Sans"/>
+              </a:defRPr>
+            </a:pPr>
+            <a:r>
+              <a:rPr sz="3300" b="1">
+                <a:solidFill>
+                  <a:srgbClr val="183B30"/>
+                </a:solidFill>
+                <a:latin typeface="DejaVu Sans"/>
+                <a:ea typeface="DejaVu Sans"/>
+                <a:cs typeface="DejaVu Sans"/>
+              </a:rPr>
+              <a:t>Um formato comum para cada leitura</a:t>
+            </a:r>
+          </a:p>
+        </p:txBody>
+      </p:sp>
+      <p:sp>
+        <p:nvSpPr>
+          <p:cNvPr id="3" name="">
+            <a:extLst xmlns:a="http://schemas.openxmlformats.org/drawingml/2006/main">
+              <a:ext uri="{FF2B5EF4-FFF2-40B4-BE49-F238E27FC236}">
+                <a16:creationId xmlns:a16="http://schemas.microsoft.com/office/drawing/2014/main" id="{FD2373B7-C051-4F05-98DA-0AFE5CB8582E}"/>
+              </a:ext>
+            </a:extLst>
+          </p:cNvPr>
+          <p:cNvSpPr>
+            <a:spLocks xmlns:a="http://schemas.openxmlformats.org/drawingml/2006/main" noGrp="1"/>
+          </p:cNvSpPr>
+          <p:nvPr/>
+        </p:nvSpPr>
+        <p:spPr>
+          <a:xfrm xmlns:a="http://schemas.openxmlformats.org/drawingml/2006/main">
+            <a:off x="609600" y="6467475"/>
+            <a:ext cx="9048750" cy="228600"/>
+          </a:xfrm>
+          <a:prstGeom xmlns:a="http://schemas.openxmlformats.org/drawingml/2006/main" prst="rect">
+            <a:avLst/>
+          </a:prstGeom>
+          <a:noFill xmlns:a="http://schemas.openxmlformats.org/drawingml/2006/main"/>
+          <a:ln xmlns:a="http://schemas.openxmlformats.org/drawingml/2006/main" w="0">
+            <a:noFill/>
+            <a:prstDash val="solid"/>
+          </a:ln>
+        </p:spPr>
+        <p:txBody>
+          <a:bodyPr xmlns:a="http://schemas.openxmlformats.org/drawingml/2006/main" lIns="0" tIns="0" rIns="0" bIns="0"/>
+          <a:lstStyle xmlns:a="http://schemas.openxmlformats.org/drawingml/2006/main">
+            <a:defPPr>
+              <a:defRPr sz="1200" b="0">
+                <a:solidFill>
+                  <a:srgbClr val="5F736B"/>
+                </a:solidFill>
+                <a:latin typeface="DejaVu Sans"/>
+                <a:ea typeface="DejaVu Sans"/>
+                <a:cs typeface="DejaVu Sans"/>
+              </a:defRPr>
+            </a:defPPr>
+            <a:lvl1pPr>
+              <a:defRPr sz="1200" b="0">
+                <a:solidFill>
+                  <a:srgbClr val="5F736B"/>
+                </a:solidFill>
+                <a:latin typeface="DejaVu Sans"/>
+                <a:ea typeface="DejaVu Sans"/>
+                <a:cs typeface="DejaVu Sans"/>
+              </a:defRPr>
+            </a:lvl1pPr>
+            <a:lvl2pPr>
+              <a:defRPr sz="1200" b="0">
+                <a:solidFill>
+                  <a:srgbClr val="5F736B"/>
+                </a:solidFill>
+                <a:latin typeface="DejaVu Sans"/>
+                <a:ea typeface="DejaVu Sans"/>
+                <a:cs typeface="DejaVu Sans"/>
+              </a:defRPr>
+            </a:lvl2pPr>
+            <a:lvl3pPr>
+              <a:defRPr sz="1200" b="0">
+                <a:solidFill>
+                  <a:srgbClr val="5F736B"/>
+                </a:solidFill>
+                <a:latin typeface="DejaVu Sans"/>
+                <a:ea typeface="DejaVu Sans"/>
+                <a:cs typeface="DejaVu Sans"/>
+              </a:defRPr>
+            </a:lvl3pPr>
+            <a:lvl4pPr>
+              <a:defRPr sz="1200" b="0">
+                <a:solidFill>
+                  <a:srgbClr val="5F736B"/>
+                </a:solidFill>
+                <a:latin typeface="DejaVu Sans"/>
+                <a:ea typeface="DejaVu Sans"/>
+                <a:cs typeface="DejaVu Sans"/>
+              </a:defRPr>
+            </a:lvl4pPr>
+            <a:lvl5pPr>
+              <a:defRPr sz="1200" b="0">
+                <a:solidFill>
+                  <a:srgbClr val="5F736B"/>
+                </a:solidFill>
+                <a:latin typeface="DejaVu Sans"/>
+                <a:ea typeface="DejaVu Sans"/>
+                <a:cs typeface="DejaVu Sans"/>
+              </a:defRPr>
+            </a:lvl5pPr>
+            <a:lvl6pPr>
+              <a:defRPr sz="1200" b="0">
+                <a:solidFill>
+                  <a:srgbClr val="5F736B"/>
+                </a:solidFill>
+                <a:latin typeface="DejaVu Sans"/>
+                <a:ea typeface="DejaVu Sans"/>
+                <a:cs typeface="DejaVu Sans"/>
+              </a:defRPr>
+            </a:lvl6pPr>
+            <a:lvl7pPr>
+              <a:defRPr sz="1200" b="0">
+                <a:solidFill>
+                  <a:srgbClr val="5F736B"/>
+                </a:solidFill>
+                <a:latin typeface="DejaVu Sans"/>
+                <a:ea typeface="DejaVu Sans"/>
+                <a:cs typeface="DejaVu Sans"/>
+              </a:defRPr>
+            </a:lvl7pPr>
+            <a:lvl8pPr>
+              <a:defRPr sz="1200" b="0">
+                <a:solidFill>
+                  <a:srgbClr val="5F736B"/>
+                </a:solidFill>
+                <a:latin typeface="DejaVu Sans"/>
+                <a:ea typeface="DejaVu Sans"/>
+                <a:cs typeface="DejaVu Sans"/>
+              </a:defRPr>
+            </a:lvl8pPr>
+            <a:lvl9pPr>
+              <a:defRPr sz="1200" b="0">
+                <a:solidFill>
+                  <a:srgbClr val="5F736B"/>
+                </a:solidFill>
+                <a:latin typeface="DejaVu Sans"/>
+                <a:ea typeface="DejaVu Sans"/>
+                <a:cs typeface="DejaVu Sans"/>
+              </a:defRPr>
+            </a:lvl9pPr>
+          </a:lstStyle>
+          <a:p xmlns:a="http://schemas.openxmlformats.org/drawingml/2006/main">
+            <a:pPr>
+              <a:defRPr sz="1200" b="0">
+                <a:solidFill>
+                  <a:srgbClr val="5F736B"/>
+                </a:solidFill>
+                <a:latin typeface="DejaVu Sans"/>
+                <a:ea typeface="DejaVu Sans"/>
+                <a:cs typeface="DejaVu Sans"/>
+              </a:defRPr>
+            </a:pPr>
+            <a:r>
+              <a:rPr sz="1200" b="0">
+                <a:solidFill>
+                  <a:srgbClr val="5F736B"/>
+                </a:solidFill>
+                <a:latin typeface="DejaVu Sans"/>
+                <a:ea typeface="DejaVu Sans"/>
+                <a:cs typeface="DejaVu Sans"/>
+              </a:rPr>
+              <a:t>Anny, Arthur, Eduardo e Jéssica</a:t>
+            </a:r>
+          </a:p>
+        </p:txBody>
+      </p:sp>
+      <p:sp>
+        <p:nvSpPr>
+          <p:cNvPr id="4" name="">
+            <a:extLst xmlns:a="http://schemas.openxmlformats.org/drawingml/2006/main">
+              <a:ext uri="{FF2B5EF4-FFF2-40B4-BE49-F238E27FC236}">
+                <a16:creationId xmlns:a16="http://schemas.microsoft.com/office/drawing/2014/main" id="{6DB53E4F-5338-4177-9E3A-C75000921359}"/>
+              </a:ext>
+            </a:extLst>
+          </p:cNvPr>
+          <p:cNvSpPr>
+            <a:spLocks xmlns:a="http://schemas.openxmlformats.org/drawingml/2006/main" noGrp="1"/>
+          </p:cNvSpPr>
+          <p:nvPr/>
+        </p:nvSpPr>
+        <p:spPr>
+          <a:xfrm xmlns:a="http://schemas.openxmlformats.org/drawingml/2006/main">
+            <a:off x="11239500" y="6467475"/>
+            <a:ext cx="381000" cy="228600"/>
+          </a:xfrm>
+          <a:prstGeom xmlns:a="http://schemas.openxmlformats.org/drawingml/2006/main" prst="rect">
+            <a:avLst/>
+          </a:prstGeom>
+          <a:noFill xmlns:a="http://schemas.openxmlformats.org/drawingml/2006/main"/>
+          <a:ln xmlns:a="http://schemas.openxmlformats.org/drawingml/2006/main" w="0">
+            <a:noFill/>
+            <a:prstDash val="solid"/>
+          </a:ln>
+        </p:spPr>
+        <p:txBody>
+          <a:bodyPr xmlns:a="http://schemas.openxmlformats.org/drawingml/2006/main" lIns="0" tIns="0" rIns="0" bIns="0"/>
+          <a:lstStyle xmlns:a="http://schemas.openxmlformats.org/drawingml/2006/main">
+            <a:defPPr>
+              <a:defRPr sz="1200" b="0">
+                <a:solidFill>
+                  <a:srgbClr val="5F736B"/>
+                </a:solidFill>
+                <a:latin typeface="DejaVu Sans"/>
+                <a:ea typeface="DejaVu Sans"/>
+                <a:cs typeface="DejaVu Sans"/>
+              </a:defRPr>
+            </a:defPPr>
+            <a:lvl1pPr>
+              <a:defRPr sz="1200" b="0">
+                <a:solidFill>
+                  <a:srgbClr val="5F736B"/>
+                </a:solidFill>
+                <a:latin typeface="DejaVu Sans"/>
+                <a:ea typeface="DejaVu Sans"/>
+                <a:cs typeface="DejaVu Sans"/>
+              </a:defRPr>
+            </a:lvl1pPr>
+            <a:lvl2pPr>
+              <a:defRPr sz="1200" b="0">
+                <a:solidFill>
+                  <a:srgbClr val="5F736B"/>
+                </a:solidFill>
+                <a:latin typeface="DejaVu Sans"/>
+                <a:ea typeface="DejaVu Sans"/>
+                <a:cs typeface="DejaVu Sans"/>
+              </a:defRPr>
+            </a:lvl2pPr>
+            <a:lvl3pPr>
+              <a:defRPr sz="1200" b="0">
+                <a:solidFill>
+                  <a:srgbClr val="5F736B"/>
+                </a:solidFill>
+                <a:latin typeface="DejaVu Sans"/>
+                <a:ea typeface="DejaVu Sans"/>
+                <a:cs typeface="DejaVu Sans"/>
+              </a:defRPr>
+            </a:lvl3pPr>
+            <a:lvl4pPr>
+              <a:defRPr sz="1200" b="0">
+                <a:solidFill>
+                  <a:srgbClr val="5F736B"/>
+                </a:solidFill>
+                <a:latin typeface="DejaVu Sans"/>
+                <a:ea typeface="DejaVu Sans"/>
+                <a:cs typeface="DejaVu Sans"/>
+              </a:defRPr>
+            </a:lvl4pPr>
+            <a:lvl5pPr>
+              <a:defRPr sz="1200" b="0">
+                <a:solidFill>
+                  <a:srgbClr val="5F736B"/>
+                </a:solidFill>
+                <a:latin typeface="DejaVu Sans"/>
+                <a:ea typeface="DejaVu Sans"/>
+                <a:cs typeface="DejaVu Sans"/>
+              </a:defRPr>
+            </a:lvl5pPr>
+            <a:lvl6pPr>
+              <a:defRPr sz="1200" b="0">
+                <a:solidFill>
+                  <a:srgbClr val="5F736B"/>
+                </a:solidFill>
+                <a:latin typeface="DejaVu Sans"/>
+                <a:ea typeface="DejaVu Sans"/>
+                <a:cs typeface="DejaVu Sans"/>
+              </a:defRPr>
+            </a:lvl6pPr>
+            <a:lvl7pPr>
+              <a:defRPr sz="1200" b="0">
+                <a:solidFill>
+                  <a:srgbClr val="5F736B"/>
+                </a:solidFill>
+                <a:latin typeface="DejaVu Sans"/>
+                <a:ea typeface="DejaVu Sans"/>
+                <a:cs typeface="DejaVu Sans"/>
+              </a:defRPr>
+            </a:lvl7pPr>
+            <a:lvl8pPr>
+              <a:defRPr sz="1200" b="0">
+                <a:solidFill>
+                  <a:srgbClr val="5F736B"/>
+                </a:solidFill>
+                <a:latin typeface="DejaVu Sans"/>
+                <a:ea typeface="DejaVu Sans"/>
+                <a:cs typeface="DejaVu Sans"/>
+              </a:defRPr>
+            </a:lvl8pPr>
+            <a:lvl9pPr>
+              <a:defRPr sz="1200" b="0">
+                <a:solidFill>
+                  <a:srgbClr val="5F736B"/>
+                </a:solidFill>
+                <a:latin typeface="DejaVu Sans"/>
+                <a:ea typeface="DejaVu Sans"/>
+                <a:cs typeface="DejaVu Sans"/>
+              </a:defRPr>
+            </a:lvl9pPr>
+          </a:lstStyle>
+          <a:p xmlns:a="http://schemas.openxmlformats.org/drawingml/2006/main">
+            <a:pPr>
+              <a:defRPr sz="1200" b="0">
+                <a:solidFill>
+                  <a:srgbClr val="5F736B"/>
+                </a:solidFill>
+                <a:latin typeface="DejaVu Sans"/>
+                <a:ea typeface="DejaVu Sans"/>
+                <a:cs typeface="DejaVu Sans"/>
+              </a:defRPr>
+            </a:pPr>
+            <a:r>
+              <a:rPr sz="1200" b="0">
+                <a:solidFill>
+                  <a:srgbClr val="5F736B"/>
+                </a:solidFill>
+                <a:latin typeface="DejaVu Sans"/>
+                <a:ea typeface="DejaVu Sans"/>
+                <a:cs typeface="DejaVu Sans"/>
+              </a:rPr>
+              <a:t>10</a:t>
+            </a:r>
+          </a:p>
+        </p:txBody>
+      </p:sp>
+      <p:sp>
+        <p:nvSpPr>
+          <p:cNvPr id="5" name="">
+            <a:extLst xmlns:a="http://schemas.openxmlformats.org/drawingml/2006/main">
+              <a:ext uri="{FF2B5EF4-FFF2-40B4-BE49-F238E27FC236}">
+                <a16:creationId xmlns:a16="http://schemas.microsoft.com/office/drawing/2014/main" id="{0EDDCEC3-82BB-4949-9079-BF905BB1161F}"/>
+              </a:ext>
+            </a:extLst>
+          </p:cNvPr>
+          <p:cNvSpPr>
+            <a:spLocks xmlns:a="http://schemas.openxmlformats.org/drawingml/2006/main" noGrp="1"/>
+          </p:cNvSpPr>
+          <p:nvPr/>
+        </p:nvSpPr>
+        <p:spPr>
+          <a:xfrm xmlns:a="http://schemas.openxmlformats.org/drawingml/2006/main">
+            <a:off x="609600" y="1676400"/>
+            <a:ext cx="10953750" cy="400050"/>
+          </a:xfrm>
+          <a:prstGeom xmlns:a="http://schemas.openxmlformats.org/drawingml/2006/main" prst="rect">
+            <a:avLst/>
+          </a:prstGeom>
+          <a:noFill xmlns:a="http://schemas.openxmlformats.org/drawingml/2006/main"/>
+          <a:ln xmlns:a="http://schemas.openxmlformats.org/drawingml/2006/main" w="0">
+            <a:noFill/>
+            <a:prstDash val="solid"/>
+          </a:ln>
+        </p:spPr>
+        <p:txBody>
+          <a:bodyPr xmlns:a="http://schemas.openxmlformats.org/drawingml/2006/main" lIns="0" tIns="0" rIns="0" bIns="0"/>
+          <a:lstStyle xmlns:a="http://schemas.openxmlformats.org/drawingml/2006/main">
+            <a:defPPr>
+              <a:defRPr sz="1950" b="0">
+                <a:solidFill>
+                  <a:srgbClr val="183B30"/>
+                </a:solidFill>
+                <a:latin typeface="DejaVu Sans"/>
+                <a:ea typeface="DejaVu Sans"/>
+                <a:cs typeface="DejaVu Sans"/>
+              </a:defRPr>
+            </a:defPPr>
+            <a:lvl1pPr>
+              <a:defRPr sz="1950" b="0">
+                <a:solidFill>
+                  <a:srgbClr val="183B30"/>
+                </a:solidFill>
+                <a:latin typeface="DejaVu Sans"/>
+                <a:ea typeface="DejaVu Sans"/>
+                <a:cs typeface="DejaVu Sans"/>
+              </a:defRPr>
+            </a:lvl1pPr>
+            <a:lvl2pPr>
+              <a:defRPr sz="1950" b="0">
+                <a:solidFill>
+                  <a:srgbClr val="183B30"/>
+                </a:solidFill>
+                <a:latin typeface="DejaVu Sans"/>
+                <a:ea typeface="DejaVu Sans"/>
+                <a:cs typeface="DejaVu Sans"/>
+              </a:defRPr>
+            </a:lvl2pPr>
+            <a:lvl3pPr>
+              <a:defRPr sz="1950" b="0">
+                <a:solidFill>
+                  <a:srgbClr val="183B30"/>
+                </a:solidFill>
+                <a:latin typeface="DejaVu Sans"/>
+                <a:ea typeface="DejaVu Sans"/>
+                <a:cs typeface="DejaVu Sans"/>
+              </a:defRPr>
+            </a:lvl3pPr>
+            <a:lvl4pPr>
+              <a:defRPr sz="1950" b="0">
+                <a:solidFill>
+                  <a:srgbClr val="183B30"/>
+                </a:solidFill>
+                <a:latin typeface="DejaVu Sans"/>
+                <a:ea typeface="DejaVu Sans"/>
+                <a:cs typeface="DejaVu Sans"/>
+              </a:defRPr>
+            </a:lvl4pPr>
+            <a:lvl5pPr>
+              <a:defRPr sz="1950" b="0">
+                <a:solidFill>
+                  <a:srgbClr val="183B30"/>
+                </a:solidFill>
+                <a:latin typeface="DejaVu Sans"/>
+                <a:ea typeface="DejaVu Sans"/>
+                <a:cs typeface="DejaVu Sans"/>
+              </a:defRPr>
+            </a:lvl5pPr>
+            <a:lvl6pPr>
+              <a:defRPr sz="1950" b="0">
+                <a:solidFill>
+                  <a:srgbClr val="183B30"/>
+                </a:solidFill>
+                <a:latin typeface="DejaVu Sans"/>
+                <a:ea typeface="DejaVu Sans"/>
+                <a:cs typeface="DejaVu Sans"/>
+              </a:defRPr>
+            </a:lvl6pPr>
+            <a:lvl7pPr>
+              <a:defRPr sz="1950" b="0">
+                <a:solidFill>
+                  <a:srgbClr val="183B30"/>
+                </a:solidFill>
+                <a:latin typeface="DejaVu Sans"/>
+                <a:ea typeface="DejaVu Sans"/>
+                <a:cs typeface="DejaVu Sans"/>
+              </a:defRPr>
+            </a:lvl7pPr>
+            <a:lvl8pPr>
+              <a:defRPr sz="1950" b="0">
+                <a:solidFill>
+                  <a:srgbClr val="183B30"/>
+                </a:solidFill>
+                <a:latin typeface="DejaVu Sans"/>
+                <a:ea typeface="DejaVu Sans"/>
+                <a:cs typeface="DejaVu Sans"/>
+              </a:defRPr>
+            </a:lvl8pPr>
+            <a:lvl9pPr>
+              <a:defRPr sz="1950" b="0">
+                <a:solidFill>
+                  <a:srgbClr val="183B30"/>
+                </a:solidFill>
+                <a:latin typeface="DejaVu Sans"/>
+                <a:ea typeface="DejaVu Sans"/>
+                <a:cs typeface="DejaVu Sans"/>
+              </a:defRPr>
+            </a:lvl9pPr>
+          </a:lstStyle>
+          <a:p xmlns:a="http://schemas.openxmlformats.org/drawingml/2006/main">
+            <a:pPr>
+              <a:defRPr sz="1950" b="0">
+                <a:solidFill>
+                  <a:srgbClr val="183B30"/>
+                </a:solidFill>
+                <a:latin typeface="DejaVu Sans"/>
+                <a:ea typeface="DejaVu Sans"/>
+                <a:cs typeface="DejaVu Sans"/>
+              </a:defRPr>
+            </a:pPr>
+            <a:r>
+              <a:rPr sz="1950" b="0">
+                <a:solidFill>
+                  <a:srgbClr val="183B30"/>
+                </a:solidFill>
+                <a:latin typeface="DejaVu Sans"/>
+                <a:ea typeface="DejaVu Sans"/>
+                <a:cs typeface="DejaVu Sans"/>
+              </a:rPr>
+              <a:t>Contrato canônico = campos iguais para sensores diferentes.</a:t>
+            </a:r>
+          </a:p>
+        </p:txBody>
+      </p:sp>
+      <p:graphicFrame>
+        <p:nvGraphicFramePr>
+          <p:cNvPr id="6" name="">
+            <a:extLst xmlns:a="http://schemas.openxmlformats.org/drawingml/2006/main">
+              <a:ext uri="{FF2B5EF4-FFF2-40B4-BE49-F238E27FC236}">
+                <a16:creationId xmlns:a16="http://schemas.microsoft.com/office/drawing/2014/main" id="{D918E443-0F52-4F82-87C1-D8615385E531}"/>
+              </a:ext>
+            </a:extLst>
+          </p:cNvPr>
+          <p:cNvGraphicFramePr/>
+          <p:nvPr/>
+        </p:nvGraphicFramePr>
+        <p:xfrm>
+          <a:off xmlns:a="http://schemas.openxmlformats.org/drawingml/2006/main" x="609600" y="2209800"/>
+          <a:ext xmlns:a="http://schemas.openxmlformats.org/drawingml/2006/main" cx="10972800" cy="3143250"/>
+        </p:xfrm>
+        <a:graphic xmlns:a="http://schemas.openxmlformats.org/drawingml/2006/main">
+          <a:graphicData uri="http://schemas.openxmlformats.org/drawingml/2006/table">
+            <a:tbl>
+              <a:tblPr/>
+              <a:tblGrid>
+                <a:gridCol w="2428875"/>
+                <a:gridCol w="4810125"/>
+                <a:gridCol w="3733800"/>
+              </a:tblGrid>
+              <a:tr h="628650">
+                <a:tc>
+                  <a:txBody>
+                    <a:bodyPr/>
+                    <a:lstStyle/>
+                    <a:p>
+                      <a:r>
+                        <a:rPr sz="1875" b="1">
+                          <a:solidFill>
+                            <a:srgbClr val="FFFFFF"/>
+                          </a:solidFill>
+                          <a:latin typeface="DejaVu Sans"/>
+                          <a:ea typeface="DejaVu Sans"/>
+                          <a:cs typeface="DejaVu Sans"/>
+                        </a:rPr>
+                        <a:t>Campo</a:t>
+                      </a:r>
+                    </a:p>
+                  </a:txBody>
+                  <a:tcPr marL="91440" marR="91440" marT="45720" marB="45720">
+                    <a:lnL w="9525">
+                      <a:solidFill>
+                        <a:srgbClr val="CFDAD1"/>
+                      </a:solidFill>
+                      <a:prstDash val="solid"/>
+                    </a:lnL>
+                    <a:lnR w="9525">
+                      <a:solidFill>
+                        <a:srgbClr val="CFDAD1"/>
+                      </a:solidFill>
+                      <a:prstDash val="solid"/>
+                    </a:lnR>
+                    <a:lnT w="9525">
+                      <a:solidFill>
+                        <a:srgbClr val="CFDAD1"/>
+                      </a:solidFill>
+                      <a:prstDash val="solid"/>
+                    </a:lnT>
+                    <a:lnB w="9525">
+                      <a:solidFill>
+                        <a:srgbClr val="CFDAD1"/>
+                      </a:solidFill>
+                      <a:prstDash val="solid"/>
+                    </a:lnB>
+                    <a:solidFill>
+                      <a:srgbClr val="167655"/>
+                    </a:solidFill>
+                  </a:tcPr>
+                </a:tc>
+                <a:tc>
+                  <a:txBody>
+                    <a:bodyPr/>
+                    <a:lstStyle/>
+                    <a:p>
+                      <a:r>
+                        <a:rPr sz="1875" b="1">
+                          <a:solidFill>
+                            <a:srgbClr val="FFFFFF"/>
+                          </a:solidFill>
+                          <a:latin typeface="DejaVu Sans"/>
+                          <a:ea typeface="DejaVu Sans"/>
+                          <a:cs typeface="DejaVu Sans"/>
+                        </a:rPr>
+                        <a:t>O que significa</a:t>
+                      </a:r>
+                    </a:p>
+                  </a:txBody>
+                  <a:tcPr marL="91440" marR="91440" marT="45720" marB="45720">
+                    <a:lnR w="9525">
+                      <a:solidFill>
+                        <a:srgbClr val="CFDAD1"/>
+                      </a:solidFill>
+                      <a:prstDash val="solid"/>
+                    </a:lnR>
+                    <a:lnT w="9525">
+                      <a:solidFill>
+                        <a:srgbClr val="CFDAD1"/>
+                      </a:solidFill>
+                      <a:prstDash val="solid"/>
+                    </a:lnT>
+                    <a:lnB w="9525">
+                      <a:solidFill>
+                        <a:srgbClr val="CFDAD1"/>
+                      </a:solidFill>
+                      <a:prstDash val="solid"/>
+                    </a:lnB>
+                    <a:solidFill>
+                      <a:srgbClr val="167655"/>
+                    </a:solidFill>
+                  </a:tcPr>
+                </a:tc>
+                <a:tc>
+                  <a:txBody>
+                    <a:bodyPr/>
+                    <a:lstStyle/>
+                    <a:p>
+                      <a:r>
+                        <a:rPr sz="1875" b="1">
+                          <a:solidFill>
+                            <a:srgbClr val="FFFFFF"/>
+                          </a:solidFill>
+                          <a:latin typeface="DejaVu Sans"/>
+                          <a:ea typeface="DejaVu Sans"/>
+                          <a:cs typeface="DejaVu Sans"/>
+                        </a:rPr>
+                        <a:t>Exemplo</a:t>
+                      </a:r>
+                    </a:p>
+                  </a:txBody>
+                  <a:tcPr marL="91440" marR="91440" marT="45720" marB="45720">
+                    <a:lnR w="9525">
+                      <a:solidFill>
+                        <a:srgbClr val="CFDAD1"/>
+                      </a:solidFill>
+                      <a:prstDash val="solid"/>
+                    </a:lnR>
+                    <a:lnT w="9525">
+                      <a:solidFill>
+                        <a:srgbClr val="CFDAD1"/>
+                      </a:solidFill>
+                      <a:prstDash val="solid"/>
+                    </a:lnT>
+                    <a:lnB w="9525">
+                      <a:solidFill>
+                        <a:srgbClr val="CFDAD1"/>
+                      </a:solidFill>
+                      <a:prstDash val="solid"/>
+                    </a:lnB>
+                    <a:solidFill>
+                      <a:srgbClr val="167655"/>
+                    </a:solidFill>
+                  </a:tcPr>
+                </a:tc>
+              </a:tr>
+              <a:tr h="628650">
+                <a:tc>
+                  <a:txBody>
+                    <a:bodyPr/>
+                    <a:lstStyle/>
+                    <a:p>
+                      <a:r>
+                        <a:rPr sz="1875" b="0">
+                          <a:solidFill>
+                            <a:srgbClr val="183B30"/>
+                          </a:solidFill>
+                          <a:latin typeface="DejaVu Sans"/>
+                          <a:ea typeface="DejaVu Sans"/>
+                          <a:cs typeface="DejaVu Sans"/>
+                        </a:rPr>
+                        <a:t>Dispositivo</a:t>
+                      </a:r>
+                    </a:p>
+                  </a:txBody>
+                  <a:tcPr marL="91440" marR="91440" marT="45720" marB="45720">
+                    <a:lnL w="9525">
+                      <a:solidFill>
+                        <a:srgbClr val="CFDAD1"/>
+                      </a:solidFill>
+                      <a:prstDash val="solid"/>
+                    </a:lnL>
+                    <a:lnR w="9525">
+                      <a:solidFill>
+                        <a:srgbClr val="CFDAD1"/>
+                      </a:solidFill>
+                      <a:prstDash val="solid"/>
+                    </a:lnR>
+                    <a:lnB w="9525">
+                      <a:solidFill>
+                        <a:srgbClr val="CFDAD1"/>
+                      </a:solidFill>
+                      <a:prstDash val="solid"/>
+                    </a:lnB>
+                    <a:solidFill>
+                      <a:srgbClr val="FFFFFF"/>
+                    </a:solidFill>
+                  </a:tcPr>
+                </a:tc>
+                <a:tc>
+                  <a:txBody>
+                    <a:bodyPr/>
+                    <a:lstStyle/>
+                    <a:p>
+                      <a:r>
+                        <a:rPr sz="1875" b="0">
+                          <a:solidFill>
+                            <a:srgbClr val="183B30"/>
+                          </a:solidFill>
+                          <a:latin typeface="DejaVu Sans"/>
+                          <a:ea typeface="DejaVu Sans"/>
+                          <a:cs typeface="DejaVu Sans"/>
+                        </a:rPr>
+                        <a:t>Quem enviou a leitura</a:t>
+                      </a:r>
+                    </a:p>
+                  </a:txBody>
+                  <a:tcPr marL="91440" marR="91440" marT="45720" marB="45720">
+                    <a:lnR w="9525">
+                      <a:solidFill>
+                        <a:srgbClr val="CFDAD1"/>
+                      </a:solidFill>
+                      <a:prstDash val="solid"/>
+                    </a:lnR>
+                    <a:lnB w="9525">
+                      <a:solidFill>
+                        <a:srgbClr val="CFDAD1"/>
+                      </a:solidFill>
+                      <a:prstDash val="solid"/>
+                    </a:lnB>
+                    <a:solidFill>
+                      <a:srgbClr val="FFFFFF"/>
+                    </a:solidFill>
+                  </a:tcPr>
+                </a:tc>
+                <a:tc>
+                  <a:txBody>
+                    <a:bodyPr/>
+                    <a:lstStyle/>
+                    <a:p>
+                      <a:r>
+                        <a:rPr sz="1875" b="0">
+                          <a:solidFill>
+                            <a:srgbClr val="183B30"/>
+                          </a:solidFill>
+                          <a:latin typeface="DejaVu Sans"/>
+                          <a:ea typeface="DejaVu Sans"/>
+                          <a:cs typeface="DejaVu Sans"/>
+                        </a:rPr>
+                        <a:t>solo-01</a:t>
+                      </a:r>
+                    </a:p>
+                  </a:txBody>
+                  <a:tcPr marL="91440" marR="91440" marT="45720" marB="45720">
+                    <a:lnR w="9525">
+                      <a:solidFill>
+                        <a:srgbClr val="CFDAD1"/>
+                      </a:solidFill>
+                      <a:prstDash val="solid"/>
+                    </a:lnR>
+                    <a:lnB w="9525">
+                      <a:solidFill>
+                        <a:srgbClr val="CFDAD1"/>
+                      </a:solidFill>
+                      <a:prstDash val="solid"/>
+                    </a:lnB>
+                    <a:solidFill>
+                      <a:srgbClr val="FFFFFF"/>
+                    </a:solidFill>
+                  </a:tcPr>
+                </a:tc>
+              </a:tr>
+              <a:tr h="628650">
+                <a:tc>
+                  <a:txBody>
+                    <a:bodyPr/>
+                    <a:lstStyle/>
+                    <a:p>
+                      <a:r>
+                        <a:rPr sz="1875" b="0">
+                          <a:solidFill>
+                            <a:srgbClr val="183B30"/>
+                          </a:solidFill>
+                          <a:latin typeface="DejaVu Sans"/>
+                          <a:ea typeface="DejaVu Sans"/>
+                          <a:cs typeface="DejaVu Sans"/>
+                        </a:rPr>
+                        <a:t>Timestamp</a:t>
+                      </a:r>
+                    </a:p>
+                  </a:txBody>
+                  <a:tcPr marL="91440" marR="91440" marT="45720" marB="45720">
+                    <a:lnL w="9525">
+                      <a:solidFill>
+                        <a:srgbClr val="CFDAD1"/>
+                      </a:solidFill>
+                      <a:prstDash val="solid"/>
+                    </a:lnL>
+                    <a:lnR w="9525">
+                      <a:solidFill>
+                        <a:srgbClr val="CFDAD1"/>
+                      </a:solidFill>
+                      <a:prstDash val="solid"/>
+                    </a:lnR>
+                    <a:lnB w="9525">
+                      <a:solidFill>
+                        <a:srgbClr val="CFDAD1"/>
+                      </a:solidFill>
+                      <a:prstDash val="solid"/>
+                    </a:lnB>
+                    <a:solidFill>
+                      <a:srgbClr val="F5F5EF"/>
+                    </a:solidFill>
+                  </a:tcPr>
+                </a:tc>
+                <a:tc>
+                  <a:txBody>
+                    <a:bodyPr/>
+                    <a:lstStyle/>
+                    <a:p>
+                      <a:r>
+                        <a:rPr sz="1875" b="0">
+                          <a:solidFill>
+                            <a:srgbClr val="183B30"/>
+                          </a:solidFill>
+                          <a:latin typeface="DejaVu Sans"/>
+                          <a:ea typeface="DejaVu Sans"/>
+                          <a:cs typeface="DejaVu Sans"/>
+                        </a:rPr>
+                        <a:t>Quando a medição ocorreu</a:t>
+                      </a:r>
+                    </a:p>
+                  </a:txBody>
+                  <a:tcPr marL="91440" marR="91440" marT="45720" marB="45720">
+                    <a:lnR w="9525">
+                      <a:solidFill>
+                        <a:srgbClr val="CFDAD1"/>
+                      </a:solidFill>
+                      <a:prstDash val="solid"/>
+                    </a:lnR>
+                    <a:lnB w="9525">
+                      <a:solidFill>
+                        <a:srgbClr val="CFDAD1"/>
+                      </a:solidFill>
+                      <a:prstDash val="solid"/>
+                    </a:lnB>
+                    <a:solidFill>
+                      <a:srgbClr val="F5F5EF"/>
+                    </a:solidFill>
+                  </a:tcPr>
+                </a:tc>
+                <a:tc>
+                  <a:txBody>
+                    <a:bodyPr/>
+                    <a:lstStyle/>
+                    <a:p>
+                      <a:r>
+                        <a:rPr sz="1875" b="0">
+                          <a:solidFill>
+                            <a:srgbClr val="183B30"/>
+                          </a:solidFill>
+                          <a:latin typeface="DejaVu Sans"/>
+                          <a:ea typeface="DejaVu Sans"/>
+                          <a:cs typeface="DejaVu Sans"/>
+                        </a:rPr>
+                        <a:t>20/10, 12h</a:t>
+                      </a:r>
+                    </a:p>
+                  </a:txBody>
+                  <a:tcPr marL="91440" marR="91440" marT="45720" marB="45720">
+                    <a:lnR w="9525">
+                      <a:solidFill>
+                        <a:srgbClr val="CFDAD1"/>
+                      </a:solidFill>
+                      <a:prstDash val="solid"/>
+                    </a:lnR>
+                    <a:lnB w="9525">
+                      <a:solidFill>
+                        <a:srgbClr val="CFDAD1"/>
+                      </a:solidFill>
+                      <a:prstDash val="solid"/>
+                    </a:lnB>
+                    <a:solidFill>
+                      <a:srgbClr val="F5F5EF"/>
+                    </a:solidFill>
+                  </a:tcPr>
+                </a:tc>
+              </a:tr>
+              <a:tr h="628650">
+                <a:tc>
+                  <a:txBody>
+                    <a:bodyPr/>
+                    <a:lstStyle/>
+                    <a:p>
+                      <a:r>
+                        <a:rPr sz="1875" b="0">
+                          <a:solidFill>
+                            <a:srgbClr val="183B30"/>
+                          </a:solidFill>
+                          <a:latin typeface="DejaVu Sans"/>
+                          <a:ea typeface="DejaVu Sans"/>
+                          <a:cs typeface="DejaVu Sans"/>
+                        </a:rPr>
+                        <a:t>Medidas</a:t>
+                      </a:r>
+                    </a:p>
+                  </a:txBody>
+                  <a:tcPr marL="91440" marR="91440" marT="45720" marB="45720">
+                    <a:lnL w="9525">
+                      <a:solidFill>
+                        <a:srgbClr val="CFDAD1"/>
+                      </a:solidFill>
+                      <a:prstDash val="solid"/>
+                    </a:lnL>
+                    <a:lnR w="9525">
+                      <a:solidFill>
+                        <a:srgbClr val="CFDAD1"/>
+                      </a:solidFill>
+                      <a:prstDash val="solid"/>
+                    </a:lnR>
+                    <a:lnB w="9525">
+                      <a:solidFill>
+                        <a:srgbClr val="CFDAD1"/>
+                      </a:solidFill>
+                      <a:prstDash val="solid"/>
+                    </a:lnB>
+                    <a:solidFill>
+                      <a:srgbClr val="FFFFFF"/>
+                    </a:solidFill>
+                  </a:tcPr>
+                </a:tc>
+                <a:tc>
+                  <a:txBody>
+                    <a:bodyPr/>
+                    <a:lstStyle/>
+                    <a:p>
+                      <a:r>
+                        <a:rPr sz="1875" b="0">
+                          <a:solidFill>
+                            <a:srgbClr val="183B30"/>
+                          </a:solidFill>
+                          <a:latin typeface="DejaVu Sans"/>
+                          <a:ea typeface="DejaVu Sans"/>
+                          <a:cs typeface="DejaVu Sans"/>
+                        </a:rPr>
+                        <a:t>Grandeza, valor e unidade</a:t>
+                      </a:r>
+                    </a:p>
+                  </a:txBody>
+                  <a:tcPr marL="91440" marR="91440" marT="45720" marB="45720">
+                    <a:lnR w="9525">
+                      <a:solidFill>
+                        <a:srgbClr val="CFDAD1"/>
+                      </a:solidFill>
+                      <a:prstDash val="solid"/>
+                    </a:lnR>
+                    <a:lnB w="9525">
+                      <a:solidFill>
+                        <a:srgbClr val="CFDAD1"/>
+                      </a:solidFill>
+                      <a:prstDash val="solid"/>
+                    </a:lnB>
+                    <a:solidFill>
+                      <a:srgbClr val="FFFFFF"/>
+                    </a:solidFill>
+                  </a:tcPr>
+                </a:tc>
+                <a:tc>
+                  <a:txBody>
+                    <a:bodyPr/>
+                    <a:lstStyle/>
+                    <a:p>
+                      <a:r>
+                        <a:rPr sz="1875" b="0">
+                          <a:solidFill>
+                            <a:srgbClr val="183B30"/>
+                          </a:solidFill>
+                          <a:latin typeface="DejaVu Sans"/>
+                          <a:ea typeface="DejaVu Sans"/>
+                          <a:cs typeface="DejaVu Sans"/>
+                        </a:rPr>
+                        <a:t>Umidade: 23,5%</a:t>
+                      </a:r>
+                    </a:p>
+                  </a:txBody>
+                  <a:tcPr marL="91440" marR="91440" marT="45720" marB="45720">
+                    <a:lnR w="9525">
+                      <a:solidFill>
+                        <a:srgbClr val="CFDAD1"/>
+                      </a:solidFill>
+                      <a:prstDash val="solid"/>
+                    </a:lnR>
+                    <a:lnB w="9525">
+                      <a:solidFill>
+                        <a:srgbClr val="CFDAD1"/>
+                      </a:solidFill>
+                      <a:prstDash val="solid"/>
+                    </a:lnB>
+                    <a:solidFill>
+                      <a:srgbClr val="FFFFFF"/>
+                    </a:solidFill>
+                  </a:tcPr>
+                </a:tc>
+              </a:tr>
+              <a:tr h="628650">
+                <a:tc>
+                  <a:txBody>
+                    <a:bodyPr/>
+                    <a:lstStyle/>
+                    <a:p>
+                      <a:r>
+                        <a:rPr sz="1875" b="0">
+                          <a:solidFill>
+                            <a:srgbClr val="183B30"/>
+                          </a:solidFill>
+                          <a:latin typeface="DejaVu Sans"/>
+                          <a:ea typeface="DejaVu Sans"/>
+                          <a:cs typeface="DejaVu Sans"/>
+                        </a:rPr>
+                        <a:t>UUID</a:t>
+                      </a:r>
+                    </a:p>
+                  </a:txBody>
+                  <a:tcPr marL="91440" marR="91440" marT="45720" marB="45720">
+                    <a:lnL w="9525">
+                      <a:solidFill>
+                        <a:srgbClr val="CFDAD1"/>
+                      </a:solidFill>
+                      <a:prstDash val="solid"/>
+                    </a:lnL>
+                    <a:lnR w="9525">
+                      <a:solidFill>
+                        <a:srgbClr val="CFDAD1"/>
+                      </a:solidFill>
+                      <a:prstDash val="solid"/>
+                    </a:lnR>
+                    <a:lnB w="9525">
+                      <a:solidFill>
+                        <a:srgbClr val="CFDAD1"/>
+                      </a:solidFill>
+                      <a:prstDash val="solid"/>
+                    </a:lnB>
+                    <a:solidFill>
+                      <a:srgbClr val="F5F5EF"/>
+                    </a:solidFill>
+                  </a:tcPr>
+                </a:tc>
+                <a:tc>
+                  <a:txBody>
+                    <a:bodyPr/>
+                    <a:lstStyle/>
+                    <a:p>
+                      <a:r>
+                        <a:rPr sz="1875" b="0">
+                          <a:solidFill>
+                            <a:srgbClr val="183B30"/>
+                          </a:solidFill>
+                          <a:latin typeface="DejaVu Sans"/>
+                          <a:ea typeface="DejaVu Sans"/>
+                          <a:cs typeface="DejaVu Sans"/>
+                        </a:rPr>
+                        <a:t>ID único da mensagem</a:t>
+                      </a:r>
+                    </a:p>
+                  </a:txBody>
+                  <a:tcPr marL="91440" marR="91440" marT="45720" marB="45720">
+                    <a:lnR w="9525">
+                      <a:solidFill>
+                        <a:srgbClr val="CFDAD1"/>
+                      </a:solidFill>
+                      <a:prstDash val="solid"/>
+                    </a:lnR>
+                    <a:lnB w="9525">
+                      <a:solidFill>
+                        <a:srgbClr val="CFDAD1"/>
+                      </a:solidFill>
+                      <a:prstDash val="solid"/>
+                    </a:lnB>
+                    <a:solidFill>
+                      <a:srgbClr val="F5F5EF"/>
+                    </a:solidFill>
+                  </a:tcPr>
+                </a:tc>
+                <a:tc>
+                  <a:txBody>
+                    <a:bodyPr/>
+                    <a:lstStyle/>
+                    <a:p>
+                      <a:r>
+                        <a:rPr sz="1875" b="0">
+                          <a:solidFill>
+                            <a:srgbClr val="183B30"/>
+                          </a:solidFill>
+                          <a:latin typeface="DejaVu Sans"/>
+                          <a:ea typeface="DejaVu Sans"/>
+                          <a:cs typeface="DejaVu Sans"/>
+                        </a:rPr>
+                        <a:t>Mesmo ID ao reenviar</a:t>
+                      </a:r>
+                    </a:p>
+                  </a:txBody>
+                  <a:tcPr marL="91440" marR="91440" marT="45720" marB="45720">
+                    <a:lnR w="9525">
+                      <a:solidFill>
+                        <a:srgbClr val="CFDAD1"/>
+                      </a:solidFill>
+                      <a:prstDash val="solid"/>
+                    </a:lnR>
+                    <a:lnB w="9525">
+                      <a:solidFill>
+                        <a:srgbClr val="CFDAD1"/>
+                      </a:solidFill>
+                      <a:prstDash val="solid"/>
+                    </a:lnB>
+                    <a:solidFill>
+                      <a:srgbClr val="F5F5EF"/>
+                    </a:solidFill>
+                  </a:tcPr>
+                </a:tc>
+              </a:tr>
+            </a:tbl>
+          </a:graphicData>
+        </a:graphic>
+      </p:graphicFrame>
+      <p:sp>
+        <p:nvSpPr>
+          <p:cNvPr id="7" name="">
+            <a:extLst xmlns:a="http://schemas.openxmlformats.org/drawingml/2006/main">
+              <a:ext uri="{FF2B5EF4-FFF2-40B4-BE49-F238E27FC236}">
+                <a16:creationId xmlns:a16="http://schemas.microsoft.com/office/drawing/2014/main" id="{4888B731-4521-4395-B4DE-5806C427170C}"/>
+              </a:ext>
+            </a:extLst>
+          </p:cNvPr>
+          <p:cNvSpPr>
+            <a:spLocks xmlns:a="http://schemas.openxmlformats.org/drawingml/2006/main" noGrp="1"/>
+          </p:cNvSpPr>
+          <p:nvPr/>
+        </p:nvSpPr>
+        <p:spPr>
+          <a:xfrm xmlns:a="http://schemas.openxmlformats.org/drawingml/2006/main">
+            <a:off x="609600" y="5724525"/>
+            <a:ext cx="10953750" cy="590550"/>
+          </a:xfrm>
+          <a:prstGeom xmlns:a="http://schemas.openxmlformats.org/drawingml/2006/main" prst="rect">
+            <a:avLst/>
+          </a:prstGeom>
+          <a:noFill xmlns:a="http://schemas.openxmlformats.org/drawingml/2006/main"/>
+          <a:ln xmlns:a="http://schemas.openxmlformats.org/drawingml/2006/main" w="0">
+            <a:noFill/>
+            <a:prstDash val="solid"/>
+          </a:ln>
+        </p:spPr>
+        <p:txBody>
+          <a:bodyPr xmlns:a="http://schemas.openxmlformats.org/drawingml/2006/main" lIns="0" tIns="0" rIns="0" bIns="0"/>
+          <a:lstStyle xmlns:a="http://schemas.openxmlformats.org/drawingml/2006/main">
+            <a:defPPr>
+              <a:defRPr sz="1950" b="1">
+                <a:solidFill>
+                  <a:srgbClr val="167655"/>
+                </a:solidFill>
+                <a:latin typeface="DejaVu Sans"/>
+                <a:ea typeface="DejaVu Sans"/>
+                <a:cs typeface="DejaVu Sans"/>
+              </a:defRPr>
+            </a:defPPr>
+            <a:lvl1pPr>
+              <a:defRPr sz="1950" b="1">
+                <a:solidFill>
+                  <a:srgbClr val="167655"/>
+                </a:solidFill>
+                <a:latin typeface="DejaVu Sans"/>
+                <a:ea typeface="DejaVu Sans"/>
+                <a:cs typeface="DejaVu Sans"/>
+              </a:defRPr>
+            </a:lvl1pPr>
+            <a:lvl2pPr>
+              <a:defRPr sz="1950" b="1">
+                <a:solidFill>
+                  <a:srgbClr val="167655"/>
+                </a:solidFill>
+                <a:latin typeface="DejaVu Sans"/>
+                <a:ea typeface="DejaVu Sans"/>
+                <a:cs typeface="DejaVu Sans"/>
+              </a:defRPr>
+            </a:lvl2pPr>
+            <a:lvl3pPr>
+              <a:defRPr sz="1950" b="1">
+                <a:solidFill>
+                  <a:srgbClr val="167655"/>
+                </a:solidFill>
+                <a:latin typeface="DejaVu Sans"/>
+                <a:ea typeface="DejaVu Sans"/>
+                <a:cs typeface="DejaVu Sans"/>
+              </a:defRPr>
+            </a:lvl3pPr>
+            <a:lvl4pPr>
+              <a:defRPr sz="1950" b="1">
+                <a:solidFill>
+                  <a:srgbClr val="167655"/>
+                </a:solidFill>
+                <a:latin typeface="DejaVu Sans"/>
+                <a:ea typeface="DejaVu Sans"/>
+                <a:cs typeface="DejaVu Sans"/>
+              </a:defRPr>
+            </a:lvl4pPr>
+            <a:lvl5pPr>
+              <a:defRPr sz="1950" b="1">
+                <a:solidFill>
+                  <a:srgbClr val="167655"/>
+                </a:solidFill>
+                <a:latin typeface="DejaVu Sans"/>
+                <a:ea typeface="DejaVu Sans"/>
+                <a:cs typeface="DejaVu Sans"/>
+              </a:defRPr>
+            </a:lvl5pPr>
+            <a:lvl6pPr>
+              <a:defRPr sz="1950" b="1">
+                <a:solidFill>
+                  <a:srgbClr val="167655"/>
+                </a:solidFill>
+                <a:latin typeface="DejaVu Sans"/>
+                <a:ea typeface="DejaVu Sans"/>
+                <a:cs typeface="DejaVu Sans"/>
+              </a:defRPr>
+            </a:lvl6pPr>
+            <a:lvl7pPr>
+              <a:defRPr sz="1950" b="1">
+                <a:solidFill>
+                  <a:srgbClr val="167655"/>
+                </a:solidFill>
+                <a:latin typeface="DejaVu Sans"/>
+                <a:ea typeface="DejaVu Sans"/>
+                <a:cs typeface="DejaVu Sans"/>
+              </a:defRPr>
+            </a:lvl7pPr>
+            <a:lvl8pPr>
+              <a:defRPr sz="1950" b="1">
+                <a:solidFill>
+                  <a:srgbClr val="167655"/>
+                </a:solidFill>
+                <a:latin typeface="DejaVu Sans"/>
+                <a:ea typeface="DejaVu Sans"/>
+                <a:cs typeface="DejaVu Sans"/>
+              </a:defRPr>
+            </a:lvl8pPr>
+            <a:lvl9pPr>
+              <a:defRPr sz="1950" b="1">
+                <a:solidFill>
+                  <a:srgbClr val="167655"/>
+                </a:solidFill>
+                <a:latin typeface="DejaVu Sans"/>
+                <a:ea typeface="DejaVu Sans"/>
+                <a:cs typeface="DejaVu Sans"/>
+              </a:defRPr>
+            </a:lvl9pPr>
+          </a:lstStyle>
+          <a:p xmlns:a="http://schemas.openxmlformats.org/drawingml/2006/main">
+            <a:pPr>
+              <a:defRPr sz="1950" b="1">
+                <a:solidFill>
+                  <a:srgbClr val="167655"/>
+                </a:solidFill>
+                <a:latin typeface="DejaVu Sans"/>
+                <a:ea typeface="DejaVu Sans"/>
+                <a:cs typeface="DejaVu Sans"/>
+              </a:defRPr>
+            </a:pPr>
+            <a:r>
+              <a:rPr sz="1950" b="1">
+                <a:solidFill>
+                  <a:srgbClr val="167655"/>
+                </a:solidFill>
+                <a:latin typeface="DejaVu Sans"/>
+                <a:ea typeface="DejaVu Sans"/>
+                <a:cs typeface="DejaVu Sans"/>
+              </a:rPr>
+              <a:t>O adaptador traduz o formato antigo. O painel e as rotas continuam.</a:t>
+            </a:r>
+          </a:p>
+        </p:txBody>
+      </p:sp>
+    </p:spTree>
+    <p:extLst>
+      <p:ext uri="{BB962C8B-B14F-4D97-AF65-F5344CB8AC3E}">
+        <p14:creationId xmlns:p14="http://schemas.microsoft.com/office/powerpoint/2010/main" val="1724733451"/>
+      </p:ext>
+    </p:extLst>
+  </p:cSld>
+</p:sld>
+</file>
+
+<file path=ppt/slides/slide12.xml><?xml version="1.0" encoding="utf-8"?>
+<p:sld xmlns:p="http://schemas.openxmlformats.org/presentationml/2006/main">
+  <p:cSld>
+    <p:bg>
+      <p:bgPr>
+        <a:solidFill xmlns:a="http://schemas.openxmlformats.org/drawingml/2006/main">
+          <a:srgbClr val="F5F5EF"/>
+        </a:solidFill>
+      </p:bgPr>
+    </p:bg>
+    <p:spTree>
+      <p:nvGrpSpPr>
+        <p:cNvPr id="1" name=""/>
+        <p:cNvGrpSpPr/>
+        <p:nvPr/>
+      </p:nvGrpSpPr>
+      <p:grpSpPr>
+        <a:xfrm xmlns:a="http://schemas.openxmlformats.org/drawingml/2006/main"/>
+      </p:grpSpPr>
+      <p:sp>
+        <p:nvSpPr>
+          <p:cNvPr id="9" name="">
+            <a:extLst xmlns:a="http://schemas.openxmlformats.org/drawingml/2006/main">
+              <a:ext uri="{FF2B5EF4-FFF2-40B4-BE49-F238E27FC236}">
+                <a16:creationId xmlns:a16="http://schemas.microsoft.com/office/drawing/2014/main" id="{8EA042E7-FF20-4254-BF92-29F6CCAC64B3}"/>
+              </a:ext>
+            </a:extLst>
+          </p:cNvPr>
+          <p:cNvSpPr>
+            <a:spLocks xmlns:a="http://schemas.openxmlformats.org/drawingml/2006/main" noGrp="1"/>
+          </p:cNvSpPr>
+          <p:nvPr/>
+        </p:nvSpPr>
+        <p:spPr>
+          <a:xfrm xmlns:a="http://schemas.openxmlformats.org/drawingml/2006/main">
+            <a:off x="609600" y="276225"/>
+            <a:ext cx="10477500" cy="266700"/>
+          </a:xfrm>
+          <a:prstGeom xmlns:a="http://schemas.openxmlformats.org/drawingml/2006/main" prst="rect">
+            <a:avLst/>
+          </a:prstGeom>
+          <a:noFill xmlns:a="http://schemas.openxmlformats.org/drawingml/2006/main"/>
+          <a:ln xmlns:a="http://schemas.openxmlformats.org/drawingml/2006/main" w="0">
+            <a:noFill/>
+            <a:prstDash val="solid"/>
+          </a:ln>
+        </p:spPr>
+        <p:txBody>
+          <a:bodyPr xmlns:a="http://schemas.openxmlformats.org/drawingml/2006/main" lIns="0" tIns="0" rIns="0" bIns="0"/>
+          <a:lstStyle xmlns:a="http://schemas.openxmlformats.org/drawingml/2006/main">
+            <a:defPPr>
+              <a:defRPr sz="1200" b="1">
+                <a:solidFill>
+                  <a:srgbClr val="167655"/>
+                </a:solidFill>
+                <a:latin typeface="DejaVu Sans"/>
+                <a:ea typeface="DejaVu Sans"/>
+                <a:cs typeface="DejaVu Sans"/>
+              </a:defRPr>
+            </a:defPPr>
+            <a:lvl1pPr>
+              <a:defRPr sz="1200" b="1">
+                <a:solidFill>
+                  <a:srgbClr val="167655"/>
+                </a:solidFill>
+                <a:latin typeface="DejaVu Sans"/>
+                <a:ea typeface="DejaVu Sans"/>
+                <a:cs typeface="DejaVu Sans"/>
+              </a:defRPr>
+            </a:lvl1pPr>
+            <a:lvl2pPr>
+              <a:defRPr sz="1200" b="1">
+                <a:solidFill>
+                  <a:srgbClr val="167655"/>
+                </a:solidFill>
+                <a:latin typeface="DejaVu Sans"/>
+                <a:ea typeface="DejaVu Sans"/>
+                <a:cs typeface="DejaVu Sans"/>
+              </a:defRPr>
+            </a:lvl2pPr>
+            <a:lvl3pPr>
+              <a:defRPr sz="1200" b="1">
+                <a:solidFill>
+                  <a:srgbClr val="167655"/>
+                </a:solidFill>
+                <a:latin typeface="DejaVu Sans"/>
+                <a:ea typeface="DejaVu Sans"/>
+                <a:cs typeface="DejaVu Sans"/>
+              </a:defRPr>
+            </a:lvl3pPr>
+            <a:lvl4pPr>
+              <a:defRPr sz="1200" b="1">
+                <a:solidFill>
+                  <a:srgbClr val="167655"/>
+                </a:solidFill>
+                <a:latin typeface="DejaVu Sans"/>
+                <a:ea typeface="DejaVu Sans"/>
+                <a:cs typeface="DejaVu Sans"/>
+              </a:defRPr>
+            </a:lvl4pPr>
+            <a:lvl5pPr>
+              <a:defRPr sz="1200" b="1">
+                <a:solidFill>
+                  <a:srgbClr val="167655"/>
+                </a:solidFill>
+                <a:latin typeface="DejaVu Sans"/>
+                <a:ea typeface="DejaVu Sans"/>
+                <a:cs typeface="DejaVu Sans"/>
+              </a:defRPr>
+            </a:lvl5pPr>
+            <a:lvl6pPr>
+              <a:defRPr sz="1200" b="1">
+                <a:solidFill>
+                  <a:srgbClr val="167655"/>
+                </a:solidFill>
+                <a:latin typeface="DejaVu Sans"/>
+                <a:ea typeface="DejaVu Sans"/>
+                <a:cs typeface="DejaVu Sans"/>
+              </a:defRPr>
+            </a:lvl6pPr>
+            <a:lvl7pPr>
+              <a:defRPr sz="1200" b="1">
+                <a:solidFill>
+                  <a:srgbClr val="167655"/>
+                </a:solidFill>
+                <a:latin typeface="DejaVu Sans"/>
+                <a:ea typeface="DejaVu Sans"/>
+                <a:cs typeface="DejaVu Sans"/>
+              </a:defRPr>
+            </a:lvl7pPr>
+            <a:lvl8pPr>
+              <a:defRPr sz="1200" b="1">
+                <a:solidFill>
+                  <a:srgbClr val="167655"/>
+                </a:solidFill>
+                <a:latin typeface="DejaVu Sans"/>
+                <a:ea typeface="DejaVu Sans"/>
+                <a:cs typeface="DejaVu Sans"/>
+              </a:defRPr>
+            </a:lvl8pPr>
+            <a:lvl9pPr>
+              <a:defRPr sz="1200" b="1">
+                <a:solidFill>
+                  <a:srgbClr val="167655"/>
+                </a:solidFill>
+                <a:latin typeface="DejaVu Sans"/>
+                <a:ea typeface="DejaVu Sans"/>
+                <a:cs typeface="DejaVu Sans"/>
+              </a:defRPr>
+            </a:lvl9pPr>
+          </a:lstStyle>
+          <a:p xmlns:a="http://schemas.openxmlformats.org/drawingml/2006/main">
+            <a:pPr>
+              <a:defRPr sz="1200" b="1">
+                <a:solidFill>
+                  <a:srgbClr val="167655"/>
+                </a:solidFill>
+                <a:latin typeface="DejaVu Sans"/>
+                <a:ea typeface="DejaVu Sans"/>
+                <a:cs typeface="DejaVu Sans"/>
+              </a:defRPr>
+            </a:pPr>
+            <a:r>
+              <a:rPr sz="1200" b="1">
+                <a:solidFill>
+                  <a:srgbClr val="167655"/>
+                </a:solidFill>
+                <a:latin typeface="DejaVu Sans"/>
+                <a:ea typeface="DejaVu Sans"/>
+                <a:cs typeface="DejaVu Sans"/>
+              </a:rPr>
+              <a:t>SMARTWASTE DF  /  ENGENHARIA DE SOFTWARE</a:t>
+            </a:r>
+          </a:p>
+        </p:txBody>
+      </p:sp>
+      <p:sp>
+        <p:nvSpPr>
+          <p:cNvPr id="2" name="">
+            <a:extLst xmlns:a="http://schemas.openxmlformats.org/drawingml/2006/main">
+              <a:ext uri="{FF2B5EF4-FFF2-40B4-BE49-F238E27FC236}">
+                <a16:creationId xmlns:a16="http://schemas.microsoft.com/office/drawing/2014/main" id="{8371328C-D79E-4EE4-A05E-54E48B439874}"/>
+              </a:ext>
+            </a:extLst>
+          </p:cNvPr>
+          <p:cNvSpPr>
+            <a:spLocks xmlns:a="http://schemas.openxmlformats.org/drawingml/2006/main" noGrp="1"/>
+          </p:cNvSpPr>
+          <p:nvPr/>
+        </p:nvSpPr>
+        <p:spPr>
+          <a:xfrm xmlns:a="http://schemas.openxmlformats.org/drawingml/2006/main">
+            <a:off x="609600" y="781050"/>
+            <a:ext cx="10972800" cy="762000"/>
+          </a:xfrm>
+          <a:prstGeom xmlns:a="http://schemas.openxmlformats.org/drawingml/2006/main" prst="rect">
+            <a:avLst/>
+          </a:prstGeom>
+          <a:noFill xmlns:a="http://schemas.openxmlformats.org/drawingml/2006/main"/>
+          <a:ln xmlns:a="http://schemas.openxmlformats.org/drawingml/2006/main" w="0">
+            <a:noFill/>
+            <a:prstDash val="solid"/>
+          </a:ln>
+        </p:spPr>
+        <p:txBody>
+          <a:bodyPr xmlns:a="http://schemas.openxmlformats.org/drawingml/2006/main" lIns="0" tIns="0" rIns="0" bIns="0"/>
+          <a:lstStyle xmlns:a="http://schemas.openxmlformats.org/drawingml/2006/main">
+            <a:defPPr>
+              <a:defRPr sz="3300" b="1">
+                <a:solidFill>
+                  <a:srgbClr val="183B30"/>
+                </a:solidFill>
+                <a:latin typeface="DejaVu Sans"/>
+                <a:ea typeface="DejaVu Sans"/>
+                <a:cs typeface="DejaVu Sans"/>
+              </a:defRPr>
+            </a:defPPr>
+            <a:lvl1pPr>
+              <a:defRPr sz="3300" b="1">
+                <a:solidFill>
+                  <a:srgbClr val="183B30"/>
+                </a:solidFill>
+                <a:latin typeface="DejaVu Sans"/>
+                <a:ea typeface="DejaVu Sans"/>
+                <a:cs typeface="DejaVu Sans"/>
+              </a:defRPr>
+            </a:lvl1pPr>
+            <a:lvl2pPr>
+              <a:defRPr sz="3300" b="1">
+                <a:solidFill>
+                  <a:srgbClr val="183B30"/>
+                </a:solidFill>
+                <a:latin typeface="DejaVu Sans"/>
+                <a:ea typeface="DejaVu Sans"/>
+                <a:cs typeface="DejaVu Sans"/>
+              </a:defRPr>
+            </a:lvl2pPr>
+            <a:lvl3pPr>
+              <a:defRPr sz="3300" b="1">
+                <a:solidFill>
+                  <a:srgbClr val="183B30"/>
+                </a:solidFill>
+                <a:latin typeface="DejaVu Sans"/>
+                <a:ea typeface="DejaVu Sans"/>
+                <a:cs typeface="DejaVu Sans"/>
+              </a:defRPr>
+            </a:lvl3pPr>
+            <a:lvl4pPr>
+              <a:defRPr sz="3300" b="1">
+                <a:solidFill>
+                  <a:srgbClr val="183B30"/>
+                </a:solidFill>
+                <a:latin typeface="DejaVu Sans"/>
+                <a:ea typeface="DejaVu Sans"/>
+                <a:cs typeface="DejaVu Sans"/>
+              </a:defRPr>
+            </a:lvl4pPr>
+            <a:lvl5pPr>
+              <a:defRPr sz="3300" b="1">
+                <a:solidFill>
+                  <a:srgbClr val="183B30"/>
+                </a:solidFill>
+                <a:latin typeface="DejaVu Sans"/>
+                <a:ea typeface="DejaVu Sans"/>
+                <a:cs typeface="DejaVu Sans"/>
+              </a:defRPr>
+            </a:lvl5pPr>
+            <a:lvl6pPr>
+              <a:defRPr sz="3300" b="1">
+                <a:solidFill>
+                  <a:srgbClr val="183B30"/>
+                </a:solidFill>
+                <a:latin typeface="DejaVu Sans"/>
+                <a:ea typeface="DejaVu Sans"/>
+                <a:cs typeface="DejaVu Sans"/>
+              </a:defRPr>
+            </a:lvl6pPr>
+            <a:lvl7pPr>
+              <a:defRPr sz="3300" b="1">
+                <a:solidFill>
+                  <a:srgbClr val="183B30"/>
+                </a:solidFill>
+                <a:latin typeface="DejaVu Sans"/>
+                <a:ea typeface="DejaVu Sans"/>
+                <a:cs typeface="DejaVu Sans"/>
+              </a:defRPr>
+            </a:lvl7pPr>
+            <a:lvl8pPr>
+              <a:defRPr sz="3300" b="1">
+                <a:solidFill>
+                  <a:srgbClr val="183B30"/>
+                </a:solidFill>
+                <a:latin typeface="DejaVu Sans"/>
+                <a:ea typeface="DejaVu Sans"/>
+                <a:cs typeface="DejaVu Sans"/>
+              </a:defRPr>
+            </a:lvl8pPr>
+            <a:lvl9pPr>
+              <a:defRPr sz="3300" b="1">
+                <a:solidFill>
+                  <a:srgbClr val="183B30"/>
+                </a:solidFill>
+                <a:latin typeface="DejaVu Sans"/>
+                <a:ea typeface="DejaVu Sans"/>
+                <a:cs typeface="DejaVu Sans"/>
+              </a:defRPr>
+            </a:lvl9pPr>
+          </a:lstStyle>
+          <a:p xmlns:a="http://schemas.openxmlformats.org/drawingml/2006/main">
+            <a:pPr>
+              <a:defRPr sz="3300" b="1">
+                <a:solidFill>
+                  <a:srgbClr val="183B30"/>
+                </a:solidFill>
+                <a:latin typeface="DejaVu Sans"/>
+                <a:ea typeface="DejaVu Sans"/>
+                <a:cs typeface="DejaVu Sans"/>
+              </a:defRPr>
+            </a:pPr>
+            <a:r>
+              <a:rPr sz="3300" b="1">
+                <a:solidFill>
+                  <a:srgbClr val="183B30"/>
+                </a:solidFill>
+                <a:latin typeface="DejaVu Sans"/>
+                <a:ea typeface="DejaVu Sans"/>
+                <a:cs typeface="DejaVu Sans"/>
+              </a:rPr>
+              <a:t>Catálogo de sensores por configuração</a:t>
+            </a:r>
+          </a:p>
+        </p:txBody>
+      </p:sp>
+      <p:sp>
+        <p:nvSpPr>
+          <p:cNvPr id="3" name="">
+            <a:extLst xmlns:a="http://schemas.openxmlformats.org/drawingml/2006/main">
+              <a:ext uri="{FF2B5EF4-FFF2-40B4-BE49-F238E27FC236}">
+                <a16:creationId xmlns:a16="http://schemas.microsoft.com/office/drawing/2014/main" id="{7BF376D1-6738-401E-9FD8-188A21E02913}"/>
+              </a:ext>
+            </a:extLst>
+          </p:cNvPr>
+          <p:cNvSpPr>
+            <a:spLocks xmlns:a="http://schemas.openxmlformats.org/drawingml/2006/main" noGrp="1"/>
+          </p:cNvSpPr>
+          <p:nvPr/>
+        </p:nvSpPr>
+        <p:spPr>
+          <a:xfrm xmlns:a="http://schemas.openxmlformats.org/drawingml/2006/main">
+            <a:off x="609600" y="6467475"/>
+            <a:ext cx="9048750" cy="228600"/>
+          </a:xfrm>
+          <a:prstGeom xmlns:a="http://schemas.openxmlformats.org/drawingml/2006/main" prst="rect">
+            <a:avLst/>
+          </a:prstGeom>
+          <a:noFill xmlns:a="http://schemas.openxmlformats.org/drawingml/2006/main"/>
+          <a:ln xmlns:a="http://schemas.openxmlformats.org/drawingml/2006/main" w="0">
+            <a:noFill/>
+            <a:prstDash val="solid"/>
+          </a:ln>
+        </p:spPr>
+        <p:txBody>
+          <a:bodyPr xmlns:a="http://schemas.openxmlformats.org/drawingml/2006/main" lIns="0" tIns="0" rIns="0" bIns="0"/>
+          <a:lstStyle xmlns:a="http://schemas.openxmlformats.org/drawingml/2006/main">
+            <a:defPPr>
+              <a:defRPr sz="1200" b="0">
+                <a:solidFill>
+                  <a:srgbClr val="5F736B"/>
+                </a:solidFill>
+                <a:latin typeface="DejaVu Sans"/>
+                <a:ea typeface="DejaVu Sans"/>
+                <a:cs typeface="DejaVu Sans"/>
+              </a:defRPr>
+            </a:defPPr>
+            <a:lvl1pPr>
+              <a:defRPr sz="1200" b="0">
+                <a:solidFill>
+                  <a:srgbClr val="5F736B"/>
+                </a:solidFill>
+                <a:latin typeface="DejaVu Sans"/>
+                <a:ea typeface="DejaVu Sans"/>
+                <a:cs typeface="DejaVu Sans"/>
+              </a:defRPr>
+            </a:lvl1pPr>
+            <a:lvl2pPr>
+              <a:defRPr sz="1200" b="0">
+                <a:solidFill>
+                  <a:srgbClr val="5F736B"/>
+                </a:solidFill>
+                <a:latin typeface="DejaVu Sans"/>
+                <a:ea typeface="DejaVu Sans"/>
+                <a:cs typeface="DejaVu Sans"/>
+              </a:defRPr>
+            </a:lvl2pPr>
+            <a:lvl3pPr>
+              <a:defRPr sz="1200" b="0">
+                <a:solidFill>
+                  <a:srgbClr val="5F736B"/>
+                </a:solidFill>
+                <a:latin typeface="DejaVu Sans"/>
+                <a:ea typeface="DejaVu Sans"/>
+                <a:cs typeface="DejaVu Sans"/>
+              </a:defRPr>
+            </a:lvl3pPr>
+            <a:lvl4pPr>
+              <a:defRPr sz="1200" b="0">
+                <a:solidFill>
+                  <a:srgbClr val="5F736B"/>
+                </a:solidFill>
+                <a:latin typeface="DejaVu Sans"/>
+                <a:ea typeface="DejaVu Sans"/>
+                <a:cs typeface="DejaVu Sans"/>
+              </a:defRPr>
+            </a:lvl4pPr>
+            <a:lvl5pPr>
+              <a:defRPr sz="1200" b="0">
+                <a:solidFill>
+                  <a:srgbClr val="5F736B"/>
+                </a:solidFill>
+                <a:latin typeface="DejaVu Sans"/>
+                <a:ea typeface="DejaVu Sans"/>
+                <a:cs typeface="DejaVu Sans"/>
+              </a:defRPr>
+            </a:lvl5pPr>
+            <a:lvl6pPr>
+              <a:defRPr sz="1200" b="0">
+                <a:solidFill>
+                  <a:srgbClr val="5F736B"/>
+                </a:solidFill>
+                <a:latin typeface="DejaVu Sans"/>
+                <a:ea typeface="DejaVu Sans"/>
+                <a:cs typeface="DejaVu Sans"/>
+              </a:defRPr>
+            </a:lvl6pPr>
+            <a:lvl7pPr>
+              <a:defRPr sz="1200" b="0">
+                <a:solidFill>
+                  <a:srgbClr val="5F736B"/>
+                </a:solidFill>
+                <a:latin typeface="DejaVu Sans"/>
+                <a:ea typeface="DejaVu Sans"/>
+                <a:cs typeface="DejaVu Sans"/>
+              </a:defRPr>
+            </a:lvl7pPr>
+            <a:lvl8pPr>
+              <a:defRPr sz="1200" b="0">
+                <a:solidFill>
+                  <a:srgbClr val="5F736B"/>
+                </a:solidFill>
+                <a:latin typeface="DejaVu Sans"/>
+                <a:ea typeface="DejaVu Sans"/>
+                <a:cs typeface="DejaVu Sans"/>
+              </a:defRPr>
+            </a:lvl8pPr>
+            <a:lvl9pPr>
+              <a:defRPr sz="1200" b="0">
+                <a:solidFill>
+                  <a:srgbClr val="5F736B"/>
+                </a:solidFill>
+                <a:latin typeface="DejaVu Sans"/>
+                <a:ea typeface="DejaVu Sans"/>
+                <a:cs typeface="DejaVu Sans"/>
+              </a:defRPr>
+            </a:lvl9pPr>
+          </a:lstStyle>
+          <a:p xmlns:a="http://schemas.openxmlformats.org/drawingml/2006/main">
+            <a:pPr>
+              <a:defRPr sz="1200" b="0">
+                <a:solidFill>
+                  <a:srgbClr val="5F736B"/>
+                </a:solidFill>
+                <a:latin typeface="DejaVu Sans"/>
+                <a:ea typeface="DejaVu Sans"/>
+                <a:cs typeface="DejaVu Sans"/>
+              </a:defRPr>
+            </a:pPr>
+            <a:r>
+              <a:rPr sz="1200" b="0">
+                <a:solidFill>
+                  <a:srgbClr val="5F736B"/>
+                </a:solidFill>
+                <a:latin typeface="DejaVu Sans"/>
+                <a:ea typeface="DejaVu Sans"/>
+                <a:cs typeface="DejaVu Sans"/>
+              </a:rPr>
+              <a:t>Anny, Arthur, Eduardo e Jéssica</a:t>
+            </a:r>
+          </a:p>
+        </p:txBody>
+      </p:sp>
+      <p:sp>
+        <p:nvSpPr>
+          <p:cNvPr id="4" name="">
+            <a:extLst xmlns:a="http://schemas.openxmlformats.org/drawingml/2006/main">
+              <a:ext uri="{FF2B5EF4-FFF2-40B4-BE49-F238E27FC236}">
+                <a16:creationId xmlns:a16="http://schemas.microsoft.com/office/drawing/2014/main" id="{5D7ED707-DFBA-4D73-8059-7CF286593E04}"/>
+              </a:ext>
+            </a:extLst>
+          </p:cNvPr>
+          <p:cNvSpPr>
+            <a:spLocks xmlns:a="http://schemas.openxmlformats.org/drawingml/2006/main" noGrp="1"/>
+          </p:cNvSpPr>
+          <p:nvPr/>
+        </p:nvSpPr>
+        <p:spPr>
+          <a:xfrm xmlns:a="http://schemas.openxmlformats.org/drawingml/2006/main">
+            <a:off x="11239500" y="6467475"/>
+            <a:ext cx="381000" cy="228600"/>
+          </a:xfrm>
+          <a:prstGeom xmlns:a="http://schemas.openxmlformats.org/drawingml/2006/main" prst="rect">
+            <a:avLst/>
+          </a:prstGeom>
+          <a:noFill xmlns:a="http://schemas.openxmlformats.org/drawingml/2006/main"/>
+          <a:ln xmlns:a="http://schemas.openxmlformats.org/drawingml/2006/main" w="0">
+            <a:noFill/>
+            <a:prstDash val="solid"/>
+          </a:ln>
+        </p:spPr>
+        <p:txBody>
+          <a:bodyPr xmlns:a="http://schemas.openxmlformats.org/drawingml/2006/main" lIns="0" tIns="0" rIns="0" bIns="0"/>
+          <a:lstStyle xmlns:a="http://schemas.openxmlformats.org/drawingml/2006/main">
+            <a:defPPr>
+              <a:defRPr sz="1200" b="0">
+                <a:solidFill>
+                  <a:srgbClr val="5F736B"/>
+                </a:solidFill>
+                <a:latin typeface="DejaVu Sans"/>
+                <a:ea typeface="DejaVu Sans"/>
+                <a:cs typeface="DejaVu Sans"/>
+              </a:defRPr>
+            </a:defPPr>
+            <a:lvl1pPr>
+              <a:defRPr sz="1200" b="0">
+                <a:solidFill>
+                  <a:srgbClr val="5F736B"/>
+                </a:solidFill>
+                <a:latin typeface="DejaVu Sans"/>
+                <a:ea typeface="DejaVu Sans"/>
+                <a:cs typeface="DejaVu Sans"/>
+              </a:defRPr>
+            </a:lvl1pPr>
+            <a:lvl2pPr>
+              <a:defRPr sz="1200" b="0">
+                <a:solidFill>
+                  <a:srgbClr val="5F736B"/>
+                </a:solidFill>
+                <a:latin typeface="DejaVu Sans"/>
+                <a:ea typeface="DejaVu Sans"/>
+                <a:cs typeface="DejaVu Sans"/>
+              </a:defRPr>
+            </a:lvl2pPr>
+            <a:lvl3pPr>
+              <a:defRPr sz="1200" b="0">
+                <a:solidFill>
+                  <a:srgbClr val="5F736B"/>
+                </a:solidFill>
+                <a:latin typeface="DejaVu Sans"/>
+                <a:ea typeface="DejaVu Sans"/>
+                <a:cs typeface="DejaVu Sans"/>
+              </a:defRPr>
+            </a:lvl3pPr>
+            <a:lvl4pPr>
+              <a:defRPr sz="1200" b="0">
+                <a:solidFill>
+                  <a:srgbClr val="5F736B"/>
+                </a:solidFill>
+                <a:latin typeface="DejaVu Sans"/>
+                <a:ea typeface="DejaVu Sans"/>
+                <a:cs typeface="DejaVu Sans"/>
+              </a:defRPr>
+            </a:lvl4pPr>
+            <a:lvl5pPr>
+              <a:defRPr sz="1200" b="0">
+                <a:solidFill>
+                  <a:srgbClr val="5F736B"/>
+                </a:solidFill>
+                <a:latin typeface="DejaVu Sans"/>
+                <a:ea typeface="DejaVu Sans"/>
+                <a:cs typeface="DejaVu Sans"/>
+              </a:defRPr>
+            </a:lvl5pPr>
+            <a:lvl6pPr>
+              <a:defRPr sz="1200" b="0">
+                <a:solidFill>
+                  <a:srgbClr val="5F736B"/>
+                </a:solidFill>
+                <a:latin typeface="DejaVu Sans"/>
+                <a:ea typeface="DejaVu Sans"/>
+                <a:cs typeface="DejaVu Sans"/>
+              </a:defRPr>
+            </a:lvl6pPr>
+            <a:lvl7pPr>
+              <a:defRPr sz="1200" b="0">
+                <a:solidFill>
+                  <a:srgbClr val="5F736B"/>
+                </a:solidFill>
+                <a:latin typeface="DejaVu Sans"/>
+                <a:ea typeface="DejaVu Sans"/>
+                <a:cs typeface="DejaVu Sans"/>
+              </a:defRPr>
+            </a:lvl7pPr>
+            <a:lvl8pPr>
+              <a:defRPr sz="1200" b="0">
+                <a:solidFill>
+                  <a:srgbClr val="5F736B"/>
+                </a:solidFill>
+                <a:latin typeface="DejaVu Sans"/>
+                <a:ea typeface="DejaVu Sans"/>
+                <a:cs typeface="DejaVu Sans"/>
+              </a:defRPr>
+            </a:lvl8pPr>
+            <a:lvl9pPr>
+              <a:defRPr sz="1200" b="0">
+                <a:solidFill>
+                  <a:srgbClr val="5F736B"/>
+                </a:solidFill>
+                <a:latin typeface="DejaVu Sans"/>
+                <a:ea typeface="DejaVu Sans"/>
+                <a:cs typeface="DejaVu Sans"/>
+              </a:defRPr>
+            </a:lvl9pPr>
+          </a:lstStyle>
+          <a:p xmlns:a="http://schemas.openxmlformats.org/drawingml/2006/main">
+            <a:pPr>
+              <a:defRPr sz="1200" b="0">
+                <a:solidFill>
+                  <a:srgbClr val="5F736B"/>
+                </a:solidFill>
+                <a:latin typeface="DejaVu Sans"/>
+                <a:ea typeface="DejaVu Sans"/>
+                <a:cs typeface="DejaVu Sans"/>
+              </a:defRPr>
+            </a:pPr>
+            <a:r>
+              <a:rPr sz="1200" b="0">
+                <a:solidFill>
+                  <a:srgbClr val="5F736B"/>
+                </a:solidFill>
+                <a:latin typeface="DejaVu Sans"/>
+                <a:ea typeface="DejaVu Sans"/>
+                <a:cs typeface="DejaVu Sans"/>
+              </a:rPr>
+              <a:t>11</a:t>
+            </a:r>
+          </a:p>
+        </p:txBody>
+      </p:sp>
+      <p:sp>
+        <p:nvSpPr>
+          <p:cNvPr id="5" name="">
+            <a:extLst xmlns:a="http://schemas.openxmlformats.org/drawingml/2006/main">
+              <a:ext uri="{FF2B5EF4-FFF2-40B4-BE49-F238E27FC236}">
+                <a16:creationId xmlns:a16="http://schemas.microsoft.com/office/drawing/2014/main" id="{F98CEAF6-5E82-4BA0-B20C-FE42072EEB67}"/>
+              </a:ext>
+            </a:extLst>
+          </p:cNvPr>
+          <p:cNvSpPr>
+            <a:spLocks xmlns:a="http://schemas.openxmlformats.org/drawingml/2006/main" noGrp="1"/>
+          </p:cNvSpPr>
+          <p:nvPr/>
+        </p:nvSpPr>
+        <p:spPr>
+          <a:xfrm xmlns:a="http://schemas.openxmlformats.org/drawingml/2006/main">
+            <a:off x="609600" y="1676400"/>
+            <a:ext cx="10953750" cy="552450"/>
+          </a:xfrm>
+          <a:prstGeom xmlns:a="http://schemas.openxmlformats.org/drawingml/2006/main" prst="rect">
+            <a:avLst/>
+          </a:prstGeom>
+          <a:noFill xmlns:a="http://schemas.openxmlformats.org/drawingml/2006/main"/>
+          <a:ln xmlns:a="http://schemas.openxmlformats.org/drawingml/2006/main" w="0">
+            <a:noFill/>
+            <a:prstDash val="solid"/>
+          </a:ln>
+        </p:spPr>
+        <p:txBody>
+          <a:bodyPr xmlns:a="http://schemas.openxmlformats.org/drawingml/2006/main" lIns="0" tIns="0" rIns="0" bIns="0"/>
+          <a:lstStyle xmlns:a="http://schemas.openxmlformats.org/drawingml/2006/main">
+            <a:defPPr>
+              <a:defRPr sz="1875" b="0">
+                <a:solidFill>
+                  <a:srgbClr val="183B30"/>
+                </a:solidFill>
+                <a:latin typeface="DejaVu Sans"/>
+                <a:ea typeface="DejaVu Sans"/>
+                <a:cs typeface="DejaVu Sans"/>
+              </a:defRPr>
+            </a:defPPr>
+            <a:lvl1pPr>
+              <a:defRPr sz="1875" b="0">
+                <a:solidFill>
+                  <a:srgbClr val="183B30"/>
+                </a:solidFill>
+                <a:latin typeface="DejaVu Sans"/>
+                <a:ea typeface="DejaVu Sans"/>
+                <a:cs typeface="DejaVu Sans"/>
+              </a:defRPr>
+            </a:lvl1pPr>
+            <a:lvl2pPr>
+              <a:defRPr sz="1875" b="0">
+                <a:solidFill>
+                  <a:srgbClr val="183B30"/>
+                </a:solidFill>
+                <a:latin typeface="DejaVu Sans"/>
+                <a:ea typeface="DejaVu Sans"/>
+                <a:cs typeface="DejaVu Sans"/>
+              </a:defRPr>
+            </a:lvl2pPr>
+            <a:lvl3pPr>
+              <a:defRPr sz="1875" b="0">
+                <a:solidFill>
+                  <a:srgbClr val="183B30"/>
+                </a:solidFill>
+                <a:latin typeface="DejaVu Sans"/>
+                <a:ea typeface="DejaVu Sans"/>
+                <a:cs typeface="DejaVu Sans"/>
+              </a:defRPr>
+            </a:lvl3pPr>
+            <a:lvl4pPr>
+              <a:defRPr sz="1875" b="0">
+                <a:solidFill>
+                  <a:srgbClr val="183B30"/>
+                </a:solidFill>
+                <a:latin typeface="DejaVu Sans"/>
+                <a:ea typeface="DejaVu Sans"/>
+                <a:cs typeface="DejaVu Sans"/>
+              </a:defRPr>
+            </a:lvl4pPr>
+            <a:lvl5pPr>
+              <a:defRPr sz="1875" b="0">
+                <a:solidFill>
+                  <a:srgbClr val="183B30"/>
+                </a:solidFill>
+                <a:latin typeface="DejaVu Sans"/>
+                <a:ea typeface="DejaVu Sans"/>
+                <a:cs typeface="DejaVu Sans"/>
+              </a:defRPr>
+            </a:lvl5pPr>
+            <a:lvl6pPr>
+              <a:defRPr sz="1875" b="0">
+                <a:solidFill>
+                  <a:srgbClr val="183B30"/>
+                </a:solidFill>
+                <a:latin typeface="DejaVu Sans"/>
+                <a:ea typeface="DejaVu Sans"/>
+                <a:cs typeface="DejaVu Sans"/>
+              </a:defRPr>
+            </a:lvl6pPr>
+            <a:lvl7pPr>
+              <a:defRPr sz="1875" b="0">
+                <a:solidFill>
+                  <a:srgbClr val="183B30"/>
+                </a:solidFill>
+                <a:latin typeface="DejaVu Sans"/>
+                <a:ea typeface="DejaVu Sans"/>
+                <a:cs typeface="DejaVu Sans"/>
+              </a:defRPr>
+            </a:lvl7pPr>
+            <a:lvl8pPr>
+              <a:defRPr sz="1875" b="0">
+                <a:solidFill>
+                  <a:srgbClr val="183B30"/>
+                </a:solidFill>
+                <a:latin typeface="DejaVu Sans"/>
+                <a:ea typeface="DejaVu Sans"/>
+                <a:cs typeface="DejaVu Sans"/>
+              </a:defRPr>
+            </a:lvl8pPr>
+            <a:lvl9pPr>
+              <a:defRPr sz="1875" b="0">
+                <a:solidFill>
+                  <a:srgbClr val="183B30"/>
+                </a:solidFill>
+                <a:latin typeface="DejaVu Sans"/>
+                <a:ea typeface="DejaVu Sans"/>
+                <a:cs typeface="DejaVu Sans"/>
+              </a:defRPr>
+            </a:lvl9pPr>
+          </a:lstStyle>
+          <a:p xmlns:a="http://schemas.openxmlformats.org/drawingml/2006/main">
+            <a:pPr>
+              <a:defRPr sz="1875" b="0">
+                <a:solidFill>
+                  <a:srgbClr val="183B30"/>
+                </a:solidFill>
+                <a:latin typeface="DejaVu Sans"/>
+                <a:ea typeface="DejaVu Sans"/>
+                <a:cs typeface="DejaVu Sans"/>
+              </a:defRPr>
+            </a:pPr>
+            <a:r>
+              <a:rPr sz="1875" b="0">
+                <a:solidFill>
+                  <a:srgbClr val="183B30"/>
+                </a:solidFill>
+                <a:latin typeface="DejaVu Sans"/>
+                <a:ea typeface="DejaVu Sans"/>
+                <a:cs typeface="DejaVu Sans"/>
+              </a:rPr>
+              <a:t>Perfil = medidas esperadas, unidades, faixas e intervalo de envio.</a:t>
+            </a:r>
+          </a:p>
+        </p:txBody>
+      </p:sp>
+      <p:graphicFrame>
+        <p:nvGraphicFramePr>
+          <p:cNvPr id="6" name="">
+            <a:extLst xmlns:a="http://schemas.openxmlformats.org/drawingml/2006/main">
+              <a:ext uri="{FF2B5EF4-FFF2-40B4-BE49-F238E27FC236}">
+                <a16:creationId xmlns:a16="http://schemas.microsoft.com/office/drawing/2014/main" id="{155BCA77-D45D-4FA9-AB35-4A7A30655753}"/>
+              </a:ext>
+            </a:extLst>
+          </p:cNvPr>
+          <p:cNvGraphicFramePr/>
+          <p:nvPr/>
+        </p:nvGraphicFramePr>
+        <p:xfrm>
+          <a:off xmlns:a="http://schemas.openxmlformats.org/drawingml/2006/main" x="609600" y="2381250"/>
+          <a:ext xmlns:a="http://schemas.openxmlformats.org/drawingml/2006/main" cx="10972800" cy="2857500"/>
+        </p:xfrm>
+        <a:graphic xmlns:a="http://schemas.openxmlformats.org/drawingml/2006/main">
+          <a:graphicData uri="http://schemas.openxmlformats.org/drawingml/2006/table">
+            <a:tbl>
+              <a:tblPr/>
+              <a:tblGrid>
+                <a:gridCol w="2428875"/>
+                <a:gridCol w="4286250"/>
+                <a:gridCol w="4257675"/>
+              </a:tblGrid>
+              <a:tr h="571500">
+                <a:tc>
+                  <a:txBody>
+                    <a:bodyPr/>
+                    <a:lstStyle/>
+                    <a:p>
+                      <a:r>
+                        <a:rPr sz="1875" b="1">
+                          <a:solidFill>
+                            <a:srgbClr val="FFFFFF"/>
+                          </a:solidFill>
+                          <a:latin typeface="DejaVu Sans"/>
+                          <a:ea typeface="DejaVu Sans"/>
+                          <a:cs typeface="DejaVu Sans"/>
+                        </a:rPr>
+                        <a:t>Cadastro</a:t>
+                      </a:r>
+                    </a:p>
+                  </a:txBody>
+                  <a:tcPr marL="91440" marR="91440" marT="45720" marB="45720">
+                    <a:lnL w="9525">
+                      <a:solidFill>
+                        <a:srgbClr val="CFDAD1"/>
+                      </a:solidFill>
+                      <a:prstDash val="solid"/>
+                    </a:lnL>
+                    <a:lnR w="9525">
+                      <a:solidFill>
+                        <a:srgbClr val="CFDAD1"/>
+                      </a:solidFill>
+                      <a:prstDash val="solid"/>
+                    </a:lnR>
+                    <a:lnT w="9525">
+                      <a:solidFill>
+                        <a:srgbClr val="CFDAD1"/>
+                      </a:solidFill>
+                      <a:prstDash val="solid"/>
+                    </a:lnT>
+                    <a:lnB w="9525">
+                      <a:solidFill>
+                        <a:srgbClr val="CFDAD1"/>
+                      </a:solidFill>
+                      <a:prstDash val="solid"/>
+                    </a:lnB>
+                    <a:solidFill>
+                      <a:srgbClr val="167655"/>
+                    </a:solidFill>
+                  </a:tcPr>
+                </a:tc>
+                <a:tc>
+                  <a:txBody>
+                    <a:bodyPr/>
+                    <a:lstStyle/>
+                    <a:p>
+                      <a:r>
+                        <a:rPr sz="1875" b="1">
+                          <a:solidFill>
+                            <a:srgbClr val="FFFFFF"/>
+                          </a:solidFill>
+                          <a:latin typeface="DejaVu Sans"/>
+                          <a:ea typeface="DejaVu Sans"/>
+                          <a:cs typeface="DejaVu Sans"/>
+                        </a:rPr>
+                        <a:t>Coleta urbana</a:t>
+                      </a:r>
+                    </a:p>
+                  </a:txBody>
+                  <a:tcPr marL="91440" marR="91440" marT="45720" marB="45720">
+                    <a:lnR w="9525">
+                      <a:solidFill>
+                        <a:srgbClr val="CFDAD1"/>
+                      </a:solidFill>
+                      <a:prstDash val="solid"/>
+                    </a:lnR>
+                    <a:lnT w="9525">
+                      <a:solidFill>
+                        <a:srgbClr val="CFDAD1"/>
+                      </a:solidFill>
+                      <a:prstDash val="solid"/>
+                    </a:lnT>
+                    <a:lnB w="9525">
+                      <a:solidFill>
+                        <a:srgbClr val="CFDAD1"/>
+                      </a:solidFill>
+                      <a:prstDash val="solid"/>
+                    </a:lnB>
+                    <a:solidFill>
+                      <a:srgbClr val="167655"/>
+                    </a:solidFill>
+                  </a:tcPr>
+                </a:tc>
+                <a:tc>
+                  <a:txBody>
+                    <a:bodyPr/>
+                    <a:lstStyle/>
+                    <a:p>
+                      <a:r>
+                        <a:rPr sz="1875" b="1">
+                          <a:solidFill>
+                            <a:srgbClr val="FFFFFF"/>
+                          </a:solidFill>
+                          <a:latin typeface="DejaVu Sans"/>
+                          <a:ea typeface="DejaVu Sans"/>
+                          <a:cs typeface="DejaVu Sans"/>
+                        </a:rPr>
+                        <a:t>Exemplo rural</a:t>
+                      </a:r>
+                    </a:p>
+                  </a:txBody>
+                  <a:tcPr marL="91440" marR="91440" marT="45720" marB="45720">
+                    <a:lnR w="9525">
+                      <a:solidFill>
+                        <a:srgbClr val="CFDAD1"/>
+                      </a:solidFill>
+                      <a:prstDash val="solid"/>
+                    </a:lnR>
+                    <a:lnT w="9525">
+                      <a:solidFill>
+                        <a:srgbClr val="CFDAD1"/>
+                      </a:solidFill>
+                      <a:prstDash val="solid"/>
+                    </a:lnT>
+                    <a:lnB w="9525">
+                      <a:solidFill>
+                        <a:srgbClr val="CFDAD1"/>
+                      </a:solidFill>
+                      <a:prstDash val="solid"/>
+                    </a:lnB>
+                    <a:solidFill>
+                      <a:srgbClr val="167655"/>
+                    </a:solidFill>
+                  </a:tcPr>
+                </a:tc>
+              </a:tr>
+              <a:tr h="571500">
+                <a:tc>
+                  <a:txBody>
+                    <a:bodyPr/>
+                    <a:lstStyle/>
+                    <a:p>
+                      <a:r>
+                        <a:rPr sz="1875" b="0">
+                          <a:solidFill>
+                            <a:srgbClr val="183B30"/>
+                          </a:solidFill>
+                          <a:latin typeface="DejaVu Sans"/>
+                          <a:ea typeface="DejaVu Sans"/>
+                          <a:cs typeface="DejaVu Sans"/>
+                        </a:rPr>
+                        <a:t>Domínio</a:t>
+                      </a:r>
+                    </a:p>
+                  </a:txBody>
+                  <a:tcPr marL="91440" marR="91440" marT="45720" marB="45720">
+                    <a:lnL w="9525">
+                      <a:solidFill>
+                        <a:srgbClr val="CFDAD1"/>
+                      </a:solidFill>
+                      <a:prstDash val="solid"/>
+                    </a:lnL>
+                    <a:lnR w="9525">
+                      <a:solidFill>
+                        <a:srgbClr val="CFDAD1"/>
+                      </a:solidFill>
+                      <a:prstDash val="solid"/>
+                    </a:lnR>
+                    <a:lnB w="9525">
+                      <a:solidFill>
+                        <a:srgbClr val="CFDAD1"/>
+                      </a:solidFill>
+                      <a:prstDash val="solid"/>
+                    </a:lnB>
+                    <a:solidFill>
+                      <a:srgbClr val="FFFFFF"/>
+                    </a:solidFill>
+                  </a:tcPr>
+                </a:tc>
+                <a:tc>
+                  <a:txBody>
+                    <a:bodyPr/>
+                    <a:lstStyle/>
+                    <a:p>
+                      <a:r>
+                        <a:rPr sz="1875" b="0">
+                          <a:solidFill>
+                            <a:srgbClr val="183B30"/>
+                          </a:solidFill>
+                          <a:latin typeface="DejaVu Sans"/>
+                          <a:ea typeface="DejaVu Sans"/>
+                          <a:cs typeface="DejaVu Sans"/>
+                        </a:rPr>
+                        <a:t>Resíduos</a:t>
+                      </a:r>
+                    </a:p>
+                  </a:txBody>
+                  <a:tcPr marL="91440" marR="91440" marT="45720" marB="45720">
+                    <a:lnR w="9525">
+                      <a:solidFill>
+                        <a:srgbClr val="CFDAD1"/>
+                      </a:solidFill>
+                      <a:prstDash val="solid"/>
+                    </a:lnR>
+                    <a:lnB w="9525">
+                      <a:solidFill>
+                        <a:srgbClr val="CFDAD1"/>
+                      </a:solidFill>
+                      <a:prstDash val="solid"/>
+                    </a:lnB>
+                    <a:solidFill>
+                      <a:srgbClr val="FFFFFF"/>
+                    </a:solidFill>
+                  </a:tcPr>
+                </a:tc>
+                <a:tc>
+                  <a:txBody>
+                    <a:bodyPr/>
+                    <a:lstStyle/>
+                    <a:p>
+                      <a:r>
+                        <a:rPr sz="1875" b="0">
+                          <a:solidFill>
+                            <a:srgbClr val="183B30"/>
+                          </a:solidFill>
+                          <a:latin typeface="DejaVu Sans"/>
+                          <a:ea typeface="DejaVu Sans"/>
+                          <a:cs typeface="DejaVu Sans"/>
+                        </a:rPr>
+                        <a:t>Agricultura</a:t>
+                      </a:r>
+                    </a:p>
+                  </a:txBody>
+                  <a:tcPr marL="91440" marR="91440" marT="45720" marB="45720">
+                    <a:lnR w="9525">
+                      <a:solidFill>
+                        <a:srgbClr val="CFDAD1"/>
+                      </a:solidFill>
+                      <a:prstDash val="solid"/>
+                    </a:lnR>
+                    <a:lnB w="9525">
+                      <a:solidFill>
+                        <a:srgbClr val="CFDAD1"/>
+                      </a:solidFill>
+                      <a:prstDash val="solid"/>
+                    </a:lnB>
+                    <a:solidFill>
+                      <a:srgbClr val="FFFFFF"/>
+                    </a:solidFill>
+                  </a:tcPr>
+                </a:tc>
+              </a:tr>
+              <a:tr h="571500">
+                <a:tc>
+                  <a:txBody>
+                    <a:bodyPr/>
+                    <a:lstStyle/>
+                    <a:p>
+                      <a:r>
+                        <a:rPr sz="1875" b="0">
+                          <a:solidFill>
+                            <a:srgbClr val="183B30"/>
+                          </a:solidFill>
+                          <a:latin typeface="DejaVu Sans"/>
+                          <a:ea typeface="DejaVu Sans"/>
+                          <a:cs typeface="DejaVu Sans"/>
+                        </a:rPr>
+                        <a:t>Perfil</a:t>
+                      </a:r>
+                    </a:p>
+                  </a:txBody>
+                  <a:tcPr marL="91440" marR="91440" marT="45720" marB="45720">
+                    <a:lnL w="9525">
+                      <a:solidFill>
+                        <a:srgbClr val="CFDAD1"/>
+                      </a:solidFill>
+                      <a:prstDash val="solid"/>
+                    </a:lnL>
+                    <a:lnR w="9525">
+                      <a:solidFill>
+                        <a:srgbClr val="CFDAD1"/>
+                      </a:solidFill>
+                      <a:prstDash val="solid"/>
+                    </a:lnR>
+                    <a:lnB w="9525">
+                      <a:solidFill>
+                        <a:srgbClr val="CFDAD1"/>
+                      </a:solidFill>
+                      <a:prstDash val="solid"/>
+                    </a:lnB>
+                    <a:solidFill>
+                      <a:srgbClr val="F5F5EF"/>
+                    </a:solidFill>
+                  </a:tcPr>
+                </a:tc>
+                <a:tc>
+                  <a:txBody>
+                    <a:bodyPr/>
+                    <a:lstStyle/>
+                    <a:p>
+                      <a:r>
+                        <a:rPr sz="1875" b="0">
+                          <a:solidFill>
+                            <a:srgbClr val="183B30"/>
+                          </a:solidFill>
+                          <a:latin typeface="DejaVu Sans"/>
+                          <a:ea typeface="DejaVu Sans"/>
+                          <a:cs typeface="DejaVu Sans"/>
+                        </a:rPr>
+                        <a:t>Lixeira</a:t>
+                      </a:r>
+                    </a:p>
+                  </a:txBody>
+                  <a:tcPr marL="91440" marR="91440" marT="45720" marB="45720">
+                    <a:lnR w="9525">
+                      <a:solidFill>
+                        <a:srgbClr val="CFDAD1"/>
+                      </a:solidFill>
+                      <a:prstDash val="solid"/>
+                    </a:lnR>
+                    <a:lnB w="9525">
+                      <a:solidFill>
+                        <a:srgbClr val="CFDAD1"/>
+                      </a:solidFill>
+                      <a:prstDash val="solid"/>
+                    </a:lnB>
+                    <a:solidFill>
+                      <a:srgbClr val="F5F5EF"/>
+                    </a:solidFill>
+                  </a:tcPr>
+                </a:tc>
+                <a:tc>
+                  <a:txBody>
+                    <a:bodyPr/>
+                    <a:lstStyle/>
+                    <a:p>
+                      <a:r>
+                        <a:rPr sz="1875" b="0">
+                          <a:solidFill>
+                            <a:srgbClr val="183B30"/>
+                          </a:solidFill>
+                          <a:latin typeface="DejaVu Sans"/>
+                          <a:ea typeface="DejaVu Sans"/>
+                          <a:cs typeface="DejaVu Sans"/>
+                        </a:rPr>
+                        <a:t>Solo</a:t>
+                      </a:r>
+                    </a:p>
+                  </a:txBody>
+                  <a:tcPr marL="91440" marR="91440" marT="45720" marB="45720">
+                    <a:lnR w="9525">
+                      <a:solidFill>
+                        <a:srgbClr val="CFDAD1"/>
+                      </a:solidFill>
+                      <a:prstDash val="solid"/>
+                    </a:lnR>
+                    <a:lnB w="9525">
+                      <a:solidFill>
+                        <a:srgbClr val="CFDAD1"/>
+                      </a:solidFill>
+                      <a:prstDash val="solid"/>
+                    </a:lnB>
+                    <a:solidFill>
+                      <a:srgbClr val="F5F5EF"/>
+                    </a:solidFill>
+                  </a:tcPr>
+                </a:tc>
+              </a:tr>
+              <a:tr h="571500">
+                <a:tc>
+                  <a:txBody>
+                    <a:bodyPr/>
+                    <a:lstStyle/>
+                    <a:p>
+                      <a:r>
+                        <a:rPr sz="1875" b="0">
+                          <a:solidFill>
+                            <a:srgbClr val="183B30"/>
+                          </a:solidFill>
+                          <a:latin typeface="DejaVu Sans"/>
+                          <a:ea typeface="DejaVu Sans"/>
+                          <a:cs typeface="DejaVu Sans"/>
+                        </a:rPr>
+                        <a:t>Dispositivo</a:t>
+                      </a:r>
+                    </a:p>
+                  </a:txBody>
+                  <a:tcPr marL="91440" marR="91440" marT="45720" marB="45720">
+                    <a:lnL w="9525">
+                      <a:solidFill>
+                        <a:srgbClr val="CFDAD1"/>
+                      </a:solidFill>
+                      <a:prstDash val="solid"/>
+                    </a:lnL>
+                    <a:lnR w="9525">
+                      <a:solidFill>
+                        <a:srgbClr val="CFDAD1"/>
+                      </a:solidFill>
+                      <a:prstDash val="solid"/>
+                    </a:lnR>
+                    <a:lnB w="9525">
+                      <a:solidFill>
+                        <a:srgbClr val="CFDAD1"/>
+                      </a:solidFill>
+                      <a:prstDash val="solid"/>
+                    </a:lnB>
+                    <a:solidFill>
+                      <a:srgbClr val="FFFFFF"/>
+                    </a:solidFill>
+                  </a:tcPr>
+                </a:tc>
+                <a:tc>
+                  <a:txBody>
+                    <a:bodyPr/>
+                    <a:lstStyle/>
+                    <a:p>
+                      <a:r>
+                        <a:rPr sz="1875" b="0">
+                          <a:solidFill>
+                            <a:srgbClr val="183B30"/>
+                          </a:solidFill>
+                          <a:latin typeface="DejaVu Sans"/>
+                          <a:ea typeface="DejaVu Sans"/>
+                          <a:cs typeface="DejaVu Sans"/>
+                        </a:rPr>
+                        <a:t>sensor-BIN-01</a:t>
+                      </a:r>
+                    </a:p>
+                  </a:txBody>
+                  <a:tcPr marL="91440" marR="91440" marT="45720" marB="45720">
+                    <a:lnR w="9525">
+                      <a:solidFill>
+                        <a:srgbClr val="CFDAD1"/>
+                      </a:solidFill>
+                      <a:prstDash val="solid"/>
+                    </a:lnR>
+                    <a:lnB w="9525">
+                      <a:solidFill>
+                        <a:srgbClr val="CFDAD1"/>
+                      </a:solidFill>
+                      <a:prstDash val="solid"/>
+                    </a:lnB>
+                    <a:solidFill>
+                      <a:srgbClr val="FFFFFF"/>
+                    </a:solidFill>
+                  </a:tcPr>
+                </a:tc>
+                <a:tc>
+                  <a:txBody>
+                    <a:bodyPr/>
+                    <a:lstStyle/>
+                    <a:p>
+                      <a:r>
+                        <a:rPr sz="1875" b="0">
+                          <a:solidFill>
+                            <a:srgbClr val="183B30"/>
+                          </a:solidFill>
+                          <a:latin typeface="DejaVu Sans"/>
+                          <a:ea typeface="DejaVu Sans"/>
+                          <a:cs typeface="DejaVu Sans"/>
+                        </a:rPr>
+                        <a:t>solo-01</a:t>
+                      </a:r>
+                    </a:p>
+                  </a:txBody>
+                  <a:tcPr marL="91440" marR="91440" marT="45720" marB="45720">
+                    <a:lnR w="9525">
+                      <a:solidFill>
+                        <a:srgbClr val="CFDAD1"/>
+                      </a:solidFill>
+                      <a:prstDash val="solid"/>
+                    </a:lnR>
+                    <a:lnB w="9525">
+                      <a:solidFill>
+                        <a:srgbClr val="CFDAD1"/>
+                      </a:solidFill>
+                      <a:prstDash val="solid"/>
+                    </a:lnB>
+                    <a:solidFill>
+                      <a:srgbClr val="FFFFFF"/>
+                    </a:solidFill>
+                  </a:tcPr>
+                </a:tc>
+              </a:tr>
+              <a:tr h="571500">
+                <a:tc>
+                  <a:txBody>
+                    <a:bodyPr/>
+                    <a:lstStyle/>
+                    <a:p>
+                      <a:r>
+                        <a:rPr sz="1875" b="0">
+                          <a:solidFill>
+                            <a:srgbClr val="183B30"/>
+                          </a:solidFill>
+                          <a:latin typeface="DejaVu Sans"/>
+                          <a:ea typeface="DejaVu Sans"/>
+                          <a:cs typeface="DejaVu Sans"/>
+                        </a:rPr>
+                        <a:t>Medida</a:t>
+                      </a:r>
+                    </a:p>
+                  </a:txBody>
+                  <a:tcPr marL="91440" marR="91440" marT="45720" marB="45720">
+                    <a:lnL w="9525">
+                      <a:solidFill>
+                        <a:srgbClr val="CFDAD1"/>
+                      </a:solidFill>
+                      <a:prstDash val="solid"/>
+                    </a:lnL>
+                    <a:lnR w="9525">
+                      <a:solidFill>
+                        <a:srgbClr val="CFDAD1"/>
+                      </a:solidFill>
+                      <a:prstDash val="solid"/>
+                    </a:lnR>
+                    <a:lnB w="9525">
+                      <a:solidFill>
+                        <a:srgbClr val="CFDAD1"/>
+                      </a:solidFill>
+                      <a:prstDash val="solid"/>
+                    </a:lnB>
+                    <a:solidFill>
+                      <a:srgbClr val="F5F5EF"/>
+                    </a:solidFill>
+                  </a:tcPr>
+                </a:tc>
+                <a:tc>
+                  <a:txBody>
+                    <a:bodyPr/>
+                    <a:lstStyle/>
+                    <a:p>
+                      <a:r>
+                        <a:rPr sz="1875" b="0">
+                          <a:solidFill>
+                            <a:srgbClr val="183B30"/>
+                          </a:solidFill>
+                          <a:latin typeface="DejaVu Sans"/>
+                          <a:ea typeface="DejaVu Sans"/>
+                          <a:cs typeface="DejaVu Sans"/>
+                        </a:rPr>
+                        <a:t>Enchimento (%)</a:t>
+                      </a:r>
+                    </a:p>
+                  </a:txBody>
+                  <a:tcPr marL="91440" marR="91440" marT="45720" marB="45720">
+                    <a:lnR w="9525">
+                      <a:solidFill>
+                        <a:srgbClr val="CFDAD1"/>
+                      </a:solidFill>
+                      <a:prstDash val="solid"/>
+                    </a:lnR>
+                    <a:lnB w="9525">
+                      <a:solidFill>
+                        <a:srgbClr val="CFDAD1"/>
+                      </a:solidFill>
+                      <a:prstDash val="solid"/>
+                    </a:lnB>
+                    <a:solidFill>
+                      <a:srgbClr val="F5F5EF"/>
+                    </a:solidFill>
+                  </a:tcPr>
+                </a:tc>
+                <a:tc>
+                  <a:txBody>
+                    <a:bodyPr/>
+                    <a:lstStyle/>
+                    <a:p>
+                      <a:r>
+                        <a:rPr sz="1875" b="0">
+                          <a:solidFill>
+                            <a:srgbClr val="183B30"/>
+                          </a:solidFill>
+                          <a:latin typeface="DejaVu Sans"/>
+                          <a:ea typeface="DejaVu Sans"/>
+                          <a:cs typeface="DejaVu Sans"/>
+                        </a:rPr>
+                        <a:t>Umidade do solo (%)</a:t>
+                      </a:r>
+                    </a:p>
+                  </a:txBody>
+                  <a:tcPr marL="91440" marR="91440" marT="45720" marB="45720">
+                    <a:lnR w="9525">
+                      <a:solidFill>
+                        <a:srgbClr val="CFDAD1"/>
+                      </a:solidFill>
+                      <a:prstDash val="solid"/>
+                    </a:lnR>
+                    <a:lnB w="9525">
+                      <a:solidFill>
+                        <a:srgbClr val="CFDAD1"/>
+                      </a:solidFill>
+                      <a:prstDash val="solid"/>
+                    </a:lnB>
+                    <a:solidFill>
+                      <a:srgbClr val="F5F5EF"/>
+                    </a:solidFill>
+                  </a:tcPr>
+                </a:tc>
+              </a:tr>
+            </a:tbl>
+          </a:graphicData>
+        </a:graphic>
+      </p:graphicFrame>
+      <p:sp>
+        <p:nvSpPr>
+          <p:cNvPr id="7" name="">
+            <a:extLst xmlns:a="http://schemas.openxmlformats.org/drawingml/2006/main">
+              <a:ext uri="{FF2B5EF4-FFF2-40B4-BE49-F238E27FC236}">
+                <a16:creationId xmlns:a16="http://schemas.microsoft.com/office/drawing/2014/main" id="{9E0A0BB9-E95A-493B-B08D-EA5FDC425C93}"/>
+              </a:ext>
+            </a:extLst>
+          </p:cNvPr>
+          <p:cNvSpPr>
+            <a:spLocks xmlns:a="http://schemas.openxmlformats.org/drawingml/2006/main" noGrp="1"/>
+          </p:cNvSpPr>
+          <p:nvPr/>
+        </p:nvSpPr>
+        <p:spPr>
+          <a:xfrm xmlns:a="http://schemas.openxmlformats.org/drawingml/2006/main">
+            <a:off x="609600" y="5600700"/>
+            <a:ext cx="10953750" cy="400050"/>
+          </a:xfrm>
+          <a:prstGeom xmlns:a="http://schemas.openxmlformats.org/drawingml/2006/main" prst="rect">
+            <a:avLst/>
+          </a:prstGeom>
+          <a:noFill xmlns:a="http://schemas.openxmlformats.org/drawingml/2006/main"/>
+          <a:ln xmlns:a="http://schemas.openxmlformats.org/drawingml/2006/main" w="0">
+            <a:noFill/>
+            <a:prstDash val="solid"/>
+          </a:ln>
+        </p:spPr>
+        <p:txBody>
+          <a:bodyPr xmlns:a="http://schemas.openxmlformats.org/drawingml/2006/main" lIns="0" tIns="0" rIns="0" bIns="0"/>
+          <a:lstStyle xmlns:a="http://schemas.openxmlformats.org/drawingml/2006/main">
+            <a:defPPr>
+              <a:defRPr sz="2100" b="1">
+                <a:solidFill>
+                  <a:srgbClr val="167655"/>
+                </a:solidFill>
+                <a:latin typeface="DejaVu Sans"/>
+                <a:ea typeface="DejaVu Sans"/>
+                <a:cs typeface="DejaVu Sans"/>
+              </a:defRPr>
+            </a:defPPr>
+            <a:lvl1pPr>
+              <a:defRPr sz="2100" b="1">
+                <a:solidFill>
+                  <a:srgbClr val="167655"/>
+                </a:solidFill>
+                <a:latin typeface="DejaVu Sans"/>
+                <a:ea typeface="DejaVu Sans"/>
+                <a:cs typeface="DejaVu Sans"/>
+              </a:defRPr>
+            </a:lvl1pPr>
+            <a:lvl2pPr>
+              <a:defRPr sz="2100" b="1">
+                <a:solidFill>
+                  <a:srgbClr val="167655"/>
+                </a:solidFill>
+                <a:latin typeface="DejaVu Sans"/>
+                <a:ea typeface="DejaVu Sans"/>
+                <a:cs typeface="DejaVu Sans"/>
+              </a:defRPr>
+            </a:lvl2pPr>
+            <a:lvl3pPr>
+              <a:defRPr sz="2100" b="1">
+                <a:solidFill>
+                  <a:srgbClr val="167655"/>
+                </a:solidFill>
+                <a:latin typeface="DejaVu Sans"/>
+                <a:ea typeface="DejaVu Sans"/>
+                <a:cs typeface="DejaVu Sans"/>
+              </a:defRPr>
+            </a:lvl3pPr>
+            <a:lvl4pPr>
+              <a:defRPr sz="2100" b="1">
+                <a:solidFill>
+                  <a:srgbClr val="167655"/>
+                </a:solidFill>
+                <a:latin typeface="DejaVu Sans"/>
+                <a:ea typeface="DejaVu Sans"/>
+                <a:cs typeface="DejaVu Sans"/>
+              </a:defRPr>
+            </a:lvl4pPr>
+            <a:lvl5pPr>
+              <a:defRPr sz="2100" b="1">
+                <a:solidFill>
+                  <a:srgbClr val="167655"/>
+                </a:solidFill>
+                <a:latin typeface="DejaVu Sans"/>
+                <a:ea typeface="DejaVu Sans"/>
+                <a:cs typeface="DejaVu Sans"/>
+              </a:defRPr>
+            </a:lvl5pPr>
+            <a:lvl6pPr>
+              <a:defRPr sz="2100" b="1">
+                <a:solidFill>
+                  <a:srgbClr val="167655"/>
+                </a:solidFill>
+                <a:latin typeface="DejaVu Sans"/>
+                <a:ea typeface="DejaVu Sans"/>
+                <a:cs typeface="DejaVu Sans"/>
+              </a:defRPr>
+            </a:lvl6pPr>
+            <a:lvl7pPr>
+              <a:defRPr sz="2100" b="1">
+                <a:solidFill>
+                  <a:srgbClr val="167655"/>
+                </a:solidFill>
+                <a:latin typeface="DejaVu Sans"/>
+                <a:ea typeface="DejaVu Sans"/>
+                <a:cs typeface="DejaVu Sans"/>
+              </a:defRPr>
+            </a:lvl7pPr>
+            <a:lvl8pPr>
+              <a:defRPr sz="2100" b="1">
+                <a:solidFill>
+                  <a:srgbClr val="167655"/>
+                </a:solidFill>
+                <a:latin typeface="DejaVu Sans"/>
+                <a:ea typeface="DejaVu Sans"/>
+                <a:cs typeface="DejaVu Sans"/>
+              </a:defRPr>
+            </a:lvl8pPr>
+            <a:lvl9pPr>
+              <a:defRPr sz="2100" b="1">
+                <a:solidFill>
+                  <a:srgbClr val="167655"/>
+                </a:solidFill>
+                <a:latin typeface="DejaVu Sans"/>
+                <a:ea typeface="DejaVu Sans"/>
+                <a:cs typeface="DejaVu Sans"/>
+              </a:defRPr>
+            </a:lvl9pPr>
+          </a:lstStyle>
+          <a:p xmlns:a="http://schemas.openxmlformats.org/drawingml/2006/main">
+            <a:pPr>
+              <a:defRPr sz="2100" b="1">
+                <a:solidFill>
+                  <a:srgbClr val="167655"/>
+                </a:solidFill>
+                <a:latin typeface="DejaVu Sans"/>
+                <a:ea typeface="DejaVu Sans"/>
+                <a:cs typeface="DejaVu Sans"/>
+              </a:defRPr>
+            </a:pPr>
+            <a:r>
+              <a:rPr sz="2100" b="1">
+                <a:solidFill>
+                  <a:srgbClr val="167655"/>
+                </a:solidFill>
+                <a:latin typeface="DejaVu Sans"/>
+                <a:ea typeface="DejaVu Sans"/>
+                <a:cs typeface="DejaVu Sans"/>
+              </a:rPr>
+              <a:t>A API cadastra o novo sensor sem alterar o motor de coleta.</a:t>
+            </a:r>
+          </a:p>
+        </p:txBody>
+      </p:sp>
+      <p:sp>
+        <p:nvSpPr>
+          <p:cNvPr id="8" name="">
+            <a:extLst xmlns:a="http://schemas.openxmlformats.org/drawingml/2006/main">
+              <a:ext uri="{FF2B5EF4-FFF2-40B4-BE49-F238E27FC236}">
+                <a16:creationId xmlns:a16="http://schemas.microsoft.com/office/drawing/2014/main" id="{A33397D4-A99C-4569-A34D-F1C6EA3C7D88}"/>
+              </a:ext>
+            </a:extLst>
+          </p:cNvPr>
+          <p:cNvSpPr>
+            <a:spLocks xmlns:a="http://schemas.openxmlformats.org/drawingml/2006/main" noGrp="1"/>
+          </p:cNvSpPr>
+          <p:nvPr/>
+        </p:nvSpPr>
+        <p:spPr>
+          <a:xfrm xmlns:a="http://schemas.openxmlformats.org/drawingml/2006/main">
+            <a:off x="609600" y="6000750"/>
+            <a:ext cx="10953750" cy="333375"/>
+          </a:xfrm>
+          <a:prstGeom xmlns:a="http://schemas.openxmlformats.org/drawingml/2006/main" prst="rect">
+            <a:avLst/>
+          </a:prstGeom>
+          <a:noFill xmlns:a="http://schemas.openxmlformats.org/drawingml/2006/main"/>
+          <a:ln xmlns:a="http://schemas.openxmlformats.org/drawingml/2006/main" w="0">
+            <a:noFill/>
+            <a:prstDash val="solid"/>
+          </a:ln>
+        </p:spPr>
+        <p:txBody>
+          <a:bodyPr xmlns:a="http://schemas.openxmlformats.org/drawingml/2006/main" lIns="0" tIns="0" rIns="0" bIns="0"/>
+          <a:lstStyle xmlns:a="http://schemas.openxmlformats.org/drawingml/2006/main">
+            <a:defPPr>
+              <a:defRPr sz="1725" b="0">
+                <a:solidFill>
+                  <a:srgbClr val="183B30"/>
+                </a:solidFill>
+                <a:latin typeface="DejaVu Sans"/>
+                <a:ea typeface="DejaVu Sans"/>
+                <a:cs typeface="DejaVu Sans"/>
+              </a:defRPr>
+            </a:defPPr>
+            <a:lvl1pPr>
+              <a:defRPr sz="1725" b="0">
+                <a:solidFill>
+                  <a:srgbClr val="183B30"/>
+                </a:solidFill>
+                <a:latin typeface="DejaVu Sans"/>
+                <a:ea typeface="DejaVu Sans"/>
+                <a:cs typeface="DejaVu Sans"/>
+              </a:defRPr>
+            </a:lvl1pPr>
+            <a:lvl2pPr>
+              <a:defRPr sz="1725" b="0">
+                <a:solidFill>
+                  <a:srgbClr val="183B30"/>
+                </a:solidFill>
+                <a:latin typeface="DejaVu Sans"/>
+                <a:ea typeface="DejaVu Sans"/>
+                <a:cs typeface="DejaVu Sans"/>
+              </a:defRPr>
+            </a:lvl2pPr>
+            <a:lvl3pPr>
+              <a:defRPr sz="1725" b="0">
+                <a:solidFill>
+                  <a:srgbClr val="183B30"/>
+                </a:solidFill>
+                <a:latin typeface="DejaVu Sans"/>
+                <a:ea typeface="DejaVu Sans"/>
+                <a:cs typeface="DejaVu Sans"/>
+              </a:defRPr>
+            </a:lvl3pPr>
+            <a:lvl4pPr>
+              <a:defRPr sz="1725" b="0">
+                <a:solidFill>
+                  <a:srgbClr val="183B30"/>
+                </a:solidFill>
+                <a:latin typeface="DejaVu Sans"/>
+                <a:ea typeface="DejaVu Sans"/>
+                <a:cs typeface="DejaVu Sans"/>
+              </a:defRPr>
+            </a:lvl4pPr>
+            <a:lvl5pPr>
+              <a:defRPr sz="1725" b="0">
+                <a:solidFill>
+                  <a:srgbClr val="183B30"/>
+                </a:solidFill>
+                <a:latin typeface="DejaVu Sans"/>
+                <a:ea typeface="DejaVu Sans"/>
+                <a:cs typeface="DejaVu Sans"/>
+              </a:defRPr>
+            </a:lvl5pPr>
+            <a:lvl6pPr>
+              <a:defRPr sz="1725" b="0">
+                <a:solidFill>
+                  <a:srgbClr val="183B30"/>
+                </a:solidFill>
+                <a:latin typeface="DejaVu Sans"/>
+                <a:ea typeface="DejaVu Sans"/>
+                <a:cs typeface="DejaVu Sans"/>
+              </a:defRPr>
+            </a:lvl6pPr>
+            <a:lvl7pPr>
+              <a:defRPr sz="1725" b="0">
+                <a:solidFill>
+                  <a:srgbClr val="183B30"/>
+                </a:solidFill>
+                <a:latin typeface="DejaVu Sans"/>
+                <a:ea typeface="DejaVu Sans"/>
+                <a:cs typeface="DejaVu Sans"/>
+              </a:defRPr>
+            </a:lvl7pPr>
+            <a:lvl8pPr>
+              <a:defRPr sz="1725" b="0">
+                <a:solidFill>
+                  <a:srgbClr val="183B30"/>
+                </a:solidFill>
+                <a:latin typeface="DejaVu Sans"/>
+                <a:ea typeface="DejaVu Sans"/>
+                <a:cs typeface="DejaVu Sans"/>
+              </a:defRPr>
+            </a:lvl8pPr>
+            <a:lvl9pPr>
+              <a:defRPr sz="1725" b="0">
+                <a:solidFill>
+                  <a:srgbClr val="183B30"/>
+                </a:solidFill>
+                <a:latin typeface="DejaVu Sans"/>
+                <a:ea typeface="DejaVu Sans"/>
+                <a:cs typeface="DejaVu Sans"/>
+              </a:defRPr>
+            </a:lvl9pPr>
+          </a:lstStyle>
+          <a:p xmlns:a="http://schemas.openxmlformats.org/drawingml/2006/main">
+            <a:pPr>
+              <a:defRPr sz="1725" b="0">
+                <a:solidFill>
+                  <a:srgbClr val="183B30"/>
+                </a:solidFill>
+                <a:latin typeface="DejaVu Sans"/>
+                <a:ea typeface="DejaVu Sans"/>
+                <a:cs typeface="DejaVu Sans"/>
+              </a:defRPr>
+            </a:pPr>
+            <a:r>
+              <a:rPr sz="1725" b="0">
+                <a:solidFill>
+                  <a:srgbClr val="183B30"/>
+                </a:solidFill>
+                <a:latin typeface="DejaVu Sans"/>
+                <a:ea typeface="DejaVu Sans"/>
+                <a:cs typeface="DejaVu Sans"/>
+              </a:rPr>
+              <a:t>API = interface para outros programas. Os cadastros ficam no banco local.</a:t>
+            </a:r>
+          </a:p>
+        </p:txBody>
+      </p:sp>
+    </p:spTree>
+    <p:extLst>
+      <p:ext uri="{BB962C8B-B14F-4D97-AF65-F5344CB8AC3E}">
+        <p14:creationId xmlns:p14="http://schemas.microsoft.com/office/powerpoint/2010/main" val="1295396488"/>
+      </p:ext>
+    </p:extLst>
+  </p:cSld>
+</p:sld>
+</file>
+
+<file path=ppt/slides/slide13.xml><?xml version="1.0" encoding="utf-8"?>
+<p:sld xmlns:p="http://schemas.openxmlformats.org/presentationml/2006/main">
+  <p:cSld>
+    <p:bg>
+      <p:bgPr>
+        <a:solidFill xmlns:a="http://schemas.openxmlformats.org/drawingml/2006/main">
+          <a:srgbClr val="F5F5EF"/>
+        </a:solidFill>
+      </p:bgPr>
+    </p:bg>
+    <p:spTree>
+      <p:nvGrpSpPr>
+        <p:cNvPr id="1" name=""/>
+        <p:cNvGrpSpPr/>
+        <p:nvPr/>
+      </p:nvGrpSpPr>
+      <p:grpSpPr>
+        <a:xfrm xmlns:a="http://schemas.openxmlformats.org/drawingml/2006/main"/>
+      </p:grpSpPr>
+      <p:sp>
+        <p:nvSpPr>
+          <p:cNvPr id="12" name="">
+            <a:extLst xmlns:a="http://schemas.openxmlformats.org/drawingml/2006/main">
+              <a:ext uri="{FF2B5EF4-FFF2-40B4-BE49-F238E27FC236}">
+                <a16:creationId xmlns:a16="http://schemas.microsoft.com/office/drawing/2014/main" id="{795C2A8F-6ACB-43F8-B111-2696991CE443}"/>
+              </a:ext>
+            </a:extLst>
+          </p:cNvPr>
+          <p:cNvSpPr>
+            <a:spLocks xmlns:a="http://schemas.openxmlformats.org/drawingml/2006/main" noGrp="1"/>
+          </p:cNvSpPr>
+          <p:nvPr/>
+        </p:nvSpPr>
+        <p:spPr>
+          <a:xfrm xmlns:a="http://schemas.openxmlformats.org/drawingml/2006/main">
+            <a:off x="609600" y="276225"/>
+            <a:ext cx="10477500" cy="266700"/>
+          </a:xfrm>
+          <a:prstGeom xmlns:a="http://schemas.openxmlformats.org/drawingml/2006/main" prst="rect">
+            <a:avLst/>
+          </a:prstGeom>
+          <a:noFill xmlns:a="http://schemas.openxmlformats.org/drawingml/2006/main"/>
+          <a:ln xmlns:a="http://schemas.openxmlformats.org/drawingml/2006/main" w="0">
+            <a:noFill/>
+            <a:prstDash val="solid"/>
+          </a:ln>
+        </p:spPr>
+        <p:txBody>
+          <a:bodyPr xmlns:a="http://schemas.openxmlformats.org/drawingml/2006/main" lIns="0" tIns="0" rIns="0" bIns="0"/>
+          <a:lstStyle xmlns:a="http://schemas.openxmlformats.org/drawingml/2006/main">
+            <a:defPPr>
+              <a:defRPr sz="1200" b="1">
+                <a:solidFill>
+                  <a:srgbClr val="167655"/>
+                </a:solidFill>
+                <a:latin typeface="DejaVu Sans"/>
+                <a:ea typeface="DejaVu Sans"/>
+                <a:cs typeface="DejaVu Sans"/>
+              </a:defRPr>
+            </a:defPPr>
+            <a:lvl1pPr>
+              <a:defRPr sz="1200" b="1">
+                <a:solidFill>
+                  <a:srgbClr val="167655"/>
+                </a:solidFill>
+                <a:latin typeface="DejaVu Sans"/>
+                <a:ea typeface="DejaVu Sans"/>
+                <a:cs typeface="DejaVu Sans"/>
+              </a:defRPr>
+            </a:lvl1pPr>
+            <a:lvl2pPr>
+              <a:defRPr sz="1200" b="1">
+                <a:solidFill>
+                  <a:srgbClr val="167655"/>
+                </a:solidFill>
+                <a:latin typeface="DejaVu Sans"/>
+                <a:ea typeface="DejaVu Sans"/>
+                <a:cs typeface="DejaVu Sans"/>
+              </a:defRPr>
+            </a:lvl2pPr>
+            <a:lvl3pPr>
+              <a:defRPr sz="1200" b="1">
+                <a:solidFill>
+                  <a:srgbClr val="167655"/>
+                </a:solidFill>
+                <a:latin typeface="DejaVu Sans"/>
+                <a:ea typeface="DejaVu Sans"/>
+                <a:cs typeface="DejaVu Sans"/>
+              </a:defRPr>
+            </a:lvl3pPr>
+            <a:lvl4pPr>
+              <a:defRPr sz="1200" b="1">
+                <a:solidFill>
+                  <a:srgbClr val="167655"/>
+                </a:solidFill>
+                <a:latin typeface="DejaVu Sans"/>
+                <a:ea typeface="DejaVu Sans"/>
+                <a:cs typeface="DejaVu Sans"/>
+              </a:defRPr>
+            </a:lvl4pPr>
+            <a:lvl5pPr>
+              <a:defRPr sz="1200" b="1">
+                <a:solidFill>
+                  <a:srgbClr val="167655"/>
+                </a:solidFill>
+                <a:latin typeface="DejaVu Sans"/>
+                <a:ea typeface="DejaVu Sans"/>
+                <a:cs typeface="DejaVu Sans"/>
+              </a:defRPr>
+            </a:lvl5pPr>
+            <a:lvl6pPr>
+              <a:defRPr sz="1200" b="1">
+                <a:solidFill>
+                  <a:srgbClr val="167655"/>
+                </a:solidFill>
+                <a:latin typeface="DejaVu Sans"/>
+                <a:ea typeface="DejaVu Sans"/>
+                <a:cs typeface="DejaVu Sans"/>
+              </a:defRPr>
+            </a:lvl6pPr>
+            <a:lvl7pPr>
+              <a:defRPr sz="1200" b="1">
+                <a:solidFill>
+                  <a:srgbClr val="167655"/>
+                </a:solidFill>
+                <a:latin typeface="DejaVu Sans"/>
+                <a:ea typeface="DejaVu Sans"/>
+                <a:cs typeface="DejaVu Sans"/>
+              </a:defRPr>
+            </a:lvl7pPr>
+            <a:lvl8pPr>
+              <a:defRPr sz="1200" b="1">
+                <a:solidFill>
+                  <a:srgbClr val="167655"/>
+                </a:solidFill>
+                <a:latin typeface="DejaVu Sans"/>
+                <a:ea typeface="DejaVu Sans"/>
+                <a:cs typeface="DejaVu Sans"/>
+              </a:defRPr>
+            </a:lvl8pPr>
+            <a:lvl9pPr>
+              <a:defRPr sz="1200" b="1">
+                <a:solidFill>
+                  <a:srgbClr val="167655"/>
+                </a:solidFill>
+                <a:latin typeface="DejaVu Sans"/>
+                <a:ea typeface="DejaVu Sans"/>
+                <a:cs typeface="DejaVu Sans"/>
+              </a:defRPr>
+            </a:lvl9pPr>
+          </a:lstStyle>
+          <a:p xmlns:a="http://schemas.openxmlformats.org/drawingml/2006/main">
+            <a:pPr>
+              <a:defRPr sz="1200" b="1">
+                <a:solidFill>
+                  <a:srgbClr val="167655"/>
+                </a:solidFill>
+                <a:latin typeface="DejaVu Sans"/>
+                <a:ea typeface="DejaVu Sans"/>
+                <a:cs typeface="DejaVu Sans"/>
+              </a:defRPr>
+            </a:pPr>
+            <a:r>
+              <a:rPr sz="1200" b="1">
+                <a:solidFill>
+                  <a:srgbClr val="167655"/>
+                </a:solidFill>
+                <a:latin typeface="DejaVu Sans"/>
+                <a:ea typeface="DejaVu Sans"/>
+                <a:cs typeface="DejaVu Sans"/>
+              </a:rPr>
+              <a:t>SMARTWASTE DF  /  ENGENHARIA DE SOFTWARE</a:t>
+            </a:r>
+          </a:p>
+        </p:txBody>
+      </p:sp>
+      <p:sp>
+        <p:nvSpPr>
+          <p:cNvPr id="2" name="">
+            <a:extLst xmlns:a="http://schemas.openxmlformats.org/drawingml/2006/main">
+              <a:ext uri="{FF2B5EF4-FFF2-40B4-BE49-F238E27FC236}">
+                <a16:creationId xmlns:a16="http://schemas.microsoft.com/office/drawing/2014/main" id="{9457E1A9-8189-4615-993C-06CDAB20A154}"/>
+              </a:ext>
+            </a:extLst>
+          </p:cNvPr>
+          <p:cNvSpPr>
+            <a:spLocks xmlns:a="http://schemas.openxmlformats.org/drawingml/2006/main" noGrp="1"/>
+          </p:cNvSpPr>
+          <p:nvPr/>
+        </p:nvSpPr>
+        <p:spPr>
+          <a:xfrm xmlns:a="http://schemas.openxmlformats.org/drawingml/2006/main">
+            <a:off x="609600" y="781050"/>
+            <a:ext cx="10972800" cy="762000"/>
+          </a:xfrm>
+          <a:prstGeom xmlns:a="http://schemas.openxmlformats.org/drawingml/2006/main" prst="rect">
+            <a:avLst/>
+          </a:prstGeom>
+          <a:noFill xmlns:a="http://schemas.openxmlformats.org/drawingml/2006/main"/>
+          <a:ln xmlns:a="http://schemas.openxmlformats.org/drawingml/2006/main" w="0">
+            <a:noFill/>
+            <a:prstDash val="solid"/>
+          </a:ln>
+        </p:spPr>
+        <p:txBody>
+          <a:bodyPr xmlns:a="http://schemas.openxmlformats.org/drawingml/2006/main" lIns="0" tIns="0" rIns="0" bIns="0"/>
+          <a:lstStyle xmlns:a="http://schemas.openxmlformats.org/drawingml/2006/main">
+            <a:defPPr>
+              <a:defRPr sz="3300" b="1">
+                <a:solidFill>
+                  <a:srgbClr val="183B30"/>
+                </a:solidFill>
+                <a:latin typeface="DejaVu Sans"/>
+                <a:ea typeface="DejaVu Sans"/>
+                <a:cs typeface="DejaVu Sans"/>
+              </a:defRPr>
+            </a:defPPr>
+            <a:lvl1pPr>
+              <a:defRPr sz="3300" b="1">
+                <a:solidFill>
+                  <a:srgbClr val="183B30"/>
+                </a:solidFill>
+                <a:latin typeface="DejaVu Sans"/>
+                <a:ea typeface="DejaVu Sans"/>
+                <a:cs typeface="DejaVu Sans"/>
+              </a:defRPr>
+            </a:lvl1pPr>
+            <a:lvl2pPr>
+              <a:defRPr sz="3300" b="1">
+                <a:solidFill>
+                  <a:srgbClr val="183B30"/>
+                </a:solidFill>
+                <a:latin typeface="DejaVu Sans"/>
+                <a:ea typeface="DejaVu Sans"/>
+                <a:cs typeface="DejaVu Sans"/>
+              </a:defRPr>
+            </a:lvl2pPr>
+            <a:lvl3pPr>
+              <a:defRPr sz="3300" b="1">
+                <a:solidFill>
+                  <a:srgbClr val="183B30"/>
+                </a:solidFill>
+                <a:latin typeface="DejaVu Sans"/>
+                <a:ea typeface="DejaVu Sans"/>
+                <a:cs typeface="DejaVu Sans"/>
+              </a:defRPr>
+            </a:lvl3pPr>
+            <a:lvl4pPr>
+              <a:defRPr sz="3300" b="1">
+                <a:solidFill>
+                  <a:srgbClr val="183B30"/>
+                </a:solidFill>
+                <a:latin typeface="DejaVu Sans"/>
+                <a:ea typeface="DejaVu Sans"/>
+                <a:cs typeface="DejaVu Sans"/>
+              </a:defRPr>
+            </a:lvl4pPr>
+            <a:lvl5pPr>
+              <a:defRPr sz="3300" b="1">
+                <a:solidFill>
+                  <a:srgbClr val="183B30"/>
+                </a:solidFill>
+                <a:latin typeface="DejaVu Sans"/>
+                <a:ea typeface="DejaVu Sans"/>
+                <a:cs typeface="DejaVu Sans"/>
+              </a:defRPr>
+            </a:lvl5pPr>
+            <a:lvl6pPr>
+              <a:defRPr sz="3300" b="1">
+                <a:solidFill>
+                  <a:srgbClr val="183B30"/>
+                </a:solidFill>
+                <a:latin typeface="DejaVu Sans"/>
+                <a:ea typeface="DejaVu Sans"/>
+                <a:cs typeface="DejaVu Sans"/>
+              </a:defRPr>
+            </a:lvl6pPr>
+            <a:lvl7pPr>
+              <a:defRPr sz="3300" b="1">
+                <a:solidFill>
+                  <a:srgbClr val="183B30"/>
+                </a:solidFill>
+                <a:latin typeface="DejaVu Sans"/>
+                <a:ea typeface="DejaVu Sans"/>
+                <a:cs typeface="DejaVu Sans"/>
+              </a:defRPr>
+            </a:lvl7pPr>
+            <a:lvl8pPr>
+              <a:defRPr sz="3300" b="1">
+                <a:solidFill>
+                  <a:srgbClr val="183B30"/>
+                </a:solidFill>
+                <a:latin typeface="DejaVu Sans"/>
+                <a:ea typeface="DejaVu Sans"/>
+                <a:cs typeface="DejaVu Sans"/>
+              </a:defRPr>
+            </a:lvl8pPr>
+            <a:lvl9pPr>
+              <a:defRPr sz="3300" b="1">
+                <a:solidFill>
+                  <a:srgbClr val="183B30"/>
+                </a:solidFill>
+                <a:latin typeface="DejaVu Sans"/>
+                <a:ea typeface="DejaVu Sans"/>
+                <a:cs typeface="DejaVu Sans"/>
+              </a:defRPr>
+            </a:lvl9pPr>
+          </a:lstStyle>
+          <a:p xmlns:a="http://schemas.openxmlformats.org/drawingml/2006/main">
+            <a:pPr>
+              <a:defRPr sz="3300" b="1">
+                <a:solidFill>
+                  <a:srgbClr val="183B30"/>
+                </a:solidFill>
+                <a:latin typeface="DejaVu Sans"/>
+                <a:ea typeface="DejaVu Sans"/>
+                <a:cs typeface="DejaVu Sans"/>
+              </a:defRPr>
+            </a:pPr>
+            <a:r>
+              <a:rPr sz="3300" b="1">
+                <a:solidFill>
+                  <a:srgbClr val="183B30"/>
+                </a:solidFill>
+                <a:latin typeface="DejaVu Sans"/>
+                <a:ea typeface="DejaVu Sans"/>
+                <a:cs typeface="DejaVu Sans"/>
+              </a:rPr>
+              <a:t>Um erro não bloqueia o lote inteiro</a:t>
+            </a:r>
+          </a:p>
+        </p:txBody>
+      </p:sp>
+      <p:sp>
+        <p:nvSpPr>
+          <p:cNvPr id="3" name="">
+            <a:extLst xmlns:a="http://schemas.openxmlformats.org/drawingml/2006/main">
+              <a:ext uri="{FF2B5EF4-FFF2-40B4-BE49-F238E27FC236}">
+                <a16:creationId xmlns:a16="http://schemas.microsoft.com/office/drawing/2014/main" id="{422A7DCF-2F86-4827-B7B8-2AC7E4407EA1}"/>
+              </a:ext>
+            </a:extLst>
+          </p:cNvPr>
+          <p:cNvSpPr>
+            <a:spLocks xmlns:a="http://schemas.openxmlformats.org/drawingml/2006/main" noGrp="1"/>
+          </p:cNvSpPr>
+          <p:nvPr/>
+        </p:nvSpPr>
+        <p:spPr>
+          <a:xfrm xmlns:a="http://schemas.openxmlformats.org/drawingml/2006/main">
+            <a:off x="609600" y="6467475"/>
+            <a:ext cx="9048750" cy="228600"/>
+          </a:xfrm>
+          <a:prstGeom xmlns:a="http://schemas.openxmlformats.org/drawingml/2006/main" prst="rect">
+            <a:avLst/>
+          </a:prstGeom>
+          <a:noFill xmlns:a="http://schemas.openxmlformats.org/drawingml/2006/main"/>
+          <a:ln xmlns:a="http://schemas.openxmlformats.org/drawingml/2006/main" w="0">
+            <a:noFill/>
+            <a:prstDash val="solid"/>
+          </a:ln>
+        </p:spPr>
+        <p:txBody>
+          <a:bodyPr xmlns:a="http://schemas.openxmlformats.org/drawingml/2006/main" lIns="0" tIns="0" rIns="0" bIns="0"/>
+          <a:lstStyle xmlns:a="http://schemas.openxmlformats.org/drawingml/2006/main">
+            <a:defPPr>
+              <a:defRPr sz="1200" b="0">
+                <a:solidFill>
+                  <a:srgbClr val="5F736B"/>
+                </a:solidFill>
+                <a:latin typeface="DejaVu Sans"/>
+                <a:ea typeface="DejaVu Sans"/>
+                <a:cs typeface="DejaVu Sans"/>
+              </a:defRPr>
+            </a:defPPr>
+            <a:lvl1pPr>
+              <a:defRPr sz="1200" b="0">
+                <a:solidFill>
+                  <a:srgbClr val="5F736B"/>
+                </a:solidFill>
+                <a:latin typeface="DejaVu Sans"/>
+                <a:ea typeface="DejaVu Sans"/>
+                <a:cs typeface="DejaVu Sans"/>
+              </a:defRPr>
+            </a:lvl1pPr>
+            <a:lvl2pPr>
+              <a:defRPr sz="1200" b="0">
+                <a:solidFill>
+                  <a:srgbClr val="5F736B"/>
+                </a:solidFill>
+                <a:latin typeface="DejaVu Sans"/>
+                <a:ea typeface="DejaVu Sans"/>
+                <a:cs typeface="DejaVu Sans"/>
+              </a:defRPr>
+            </a:lvl2pPr>
+            <a:lvl3pPr>
+              <a:defRPr sz="1200" b="0">
+                <a:solidFill>
+                  <a:srgbClr val="5F736B"/>
+                </a:solidFill>
+                <a:latin typeface="DejaVu Sans"/>
+                <a:ea typeface="DejaVu Sans"/>
+                <a:cs typeface="DejaVu Sans"/>
+              </a:defRPr>
+            </a:lvl3pPr>
+            <a:lvl4pPr>
+              <a:defRPr sz="1200" b="0">
+                <a:solidFill>
+                  <a:srgbClr val="5F736B"/>
+                </a:solidFill>
+                <a:latin typeface="DejaVu Sans"/>
+                <a:ea typeface="DejaVu Sans"/>
+                <a:cs typeface="DejaVu Sans"/>
+              </a:defRPr>
+            </a:lvl4pPr>
+            <a:lvl5pPr>
+              <a:defRPr sz="1200" b="0">
+                <a:solidFill>
+                  <a:srgbClr val="5F736B"/>
+                </a:solidFill>
+                <a:latin typeface="DejaVu Sans"/>
+                <a:ea typeface="DejaVu Sans"/>
+                <a:cs typeface="DejaVu Sans"/>
+              </a:defRPr>
+            </a:lvl5pPr>
+            <a:lvl6pPr>
+              <a:defRPr sz="1200" b="0">
+                <a:solidFill>
+                  <a:srgbClr val="5F736B"/>
+                </a:solidFill>
+                <a:latin typeface="DejaVu Sans"/>
+                <a:ea typeface="DejaVu Sans"/>
+                <a:cs typeface="DejaVu Sans"/>
+              </a:defRPr>
+            </a:lvl6pPr>
+            <a:lvl7pPr>
+              <a:defRPr sz="1200" b="0">
+                <a:solidFill>
+                  <a:srgbClr val="5F736B"/>
+                </a:solidFill>
+                <a:latin typeface="DejaVu Sans"/>
+                <a:ea typeface="DejaVu Sans"/>
+                <a:cs typeface="DejaVu Sans"/>
+              </a:defRPr>
+            </a:lvl7pPr>
+            <a:lvl8pPr>
+              <a:defRPr sz="1200" b="0">
+                <a:solidFill>
+                  <a:srgbClr val="5F736B"/>
+                </a:solidFill>
+                <a:latin typeface="DejaVu Sans"/>
+                <a:ea typeface="DejaVu Sans"/>
+                <a:cs typeface="DejaVu Sans"/>
+              </a:defRPr>
+            </a:lvl8pPr>
+            <a:lvl9pPr>
+              <a:defRPr sz="1200" b="0">
+                <a:solidFill>
+                  <a:srgbClr val="5F736B"/>
+                </a:solidFill>
+                <a:latin typeface="DejaVu Sans"/>
+                <a:ea typeface="DejaVu Sans"/>
+                <a:cs typeface="DejaVu Sans"/>
+              </a:defRPr>
+            </a:lvl9pPr>
+          </a:lstStyle>
+          <a:p xmlns:a="http://schemas.openxmlformats.org/drawingml/2006/main">
+            <a:pPr>
+              <a:defRPr sz="1200" b="0">
+                <a:solidFill>
+                  <a:srgbClr val="5F736B"/>
+                </a:solidFill>
+                <a:latin typeface="DejaVu Sans"/>
+                <a:ea typeface="DejaVu Sans"/>
+                <a:cs typeface="DejaVu Sans"/>
+              </a:defRPr>
+            </a:pPr>
+            <a:r>
+              <a:rPr sz="1200" b="0">
+                <a:solidFill>
+                  <a:srgbClr val="5F736B"/>
+                </a:solidFill>
+                <a:latin typeface="DejaVu Sans"/>
+                <a:ea typeface="DejaVu Sans"/>
+                <a:cs typeface="DejaVu Sans"/>
+              </a:rPr>
+              <a:t>Anny, Arthur, Eduardo e Jéssica</a:t>
+            </a:r>
+          </a:p>
+        </p:txBody>
+      </p:sp>
+      <p:sp>
+        <p:nvSpPr>
+          <p:cNvPr id="4" name="">
+            <a:extLst xmlns:a="http://schemas.openxmlformats.org/drawingml/2006/main">
+              <a:ext uri="{FF2B5EF4-FFF2-40B4-BE49-F238E27FC236}">
+                <a16:creationId xmlns:a16="http://schemas.microsoft.com/office/drawing/2014/main" id="{20C62E65-5F87-4265-8CA6-95261EE6867E}"/>
+              </a:ext>
+            </a:extLst>
+          </p:cNvPr>
+          <p:cNvSpPr>
+            <a:spLocks xmlns:a="http://schemas.openxmlformats.org/drawingml/2006/main" noGrp="1"/>
+          </p:cNvSpPr>
+          <p:nvPr/>
+        </p:nvSpPr>
+        <p:spPr>
+          <a:xfrm xmlns:a="http://schemas.openxmlformats.org/drawingml/2006/main">
+            <a:off x="11239500" y="6467475"/>
+            <a:ext cx="381000" cy="228600"/>
+          </a:xfrm>
+          <a:prstGeom xmlns:a="http://schemas.openxmlformats.org/drawingml/2006/main" prst="rect">
+            <a:avLst/>
+          </a:prstGeom>
+          <a:noFill xmlns:a="http://schemas.openxmlformats.org/drawingml/2006/main"/>
+          <a:ln xmlns:a="http://schemas.openxmlformats.org/drawingml/2006/main" w="0">
+            <a:noFill/>
+            <a:prstDash val="solid"/>
+          </a:ln>
+        </p:spPr>
+        <p:txBody>
+          <a:bodyPr xmlns:a="http://schemas.openxmlformats.org/drawingml/2006/main" lIns="0" tIns="0" rIns="0" bIns="0"/>
+          <a:lstStyle xmlns:a="http://schemas.openxmlformats.org/drawingml/2006/main">
+            <a:defPPr>
+              <a:defRPr sz="1200" b="0">
+                <a:solidFill>
+                  <a:srgbClr val="5F736B"/>
+                </a:solidFill>
+                <a:latin typeface="DejaVu Sans"/>
+                <a:ea typeface="DejaVu Sans"/>
+                <a:cs typeface="DejaVu Sans"/>
+              </a:defRPr>
+            </a:defPPr>
+            <a:lvl1pPr>
+              <a:defRPr sz="1200" b="0">
+                <a:solidFill>
+                  <a:srgbClr val="5F736B"/>
+                </a:solidFill>
+                <a:latin typeface="DejaVu Sans"/>
+                <a:ea typeface="DejaVu Sans"/>
+                <a:cs typeface="DejaVu Sans"/>
+              </a:defRPr>
+            </a:lvl1pPr>
+            <a:lvl2pPr>
+              <a:defRPr sz="1200" b="0">
+                <a:solidFill>
+                  <a:srgbClr val="5F736B"/>
+                </a:solidFill>
+                <a:latin typeface="DejaVu Sans"/>
+                <a:ea typeface="DejaVu Sans"/>
+                <a:cs typeface="DejaVu Sans"/>
+              </a:defRPr>
+            </a:lvl2pPr>
+            <a:lvl3pPr>
+              <a:defRPr sz="1200" b="0">
+                <a:solidFill>
+                  <a:srgbClr val="5F736B"/>
+                </a:solidFill>
+                <a:latin typeface="DejaVu Sans"/>
+                <a:ea typeface="DejaVu Sans"/>
+                <a:cs typeface="DejaVu Sans"/>
+              </a:defRPr>
+            </a:lvl3pPr>
+            <a:lvl4pPr>
+              <a:defRPr sz="1200" b="0">
+                <a:solidFill>
+                  <a:srgbClr val="5F736B"/>
+                </a:solidFill>
+                <a:latin typeface="DejaVu Sans"/>
+                <a:ea typeface="DejaVu Sans"/>
+                <a:cs typeface="DejaVu Sans"/>
+              </a:defRPr>
+            </a:lvl4pPr>
+            <a:lvl5pPr>
+              <a:defRPr sz="1200" b="0">
+                <a:solidFill>
+                  <a:srgbClr val="5F736B"/>
+                </a:solidFill>
+                <a:latin typeface="DejaVu Sans"/>
+                <a:ea typeface="DejaVu Sans"/>
+                <a:cs typeface="DejaVu Sans"/>
+              </a:defRPr>
+            </a:lvl5pPr>
+            <a:lvl6pPr>
+              <a:defRPr sz="1200" b="0">
+                <a:solidFill>
+                  <a:srgbClr val="5F736B"/>
+                </a:solidFill>
+                <a:latin typeface="DejaVu Sans"/>
+                <a:ea typeface="DejaVu Sans"/>
+                <a:cs typeface="DejaVu Sans"/>
+              </a:defRPr>
+            </a:lvl6pPr>
+            <a:lvl7pPr>
+              <a:defRPr sz="1200" b="0">
+                <a:solidFill>
+                  <a:srgbClr val="5F736B"/>
+                </a:solidFill>
+                <a:latin typeface="DejaVu Sans"/>
+                <a:ea typeface="DejaVu Sans"/>
+                <a:cs typeface="DejaVu Sans"/>
+              </a:defRPr>
+            </a:lvl7pPr>
+            <a:lvl8pPr>
+              <a:defRPr sz="1200" b="0">
+                <a:solidFill>
+                  <a:srgbClr val="5F736B"/>
+                </a:solidFill>
+                <a:latin typeface="DejaVu Sans"/>
+                <a:ea typeface="DejaVu Sans"/>
+                <a:cs typeface="DejaVu Sans"/>
+              </a:defRPr>
+            </a:lvl8pPr>
+            <a:lvl9pPr>
+              <a:defRPr sz="1200" b="0">
+                <a:solidFill>
+                  <a:srgbClr val="5F736B"/>
+                </a:solidFill>
+                <a:latin typeface="DejaVu Sans"/>
+                <a:ea typeface="DejaVu Sans"/>
+                <a:cs typeface="DejaVu Sans"/>
+              </a:defRPr>
+            </a:lvl9pPr>
+          </a:lstStyle>
+          <a:p xmlns:a="http://schemas.openxmlformats.org/drawingml/2006/main">
+            <a:pPr>
+              <a:defRPr sz="1200" b="0">
+                <a:solidFill>
+                  <a:srgbClr val="5F736B"/>
+                </a:solidFill>
+                <a:latin typeface="DejaVu Sans"/>
+                <a:ea typeface="DejaVu Sans"/>
+                <a:cs typeface="DejaVu Sans"/>
+              </a:defRPr>
+            </a:pPr>
+            <a:r>
+              <a:rPr sz="1200" b="0">
+                <a:solidFill>
+                  <a:srgbClr val="5F736B"/>
+                </a:solidFill>
+                <a:latin typeface="DejaVu Sans"/>
+                <a:ea typeface="DejaVu Sans"/>
+                <a:cs typeface="DejaVu Sans"/>
+              </a:rPr>
+              <a:t>12</a:t>
+            </a:r>
+          </a:p>
+        </p:txBody>
+      </p:sp>
+      <p:sp>
+        <p:nvSpPr>
+          <p:cNvPr id="5" name="">
+            <a:extLst xmlns:a="http://schemas.openxmlformats.org/drawingml/2006/main">
+              <a:ext uri="{FF2B5EF4-FFF2-40B4-BE49-F238E27FC236}">
+                <a16:creationId xmlns:a16="http://schemas.microsoft.com/office/drawing/2014/main" id="{7D3DD651-6C28-4CF5-83AA-2405A815BC5C}"/>
+              </a:ext>
+            </a:extLst>
+          </p:cNvPr>
+          <p:cNvSpPr>
+            <a:spLocks xmlns:a="http://schemas.openxmlformats.org/drawingml/2006/main" noGrp="1"/>
+          </p:cNvSpPr>
+          <p:nvPr/>
+        </p:nvSpPr>
+        <p:spPr>
+          <a:xfrm xmlns:a="http://schemas.openxmlformats.org/drawingml/2006/main">
+            <a:off x="609600" y="1676400"/>
+            <a:ext cx="10953750" cy="400050"/>
+          </a:xfrm>
+          <a:prstGeom xmlns:a="http://schemas.openxmlformats.org/drawingml/2006/main" prst="rect">
+            <a:avLst/>
+          </a:prstGeom>
+          <a:noFill xmlns:a="http://schemas.openxmlformats.org/drawingml/2006/main"/>
+          <a:ln xmlns:a="http://schemas.openxmlformats.org/drawingml/2006/main" w="0">
+            <a:noFill/>
+            <a:prstDash val="solid"/>
+          </a:ln>
+        </p:spPr>
+        <p:txBody>
+          <a:bodyPr xmlns:a="http://schemas.openxmlformats.org/drawingml/2006/main" lIns="0" tIns="0" rIns="0" bIns="0"/>
+          <a:lstStyle xmlns:a="http://schemas.openxmlformats.org/drawingml/2006/main">
+            <a:defPPr>
+              <a:defRPr sz="1950" b="0">
+                <a:solidFill>
+                  <a:srgbClr val="183B30"/>
+                </a:solidFill>
+                <a:latin typeface="DejaVu Sans"/>
+                <a:ea typeface="DejaVu Sans"/>
+                <a:cs typeface="DejaVu Sans"/>
+              </a:defRPr>
+            </a:defPPr>
+            <a:lvl1pPr>
+              <a:defRPr sz="1950" b="0">
+                <a:solidFill>
+                  <a:srgbClr val="183B30"/>
+                </a:solidFill>
+                <a:latin typeface="DejaVu Sans"/>
+                <a:ea typeface="DejaVu Sans"/>
+                <a:cs typeface="DejaVu Sans"/>
+              </a:defRPr>
+            </a:lvl1pPr>
+            <a:lvl2pPr>
+              <a:defRPr sz="1950" b="0">
+                <a:solidFill>
+                  <a:srgbClr val="183B30"/>
+                </a:solidFill>
+                <a:latin typeface="DejaVu Sans"/>
+                <a:ea typeface="DejaVu Sans"/>
+                <a:cs typeface="DejaVu Sans"/>
+              </a:defRPr>
+            </a:lvl2pPr>
+            <a:lvl3pPr>
+              <a:defRPr sz="1950" b="0">
+                <a:solidFill>
+                  <a:srgbClr val="183B30"/>
+                </a:solidFill>
+                <a:latin typeface="DejaVu Sans"/>
+                <a:ea typeface="DejaVu Sans"/>
+                <a:cs typeface="DejaVu Sans"/>
+              </a:defRPr>
+            </a:lvl3pPr>
+            <a:lvl4pPr>
+              <a:defRPr sz="1950" b="0">
+                <a:solidFill>
+                  <a:srgbClr val="183B30"/>
+                </a:solidFill>
+                <a:latin typeface="DejaVu Sans"/>
+                <a:ea typeface="DejaVu Sans"/>
+                <a:cs typeface="DejaVu Sans"/>
+              </a:defRPr>
+            </a:lvl4pPr>
+            <a:lvl5pPr>
+              <a:defRPr sz="1950" b="0">
+                <a:solidFill>
+                  <a:srgbClr val="183B30"/>
+                </a:solidFill>
+                <a:latin typeface="DejaVu Sans"/>
+                <a:ea typeface="DejaVu Sans"/>
+                <a:cs typeface="DejaVu Sans"/>
+              </a:defRPr>
+            </a:lvl5pPr>
+            <a:lvl6pPr>
+              <a:defRPr sz="1950" b="0">
+                <a:solidFill>
+                  <a:srgbClr val="183B30"/>
+                </a:solidFill>
+                <a:latin typeface="DejaVu Sans"/>
+                <a:ea typeface="DejaVu Sans"/>
+                <a:cs typeface="DejaVu Sans"/>
+              </a:defRPr>
+            </a:lvl6pPr>
+            <a:lvl7pPr>
+              <a:defRPr sz="1950" b="0">
+                <a:solidFill>
+                  <a:srgbClr val="183B30"/>
+                </a:solidFill>
+                <a:latin typeface="DejaVu Sans"/>
+                <a:ea typeface="DejaVu Sans"/>
+                <a:cs typeface="DejaVu Sans"/>
+              </a:defRPr>
+            </a:lvl7pPr>
+            <a:lvl8pPr>
+              <a:defRPr sz="1950" b="0">
+                <a:solidFill>
+                  <a:srgbClr val="183B30"/>
+                </a:solidFill>
+                <a:latin typeface="DejaVu Sans"/>
+                <a:ea typeface="DejaVu Sans"/>
+                <a:cs typeface="DejaVu Sans"/>
+              </a:defRPr>
+            </a:lvl8pPr>
+            <a:lvl9pPr>
+              <a:defRPr sz="1950" b="0">
+                <a:solidFill>
+                  <a:srgbClr val="183B30"/>
+                </a:solidFill>
+                <a:latin typeface="DejaVu Sans"/>
+                <a:ea typeface="DejaVu Sans"/>
+                <a:cs typeface="DejaVu Sans"/>
+              </a:defRPr>
+            </a:lvl9pPr>
+          </a:lstStyle>
+          <a:p xmlns:a="http://schemas.openxmlformats.org/drawingml/2006/main">
+            <a:pPr>
+              <a:defRPr sz="1950" b="0">
+                <a:solidFill>
+                  <a:srgbClr val="183B30"/>
+                </a:solidFill>
+                <a:latin typeface="DejaVu Sans"/>
+                <a:ea typeface="DejaVu Sans"/>
+                <a:cs typeface="DejaVu Sans"/>
+              </a:defRPr>
+            </a:pPr>
+            <a:r>
+              <a:rPr sz="1950" b="0">
+                <a:solidFill>
+                  <a:srgbClr val="183B30"/>
+                </a:solidFill>
+                <a:latin typeface="DejaVu Sans"/>
+                <a:ea typeface="DejaVu Sans"/>
+                <a:cs typeface="DejaVu Sans"/>
+              </a:rPr>
+              <a:t>Teste automatizado local com 5.000 mensagens sintéticas</a:t>
+            </a:r>
+          </a:p>
+        </p:txBody>
+      </p:sp>
+      <p:graphicFrame>
+        <p:nvGraphicFramePr>
+          <p:cNvPr id="6" name="Chart">
+            <a:extLst xmlns:a="http://schemas.openxmlformats.org/drawingml/2006/main">
+              <a:ext uri="{FF2B5EF4-FFF2-40B4-BE49-F238E27FC236}">
+                <a16:creationId xmlns:a16="http://schemas.microsoft.com/office/drawing/2014/main" id="{C8592004-5F57-412E-BA4C-0CFF6C16DAF9}"/>
+              </a:ext>
+            </a:extLst>
+          </p:cNvPr>
+          <p:cNvGraphicFramePr/>
+          <p:nvPr/>
+        </p:nvGraphicFramePr>
+        <p:xfrm>
+          <a:off xmlns:a="http://schemas.openxmlformats.org/drawingml/2006/main" x="609600" y="2333625"/>
+          <a:ext xmlns:a="http://schemas.openxmlformats.org/drawingml/2006/main" cx="6953250" cy="3143250"/>
+        </p:xfrm>
+        <a:graphic xmlns:a="http://schemas.openxmlformats.org/drawingml/2006/main">
+          <a:graphicData uri="http://schemas.openxmlformats.org/drawingml/2006/chart">
+            <c:chart xmlns:r="http://schemas.openxmlformats.org/officeDocument/2006/relationships" xmlns:c="http://schemas.openxmlformats.org/drawingml/2006/chart" r:id="R7889cc3dd2344a19"/>
+          </a:graphicData>
+        </a:graphic>
+      </p:graphicFrame>
+      <p:sp>
+        <p:nvSpPr>
+          <p:cNvPr id="7" name="">
+            <a:extLst xmlns:a="http://schemas.openxmlformats.org/drawingml/2006/main">
+              <a:ext uri="{FF2B5EF4-FFF2-40B4-BE49-F238E27FC236}">
+                <a16:creationId xmlns:a16="http://schemas.microsoft.com/office/drawing/2014/main" id="{2926EAEF-1835-4C88-807C-D76469DF82D7}"/>
+              </a:ext>
+            </a:extLst>
+          </p:cNvPr>
+          <p:cNvSpPr>
+            <a:spLocks xmlns:a="http://schemas.openxmlformats.org/drawingml/2006/main" noGrp="1"/>
+          </p:cNvSpPr>
+          <p:nvPr/>
+        </p:nvSpPr>
+        <p:spPr>
+          <a:xfrm xmlns:a="http://schemas.openxmlformats.org/drawingml/2006/main">
+            <a:off x="8096250" y="2428875"/>
+            <a:ext cx="3333750" cy="619125"/>
+          </a:xfrm>
+          <a:prstGeom xmlns:a="http://schemas.openxmlformats.org/drawingml/2006/main" prst="rect">
+            <a:avLst/>
+          </a:prstGeom>
+          <a:noFill xmlns:a="http://schemas.openxmlformats.org/drawingml/2006/main"/>
+          <a:ln xmlns:a="http://schemas.openxmlformats.org/drawingml/2006/main" w="0">
+            <a:noFill/>
+            <a:prstDash val="solid"/>
+          </a:ln>
+        </p:spPr>
+        <p:txBody>
+          <a:bodyPr xmlns:a="http://schemas.openxmlformats.org/drawingml/2006/main" lIns="0" tIns="0" rIns="0" bIns="0"/>
+          <a:lstStyle xmlns:a="http://schemas.openxmlformats.org/drawingml/2006/main">
+            <a:defPPr>
+              <a:defRPr sz="2700" b="1">
+                <a:solidFill>
+                  <a:srgbClr val="167655"/>
+                </a:solidFill>
+                <a:latin typeface="DejaVu Sans"/>
+                <a:ea typeface="DejaVu Sans"/>
+                <a:cs typeface="DejaVu Sans"/>
+              </a:defRPr>
+            </a:defPPr>
+            <a:lvl1pPr>
+              <a:defRPr sz="2700" b="1">
+                <a:solidFill>
+                  <a:srgbClr val="167655"/>
+                </a:solidFill>
+                <a:latin typeface="DejaVu Sans"/>
+                <a:ea typeface="DejaVu Sans"/>
+                <a:cs typeface="DejaVu Sans"/>
+              </a:defRPr>
+            </a:lvl1pPr>
+            <a:lvl2pPr>
+              <a:defRPr sz="2700" b="1">
+                <a:solidFill>
+                  <a:srgbClr val="167655"/>
+                </a:solidFill>
+                <a:latin typeface="DejaVu Sans"/>
+                <a:ea typeface="DejaVu Sans"/>
+                <a:cs typeface="DejaVu Sans"/>
+              </a:defRPr>
+            </a:lvl2pPr>
+            <a:lvl3pPr>
+              <a:defRPr sz="2700" b="1">
+                <a:solidFill>
+                  <a:srgbClr val="167655"/>
+                </a:solidFill>
+                <a:latin typeface="DejaVu Sans"/>
+                <a:ea typeface="DejaVu Sans"/>
+                <a:cs typeface="DejaVu Sans"/>
+              </a:defRPr>
+            </a:lvl3pPr>
+            <a:lvl4pPr>
+              <a:defRPr sz="2700" b="1">
+                <a:solidFill>
+                  <a:srgbClr val="167655"/>
+                </a:solidFill>
+                <a:latin typeface="DejaVu Sans"/>
+                <a:ea typeface="DejaVu Sans"/>
+                <a:cs typeface="DejaVu Sans"/>
+              </a:defRPr>
+            </a:lvl4pPr>
+            <a:lvl5pPr>
+              <a:defRPr sz="2700" b="1">
+                <a:solidFill>
+                  <a:srgbClr val="167655"/>
+                </a:solidFill>
+                <a:latin typeface="DejaVu Sans"/>
+                <a:ea typeface="DejaVu Sans"/>
+                <a:cs typeface="DejaVu Sans"/>
+              </a:defRPr>
+            </a:lvl5pPr>
+            <a:lvl6pPr>
+              <a:defRPr sz="2700" b="1">
+                <a:solidFill>
+                  <a:srgbClr val="167655"/>
+                </a:solidFill>
+                <a:latin typeface="DejaVu Sans"/>
+                <a:ea typeface="DejaVu Sans"/>
+                <a:cs typeface="DejaVu Sans"/>
+              </a:defRPr>
+            </a:lvl6pPr>
+            <a:lvl7pPr>
+              <a:defRPr sz="2700" b="1">
+                <a:solidFill>
+                  <a:srgbClr val="167655"/>
+                </a:solidFill>
+                <a:latin typeface="DejaVu Sans"/>
+                <a:ea typeface="DejaVu Sans"/>
+                <a:cs typeface="DejaVu Sans"/>
+              </a:defRPr>
+            </a:lvl7pPr>
+            <a:lvl8pPr>
+              <a:defRPr sz="2700" b="1">
+                <a:solidFill>
+                  <a:srgbClr val="167655"/>
+                </a:solidFill>
+                <a:latin typeface="DejaVu Sans"/>
+                <a:ea typeface="DejaVu Sans"/>
+                <a:cs typeface="DejaVu Sans"/>
+              </a:defRPr>
+            </a:lvl8pPr>
+            <a:lvl9pPr>
+              <a:defRPr sz="2700" b="1">
+                <a:solidFill>
+                  <a:srgbClr val="167655"/>
+                </a:solidFill>
+                <a:latin typeface="DejaVu Sans"/>
+                <a:ea typeface="DejaVu Sans"/>
+                <a:cs typeface="DejaVu Sans"/>
+              </a:defRPr>
+            </a:lvl9pPr>
+          </a:lstStyle>
+          <a:p xmlns:a="http://schemas.openxmlformats.org/drawingml/2006/main">
+            <a:pPr>
+              <a:defRPr sz="2700" b="1">
+                <a:solidFill>
+                  <a:srgbClr val="167655"/>
+                </a:solidFill>
+                <a:latin typeface="DejaVu Sans"/>
+                <a:ea typeface="DejaVu Sans"/>
+                <a:cs typeface="DejaVu Sans"/>
+              </a:defRPr>
+            </a:pPr>
+            <a:r>
+              <a:rPr sz="2700" b="1">
+                <a:solidFill>
+                  <a:srgbClr val="167655"/>
+                </a:solidFill>
+                <a:latin typeface="DejaVu Sans"/>
+                <a:ea typeface="DejaVu Sans"/>
+                <a:cs typeface="DejaVu Sans"/>
+              </a:rPr>
+              <a:t>4.997 aceitas</a:t>
+            </a:r>
+          </a:p>
+        </p:txBody>
+      </p:sp>
+      <p:sp>
+        <p:nvSpPr>
+          <p:cNvPr id="8" name="">
+            <a:extLst xmlns:a="http://schemas.openxmlformats.org/drawingml/2006/main">
+              <a:ext uri="{FF2B5EF4-FFF2-40B4-BE49-F238E27FC236}">
+                <a16:creationId xmlns:a16="http://schemas.microsoft.com/office/drawing/2014/main" id="{1A0AB938-DE20-4782-AE52-97DA82ADE34B}"/>
+              </a:ext>
+            </a:extLst>
+          </p:cNvPr>
+          <p:cNvSpPr>
+            <a:spLocks xmlns:a="http://schemas.openxmlformats.org/drawingml/2006/main" noGrp="1"/>
+          </p:cNvSpPr>
+          <p:nvPr/>
+        </p:nvSpPr>
+        <p:spPr>
+          <a:xfrm xmlns:a="http://schemas.openxmlformats.org/drawingml/2006/main">
+            <a:off x="8096250" y="3133725"/>
+            <a:ext cx="3333750" cy="857250"/>
+          </a:xfrm>
+          <a:prstGeom xmlns:a="http://schemas.openxmlformats.org/drawingml/2006/main" prst="rect">
+            <a:avLst/>
+          </a:prstGeom>
+          <a:noFill xmlns:a="http://schemas.openxmlformats.org/drawingml/2006/main"/>
+          <a:ln xmlns:a="http://schemas.openxmlformats.org/drawingml/2006/main" w="0">
+            <a:noFill/>
+            <a:prstDash val="solid"/>
+          </a:ln>
+        </p:spPr>
+        <p:txBody>
+          <a:bodyPr xmlns:a="http://schemas.openxmlformats.org/drawingml/2006/main" lIns="0" tIns="0" rIns="0" bIns="0"/>
+          <a:lstStyle xmlns:a="http://schemas.openxmlformats.org/drawingml/2006/main">
+            <a:defPPr>
+              <a:defRPr sz="1950" b="0">
+                <a:solidFill>
+                  <a:srgbClr val="183B30"/>
+                </a:solidFill>
+                <a:latin typeface="DejaVu Sans"/>
+                <a:ea typeface="DejaVu Sans"/>
+                <a:cs typeface="DejaVu Sans"/>
+              </a:defRPr>
+            </a:defPPr>
+            <a:lvl1pPr>
+              <a:defRPr sz="1950" b="0">
+                <a:solidFill>
+                  <a:srgbClr val="183B30"/>
+                </a:solidFill>
+                <a:latin typeface="DejaVu Sans"/>
+                <a:ea typeface="DejaVu Sans"/>
+                <a:cs typeface="DejaVu Sans"/>
+              </a:defRPr>
+            </a:lvl1pPr>
+            <a:lvl2pPr>
+              <a:defRPr sz="1950" b="0">
+                <a:solidFill>
+                  <a:srgbClr val="183B30"/>
+                </a:solidFill>
+                <a:latin typeface="DejaVu Sans"/>
+                <a:ea typeface="DejaVu Sans"/>
+                <a:cs typeface="DejaVu Sans"/>
+              </a:defRPr>
+            </a:lvl2pPr>
+            <a:lvl3pPr>
+              <a:defRPr sz="1950" b="0">
+                <a:solidFill>
+                  <a:srgbClr val="183B30"/>
+                </a:solidFill>
+                <a:latin typeface="DejaVu Sans"/>
+                <a:ea typeface="DejaVu Sans"/>
+                <a:cs typeface="DejaVu Sans"/>
+              </a:defRPr>
+            </a:lvl3pPr>
+            <a:lvl4pPr>
+              <a:defRPr sz="1950" b="0">
+                <a:solidFill>
+                  <a:srgbClr val="183B30"/>
+                </a:solidFill>
+                <a:latin typeface="DejaVu Sans"/>
+                <a:ea typeface="DejaVu Sans"/>
+                <a:cs typeface="DejaVu Sans"/>
+              </a:defRPr>
+            </a:lvl4pPr>
+            <a:lvl5pPr>
+              <a:defRPr sz="1950" b="0">
+                <a:solidFill>
+                  <a:srgbClr val="183B30"/>
+                </a:solidFill>
+                <a:latin typeface="DejaVu Sans"/>
+                <a:ea typeface="DejaVu Sans"/>
+                <a:cs typeface="DejaVu Sans"/>
+              </a:defRPr>
+            </a:lvl5pPr>
+            <a:lvl6pPr>
+              <a:defRPr sz="1950" b="0">
+                <a:solidFill>
+                  <a:srgbClr val="183B30"/>
+                </a:solidFill>
+                <a:latin typeface="DejaVu Sans"/>
+                <a:ea typeface="DejaVu Sans"/>
+                <a:cs typeface="DejaVu Sans"/>
+              </a:defRPr>
+            </a:lvl6pPr>
+            <a:lvl7pPr>
+              <a:defRPr sz="1950" b="0">
+                <a:solidFill>
+                  <a:srgbClr val="183B30"/>
+                </a:solidFill>
+                <a:latin typeface="DejaVu Sans"/>
+                <a:ea typeface="DejaVu Sans"/>
+                <a:cs typeface="DejaVu Sans"/>
+              </a:defRPr>
+            </a:lvl7pPr>
+            <a:lvl8pPr>
+              <a:defRPr sz="1950" b="0">
+                <a:solidFill>
+                  <a:srgbClr val="183B30"/>
+                </a:solidFill>
+                <a:latin typeface="DejaVu Sans"/>
+                <a:ea typeface="DejaVu Sans"/>
+                <a:cs typeface="DejaVu Sans"/>
+              </a:defRPr>
+            </a:lvl8pPr>
+            <a:lvl9pPr>
+              <a:defRPr sz="1950" b="0">
+                <a:solidFill>
+                  <a:srgbClr val="183B30"/>
+                </a:solidFill>
+                <a:latin typeface="DejaVu Sans"/>
+                <a:ea typeface="DejaVu Sans"/>
+                <a:cs typeface="DejaVu Sans"/>
+              </a:defRPr>
+            </a:lvl9pPr>
+          </a:lstStyle>
+          <a:p xmlns:a="http://schemas.openxmlformats.org/drawingml/2006/main">
+            <a:pPr>
+              <a:defRPr sz="1950" b="0">
+                <a:solidFill>
+                  <a:srgbClr val="183B30"/>
+                </a:solidFill>
+                <a:latin typeface="DejaVu Sans"/>
+                <a:ea typeface="DejaVu Sans"/>
+                <a:cs typeface="DejaVu Sans"/>
+              </a:defRPr>
+            </a:pPr>
+            <a:r>
+              <a:rPr sz="1950" b="0">
+                <a:solidFill>
+                  <a:srgbClr val="183B30"/>
+                </a:solidFill>
+                <a:latin typeface="DejaVu Sans"/>
+                <a:ea typeface="DejaVu Sans"/>
+                <a:cs typeface="DejaVu Sans"/>
+              </a:rPr>
+              <a:t>O histórico recebe os dados válidos.</a:t>
+            </a:r>
+          </a:p>
+        </p:txBody>
+      </p:sp>
+      <p:sp>
+        <p:nvSpPr>
+          <p:cNvPr id="9" name="">
+            <a:extLst xmlns:a="http://schemas.openxmlformats.org/drawingml/2006/main">
+              <a:ext uri="{FF2B5EF4-FFF2-40B4-BE49-F238E27FC236}">
+                <a16:creationId xmlns:a16="http://schemas.microsoft.com/office/drawing/2014/main" id="{2BB8443F-F1DD-445C-8A27-31016F133AA0}"/>
+              </a:ext>
+            </a:extLst>
+          </p:cNvPr>
+          <p:cNvSpPr>
+            <a:spLocks xmlns:a="http://schemas.openxmlformats.org/drawingml/2006/main" noGrp="1"/>
+          </p:cNvSpPr>
+          <p:nvPr/>
+        </p:nvSpPr>
+        <p:spPr>
+          <a:xfrm xmlns:a="http://schemas.openxmlformats.org/drawingml/2006/main">
+            <a:off x="8096250" y="4143375"/>
+            <a:ext cx="3333750" cy="571500"/>
+          </a:xfrm>
+          <a:prstGeom xmlns:a="http://schemas.openxmlformats.org/drawingml/2006/main" prst="rect">
+            <a:avLst/>
+          </a:prstGeom>
+          <a:noFill xmlns:a="http://schemas.openxmlformats.org/drawingml/2006/main"/>
+          <a:ln xmlns:a="http://schemas.openxmlformats.org/drawingml/2006/main" w="0">
+            <a:noFill/>
+            <a:prstDash val="solid"/>
+          </a:ln>
+        </p:spPr>
+        <p:txBody>
+          <a:bodyPr xmlns:a="http://schemas.openxmlformats.org/drawingml/2006/main" lIns="0" tIns="0" rIns="0" bIns="0"/>
+          <a:lstStyle xmlns:a="http://schemas.openxmlformats.org/drawingml/2006/main">
+            <a:defPPr>
+              <a:defRPr sz="2700" b="1">
+                <a:solidFill>
+                  <a:srgbClr val="936017"/>
+                </a:solidFill>
+                <a:latin typeface="DejaVu Sans"/>
+                <a:ea typeface="DejaVu Sans"/>
+                <a:cs typeface="DejaVu Sans"/>
+              </a:defRPr>
+            </a:defPPr>
+            <a:lvl1pPr>
+              <a:defRPr sz="2700" b="1">
+                <a:solidFill>
+                  <a:srgbClr val="936017"/>
+                </a:solidFill>
+                <a:latin typeface="DejaVu Sans"/>
+                <a:ea typeface="DejaVu Sans"/>
+                <a:cs typeface="DejaVu Sans"/>
+              </a:defRPr>
+            </a:lvl1pPr>
+            <a:lvl2pPr>
+              <a:defRPr sz="2700" b="1">
+                <a:solidFill>
+                  <a:srgbClr val="936017"/>
+                </a:solidFill>
+                <a:latin typeface="DejaVu Sans"/>
+                <a:ea typeface="DejaVu Sans"/>
+                <a:cs typeface="DejaVu Sans"/>
+              </a:defRPr>
+            </a:lvl2pPr>
+            <a:lvl3pPr>
+              <a:defRPr sz="2700" b="1">
+                <a:solidFill>
+                  <a:srgbClr val="936017"/>
+                </a:solidFill>
+                <a:latin typeface="DejaVu Sans"/>
+                <a:ea typeface="DejaVu Sans"/>
+                <a:cs typeface="DejaVu Sans"/>
+              </a:defRPr>
+            </a:lvl3pPr>
+            <a:lvl4pPr>
+              <a:defRPr sz="2700" b="1">
+                <a:solidFill>
+                  <a:srgbClr val="936017"/>
+                </a:solidFill>
+                <a:latin typeface="DejaVu Sans"/>
+                <a:ea typeface="DejaVu Sans"/>
+                <a:cs typeface="DejaVu Sans"/>
+              </a:defRPr>
+            </a:lvl4pPr>
+            <a:lvl5pPr>
+              <a:defRPr sz="2700" b="1">
+                <a:solidFill>
+                  <a:srgbClr val="936017"/>
+                </a:solidFill>
+                <a:latin typeface="DejaVu Sans"/>
+                <a:ea typeface="DejaVu Sans"/>
+                <a:cs typeface="DejaVu Sans"/>
+              </a:defRPr>
+            </a:lvl5pPr>
+            <a:lvl6pPr>
+              <a:defRPr sz="2700" b="1">
+                <a:solidFill>
+                  <a:srgbClr val="936017"/>
+                </a:solidFill>
+                <a:latin typeface="DejaVu Sans"/>
+                <a:ea typeface="DejaVu Sans"/>
+                <a:cs typeface="DejaVu Sans"/>
+              </a:defRPr>
+            </a:lvl6pPr>
+            <a:lvl7pPr>
+              <a:defRPr sz="2700" b="1">
+                <a:solidFill>
+                  <a:srgbClr val="936017"/>
+                </a:solidFill>
+                <a:latin typeface="DejaVu Sans"/>
+                <a:ea typeface="DejaVu Sans"/>
+                <a:cs typeface="DejaVu Sans"/>
+              </a:defRPr>
+            </a:lvl7pPr>
+            <a:lvl8pPr>
+              <a:defRPr sz="2700" b="1">
+                <a:solidFill>
+                  <a:srgbClr val="936017"/>
+                </a:solidFill>
+                <a:latin typeface="DejaVu Sans"/>
+                <a:ea typeface="DejaVu Sans"/>
+                <a:cs typeface="DejaVu Sans"/>
+              </a:defRPr>
+            </a:lvl8pPr>
+            <a:lvl9pPr>
+              <a:defRPr sz="2700" b="1">
+                <a:solidFill>
+                  <a:srgbClr val="936017"/>
+                </a:solidFill>
+                <a:latin typeface="DejaVu Sans"/>
+                <a:ea typeface="DejaVu Sans"/>
+                <a:cs typeface="DejaVu Sans"/>
+              </a:defRPr>
+            </a:lvl9pPr>
+          </a:lstStyle>
+          <a:p xmlns:a="http://schemas.openxmlformats.org/drawingml/2006/main">
+            <a:pPr>
+              <a:defRPr sz="2700" b="1">
+                <a:solidFill>
+                  <a:srgbClr val="936017"/>
+                </a:solidFill>
+                <a:latin typeface="DejaVu Sans"/>
+                <a:ea typeface="DejaVu Sans"/>
+                <a:cs typeface="DejaVu Sans"/>
+              </a:defRPr>
+            </a:pPr>
+            <a:r>
+              <a:rPr sz="2700" b="1">
+                <a:solidFill>
+                  <a:srgbClr val="936017"/>
+                </a:solidFill>
+                <a:latin typeface="DejaVu Sans"/>
+                <a:ea typeface="DejaVu Sans"/>
+                <a:cs typeface="DejaVu Sans"/>
+              </a:rPr>
+              <a:t>3 isoladas</a:t>
+            </a:r>
+          </a:p>
+        </p:txBody>
+      </p:sp>
+      <p:sp>
+        <p:nvSpPr>
+          <p:cNvPr id="10" name="">
+            <a:extLst xmlns:a="http://schemas.openxmlformats.org/drawingml/2006/main">
+              <a:ext uri="{FF2B5EF4-FFF2-40B4-BE49-F238E27FC236}">
+                <a16:creationId xmlns:a16="http://schemas.microsoft.com/office/drawing/2014/main" id="{74BA6D3B-8B9B-449D-BA45-C6A6B9B2B5D5}"/>
+              </a:ext>
+            </a:extLst>
+          </p:cNvPr>
+          <p:cNvSpPr>
+            <a:spLocks xmlns:a="http://schemas.openxmlformats.org/drawingml/2006/main" noGrp="1"/>
+          </p:cNvSpPr>
+          <p:nvPr/>
+        </p:nvSpPr>
+        <p:spPr>
+          <a:xfrm xmlns:a="http://schemas.openxmlformats.org/drawingml/2006/main">
+            <a:off x="8096250" y="4829175"/>
+            <a:ext cx="3333750" cy="952500"/>
+          </a:xfrm>
+          <a:prstGeom xmlns:a="http://schemas.openxmlformats.org/drawingml/2006/main" prst="rect">
+            <a:avLst/>
+          </a:prstGeom>
+          <a:noFill xmlns:a="http://schemas.openxmlformats.org/drawingml/2006/main"/>
+          <a:ln xmlns:a="http://schemas.openxmlformats.org/drawingml/2006/main" w="0">
+            <a:noFill/>
+            <a:prstDash val="solid"/>
+          </a:ln>
+        </p:spPr>
+        <p:txBody>
+          <a:bodyPr xmlns:a="http://schemas.openxmlformats.org/drawingml/2006/main" lIns="0" tIns="0" rIns="0" bIns="0"/>
+          <a:lstStyle xmlns:a="http://schemas.openxmlformats.org/drawingml/2006/main">
+            <a:defPPr>
+              <a:defRPr sz="1950" b="0">
+                <a:solidFill>
+                  <a:srgbClr val="183B30"/>
+                </a:solidFill>
+                <a:latin typeface="DejaVu Sans"/>
+                <a:ea typeface="DejaVu Sans"/>
+                <a:cs typeface="DejaVu Sans"/>
+              </a:defRPr>
+            </a:defPPr>
+            <a:lvl1pPr>
+              <a:defRPr sz="1950" b="0">
+                <a:solidFill>
+                  <a:srgbClr val="183B30"/>
+                </a:solidFill>
+                <a:latin typeface="DejaVu Sans"/>
+                <a:ea typeface="DejaVu Sans"/>
+                <a:cs typeface="DejaVu Sans"/>
+              </a:defRPr>
+            </a:lvl1pPr>
+            <a:lvl2pPr>
+              <a:defRPr sz="1950" b="0">
+                <a:solidFill>
+                  <a:srgbClr val="183B30"/>
+                </a:solidFill>
+                <a:latin typeface="DejaVu Sans"/>
+                <a:ea typeface="DejaVu Sans"/>
+                <a:cs typeface="DejaVu Sans"/>
+              </a:defRPr>
+            </a:lvl2pPr>
+            <a:lvl3pPr>
+              <a:defRPr sz="1950" b="0">
+                <a:solidFill>
+                  <a:srgbClr val="183B30"/>
+                </a:solidFill>
+                <a:latin typeface="DejaVu Sans"/>
+                <a:ea typeface="DejaVu Sans"/>
+                <a:cs typeface="DejaVu Sans"/>
+              </a:defRPr>
+            </a:lvl3pPr>
+            <a:lvl4pPr>
+              <a:defRPr sz="1950" b="0">
+                <a:solidFill>
+                  <a:srgbClr val="183B30"/>
+                </a:solidFill>
+                <a:latin typeface="DejaVu Sans"/>
+                <a:ea typeface="DejaVu Sans"/>
+                <a:cs typeface="DejaVu Sans"/>
+              </a:defRPr>
+            </a:lvl4pPr>
+            <a:lvl5pPr>
+              <a:defRPr sz="1950" b="0">
+                <a:solidFill>
+                  <a:srgbClr val="183B30"/>
+                </a:solidFill>
+                <a:latin typeface="DejaVu Sans"/>
+                <a:ea typeface="DejaVu Sans"/>
+                <a:cs typeface="DejaVu Sans"/>
+              </a:defRPr>
+            </a:lvl5pPr>
+            <a:lvl6pPr>
+              <a:defRPr sz="1950" b="0">
+                <a:solidFill>
+                  <a:srgbClr val="183B30"/>
+                </a:solidFill>
+                <a:latin typeface="DejaVu Sans"/>
+                <a:ea typeface="DejaVu Sans"/>
+                <a:cs typeface="DejaVu Sans"/>
+              </a:defRPr>
+            </a:lvl6pPr>
+            <a:lvl7pPr>
+              <a:defRPr sz="1950" b="0">
+                <a:solidFill>
+                  <a:srgbClr val="183B30"/>
+                </a:solidFill>
+                <a:latin typeface="DejaVu Sans"/>
+                <a:ea typeface="DejaVu Sans"/>
+                <a:cs typeface="DejaVu Sans"/>
+              </a:defRPr>
+            </a:lvl7pPr>
+            <a:lvl8pPr>
+              <a:defRPr sz="1950" b="0">
+                <a:solidFill>
+                  <a:srgbClr val="183B30"/>
+                </a:solidFill>
+                <a:latin typeface="DejaVu Sans"/>
+                <a:ea typeface="DejaVu Sans"/>
+                <a:cs typeface="DejaVu Sans"/>
+              </a:defRPr>
+            </a:lvl8pPr>
+            <a:lvl9pPr>
+              <a:defRPr sz="1950" b="0">
+                <a:solidFill>
+                  <a:srgbClr val="183B30"/>
+                </a:solidFill>
+                <a:latin typeface="DejaVu Sans"/>
+                <a:ea typeface="DejaVu Sans"/>
+                <a:cs typeface="DejaVu Sans"/>
+              </a:defRPr>
+            </a:lvl9pPr>
+          </a:lstStyle>
+          <a:p xmlns:a="http://schemas.openxmlformats.org/drawingml/2006/main">
+            <a:pPr>
+              <a:defRPr sz="1950" b="0">
+                <a:solidFill>
+                  <a:srgbClr val="183B30"/>
+                </a:solidFill>
+                <a:latin typeface="DejaVu Sans"/>
+                <a:ea typeface="DejaVu Sans"/>
+                <a:cs typeface="DejaVu Sans"/>
+              </a:defRPr>
+            </a:pPr>
+            <a:r>
+              <a:rPr sz="1950" b="0">
+                <a:solidFill>
+                  <a:srgbClr val="183B30"/>
+                </a:solidFill>
+                <a:latin typeface="DejaVu Sans"/>
+                <a:ea typeface="DejaVu Sans"/>
+                <a:cs typeface="DejaVu Sans"/>
+              </a:rPr>
+              <a:t>A quarentena conserva o motivo de cada erro.</a:t>
+            </a:r>
+          </a:p>
+        </p:txBody>
+      </p:sp>
+      <p:sp>
+        <p:nvSpPr>
+          <p:cNvPr id="11" name="">
+            <a:extLst xmlns:a="http://schemas.openxmlformats.org/drawingml/2006/main">
+              <a:ext uri="{FF2B5EF4-FFF2-40B4-BE49-F238E27FC236}">
+                <a16:creationId xmlns:a16="http://schemas.microsoft.com/office/drawing/2014/main" id="{37869B3B-8A7A-417A-9B88-C5921EC905B9}"/>
+              </a:ext>
+            </a:extLst>
+          </p:cNvPr>
+          <p:cNvSpPr>
+            <a:spLocks xmlns:a="http://schemas.openxmlformats.org/drawingml/2006/main" noGrp="1"/>
+          </p:cNvSpPr>
+          <p:nvPr/>
+        </p:nvSpPr>
+        <p:spPr>
+          <a:xfrm xmlns:a="http://schemas.openxmlformats.org/drawingml/2006/main">
+            <a:off x="609600" y="5819775"/>
+            <a:ext cx="10953750" cy="495300"/>
+          </a:xfrm>
+          <a:prstGeom xmlns:a="http://schemas.openxmlformats.org/drawingml/2006/main" prst="rect">
+            <a:avLst/>
+          </a:prstGeom>
+          <a:noFill xmlns:a="http://schemas.openxmlformats.org/drawingml/2006/main"/>
+          <a:ln xmlns:a="http://schemas.openxmlformats.org/drawingml/2006/main" w="0">
+            <a:noFill/>
+            <a:prstDash val="solid"/>
+          </a:ln>
+        </p:spPr>
+        <p:txBody>
+          <a:bodyPr xmlns:a="http://schemas.openxmlformats.org/drawingml/2006/main" lIns="0" tIns="0" rIns="0" bIns="0"/>
+          <a:lstStyle xmlns:a="http://schemas.openxmlformats.org/drawingml/2006/main">
+            <a:defPPr>
+              <a:defRPr sz="1875" b="1">
+                <a:solidFill>
+                  <a:srgbClr val="183B30"/>
+                </a:solidFill>
+                <a:latin typeface="DejaVu Sans"/>
+                <a:ea typeface="DejaVu Sans"/>
+                <a:cs typeface="DejaVu Sans"/>
+              </a:defRPr>
+            </a:defPPr>
+            <a:lvl1pPr>
+              <a:defRPr sz="1875" b="1">
+                <a:solidFill>
+                  <a:srgbClr val="183B30"/>
+                </a:solidFill>
+                <a:latin typeface="DejaVu Sans"/>
+                <a:ea typeface="DejaVu Sans"/>
+                <a:cs typeface="DejaVu Sans"/>
+              </a:defRPr>
+            </a:lvl1pPr>
+            <a:lvl2pPr>
+              <a:defRPr sz="1875" b="1">
+                <a:solidFill>
+                  <a:srgbClr val="183B30"/>
+                </a:solidFill>
+                <a:latin typeface="DejaVu Sans"/>
+                <a:ea typeface="DejaVu Sans"/>
+                <a:cs typeface="DejaVu Sans"/>
+              </a:defRPr>
+            </a:lvl2pPr>
+            <a:lvl3pPr>
+              <a:defRPr sz="1875" b="1">
+                <a:solidFill>
+                  <a:srgbClr val="183B30"/>
+                </a:solidFill>
+                <a:latin typeface="DejaVu Sans"/>
+                <a:ea typeface="DejaVu Sans"/>
+                <a:cs typeface="DejaVu Sans"/>
+              </a:defRPr>
+            </a:lvl3pPr>
+            <a:lvl4pPr>
+              <a:defRPr sz="1875" b="1">
+                <a:solidFill>
+                  <a:srgbClr val="183B30"/>
+                </a:solidFill>
+                <a:latin typeface="DejaVu Sans"/>
+                <a:ea typeface="DejaVu Sans"/>
+                <a:cs typeface="DejaVu Sans"/>
+              </a:defRPr>
+            </a:lvl4pPr>
+            <a:lvl5pPr>
+              <a:defRPr sz="1875" b="1">
+                <a:solidFill>
+                  <a:srgbClr val="183B30"/>
+                </a:solidFill>
+                <a:latin typeface="DejaVu Sans"/>
+                <a:ea typeface="DejaVu Sans"/>
+                <a:cs typeface="DejaVu Sans"/>
+              </a:defRPr>
+            </a:lvl5pPr>
+            <a:lvl6pPr>
+              <a:defRPr sz="1875" b="1">
+                <a:solidFill>
+                  <a:srgbClr val="183B30"/>
+                </a:solidFill>
+                <a:latin typeface="DejaVu Sans"/>
+                <a:ea typeface="DejaVu Sans"/>
+                <a:cs typeface="DejaVu Sans"/>
+              </a:defRPr>
+            </a:lvl6pPr>
+            <a:lvl7pPr>
+              <a:defRPr sz="1875" b="1">
+                <a:solidFill>
+                  <a:srgbClr val="183B30"/>
+                </a:solidFill>
+                <a:latin typeface="DejaVu Sans"/>
+                <a:ea typeface="DejaVu Sans"/>
+                <a:cs typeface="DejaVu Sans"/>
+              </a:defRPr>
+            </a:lvl7pPr>
+            <a:lvl8pPr>
+              <a:defRPr sz="1875" b="1">
+                <a:solidFill>
+                  <a:srgbClr val="183B30"/>
+                </a:solidFill>
+                <a:latin typeface="DejaVu Sans"/>
+                <a:ea typeface="DejaVu Sans"/>
+                <a:cs typeface="DejaVu Sans"/>
+              </a:defRPr>
+            </a:lvl8pPr>
+            <a:lvl9pPr>
+              <a:defRPr sz="1875" b="1">
+                <a:solidFill>
+                  <a:srgbClr val="183B30"/>
+                </a:solidFill>
+                <a:latin typeface="DejaVu Sans"/>
+                <a:ea typeface="DejaVu Sans"/>
+                <a:cs typeface="DejaVu Sans"/>
+              </a:defRPr>
+            </a:lvl9pPr>
+          </a:lstStyle>
+          <a:p xmlns:a="http://schemas.openxmlformats.org/drawingml/2006/main">
+            <a:pPr>
+              <a:defRPr sz="1875" b="1">
+                <a:solidFill>
+                  <a:srgbClr val="183B30"/>
+                </a:solidFill>
+                <a:latin typeface="DejaVu Sans"/>
+                <a:ea typeface="DejaVu Sans"/>
+                <a:cs typeface="DejaVu Sans"/>
+              </a:defRPr>
+            </a:pPr>
+            <a:r>
+              <a:rPr sz="1875" b="1">
+                <a:solidFill>
+                  <a:srgbClr val="183B30"/>
+                </a:solidFill>
+                <a:latin typeface="DejaVu Sans"/>
+                <a:ea typeface="DejaVu Sans"/>
+                <a:cs typeface="DejaVu Sans"/>
+              </a:rPr>
+              <a:t>Quarentena = dados recusados para análise. Não confirma entrega à nuvem.</a:t>
+            </a:r>
+          </a:p>
+        </p:txBody>
+      </p:sp>
+    </p:spTree>
+    <p:extLst>
+      <p:ext uri="{BB962C8B-B14F-4D97-AF65-F5344CB8AC3E}">
+        <p14:creationId xmlns:p14="http://schemas.microsoft.com/office/powerpoint/2010/main" val="1721814937"/>
+      </p:ext>
+    </p:extLst>
+  </p:cSld>
+</p:sld>
+</file>
+
+<file path=ppt/slides/slide14.xml><?xml version="1.0" encoding="utf-8"?>
+<p:sld xmlns:p="http://schemas.openxmlformats.org/presentationml/2006/main">
+  <p:cSld>
+    <p:bg>
+      <p:bgPr>
+        <a:solidFill xmlns:a="http://schemas.openxmlformats.org/drawingml/2006/main">
+          <a:srgbClr val="F5F5EF"/>
+        </a:solidFill>
+      </p:bgPr>
+    </p:bg>
+    <p:spTree>
+      <p:nvGrpSpPr>
+        <p:cNvPr id="1" name=""/>
+        <p:cNvGrpSpPr/>
+        <p:nvPr/>
+      </p:nvGrpSpPr>
+      <p:grpSpPr>
+        <a:xfrm xmlns:a="http://schemas.openxmlformats.org/drawingml/2006/main"/>
+      </p:grpSpPr>
+      <p:sp>
+        <p:nvSpPr>
+          <p:cNvPr id="9" name="">
+            <a:extLst xmlns:a="http://schemas.openxmlformats.org/drawingml/2006/main">
+              <a:ext uri="{FF2B5EF4-FFF2-40B4-BE49-F238E27FC236}">
+                <a16:creationId xmlns:a16="http://schemas.microsoft.com/office/drawing/2014/main" id="{6D87247C-0875-49A6-A43E-A444E473B963}"/>
+              </a:ext>
+            </a:extLst>
+          </p:cNvPr>
+          <p:cNvSpPr>
+            <a:spLocks xmlns:a="http://schemas.openxmlformats.org/drawingml/2006/main" noGrp="1"/>
+          </p:cNvSpPr>
+          <p:nvPr/>
+        </p:nvSpPr>
+        <p:spPr>
+          <a:xfrm xmlns:a="http://schemas.openxmlformats.org/drawingml/2006/main">
+            <a:off x="609600" y="276225"/>
+            <a:ext cx="10477500" cy="266700"/>
+          </a:xfrm>
+          <a:prstGeom xmlns:a="http://schemas.openxmlformats.org/drawingml/2006/main" prst="rect">
+            <a:avLst/>
+          </a:prstGeom>
+          <a:noFill xmlns:a="http://schemas.openxmlformats.org/drawingml/2006/main"/>
+          <a:ln xmlns:a="http://schemas.openxmlformats.org/drawingml/2006/main" w="0">
+            <a:noFill/>
+            <a:prstDash val="solid"/>
+          </a:ln>
+        </p:spPr>
+        <p:txBody>
+          <a:bodyPr xmlns:a="http://schemas.openxmlformats.org/drawingml/2006/main" lIns="0" tIns="0" rIns="0" bIns="0"/>
+          <a:lstStyle xmlns:a="http://schemas.openxmlformats.org/drawingml/2006/main">
+            <a:defPPr>
+              <a:defRPr sz="1200" b="1">
+                <a:solidFill>
+                  <a:srgbClr val="167655"/>
+                </a:solidFill>
+                <a:latin typeface="DejaVu Sans"/>
+                <a:ea typeface="DejaVu Sans"/>
+                <a:cs typeface="DejaVu Sans"/>
+              </a:defRPr>
+            </a:defPPr>
+            <a:lvl1pPr>
+              <a:defRPr sz="1200" b="1">
+                <a:solidFill>
+                  <a:srgbClr val="167655"/>
+                </a:solidFill>
+                <a:latin typeface="DejaVu Sans"/>
+                <a:ea typeface="DejaVu Sans"/>
+                <a:cs typeface="DejaVu Sans"/>
+              </a:defRPr>
+            </a:lvl1pPr>
+            <a:lvl2pPr>
+              <a:defRPr sz="1200" b="1">
+                <a:solidFill>
+                  <a:srgbClr val="167655"/>
+                </a:solidFill>
+                <a:latin typeface="DejaVu Sans"/>
+                <a:ea typeface="DejaVu Sans"/>
+                <a:cs typeface="DejaVu Sans"/>
+              </a:defRPr>
+            </a:lvl2pPr>
+            <a:lvl3pPr>
+              <a:defRPr sz="1200" b="1">
+                <a:solidFill>
+                  <a:srgbClr val="167655"/>
+                </a:solidFill>
+                <a:latin typeface="DejaVu Sans"/>
+                <a:ea typeface="DejaVu Sans"/>
+                <a:cs typeface="DejaVu Sans"/>
+              </a:defRPr>
+            </a:lvl3pPr>
+            <a:lvl4pPr>
+              <a:defRPr sz="1200" b="1">
+                <a:solidFill>
+                  <a:srgbClr val="167655"/>
+                </a:solidFill>
+                <a:latin typeface="DejaVu Sans"/>
+                <a:ea typeface="DejaVu Sans"/>
+                <a:cs typeface="DejaVu Sans"/>
+              </a:defRPr>
+            </a:lvl4pPr>
+            <a:lvl5pPr>
+              <a:defRPr sz="1200" b="1">
+                <a:solidFill>
+                  <a:srgbClr val="167655"/>
+                </a:solidFill>
+                <a:latin typeface="DejaVu Sans"/>
+                <a:ea typeface="DejaVu Sans"/>
+                <a:cs typeface="DejaVu Sans"/>
+              </a:defRPr>
+            </a:lvl5pPr>
+            <a:lvl6pPr>
+              <a:defRPr sz="1200" b="1">
+                <a:solidFill>
+                  <a:srgbClr val="167655"/>
+                </a:solidFill>
+                <a:latin typeface="DejaVu Sans"/>
+                <a:ea typeface="DejaVu Sans"/>
+                <a:cs typeface="DejaVu Sans"/>
+              </a:defRPr>
+            </a:lvl6pPr>
+            <a:lvl7pPr>
+              <a:defRPr sz="1200" b="1">
+                <a:solidFill>
+                  <a:srgbClr val="167655"/>
+                </a:solidFill>
+                <a:latin typeface="DejaVu Sans"/>
+                <a:ea typeface="DejaVu Sans"/>
+                <a:cs typeface="DejaVu Sans"/>
+              </a:defRPr>
+            </a:lvl7pPr>
+            <a:lvl8pPr>
+              <a:defRPr sz="1200" b="1">
+                <a:solidFill>
+                  <a:srgbClr val="167655"/>
+                </a:solidFill>
+                <a:latin typeface="DejaVu Sans"/>
+                <a:ea typeface="DejaVu Sans"/>
+                <a:cs typeface="DejaVu Sans"/>
+              </a:defRPr>
+            </a:lvl8pPr>
+            <a:lvl9pPr>
+              <a:defRPr sz="1200" b="1">
+                <a:solidFill>
+                  <a:srgbClr val="167655"/>
+                </a:solidFill>
+                <a:latin typeface="DejaVu Sans"/>
+                <a:ea typeface="DejaVu Sans"/>
+                <a:cs typeface="DejaVu Sans"/>
+              </a:defRPr>
+            </a:lvl9pPr>
+          </a:lstStyle>
+          <a:p xmlns:a="http://schemas.openxmlformats.org/drawingml/2006/main">
+            <a:pPr>
+              <a:defRPr sz="1200" b="1">
+                <a:solidFill>
+                  <a:srgbClr val="167655"/>
+                </a:solidFill>
+                <a:latin typeface="DejaVu Sans"/>
+                <a:ea typeface="DejaVu Sans"/>
+                <a:cs typeface="DejaVu Sans"/>
+              </a:defRPr>
+            </a:pPr>
+            <a:r>
+              <a:rPr sz="1200" b="1">
+                <a:solidFill>
+                  <a:srgbClr val="167655"/>
+                </a:solidFill>
+                <a:latin typeface="DejaVu Sans"/>
+                <a:ea typeface="DejaVu Sans"/>
+                <a:cs typeface="DejaVu Sans"/>
+              </a:rPr>
+              <a:t>SMARTWASTE DF  /  ENGENHARIA DE SOFTWARE</a:t>
+            </a:r>
+          </a:p>
+        </p:txBody>
+      </p:sp>
+      <p:sp>
+        <p:nvSpPr>
+          <p:cNvPr id="2" name="">
+            <a:extLst xmlns:a="http://schemas.openxmlformats.org/drawingml/2006/main">
+              <a:ext uri="{FF2B5EF4-FFF2-40B4-BE49-F238E27FC236}">
+                <a16:creationId xmlns:a16="http://schemas.microsoft.com/office/drawing/2014/main" id="{DDF32D4A-DFF8-42C0-814A-C02187AEA496}"/>
+              </a:ext>
+            </a:extLst>
+          </p:cNvPr>
+          <p:cNvSpPr>
+            <a:spLocks xmlns:a="http://schemas.openxmlformats.org/drawingml/2006/main" noGrp="1"/>
+          </p:cNvSpPr>
+          <p:nvPr/>
+        </p:nvSpPr>
+        <p:spPr>
+          <a:xfrm xmlns:a="http://schemas.openxmlformats.org/drawingml/2006/main">
+            <a:off x="609600" y="781050"/>
+            <a:ext cx="10972800" cy="762000"/>
+          </a:xfrm>
+          <a:prstGeom xmlns:a="http://schemas.openxmlformats.org/drawingml/2006/main" prst="rect">
+            <a:avLst/>
+          </a:prstGeom>
+          <a:noFill xmlns:a="http://schemas.openxmlformats.org/drawingml/2006/main"/>
+          <a:ln xmlns:a="http://schemas.openxmlformats.org/drawingml/2006/main" w="0">
+            <a:noFill/>
+            <a:prstDash val="solid"/>
+          </a:ln>
+        </p:spPr>
+        <p:txBody>
+          <a:bodyPr xmlns:a="http://schemas.openxmlformats.org/drawingml/2006/main" lIns="0" tIns="0" rIns="0" bIns="0"/>
+          <a:lstStyle xmlns:a="http://schemas.openxmlformats.org/drawingml/2006/main">
+            <a:defPPr>
+              <a:defRPr sz="3300" b="1">
+                <a:solidFill>
+                  <a:srgbClr val="183B30"/>
+                </a:solidFill>
+                <a:latin typeface="DejaVu Sans"/>
+                <a:ea typeface="DejaVu Sans"/>
+                <a:cs typeface="DejaVu Sans"/>
+              </a:defRPr>
+            </a:defPPr>
+            <a:lvl1pPr>
+              <a:defRPr sz="3300" b="1">
+                <a:solidFill>
+                  <a:srgbClr val="183B30"/>
+                </a:solidFill>
+                <a:latin typeface="DejaVu Sans"/>
+                <a:ea typeface="DejaVu Sans"/>
+                <a:cs typeface="DejaVu Sans"/>
+              </a:defRPr>
+            </a:lvl1pPr>
+            <a:lvl2pPr>
+              <a:defRPr sz="3300" b="1">
+                <a:solidFill>
+                  <a:srgbClr val="183B30"/>
+                </a:solidFill>
+                <a:latin typeface="DejaVu Sans"/>
+                <a:ea typeface="DejaVu Sans"/>
+                <a:cs typeface="DejaVu Sans"/>
+              </a:defRPr>
+            </a:lvl2pPr>
+            <a:lvl3pPr>
+              <a:defRPr sz="3300" b="1">
+                <a:solidFill>
+                  <a:srgbClr val="183B30"/>
+                </a:solidFill>
+                <a:latin typeface="DejaVu Sans"/>
+                <a:ea typeface="DejaVu Sans"/>
+                <a:cs typeface="DejaVu Sans"/>
+              </a:defRPr>
+            </a:lvl3pPr>
+            <a:lvl4pPr>
+              <a:defRPr sz="3300" b="1">
+                <a:solidFill>
+                  <a:srgbClr val="183B30"/>
+                </a:solidFill>
+                <a:latin typeface="DejaVu Sans"/>
+                <a:ea typeface="DejaVu Sans"/>
+                <a:cs typeface="DejaVu Sans"/>
+              </a:defRPr>
+            </a:lvl4pPr>
+            <a:lvl5pPr>
+              <a:defRPr sz="3300" b="1">
+                <a:solidFill>
+                  <a:srgbClr val="183B30"/>
+                </a:solidFill>
+                <a:latin typeface="DejaVu Sans"/>
+                <a:ea typeface="DejaVu Sans"/>
+                <a:cs typeface="DejaVu Sans"/>
+              </a:defRPr>
+            </a:lvl5pPr>
+            <a:lvl6pPr>
+              <a:defRPr sz="3300" b="1">
+                <a:solidFill>
+                  <a:srgbClr val="183B30"/>
+                </a:solidFill>
+                <a:latin typeface="DejaVu Sans"/>
+                <a:ea typeface="DejaVu Sans"/>
+                <a:cs typeface="DejaVu Sans"/>
+              </a:defRPr>
+            </a:lvl6pPr>
+            <a:lvl7pPr>
+              <a:defRPr sz="3300" b="1">
+                <a:solidFill>
+                  <a:srgbClr val="183B30"/>
+                </a:solidFill>
+                <a:latin typeface="DejaVu Sans"/>
+                <a:ea typeface="DejaVu Sans"/>
+                <a:cs typeface="DejaVu Sans"/>
+              </a:defRPr>
+            </a:lvl7pPr>
+            <a:lvl8pPr>
+              <a:defRPr sz="3300" b="1">
+                <a:solidFill>
+                  <a:srgbClr val="183B30"/>
+                </a:solidFill>
+                <a:latin typeface="DejaVu Sans"/>
+                <a:ea typeface="DejaVu Sans"/>
+                <a:cs typeface="DejaVu Sans"/>
+              </a:defRPr>
+            </a:lvl8pPr>
+            <a:lvl9pPr>
+              <a:defRPr sz="3300" b="1">
+                <a:solidFill>
+                  <a:srgbClr val="183B30"/>
+                </a:solidFill>
+                <a:latin typeface="DejaVu Sans"/>
+                <a:ea typeface="DejaVu Sans"/>
+                <a:cs typeface="DejaVu Sans"/>
+              </a:defRPr>
+            </a:lvl9pPr>
+          </a:lstStyle>
+          <a:p xmlns:a="http://schemas.openxmlformats.org/drawingml/2006/main">
+            <a:pPr>
+              <a:defRPr sz="3300" b="1">
+                <a:solidFill>
+                  <a:srgbClr val="183B30"/>
+                </a:solidFill>
+                <a:latin typeface="DejaVu Sans"/>
+                <a:ea typeface="DejaVu Sans"/>
+                <a:cs typeface="DejaVu Sans"/>
+              </a:defRPr>
+            </a:pPr>
+            <a:r>
+              <a:rPr sz="3300" b="1">
+                <a:solidFill>
+                  <a:srgbClr val="183B30"/>
+                </a:solidFill>
+                <a:latin typeface="DejaVu Sans"/>
+                <a:ea typeface="DejaVu Sans"/>
+                <a:cs typeface="DejaVu Sans"/>
+              </a:rPr>
+              <a:t>Dados atrasados no lugar certo</a:t>
+            </a:r>
+          </a:p>
+        </p:txBody>
+      </p:sp>
+      <p:sp>
+        <p:nvSpPr>
+          <p:cNvPr id="3" name="">
+            <a:extLst xmlns:a="http://schemas.openxmlformats.org/drawingml/2006/main">
+              <a:ext uri="{FF2B5EF4-FFF2-40B4-BE49-F238E27FC236}">
+                <a16:creationId xmlns:a16="http://schemas.microsoft.com/office/drawing/2014/main" id="{B36C22FE-936D-49A6-8E01-0B59B80F6B24}"/>
+              </a:ext>
+            </a:extLst>
+          </p:cNvPr>
+          <p:cNvSpPr>
+            <a:spLocks xmlns:a="http://schemas.openxmlformats.org/drawingml/2006/main" noGrp="1"/>
+          </p:cNvSpPr>
+          <p:nvPr/>
+        </p:nvSpPr>
+        <p:spPr>
+          <a:xfrm xmlns:a="http://schemas.openxmlformats.org/drawingml/2006/main">
+            <a:off x="609600" y="6467475"/>
+            <a:ext cx="9048750" cy="228600"/>
+          </a:xfrm>
+          <a:prstGeom xmlns:a="http://schemas.openxmlformats.org/drawingml/2006/main" prst="rect">
+            <a:avLst/>
+          </a:prstGeom>
+          <a:noFill xmlns:a="http://schemas.openxmlformats.org/drawingml/2006/main"/>
+          <a:ln xmlns:a="http://schemas.openxmlformats.org/drawingml/2006/main" w="0">
+            <a:noFill/>
+            <a:prstDash val="solid"/>
+          </a:ln>
+        </p:spPr>
+        <p:txBody>
+          <a:bodyPr xmlns:a="http://schemas.openxmlformats.org/drawingml/2006/main" lIns="0" tIns="0" rIns="0" bIns="0"/>
+          <a:lstStyle xmlns:a="http://schemas.openxmlformats.org/drawingml/2006/main">
+            <a:defPPr>
+              <a:defRPr sz="1200" b="0">
+                <a:solidFill>
+                  <a:srgbClr val="5F736B"/>
+                </a:solidFill>
+                <a:latin typeface="DejaVu Sans"/>
+                <a:ea typeface="DejaVu Sans"/>
+                <a:cs typeface="DejaVu Sans"/>
+              </a:defRPr>
+            </a:defPPr>
+            <a:lvl1pPr>
+              <a:defRPr sz="1200" b="0">
+                <a:solidFill>
+                  <a:srgbClr val="5F736B"/>
+                </a:solidFill>
+                <a:latin typeface="DejaVu Sans"/>
+                <a:ea typeface="DejaVu Sans"/>
+                <a:cs typeface="DejaVu Sans"/>
+              </a:defRPr>
+            </a:lvl1pPr>
+            <a:lvl2pPr>
+              <a:defRPr sz="1200" b="0">
+                <a:solidFill>
+                  <a:srgbClr val="5F736B"/>
+                </a:solidFill>
+                <a:latin typeface="DejaVu Sans"/>
+                <a:ea typeface="DejaVu Sans"/>
+                <a:cs typeface="DejaVu Sans"/>
+              </a:defRPr>
+            </a:lvl2pPr>
+            <a:lvl3pPr>
+              <a:defRPr sz="1200" b="0">
+                <a:solidFill>
+                  <a:srgbClr val="5F736B"/>
+                </a:solidFill>
+                <a:latin typeface="DejaVu Sans"/>
+                <a:ea typeface="DejaVu Sans"/>
+                <a:cs typeface="DejaVu Sans"/>
+              </a:defRPr>
+            </a:lvl3pPr>
+            <a:lvl4pPr>
+              <a:defRPr sz="1200" b="0">
+                <a:solidFill>
+                  <a:srgbClr val="5F736B"/>
+                </a:solidFill>
+                <a:latin typeface="DejaVu Sans"/>
+                <a:ea typeface="DejaVu Sans"/>
+                <a:cs typeface="DejaVu Sans"/>
+              </a:defRPr>
+            </a:lvl4pPr>
+            <a:lvl5pPr>
+              <a:defRPr sz="1200" b="0">
+                <a:solidFill>
+                  <a:srgbClr val="5F736B"/>
+                </a:solidFill>
+                <a:latin typeface="DejaVu Sans"/>
+                <a:ea typeface="DejaVu Sans"/>
+                <a:cs typeface="DejaVu Sans"/>
+              </a:defRPr>
+            </a:lvl5pPr>
+            <a:lvl6pPr>
+              <a:defRPr sz="1200" b="0">
+                <a:solidFill>
+                  <a:srgbClr val="5F736B"/>
+                </a:solidFill>
+                <a:latin typeface="DejaVu Sans"/>
+                <a:ea typeface="DejaVu Sans"/>
+                <a:cs typeface="DejaVu Sans"/>
+              </a:defRPr>
+            </a:lvl6pPr>
+            <a:lvl7pPr>
+              <a:defRPr sz="1200" b="0">
+                <a:solidFill>
+                  <a:srgbClr val="5F736B"/>
+                </a:solidFill>
+                <a:latin typeface="DejaVu Sans"/>
+                <a:ea typeface="DejaVu Sans"/>
+                <a:cs typeface="DejaVu Sans"/>
+              </a:defRPr>
+            </a:lvl7pPr>
+            <a:lvl8pPr>
+              <a:defRPr sz="1200" b="0">
+                <a:solidFill>
+                  <a:srgbClr val="5F736B"/>
+                </a:solidFill>
+                <a:latin typeface="DejaVu Sans"/>
+                <a:ea typeface="DejaVu Sans"/>
+                <a:cs typeface="DejaVu Sans"/>
+              </a:defRPr>
+            </a:lvl8pPr>
+            <a:lvl9pPr>
+              <a:defRPr sz="1200" b="0">
+                <a:solidFill>
+                  <a:srgbClr val="5F736B"/>
+                </a:solidFill>
+                <a:latin typeface="DejaVu Sans"/>
+                <a:ea typeface="DejaVu Sans"/>
+                <a:cs typeface="DejaVu Sans"/>
+              </a:defRPr>
+            </a:lvl9pPr>
+          </a:lstStyle>
+          <a:p xmlns:a="http://schemas.openxmlformats.org/drawingml/2006/main">
+            <a:pPr>
+              <a:defRPr sz="1200" b="0">
+                <a:solidFill>
+                  <a:srgbClr val="5F736B"/>
+                </a:solidFill>
+                <a:latin typeface="DejaVu Sans"/>
+                <a:ea typeface="DejaVu Sans"/>
+                <a:cs typeface="DejaVu Sans"/>
+              </a:defRPr>
+            </a:pPr>
+            <a:r>
+              <a:rPr sz="1200" b="0">
+                <a:solidFill>
+                  <a:srgbClr val="5F736B"/>
+                </a:solidFill>
+                <a:latin typeface="DejaVu Sans"/>
+                <a:ea typeface="DejaVu Sans"/>
+                <a:cs typeface="DejaVu Sans"/>
+              </a:rPr>
+              <a:t>Anny, Arthur, Eduardo e Jéssica</a:t>
+            </a:r>
+          </a:p>
+        </p:txBody>
+      </p:sp>
+      <p:sp>
+        <p:nvSpPr>
+          <p:cNvPr id="4" name="">
+            <a:extLst xmlns:a="http://schemas.openxmlformats.org/drawingml/2006/main">
+              <a:ext uri="{FF2B5EF4-FFF2-40B4-BE49-F238E27FC236}">
+                <a16:creationId xmlns:a16="http://schemas.microsoft.com/office/drawing/2014/main" id="{F901D93D-8F4A-415C-85F2-91E7A9DAEEC2}"/>
+              </a:ext>
+            </a:extLst>
+          </p:cNvPr>
+          <p:cNvSpPr>
+            <a:spLocks xmlns:a="http://schemas.openxmlformats.org/drawingml/2006/main" noGrp="1"/>
+          </p:cNvSpPr>
+          <p:nvPr/>
+        </p:nvSpPr>
+        <p:spPr>
+          <a:xfrm xmlns:a="http://schemas.openxmlformats.org/drawingml/2006/main">
+            <a:off x="11239500" y="6467475"/>
+            <a:ext cx="381000" cy="228600"/>
+          </a:xfrm>
+          <a:prstGeom xmlns:a="http://schemas.openxmlformats.org/drawingml/2006/main" prst="rect">
+            <a:avLst/>
+          </a:prstGeom>
+          <a:noFill xmlns:a="http://schemas.openxmlformats.org/drawingml/2006/main"/>
+          <a:ln xmlns:a="http://schemas.openxmlformats.org/drawingml/2006/main" w="0">
+            <a:noFill/>
+            <a:prstDash val="solid"/>
+          </a:ln>
+        </p:spPr>
+        <p:txBody>
+          <a:bodyPr xmlns:a="http://schemas.openxmlformats.org/drawingml/2006/main" lIns="0" tIns="0" rIns="0" bIns="0"/>
+          <a:lstStyle xmlns:a="http://schemas.openxmlformats.org/drawingml/2006/main">
+            <a:defPPr>
+              <a:defRPr sz="1200" b="0">
+                <a:solidFill>
+                  <a:srgbClr val="5F736B"/>
+                </a:solidFill>
+                <a:latin typeface="DejaVu Sans"/>
+                <a:ea typeface="DejaVu Sans"/>
+                <a:cs typeface="DejaVu Sans"/>
+              </a:defRPr>
+            </a:defPPr>
+            <a:lvl1pPr>
+              <a:defRPr sz="1200" b="0">
+                <a:solidFill>
+                  <a:srgbClr val="5F736B"/>
+                </a:solidFill>
+                <a:latin typeface="DejaVu Sans"/>
+                <a:ea typeface="DejaVu Sans"/>
+                <a:cs typeface="DejaVu Sans"/>
+              </a:defRPr>
+            </a:lvl1pPr>
+            <a:lvl2pPr>
+              <a:defRPr sz="1200" b="0">
+                <a:solidFill>
+                  <a:srgbClr val="5F736B"/>
+                </a:solidFill>
+                <a:latin typeface="DejaVu Sans"/>
+                <a:ea typeface="DejaVu Sans"/>
+                <a:cs typeface="DejaVu Sans"/>
+              </a:defRPr>
+            </a:lvl2pPr>
+            <a:lvl3pPr>
+              <a:defRPr sz="1200" b="0">
+                <a:solidFill>
+                  <a:srgbClr val="5F736B"/>
+                </a:solidFill>
+                <a:latin typeface="DejaVu Sans"/>
+                <a:ea typeface="DejaVu Sans"/>
+                <a:cs typeface="DejaVu Sans"/>
+              </a:defRPr>
+            </a:lvl3pPr>
+            <a:lvl4pPr>
+              <a:defRPr sz="1200" b="0">
+                <a:solidFill>
+                  <a:srgbClr val="5F736B"/>
+                </a:solidFill>
+                <a:latin typeface="DejaVu Sans"/>
+                <a:ea typeface="DejaVu Sans"/>
+                <a:cs typeface="DejaVu Sans"/>
+              </a:defRPr>
+            </a:lvl4pPr>
+            <a:lvl5pPr>
+              <a:defRPr sz="1200" b="0">
+                <a:solidFill>
+                  <a:srgbClr val="5F736B"/>
+                </a:solidFill>
+                <a:latin typeface="DejaVu Sans"/>
+                <a:ea typeface="DejaVu Sans"/>
+                <a:cs typeface="DejaVu Sans"/>
+              </a:defRPr>
+            </a:lvl5pPr>
+            <a:lvl6pPr>
+              <a:defRPr sz="1200" b="0">
+                <a:solidFill>
+                  <a:srgbClr val="5F736B"/>
+                </a:solidFill>
+                <a:latin typeface="DejaVu Sans"/>
+                <a:ea typeface="DejaVu Sans"/>
+                <a:cs typeface="DejaVu Sans"/>
+              </a:defRPr>
+            </a:lvl6pPr>
+            <a:lvl7pPr>
+              <a:defRPr sz="1200" b="0">
+                <a:solidFill>
+                  <a:srgbClr val="5F736B"/>
+                </a:solidFill>
+                <a:latin typeface="DejaVu Sans"/>
+                <a:ea typeface="DejaVu Sans"/>
+                <a:cs typeface="DejaVu Sans"/>
+              </a:defRPr>
+            </a:lvl7pPr>
+            <a:lvl8pPr>
+              <a:defRPr sz="1200" b="0">
+                <a:solidFill>
+                  <a:srgbClr val="5F736B"/>
+                </a:solidFill>
+                <a:latin typeface="DejaVu Sans"/>
+                <a:ea typeface="DejaVu Sans"/>
+                <a:cs typeface="DejaVu Sans"/>
+              </a:defRPr>
+            </a:lvl8pPr>
+            <a:lvl9pPr>
+              <a:defRPr sz="1200" b="0">
+                <a:solidFill>
+                  <a:srgbClr val="5F736B"/>
+                </a:solidFill>
+                <a:latin typeface="DejaVu Sans"/>
+                <a:ea typeface="DejaVu Sans"/>
+                <a:cs typeface="DejaVu Sans"/>
+              </a:defRPr>
+            </a:lvl9pPr>
+          </a:lstStyle>
+          <a:p xmlns:a="http://schemas.openxmlformats.org/drawingml/2006/main">
+            <a:pPr>
+              <a:defRPr sz="1200" b="0">
+                <a:solidFill>
+                  <a:srgbClr val="5F736B"/>
+                </a:solidFill>
+                <a:latin typeface="DejaVu Sans"/>
+                <a:ea typeface="DejaVu Sans"/>
+                <a:cs typeface="DejaVu Sans"/>
+              </a:defRPr>
+            </a:pPr>
+            <a:r>
+              <a:rPr sz="1200" b="0">
+                <a:solidFill>
+                  <a:srgbClr val="5F736B"/>
+                </a:solidFill>
+                <a:latin typeface="DejaVu Sans"/>
+                <a:ea typeface="DejaVu Sans"/>
+                <a:cs typeface="DejaVu Sans"/>
+              </a:rPr>
+              <a:t>13</a:t>
+            </a:r>
+          </a:p>
+        </p:txBody>
+      </p:sp>
+      <p:sp>
+        <p:nvSpPr>
+          <p:cNvPr id="5" name="">
+            <a:extLst xmlns:a="http://schemas.openxmlformats.org/drawingml/2006/main">
+              <a:ext uri="{FF2B5EF4-FFF2-40B4-BE49-F238E27FC236}">
+                <a16:creationId xmlns:a16="http://schemas.microsoft.com/office/drawing/2014/main" id="{FD6FDF1C-B260-4D0E-B76B-8DB17EECAC0C}"/>
+              </a:ext>
+            </a:extLst>
+          </p:cNvPr>
+          <p:cNvSpPr>
+            <a:spLocks xmlns:a="http://schemas.openxmlformats.org/drawingml/2006/main" noGrp="1"/>
+          </p:cNvSpPr>
+          <p:nvPr/>
+        </p:nvSpPr>
+        <p:spPr>
+          <a:xfrm xmlns:a="http://schemas.openxmlformats.org/drawingml/2006/main">
+            <a:off x="609600" y="1676400"/>
+            <a:ext cx="10953750" cy="552450"/>
+          </a:xfrm>
+          <a:prstGeom xmlns:a="http://schemas.openxmlformats.org/drawingml/2006/main" prst="rect">
+            <a:avLst/>
+          </a:prstGeom>
+          <a:noFill xmlns:a="http://schemas.openxmlformats.org/drawingml/2006/main"/>
+          <a:ln xmlns:a="http://schemas.openxmlformats.org/drawingml/2006/main" w="0">
+            <a:noFill/>
+            <a:prstDash val="solid"/>
+          </a:ln>
+        </p:spPr>
+        <p:txBody>
+          <a:bodyPr xmlns:a="http://schemas.openxmlformats.org/drawingml/2006/main" lIns="0" tIns="0" rIns="0" bIns="0"/>
+          <a:lstStyle xmlns:a="http://schemas.openxmlformats.org/drawingml/2006/main">
+            <a:defPPr>
+              <a:defRPr sz="1875" b="0">
+                <a:solidFill>
+                  <a:srgbClr val="183B30"/>
+                </a:solidFill>
+                <a:latin typeface="DejaVu Sans"/>
+                <a:ea typeface="DejaVu Sans"/>
+                <a:cs typeface="DejaVu Sans"/>
+              </a:defRPr>
+            </a:defPPr>
+            <a:lvl1pPr>
+              <a:defRPr sz="1875" b="0">
+                <a:solidFill>
+                  <a:srgbClr val="183B30"/>
+                </a:solidFill>
+                <a:latin typeface="DejaVu Sans"/>
+                <a:ea typeface="DejaVu Sans"/>
+                <a:cs typeface="DejaVu Sans"/>
+              </a:defRPr>
+            </a:lvl1pPr>
+            <a:lvl2pPr>
+              <a:defRPr sz="1875" b="0">
+                <a:solidFill>
+                  <a:srgbClr val="183B30"/>
+                </a:solidFill>
+                <a:latin typeface="DejaVu Sans"/>
+                <a:ea typeface="DejaVu Sans"/>
+                <a:cs typeface="DejaVu Sans"/>
+              </a:defRPr>
+            </a:lvl2pPr>
+            <a:lvl3pPr>
+              <a:defRPr sz="1875" b="0">
+                <a:solidFill>
+                  <a:srgbClr val="183B30"/>
+                </a:solidFill>
+                <a:latin typeface="DejaVu Sans"/>
+                <a:ea typeface="DejaVu Sans"/>
+                <a:cs typeface="DejaVu Sans"/>
+              </a:defRPr>
+            </a:lvl3pPr>
+            <a:lvl4pPr>
+              <a:defRPr sz="1875" b="0">
+                <a:solidFill>
+                  <a:srgbClr val="183B30"/>
+                </a:solidFill>
+                <a:latin typeface="DejaVu Sans"/>
+                <a:ea typeface="DejaVu Sans"/>
+                <a:cs typeface="DejaVu Sans"/>
+              </a:defRPr>
+            </a:lvl4pPr>
+            <a:lvl5pPr>
+              <a:defRPr sz="1875" b="0">
+                <a:solidFill>
+                  <a:srgbClr val="183B30"/>
+                </a:solidFill>
+                <a:latin typeface="DejaVu Sans"/>
+                <a:ea typeface="DejaVu Sans"/>
+                <a:cs typeface="DejaVu Sans"/>
+              </a:defRPr>
+            </a:lvl5pPr>
+            <a:lvl6pPr>
+              <a:defRPr sz="1875" b="0">
+                <a:solidFill>
+                  <a:srgbClr val="183B30"/>
+                </a:solidFill>
+                <a:latin typeface="DejaVu Sans"/>
+                <a:ea typeface="DejaVu Sans"/>
+                <a:cs typeface="DejaVu Sans"/>
+              </a:defRPr>
+            </a:lvl6pPr>
+            <a:lvl7pPr>
+              <a:defRPr sz="1875" b="0">
+                <a:solidFill>
+                  <a:srgbClr val="183B30"/>
+                </a:solidFill>
+                <a:latin typeface="DejaVu Sans"/>
+                <a:ea typeface="DejaVu Sans"/>
+                <a:cs typeface="DejaVu Sans"/>
+              </a:defRPr>
+            </a:lvl7pPr>
+            <a:lvl8pPr>
+              <a:defRPr sz="1875" b="0">
+                <a:solidFill>
+                  <a:srgbClr val="183B30"/>
+                </a:solidFill>
+                <a:latin typeface="DejaVu Sans"/>
+                <a:ea typeface="DejaVu Sans"/>
+                <a:cs typeface="DejaVu Sans"/>
+              </a:defRPr>
+            </a:lvl8pPr>
+            <a:lvl9pPr>
+              <a:defRPr sz="1875" b="0">
+                <a:solidFill>
+                  <a:srgbClr val="183B30"/>
+                </a:solidFill>
+                <a:latin typeface="DejaVu Sans"/>
+                <a:ea typeface="DejaVu Sans"/>
+                <a:cs typeface="DejaVu Sans"/>
+              </a:defRPr>
+            </a:lvl9pPr>
+          </a:lstStyle>
+          <a:p xmlns:a="http://schemas.openxmlformats.org/drawingml/2006/main">
+            <a:pPr>
+              <a:defRPr sz="1875" b="0">
+                <a:solidFill>
+                  <a:srgbClr val="183B30"/>
+                </a:solidFill>
+                <a:latin typeface="DejaVu Sans"/>
+                <a:ea typeface="DejaVu Sans"/>
+                <a:cs typeface="DejaVu Sans"/>
+              </a:defRPr>
+            </a:pPr>
+            <a:r>
+              <a:rPr sz="1875" b="0">
+                <a:solidFill>
+                  <a:srgbClr val="183B30"/>
+                </a:solidFill>
+                <a:latin typeface="DejaVu Sans"/>
+                <a:ea typeface="DejaVu Sans"/>
+                <a:cs typeface="DejaVu Sans"/>
+              </a:rPr>
+              <a:t>Exemplo didático: a ordem de chegada pode ser diferente da medição.</a:t>
+            </a:r>
+          </a:p>
+        </p:txBody>
+      </p:sp>
+      <p:graphicFrame>
+        <p:nvGraphicFramePr>
+          <p:cNvPr id="6" name="">
+            <a:extLst xmlns:a="http://schemas.openxmlformats.org/drawingml/2006/main">
+              <a:ext uri="{FF2B5EF4-FFF2-40B4-BE49-F238E27FC236}">
+                <a16:creationId xmlns:a16="http://schemas.microsoft.com/office/drawing/2014/main" id="{E169B134-2537-438A-A464-2C8B1DD1E911}"/>
+              </a:ext>
+            </a:extLst>
+          </p:cNvPr>
+          <p:cNvGraphicFramePr/>
+          <p:nvPr/>
+        </p:nvGraphicFramePr>
+        <p:xfrm>
+          <a:off xmlns:a="http://schemas.openxmlformats.org/drawingml/2006/main" x="609600" y="2476500"/>
+          <a:ext xmlns:a="http://schemas.openxmlformats.org/drawingml/2006/main" cx="10972800" cy="2143125"/>
+        </p:xfrm>
+        <a:graphic xmlns:a="http://schemas.openxmlformats.org/drawingml/2006/main">
+          <a:graphicData uri="http://schemas.openxmlformats.org/drawingml/2006/table">
+            <a:tbl>
+              <a:tblPr/>
+              <a:tblGrid>
+                <a:gridCol w="2286000"/>
+                <a:gridCol w="3619500"/>
+                <a:gridCol w="5067300"/>
+              </a:tblGrid>
+              <a:tr h="714375">
+                <a:tc>
+                  <a:txBody>
+                    <a:bodyPr/>
+                    <a:lstStyle/>
+                    <a:p>
+                      <a:r>
+                        <a:rPr sz="1875" b="1">
+                          <a:solidFill>
+                            <a:srgbClr val="FFFFFF"/>
+                          </a:solidFill>
+                          <a:latin typeface="DejaVu Sans"/>
+                          <a:ea typeface="DejaVu Sans"/>
+                          <a:cs typeface="DejaVu Sans"/>
+                        </a:rPr>
+                        <a:t>Chegada</a:t>
+                      </a:r>
+                    </a:p>
+                  </a:txBody>
+                  <a:tcPr marL="91440" marR="91440" marT="45720" marB="45720">
+                    <a:lnL w="9525">
+                      <a:solidFill>
+                        <a:srgbClr val="CFDAD1"/>
+                      </a:solidFill>
+                      <a:prstDash val="solid"/>
+                    </a:lnL>
+                    <a:lnR w="9525">
+                      <a:solidFill>
+                        <a:srgbClr val="CFDAD1"/>
+                      </a:solidFill>
+                      <a:prstDash val="solid"/>
+                    </a:lnR>
+                    <a:lnT w="9525">
+                      <a:solidFill>
+                        <a:srgbClr val="CFDAD1"/>
+                      </a:solidFill>
+                      <a:prstDash val="solid"/>
+                    </a:lnT>
+                    <a:lnB w="9525">
+                      <a:solidFill>
+                        <a:srgbClr val="CFDAD1"/>
+                      </a:solidFill>
+                      <a:prstDash val="solid"/>
+                    </a:lnB>
+                    <a:solidFill>
+                      <a:srgbClr val="167655"/>
+                    </a:solidFill>
+                  </a:tcPr>
+                </a:tc>
+                <a:tc>
+                  <a:txBody>
+                    <a:bodyPr/>
+                    <a:lstStyle/>
+                    <a:p>
+                      <a:r>
+                        <a:rPr sz="1875" b="1">
+                          <a:solidFill>
+                            <a:srgbClr val="FFFFFF"/>
+                          </a:solidFill>
+                          <a:latin typeface="DejaVu Sans"/>
+                          <a:ea typeface="DejaVu Sans"/>
+                          <a:cs typeface="DejaVu Sans"/>
+                        </a:rPr>
+                        <a:t>Horário da medição</a:t>
+                      </a:r>
+                    </a:p>
+                  </a:txBody>
+                  <a:tcPr marL="91440" marR="91440" marT="45720" marB="45720">
+                    <a:lnR w="9525">
+                      <a:solidFill>
+                        <a:srgbClr val="CFDAD1"/>
+                      </a:solidFill>
+                      <a:prstDash val="solid"/>
+                    </a:lnR>
+                    <a:lnT w="9525">
+                      <a:solidFill>
+                        <a:srgbClr val="CFDAD1"/>
+                      </a:solidFill>
+                      <a:prstDash val="solid"/>
+                    </a:lnT>
+                    <a:lnB w="9525">
+                      <a:solidFill>
+                        <a:srgbClr val="CFDAD1"/>
+                      </a:solidFill>
+                      <a:prstDash val="solid"/>
+                    </a:lnB>
+                    <a:solidFill>
+                      <a:srgbClr val="167655"/>
+                    </a:solidFill>
+                  </a:tcPr>
+                </a:tc>
+                <a:tc>
+                  <a:txBody>
+                    <a:bodyPr/>
+                    <a:lstStyle/>
+                    <a:p>
+                      <a:r>
+                        <a:rPr sz="1875" b="1">
+                          <a:solidFill>
+                            <a:srgbClr val="FFFFFF"/>
+                          </a:solidFill>
+                          <a:latin typeface="DejaVu Sans"/>
+                          <a:ea typeface="DejaVu Sans"/>
+                          <a:cs typeface="DejaVu Sans"/>
+                        </a:rPr>
+                        <a:t>Tratamento</a:t>
+                      </a:r>
+                    </a:p>
+                  </a:txBody>
+                  <a:tcPr marL="91440" marR="91440" marT="45720" marB="45720">
+                    <a:lnR w="9525">
+                      <a:solidFill>
+                        <a:srgbClr val="CFDAD1"/>
+                      </a:solidFill>
+                      <a:prstDash val="solid"/>
+                    </a:lnR>
+                    <a:lnT w="9525">
+                      <a:solidFill>
+                        <a:srgbClr val="CFDAD1"/>
+                      </a:solidFill>
+                      <a:prstDash val="solid"/>
+                    </a:lnT>
+                    <a:lnB w="9525">
+                      <a:solidFill>
+                        <a:srgbClr val="CFDAD1"/>
+                      </a:solidFill>
+                      <a:prstDash val="solid"/>
+                    </a:lnB>
+                    <a:solidFill>
+                      <a:srgbClr val="167655"/>
+                    </a:solidFill>
+                  </a:tcPr>
+                </a:tc>
+              </a:tr>
+              <a:tr h="714375">
+                <a:tc>
+                  <a:txBody>
+                    <a:bodyPr/>
+                    <a:lstStyle/>
+                    <a:p>
+                      <a:r>
+                        <a:rPr sz="1875" b="0">
+                          <a:solidFill>
+                            <a:srgbClr val="183B30"/>
+                          </a:solidFill>
+                          <a:latin typeface="DejaVu Sans"/>
+                          <a:ea typeface="DejaVu Sans"/>
+                          <a:cs typeface="DejaVu Sans"/>
+                        </a:rPr>
+                        <a:t>Primeiro</a:t>
+                      </a:r>
+                    </a:p>
+                  </a:txBody>
+                  <a:tcPr marL="91440" marR="91440" marT="45720" marB="45720">
+                    <a:lnL w="9525">
+                      <a:solidFill>
+                        <a:srgbClr val="CFDAD1"/>
+                      </a:solidFill>
+                      <a:prstDash val="solid"/>
+                    </a:lnL>
+                    <a:lnR w="9525">
+                      <a:solidFill>
+                        <a:srgbClr val="CFDAD1"/>
+                      </a:solidFill>
+                      <a:prstDash val="solid"/>
+                    </a:lnR>
+                    <a:lnB w="9525">
+                      <a:solidFill>
+                        <a:srgbClr val="CFDAD1"/>
+                      </a:solidFill>
+                      <a:prstDash val="solid"/>
+                    </a:lnB>
+                    <a:solidFill>
+                      <a:srgbClr val="FFFFFF"/>
+                    </a:solidFill>
+                  </a:tcPr>
+                </a:tc>
+                <a:tc>
+                  <a:txBody>
+                    <a:bodyPr/>
+                    <a:lstStyle/>
+                    <a:p>
+                      <a:r>
+                        <a:rPr sz="1875" b="0">
+                          <a:solidFill>
+                            <a:srgbClr val="183B30"/>
+                          </a:solidFill>
+                          <a:latin typeface="DejaVu Sans"/>
+                          <a:ea typeface="DejaVu Sans"/>
+                          <a:cs typeface="DejaVu Sans"/>
+                        </a:rPr>
+                        <a:t>20/10, 12h</a:t>
+                      </a:r>
+                    </a:p>
+                  </a:txBody>
+                  <a:tcPr marL="91440" marR="91440" marT="45720" marB="45720">
+                    <a:lnR w="9525">
+                      <a:solidFill>
+                        <a:srgbClr val="CFDAD1"/>
+                      </a:solidFill>
+                      <a:prstDash val="solid"/>
+                    </a:lnR>
+                    <a:lnB w="9525">
+                      <a:solidFill>
+                        <a:srgbClr val="CFDAD1"/>
+                      </a:solidFill>
+                      <a:prstDash val="solid"/>
+                    </a:lnB>
+                    <a:solidFill>
+                      <a:srgbClr val="FFFFFF"/>
+                    </a:solidFill>
+                  </a:tcPr>
+                </a:tc>
+                <a:tc>
+                  <a:txBody>
+                    <a:bodyPr/>
+                    <a:lstStyle/>
+                    <a:p>
+                      <a:r>
+                        <a:rPr sz="1875" b="0">
+                          <a:solidFill>
+                            <a:srgbClr val="183B30"/>
+                          </a:solidFill>
+                          <a:latin typeface="DejaVu Sans"/>
+                          <a:ea typeface="DejaVu Sans"/>
+                          <a:cs typeface="DejaVu Sans"/>
+                        </a:rPr>
+                        <a:t>Estado atual</a:t>
+                      </a:r>
+                    </a:p>
+                  </a:txBody>
+                  <a:tcPr marL="91440" marR="91440" marT="45720" marB="45720">
+                    <a:lnR w="9525">
+                      <a:solidFill>
+                        <a:srgbClr val="CFDAD1"/>
+                      </a:solidFill>
+                      <a:prstDash val="solid"/>
+                    </a:lnR>
+                    <a:lnB w="9525">
+                      <a:solidFill>
+                        <a:srgbClr val="CFDAD1"/>
+                      </a:solidFill>
+                      <a:prstDash val="solid"/>
+                    </a:lnB>
+                    <a:solidFill>
+                      <a:srgbClr val="FFFFFF"/>
+                    </a:solidFill>
+                  </a:tcPr>
+                </a:tc>
+              </a:tr>
+              <a:tr h="714375">
+                <a:tc>
+                  <a:txBody>
+                    <a:bodyPr/>
+                    <a:lstStyle/>
+                    <a:p>
+                      <a:r>
+                        <a:rPr sz="1875" b="0">
+                          <a:solidFill>
+                            <a:srgbClr val="183B30"/>
+                          </a:solidFill>
+                          <a:latin typeface="DejaVu Sans"/>
+                          <a:ea typeface="DejaVu Sans"/>
+                          <a:cs typeface="DejaVu Sans"/>
+                        </a:rPr>
+                        <a:t>Depois</a:t>
+                      </a:r>
+                    </a:p>
+                  </a:txBody>
+                  <a:tcPr marL="91440" marR="91440" marT="45720" marB="45720">
+                    <a:lnL w="9525">
+                      <a:solidFill>
+                        <a:srgbClr val="CFDAD1"/>
+                      </a:solidFill>
+                      <a:prstDash val="solid"/>
+                    </a:lnL>
+                    <a:lnR w="9525">
+                      <a:solidFill>
+                        <a:srgbClr val="CFDAD1"/>
+                      </a:solidFill>
+                      <a:prstDash val="solid"/>
+                    </a:lnR>
+                    <a:lnB w="9525">
+                      <a:solidFill>
+                        <a:srgbClr val="CFDAD1"/>
+                      </a:solidFill>
+                      <a:prstDash val="solid"/>
+                    </a:lnB>
+                    <a:solidFill>
+                      <a:srgbClr val="F5F5EF"/>
+                    </a:solidFill>
+                  </a:tcPr>
+                </a:tc>
+                <a:tc>
+                  <a:txBody>
+                    <a:bodyPr/>
+                    <a:lstStyle/>
+                    <a:p>
+                      <a:r>
+                        <a:rPr sz="1875" b="0">
+                          <a:solidFill>
+                            <a:srgbClr val="183B30"/>
+                          </a:solidFill>
+                          <a:latin typeface="DejaVu Sans"/>
+                          <a:ea typeface="DejaVu Sans"/>
+                          <a:cs typeface="DejaVu Sans"/>
+                        </a:rPr>
+                        <a:t>18/10, 12h</a:t>
+                      </a:r>
+                    </a:p>
+                  </a:txBody>
+                  <a:tcPr marL="91440" marR="91440" marT="45720" marB="45720">
+                    <a:lnR w="9525">
+                      <a:solidFill>
+                        <a:srgbClr val="CFDAD1"/>
+                      </a:solidFill>
+                      <a:prstDash val="solid"/>
+                    </a:lnR>
+                    <a:lnB w="9525">
+                      <a:solidFill>
+                        <a:srgbClr val="CFDAD1"/>
+                      </a:solidFill>
+                      <a:prstDash val="solid"/>
+                    </a:lnB>
+                    <a:solidFill>
+                      <a:srgbClr val="F5F5EF"/>
+                    </a:solidFill>
+                  </a:tcPr>
+                </a:tc>
+                <a:tc>
+                  <a:txBody>
+                    <a:bodyPr/>
+                    <a:lstStyle/>
+                    <a:p>
+                      <a:r>
+                        <a:rPr sz="1875" b="0">
+                          <a:solidFill>
+                            <a:srgbClr val="183B30"/>
+                          </a:solidFill>
+                          <a:latin typeface="DejaVu Sans"/>
+                          <a:ea typeface="DejaVu Sans"/>
+                          <a:cs typeface="DejaVu Sans"/>
+                        </a:rPr>
+                        <a:t>Histórico de dois dias atrás</a:t>
+                      </a:r>
+                    </a:p>
+                  </a:txBody>
+                  <a:tcPr marL="91440" marR="91440" marT="45720" marB="45720">
+                    <a:lnR w="9525">
+                      <a:solidFill>
+                        <a:srgbClr val="CFDAD1"/>
+                      </a:solidFill>
+                      <a:prstDash val="solid"/>
+                    </a:lnR>
+                    <a:lnB w="9525">
+                      <a:solidFill>
+                        <a:srgbClr val="CFDAD1"/>
+                      </a:solidFill>
+                      <a:prstDash val="solid"/>
+                    </a:lnB>
+                    <a:solidFill>
+                      <a:srgbClr val="F5F5EF"/>
+                    </a:solidFill>
+                  </a:tcPr>
+                </a:tc>
+              </a:tr>
+            </a:tbl>
+          </a:graphicData>
+        </a:graphic>
+      </p:graphicFrame>
+      <p:sp>
+        <p:nvSpPr>
+          <p:cNvPr id="7" name="">
+            <a:extLst xmlns:a="http://schemas.openxmlformats.org/drawingml/2006/main">
+              <a:ext uri="{FF2B5EF4-FFF2-40B4-BE49-F238E27FC236}">
+                <a16:creationId xmlns:a16="http://schemas.microsoft.com/office/drawing/2014/main" id="{B80AB3A2-8B9C-4D61-9A76-FAEFF1B1127B}"/>
+              </a:ext>
+            </a:extLst>
+          </p:cNvPr>
+          <p:cNvSpPr>
+            <a:spLocks xmlns:a="http://schemas.openxmlformats.org/drawingml/2006/main" noGrp="1"/>
+          </p:cNvSpPr>
+          <p:nvPr/>
+        </p:nvSpPr>
+        <p:spPr>
+          <a:xfrm xmlns:a="http://schemas.openxmlformats.org/drawingml/2006/main">
+            <a:off x="609600" y="5038725"/>
+            <a:ext cx="10953750" cy="609600"/>
+          </a:xfrm>
+          <a:prstGeom xmlns:a="http://schemas.openxmlformats.org/drawingml/2006/main" prst="rect">
+            <a:avLst/>
+          </a:prstGeom>
+          <a:noFill xmlns:a="http://schemas.openxmlformats.org/drawingml/2006/main"/>
+          <a:ln xmlns:a="http://schemas.openxmlformats.org/drawingml/2006/main" w="0">
+            <a:noFill/>
+            <a:prstDash val="solid"/>
+          </a:ln>
+        </p:spPr>
+        <p:txBody>
+          <a:bodyPr xmlns:a="http://schemas.openxmlformats.org/drawingml/2006/main" lIns="0" tIns="0" rIns="0" bIns="0"/>
+          <a:lstStyle xmlns:a="http://schemas.openxmlformats.org/drawingml/2006/main">
+            <a:defPPr>
+              <a:defRPr sz="2250" b="1">
+                <a:solidFill>
+                  <a:srgbClr val="167655"/>
+                </a:solidFill>
+                <a:latin typeface="DejaVu Sans"/>
+                <a:ea typeface="DejaVu Sans"/>
+                <a:cs typeface="DejaVu Sans"/>
+              </a:defRPr>
+            </a:defPPr>
+            <a:lvl1pPr>
+              <a:defRPr sz="2250" b="1">
+                <a:solidFill>
+                  <a:srgbClr val="167655"/>
+                </a:solidFill>
+                <a:latin typeface="DejaVu Sans"/>
+                <a:ea typeface="DejaVu Sans"/>
+                <a:cs typeface="DejaVu Sans"/>
+              </a:defRPr>
+            </a:lvl1pPr>
+            <a:lvl2pPr>
+              <a:defRPr sz="2250" b="1">
+                <a:solidFill>
+                  <a:srgbClr val="167655"/>
+                </a:solidFill>
+                <a:latin typeface="DejaVu Sans"/>
+                <a:ea typeface="DejaVu Sans"/>
+                <a:cs typeface="DejaVu Sans"/>
+              </a:defRPr>
+            </a:lvl2pPr>
+            <a:lvl3pPr>
+              <a:defRPr sz="2250" b="1">
+                <a:solidFill>
+                  <a:srgbClr val="167655"/>
+                </a:solidFill>
+                <a:latin typeface="DejaVu Sans"/>
+                <a:ea typeface="DejaVu Sans"/>
+                <a:cs typeface="DejaVu Sans"/>
+              </a:defRPr>
+            </a:lvl3pPr>
+            <a:lvl4pPr>
+              <a:defRPr sz="2250" b="1">
+                <a:solidFill>
+                  <a:srgbClr val="167655"/>
+                </a:solidFill>
+                <a:latin typeface="DejaVu Sans"/>
+                <a:ea typeface="DejaVu Sans"/>
+                <a:cs typeface="DejaVu Sans"/>
+              </a:defRPr>
+            </a:lvl4pPr>
+            <a:lvl5pPr>
+              <a:defRPr sz="2250" b="1">
+                <a:solidFill>
+                  <a:srgbClr val="167655"/>
+                </a:solidFill>
+                <a:latin typeface="DejaVu Sans"/>
+                <a:ea typeface="DejaVu Sans"/>
+                <a:cs typeface="DejaVu Sans"/>
+              </a:defRPr>
+            </a:lvl5pPr>
+            <a:lvl6pPr>
+              <a:defRPr sz="2250" b="1">
+                <a:solidFill>
+                  <a:srgbClr val="167655"/>
+                </a:solidFill>
+                <a:latin typeface="DejaVu Sans"/>
+                <a:ea typeface="DejaVu Sans"/>
+                <a:cs typeface="DejaVu Sans"/>
+              </a:defRPr>
+            </a:lvl6pPr>
+            <a:lvl7pPr>
+              <a:defRPr sz="2250" b="1">
+                <a:solidFill>
+                  <a:srgbClr val="167655"/>
+                </a:solidFill>
+                <a:latin typeface="DejaVu Sans"/>
+                <a:ea typeface="DejaVu Sans"/>
+                <a:cs typeface="DejaVu Sans"/>
+              </a:defRPr>
+            </a:lvl7pPr>
+            <a:lvl8pPr>
+              <a:defRPr sz="2250" b="1">
+                <a:solidFill>
+                  <a:srgbClr val="167655"/>
+                </a:solidFill>
+                <a:latin typeface="DejaVu Sans"/>
+                <a:ea typeface="DejaVu Sans"/>
+                <a:cs typeface="DejaVu Sans"/>
+              </a:defRPr>
+            </a:lvl8pPr>
+            <a:lvl9pPr>
+              <a:defRPr sz="2250" b="1">
+                <a:solidFill>
+                  <a:srgbClr val="167655"/>
+                </a:solidFill>
+                <a:latin typeface="DejaVu Sans"/>
+                <a:ea typeface="DejaVu Sans"/>
+                <a:cs typeface="DejaVu Sans"/>
+              </a:defRPr>
+            </a:lvl9pPr>
+          </a:lstStyle>
+          <a:p xmlns:a="http://schemas.openxmlformats.org/drawingml/2006/main">
+            <a:pPr>
+              <a:defRPr sz="2250" b="1">
+                <a:solidFill>
+                  <a:srgbClr val="167655"/>
+                </a:solidFill>
+                <a:latin typeface="DejaVu Sans"/>
+                <a:ea typeface="DejaVu Sans"/>
+                <a:cs typeface="DejaVu Sans"/>
+              </a:defRPr>
+            </a:pPr>
+            <a:r>
+              <a:rPr sz="2250" b="1">
+                <a:solidFill>
+                  <a:srgbClr val="167655"/>
+                </a:solidFill>
+                <a:latin typeface="DejaVu Sans"/>
+                <a:ea typeface="DejaVu Sans"/>
+                <a:cs typeface="DejaVu Sans"/>
+              </a:rPr>
+              <a:t>O dado antigo completa a série sem substituir o estado mais novo.</a:t>
+            </a:r>
+          </a:p>
+        </p:txBody>
+      </p:sp>
+      <p:sp>
+        <p:nvSpPr>
+          <p:cNvPr id="8" name="">
+            <a:extLst xmlns:a="http://schemas.openxmlformats.org/drawingml/2006/main">
+              <a:ext uri="{FF2B5EF4-FFF2-40B4-BE49-F238E27FC236}">
+                <a16:creationId xmlns:a16="http://schemas.microsoft.com/office/drawing/2014/main" id="{C76AB2F7-6BC4-4637-B775-E7C22B782404}"/>
+              </a:ext>
+            </a:extLst>
+          </p:cNvPr>
+          <p:cNvSpPr>
+            <a:spLocks xmlns:a="http://schemas.openxmlformats.org/drawingml/2006/main" noGrp="1"/>
+          </p:cNvSpPr>
+          <p:nvPr/>
+        </p:nvSpPr>
+        <p:spPr>
+          <a:xfrm xmlns:a="http://schemas.openxmlformats.org/drawingml/2006/main">
+            <a:off x="609600" y="5848350"/>
+            <a:ext cx="10953750" cy="381000"/>
+          </a:xfrm>
+          <a:prstGeom xmlns:a="http://schemas.openxmlformats.org/drawingml/2006/main" prst="rect">
+            <a:avLst/>
+          </a:prstGeom>
+          <a:noFill xmlns:a="http://schemas.openxmlformats.org/drawingml/2006/main"/>
+          <a:ln xmlns:a="http://schemas.openxmlformats.org/drawingml/2006/main" w="0">
+            <a:noFill/>
+            <a:prstDash val="solid"/>
+          </a:ln>
+        </p:spPr>
+        <p:txBody>
+          <a:bodyPr xmlns:a="http://schemas.openxmlformats.org/drawingml/2006/main" lIns="0" tIns="0" rIns="0" bIns="0"/>
+          <a:lstStyle xmlns:a="http://schemas.openxmlformats.org/drawingml/2006/main">
+            <a:defPPr>
+              <a:defRPr sz="1875" b="0">
+                <a:solidFill>
+                  <a:srgbClr val="183B30"/>
+                </a:solidFill>
+                <a:latin typeface="DejaVu Sans"/>
+                <a:ea typeface="DejaVu Sans"/>
+                <a:cs typeface="DejaVu Sans"/>
+              </a:defRPr>
+            </a:defPPr>
+            <a:lvl1pPr>
+              <a:defRPr sz="1875" b="0">
+                <a:solidFill>
+                  <a:srgbClr val="183B30"/>
+                </a:solidFill>
+                <a:latin typeface="DejaVu Sans"/>
+                <a:ea typeface="DejaVu Sans"/>
+                <a:cs typeface="DejaVu Sans"/>
+              </a:defRPr>
+            </a:lvl1pPr>
+            <a:lvl2pPr>
+              <a:defRPr sz="1875" b="0">
+                <a:solidFill>
+                  <a:srgbClr val="183B30"/>
+                </a:solidFill>
+                <a:latin typeface="DejaVu Sans"/>
+                <a:ea typeface="DejaVu Sans"/>
+                <a:cs typeface="DejaVu Sans"/>
+              </a:defRPr>
+            </a:lvl2pPr>
+            <a:lvl3pPr>
+              <a:defRPr sz="1875" b="0">
+                <a:solidFill>
+                  <a:srgbClr val="183B30"/>
+                </a:solidFill>
+                <a:latin typeface="DejaVu Sans"/>
+                <a:ea typeface="DejaVu Sans"/>
+                <a:cs typeface="DejaVu Sans"/>
+              </a:defRPr>
+            </a:lvl3pPr>
+            <a:lvl4pPr>
+              <a:defRPr sz="1875" b="0">
+                <a:solidFill>
+                  <a:srgbClr val="183B30"/>
+                </a:solidFill>
+                <a:latin typeface="DejaVu Sans"/>
+                <a:ea typeface="DejaVu Sans"/>
+                <a:cs typeface="DejaVu Sans"/>
+              </a:defRPr>
+            </a:lvl4pPr>
+            <a:lvl5pPr>
+              <a:defRPr sz="1875" b="0">
+                <a:solidFill>
+                  <a:srgbClr val="183B30"/>
+                </a:solidFill>
+                <a:latin typeface="DejaVu Sans"/>
+                <a:ea typeface="DejaVu Sans"/>
+                <a:cs typeface="DejaVu Sans"/>
+              </a:defRPr>
+            </a:lvl5pPr>
+            <a:lvl6pPr>
+              <a:defRPr sz="1875" b="0">
+                <a:solidFill>
+                  <a:srgbClr val="183B30"/>
+                </a:solidFill>
+                <a:latin typeface="DejaVu Sans"/>
+                <a:ea typeface="DejaVu Sans"/>
+                <a:cs typeface="DejaVu Sans"/>
+              </a:defRPr>
+            </a:lvl6pPr>
+            <a:lvl7pPr>
+              <a:defRPr sz="1875" b="0">
+                <a:solidFill>
+                  <a:srgbClr val="183B30"/>
+                </a:solidFill>
+                <a:latin typeface="DejaVu Sans"/>
+                <a:ea typeface="DejaVu Sans"/>
+                <a:cs typeface="DejaVu Sans"/>
+              </a:defRPr>
+            </a:lvl7pPr>
+            <a:lvl8pPr>
+              <a:defRPr sz="1875" b="0">
+                <a:solidFill>
+                  <a:srgbClr val="183B30"/>
+                </a:solidFill>
+                <a:latin typeface="DejaVu Sans"/>
+                <a:ea typeface="DejaVu Sans"/>
+                <a:cs typeface="DejaVu Sans"/>
+              </a:defRPr>
+            </a:lvl8pPr>
+            <a:lvl9pPr>
+              <a:defRPr sz="1875" b="0">
+                <a:solidFill>
+                  <a:srgbClr val="183B30"/>
+                </a:solidFill>
+                <a:latin typeface="DejaVu Sans"/>
+                <a:ea typeface="DejaVu Sans"/>
+                <a:cs typeface="DejaVu Sans"/>
+              </a:defRPr>
+            </a:lvl9pPr>
+          </a:lstStyle>
+          <a:p xmlns:a="http://schemas.openxmlformats.org/drawingml/2006/main">
+            <a:pPr>
+              <a:defRPr sz="1875" b="0">
+                <a:solidFill>
+                  <a:srgbClr val="183B30"/>
+                </a:solidFill>
+                <a:latin typeface="DejaVu Sans"/>
+                <a:ea typeface="DejaVu Sans"/>
+                <a:cs typeface="DejaVu Sans"/>
+              </a:defRPr>
+            </a:pPr>
+            <a:r>
+              <a:rPr sz="1875" b="0">
+                <a:solidFill>
+                  <a:srgbClr val="183B30"/>
+                </a:solidFill>
+                <a:latin typeface="DejaVu Sans"/>
+                <a:ea typeface="DejaVu Sans"/>
+                <a:cs typeface="DejaVu Sans"/>
+              </a:rPr>
+              <a:t>Após reinício, a edge também informa o horário real do estado.</a:t>
+            </a:r>
+          </a:p>
+        </p:txBody>
+      </p:sp>
+    </p:spTree>
+    <p:extLst>
+      <p:ext uri="{BB962C8B-B14F-4D97-AF65-F5344CB8AC3E}">
+        <p14:creationId xmlns:p14="http://schemas.microsoft.com/office/powerpoint/2010/main" val="1091347924"/>
       </p:ext>
     </p:extLst>
   </p:cSld>
@@ -7936,7 +15062,7 @@
                 <a:ea typeface="DejaVu Sans"/>
                 <a:cs typeface="DejaVu Sans"/>
               </a:rPr>
-              <a:t>Anny, Arthur e Eduardo</a:t>
+              <a:t>Anny, Arthur, Eduardo e Jéssica</a:t>
             </a:r>
           </a:p>
         </p:txBody>
@@ -10442,7 +17568,7 @@
                 <a:ea typeface="DejaVu Sans"/>
                 <a:cs typeface="DejaVu Sans"/>
               </a:rPr>
-              <a:t>Anny, Arthur e Eduardo</a:t>
+              <a:t>Anny, Arthur, Eduardo e Jéssica</a:t>
             </a:r>
           </a:p>
         </p:txBody>
@@ -12869,7 +19995,7 @@
                 <a:ea typeface="DejaVu Sans"/>
                 <a:cs typeface="DejaVu Sans"/>
               </a:rPr>
-              <a:t>Anny, Arthur e Eduardo</a:t>
+              <a:t>Anny, Arthur, Eduardo e Jéssica</a:t>
             </a:r>
           </a:p>
         </p:txBody>
@@ -14234,7 +21360,7 @@
                 <a:ea typeface="DejaVu Sans"/>
                 <a:cs typeface="DejaVu Sans"/>
               </a:rPr>
-              <a:t>Anny, Arthur e Eduardo</a:t>
+              <a:t>Anny, Arthur, Eduardo e Jéssica</a:t>
             </a:r>
           </a:p>
         </p:txBody>
@@ -16449,7 +23575,7 @@
                 <a:ea typeface="DejaVu Sans"/>
                 <a:cs typeface="DejaVu Sans"/>
               </a:rPr>
-              <a:t>Anny, Arthur e Eduardo</a:t>
+              <a:t>Anny, Arthur, Eduardo e Jéssica</a:t>
             </a:r>
           </a:p>
         </p:txBody>
@@ -17359,7 +24485,7 @@
                 <a:ea typeface="DejaVu Sans"/>
                 <a:cs typeface="DejaVu Sans"/>
               </a:rPr>
-              <a:t>Anny, Arthur e Eduardo</a:t>
+              <a:t>Anny, Arthur, Eduardo e Jéssica</a:t>
             </a:r>
           </a:p>
         </p:txBody>
@@ -17682,7 +24808,7 @@
                 <a:ea typeface="DejaVu Sans"/>
                 <a:cs typeface="DejaVu Sans"/>
               </a:rPr>
-              <a:t>Teste remoto com Supabase: ponto observado após reconectar</a:t>
+              <a:t>Teste remoto de 19/10: ponto observado após reconectar</a:t>
             </a:r>
           </a:p>
         </p:txBody>
@@ -19080,7 +26206,7 @@
                 <a:ea typeface="DejaVu Sans"/>
                 <a:cs typeface="DejaVu Sans"/>
               </a:rPr>
-              <a:t>Anny, Arthur e Eduardo</a:t>
+              <a:t>Anny, Arthur, Eduardo e Jéssica</a:t>
             </a:r>
           </a:p>
         </p:txBody>
@@ -20299,7 +27425,7 @@
                 <a:ea typeface="DejaVu Sans"/>
                 <a:cs typeface="DejaVu Sans"/>
               </a:rPr>
-              <a:t>Anny, Arthur e Eduardo</a:t>
+              <a:t>Anny, Arthur, Eduardo e Jéssica</a:t>
             </a:r>
           </a:p>
         </p:txBody>
